--- a/reports/presentation/ratecycle_india_nepal.pptx
+++ b/reports/presentation/ratecycle_india_nepal.pptx
@@ -28,9 +28,10 @@
     <p:sldId id="276" r:id="rId22"/>
     <p:sldId id="277" r:id="rId23"/>
     <p:sldId id="278" r:id="rId24"/>
+    <p:sldId id="279" r:id="rId25"/>
   </p:sldIdLst>
   <p:notesMasterIdLst>
-    <p:notesMasterId r:id="rId25"/>
+    <p:notesMasterId r:id="rId26"/>
   </p:notesMasterIdLst>
   <p:sldSz cx="9144000" cy="5143500"/>
   <p:notesSz cx="5143500" cy="9144000"/>
@@ -129,13 +130,13 @@
   <p:extLst>
     <p:ext uri="{521415D9-36F7-43E2-AB2F-B90AF26B5E84}">
       <p14:sectionLst xmlns:p14="http://schemas.microsoft.com/office/powerpoint/2010/main">
-        <p14:section name="Opening" id="{3ddd88f2-8542-5d99-f0b1-964e44c24cb8}">
+        <p14:section name="Opening" id="{48b1857e-b106-c3cd-4ac4-50f9e93c3d3f}">
           <p14:sldIdLst>
             <p14:sldId id="256"/>
             <p14:sldId id="257"/>
           </p14:sldIdLst>
         </p14:section>
-        <p14:section name="How the models were trained" id="{44ce121f-d22a-a76e-ad78-d7e73d070195}">
+        <p14:section name="How the models were trained" id="{ed13fa3e-1541-a7e2-18e8-d7227300291b}">
           <p14:sldIdLst>
             <p14:sldId id="258"/>
             <p14:sldId id="259"/>
@@ -146,7 +147,7 @@
             <p14:sldId id="264"/>
           </p14:sldIdLst>
         </p14:section>
-        <p14:section name="India" id="{0ac8523e-e6a5-4238-067d-917185162547}">
+        <p14:section name="India" id="{aab90010-c327-4144-9152-6703df323820}">
           <p14:sldIdLst>
             <p14:sldId id="265"/>
             <p14:sldId id="266"/>
@@ -157,7 +158,7 @@
             <p14:sldId id="271"/>
           </p14:sldIdLst>
         </p14:section>
-        <p14:section name="Nepal, derived from India's cycle" id="{fd274d6a-0211-9cf8-55f9-7603d3fce845}">
+        <p14:section name="Nepal, derived from India's cycle" id="{03934389-97cb-e416-fac4-0c6b32056aa7}">
           <p14:sldIdLst>
             <p14:sldId id="272"/>
             <p14:sldId id="273"/>
@@ -165,11 +166,12 @@
             <p14:sldId id="275"/>
             <p14:sldId id="276"/>
             <p14:sldId id="277"/>
+            <p14:sldId id="278"/>
           </p14:sldIdLst>
         </p14:section>
-        <p14:section name="Close" id="{e3f36633-b7b9-830b-2af4-9c5be373720d}">
+        <p14:section name="Close" id="{16203a55-d3cc-5fe8-3d5a-18b290e91982}">
           <p14:sldIdLst>
-            <p14:sldId id="278"/>
+            <p14:sldId id="279"/>
           </p14:sldIdLst>
         </p14:section>
       </p14:sectionLst>
@@ -18121,7 +18123,7 @@
           <a:p>
             <a:r>
               <a:rPr lang="en-US" dirty="0"/>
-              <a:t>Monthly CPI inflation on both sides; Nepal's series ends in March 2026 and twelve months in 2006 and 2007 that repeated the year before in the IMF file are left missing. Source: reports/tables/peg_channels.csv, decision D052.</a:t>
+              <a:t>Change from the month before the RBI's first move to three months after its last, in percentage points. Same way means a move of more than 0.1 point in the RBI's direction. The monthly test of decision D055 agrees: no significant response of the interbank rate before or during the corridor (p 0.50 and 0.51). Decision D053, reports/tables/peg_cycles.csv.</a:t>
             </a:r>
             <a:endParaRPr lang="en-US" dirty="0"/>
           </a:p>
@@ -18209,7 +18211,7 @@
           <a:p>
             <a:r>
               <a:rPr lang="en-US" dirty="0"/>
-              <a:t>Change from the month before the RBI's first move to three months after its last. Over all twelve complete RBI cycles since 2001 the NRB bank rate moved the same way in 7, the 91 day treasury bill in 7 and the interbank rate in 6; the response became regular once the NRB corridor was in place. Treasury bill changes since 2019: minus 0.65, plus 2.08, minus 0.35. Source: reports/tables/peg_cycles.csv, decision D053.</a:t>
+              <a:t>Monthly CPI inflation on both sides; Nepal's series ends in March 2026 and twelve months in 2006 and 2007 that repeated the year before in the IMF file are left missing. Source: reports/tables/peg_channels.csv, decision D052.</a:t>
             </a:r>
             <a:endParaRPr lang="en-US" dirty="0"/>
           </a:p>
@@ -18297,7 +18299,7 @@
           <a:p>
             <a:r>
               <a:rPr lang="en-US" dirty="0"/>
-              <a:t>India: the new cycle has already started; the question now is how long it runs. Nepal: the peg carries India's prices across the border, and the NRB has answered every RBI cycle since 2019 with six tenths of the RBI's move.</a:t>
+              <a:t>India: the new cycle has already started; the question now is how long it runs. Nepal: the peg carries India's prices across the border. The market rate follows the RBI only half the time, a coin flip, but since the NRB corridor began in 2016 the NRB's own rate has responded at about half the RBI's move, a significant result in a test declared beforehand (D055).</a:t>
             </a:r>
             <a:endParaRPr lang="en-US" dirty="0"/>
           </a:p>
@@ -18385,7 +18387,7 @@
           <a:p>
             <a:r>
               <a:rPr lang="en-US" dirty="0"/>
-              <a:t>Under the peg the NRB must buy the foreign currency that remittances bring in, and each purchase creates bank reserves. When deposits grow faster than credit, the surplus pushes the interbank rate to the floor of the corridor; when credit outruns deposits, it rises to the ceiling. Slow government spending did not cause the current floor: the fiscal injection was smaller during it. Decision D049.</a:t>
+              <a:t>Change from the month before the RBI's first move to three months after its last. Over all twelve complete RBI cycles since 2001 the NRB bank rate moved the same way in 7, the 91 day treasury bill in 7 and the interbank rate in 6; the response became regular once the NRB corridor was in place. Treasury bill changes since 2019: minus 0.65, plus 2.08, minus 0.35. Sources: reports/tables/peg_cycles.csv and peg_policy_response.csv, decisions D053, D055 and D056.</a:t>
             </a:r>
             <a:endParaRPr lang="en-US" dirty="0"/>
           </a:p>
@@ -18473,7 +18475,7 @@
           <a:p>
             <a:r>
               <a:rPr lang="en-US" dirty="0"/>
-              <a:t>Binary logistic model of decision D039, refitted at every origin with a four month gap so no training label was unknown at the origin. Lean is P(rise) minus P(fall). Results from November 2021 are labelled post hoc because the design was chosen afterwards. The last three months, August to October 2026, are sealed forecasts awaiting NRB data. Source: reports/tables/nepal_binary_predictions.csv.</a:t>
+              <a:t>Under the peg the NRB must buy the foreign currency that remittances bring in, and each purchase creates bank reserves. When deposits grow faster than credit, the surplus pushes the interbank rate to the floor of the corridor; when credit outruns deposits, it rises to the ceiling. Slow government spending did not cause the current floor: the fiscal injection was smaller during it. Decision D049.</a:t>
             </a:r>
             <a:endParaRPr lang="en-US" dirty="0"/>
           </a:p>
@@ -18561,7 +18563,7 @@
           <a:p>
             <a:r>
               <a:rPr lang="en-US" dirty="0"/>
-              <a:t>The NRB estimate applies the ratio of the last three cycles to the outlook range and is an implication, not a model forecast. The frozen Nepal model's sealed forecast for October 2026 is rise 0.29, fall 0.24.</a:t>
+              <a:t>Binary logistic model of decision D039, refitted at every origin with a four month gap so no training label was unknown at the origin. Lean is P(rise) minus P(fall). Results from November 2021 are labelled post hoc because the design was chosen afterwards. The last three months, August to October 2026, are sealed forecasts awaiting NRB data. Source: reports/tables/nepal_binary_predictions.csv.</a:t>
             </a:r>
             <a:endParaRPr lang="en-US" dirty="0"/>
           </a:p>
@@ -18649,6 +18651,94 @@
           <a:p>
             <a:r>
               <a:rPr lang="en-US" dirty="0"/>
+              <a:t>The NRB estimate applies the corridor era response of decision D056 to the outlook range and is an implication, not a model forecast. The frozen Nepal model's sealed forecast for October 2026 is rise 0.29, fall 0.24.</a:t>
+            </a:r>
+            <a:endParaRPr lang="en-US" dirty="0"/>
+          </a:p>
+        </p:txBody>
+      </p:sp>
+      <p:sp>
+        <p:nvSpPr>
+          <p:cNvPr id="4" name="Slide Number Placeholder 3"/>
+          <p:cNvSpPr>
+            <a:spLocks noGrp="1"/>
+          </p:cNvSpPr>
+          <p:nvPr>
+            <p:ph type="sldNum" sz="quarter" idx="10"/>
+          </p:nvPr>
+        </p:nvSpPr>
+        <p:spPr/>
+        <p:txBody>
+          <a:bodyPr/>
+          <a:lstStyle/>
+          <a:p>
+            <a:fld id="{F7021451-1387-4CA6-816F-3879F97B5CBC}" type="slidenum">
+              <a:rPr lang="en-US"/>
+              <a:t>23</a:t>
+            </a:fld>
+            <a:endParaRPr lang="en-US"/>
+          </a:p>
+        </p:txBody>
+      </p:sp>
+    </p:spTree>
+    <p:extLst>
+      <p:ext uri="{BB962C8B-B14F-4D97-AF65-F5344CB8AC3E}">
+        <p14:creationId xmlns:p14="http://schemas.microsoft.com/office/powerpoint/2010/main" val="1024086991"/>
+      </p:ext>
+    </p:extLst>
+  </p:cSld>
+  <p:clrMapOvr>
+    <a:masterClrMapping/>
+  </p:clrMapOvr>
+</p:notes>
+</file>
+
+<file path=ppt/notesSlides/notesSlide24.xml><?xml version="1.0" encoding="utf-8"?>
+<p:notes xmlns:a="http://schemas.openxmlformats.org/drawingml/2006/main" xmlns:r="http://schemas.openxmlformats.org/officeDocument/2006/relationships" xmlns:p="http://schemas.openxmlformats.org/presentationml/2006/main">
+  <p:cSld>
+    <p:spTree>
+      <p:nvGrpSpPr>
+        <p:cNvPr id="1" name=""/>
+        <p:cNvGrpSpPr/>
+        <p:nvPr/>
+      </p:nvGrpSpPr>
+      <p:grpSpPr>
+        <a:xfrm>
+          <a:off x="0" y="0"/>
+          <a:ext cx="0" cy="0"/>
+          <a:chOff x="0" y="0"/>
+          <a:chExt cx="0" cy="0"/>
+        </a:xfrm>
+      </p:grpSpPr>
+      <p:sp>
+        <p:nvSpPr>
+          <p:cNvPr id="2" name="Slide Image Placeholder 1"/>
+          <p:cNvSpPr>
+            <a:spLocks noGrp="1" noRot="1" noChangeAspect="1"/>
+          </p:cNvSpPr>
+          <p:nvPr>
+            <p:ph type="sldImg"/>
+          </p:nvPr>
+        </p:nvSpPr>
+        <p:spPr/>
+      </p:sp>
+      <p:sp>
+        <p:nvSpPr>
+          <p:cNvPr id="3" name="Notes Placeholder 2"/>
+          <p:cNvSpPr>
+            <a:spLocks noGrp="1"/>
+          </p:cNvSpPr>
+          <p:nvPr>
+            <p:ph type="body" idx="1"/>
+          </p:nvPr>
+        </p:nvSpPr>
+        <p:spPr/>
+        <p:txBody>
+          <a:bodyPr/>
+          <a:lstStyle/>
+          <a:p>
+            <a:r>
+              <a:rPr lang="en-US" dirty="0"/>
               <a:t>Code, data manifests and the decision log are in the project repository; every number in this deck comes from a committed table.</a:t>
             </a:r>
             <a:endParaRPr lang="en-US" dirty="0"/>
@@ -18672,7 +18762,7 @@
           <a:p>
             <a:fld id="{F7021451-1387-4CA6-816F-3879F97B5CBC}" type="slidenum">
               <a:rPr lang="en-US"/>
-              <a:t>23</a:t>
+              <a:t>24</a:t>
             </a:fld>
             <a:endParaRPr lang="en-US"/>
           </a:p>
@@ -26479,7 +26569,7 @@
                 <a:ea typeface="Calibri" pitchFamily="34" charset="-122"/>
                 <a:cs typeface="Calibri" pitchFamily="34" charset="-120"/>
               </a:rPr>
-              <a:t>2  NRB policy corridor: 0.6</a:t>
+              <a:t>2  NRB policy corridor: 0.5 since 2016</a:t>
             </a:r>
             <a:endParaRPr lang="en-US" sz="1100" dirty="0"/>
           </a:p>
@@ -26496,7 +26586,7 @@
                 <a:ea typeface="Calibri" pitchFamily="34" charset="-122"/>
                 <a:cs typeface="Calibri" pitchFamily="34" charset="-120"/>
               </a:rPr>
-              <a:t>The NRB moved its corridor 0.6 point per RBI point in each of the three cycles since 2019.</a:t>
+              <a:t>About 0.5 point per RBI point since the corridor began (p 0.007); no response before it.</a:t>
             </a:r>
             <a:endParaRPr lang="en-US" sz="1100" dirty="0"/>
           </a:p>
@@ -26557,7 +26647,7 @@
                 <a:ea typeface="Calibri" pitchFamily="34" charset="-122"/>
                 <a:cs typeface="Calibri" pitchFamily="34" charset="-120"/>
               </a:rPr>
-              <a:t>3  Market rate: through liquidity</a:t>
+              <a:t>3  Market rate: a coin flip</a:t>
             </a:r>
             <a:endParaRPr lang="en-US" sz="1100" dirty="0"/>
           </a:p>
@@ -26574,7 +26664,7 @@
                 <a:ea typeface="Calibri" pitchFamily="34" charset="-122"/>
                 <a:cs typeface="Calibri" pitchFamily="34" charset="-120"/>
               </a:rPr>
-              <a:t>Remittances bought at the peg add reserves and set how much of the move reaches the interbank rate.</a:t>
+              <a:t>Followed the RBI in 6 of 12 cycles. Remittances bought at the peg add reserves and keep it on its own path.</a:t>
             </a:r>
             <a:endParaRPr lang="en-US" sz="1100" dirty="0"/>
           </a:p>
@@ -26636,6 +26726,5394 @@
 <file path=ppt/slides/slide18.xml><?xml version="1.0" encoding="utf-8"?>
 <p:sld xmlns:a="http://schemas.openxmlformats.org/drawingml/2006/main" xmlns:r="http://schemas.openxmlformats.org/officeDocument/2006/relationships" xmlns:p="http://schemas.openxmlformats.org/presentationml/2006/main">
   <p:cSld name="Slide 18">
+    <p:spTree>
+      <p:nvGrpSpPr>
+        <p:cNvPr id="1" name=""/>
+        <p:cNvGrpSpPr/>
+        <p:nvPr/>
+      </p:nvGrpSpPr>
+      <p:grpSpPr>
+        <a:xfrm>
+          <a:off x="0" y="0"/>
+          <a:ext cx="0" cy="0"/>
+          <a:chOff x="0" y="0"/>
+          <a:chExt cx="0" cy="0"/>
+        </a:xfrm>
+      </p:grpSpPr>
+      <p:sp>
+        <p:nvSpPr>
+          <p:cNvPr id="2" name="Text 0"/>
+          <p:cNvSpPr/>
+          <p:nvPr>
+            <p:ph idx="100" type="title" hasCustomPrompt="1"/>
+          </p:nvPr>
+        </p:nvSpPr>
+        <p:spPr>
+          <a:xfrm>
+            <a:off x="457200" y="274320"/>
+            <a:ext cx="8229600" cy="685800"/>
+          </a:xfrm>
+          <a:prstGeom prst="rect">
+            <a:avLst/>
+          </a:prstGeom>
+          <a:noFill/>
+          <a:ln/>
+        </p:spPr>
+        <p:txBody>
+          <a:bodyPr wrap="square" lIns="0" tIns="0" rIns="0" bIns="0" rtlCol="0" anchor="ctr"/>
+          <a:lstStyle/>
+          <a:p>
+            <a:pPr algn="l" indent="0" marL="0">
+              <a:buNone/>
+            </a:pPr>
+            <a:r>
+              <a:rPr lang="en-US" sz="2600" b="1" dirty="0">
+                <a:solidFill>
+                  <a:schemeClr val="tx2"/>
+                </a:solidFill>
+                <a:latin typeface="Cambria" pitchFamily="34" charset="0"/>
+                <a:ea typeface="Cambria" pitchFamily="34" charset="-122"/>
+                <a:cs typeface="Cambria" pitchFamily="34" charset="-120"/>
+              </a:rPr>
+              <a:t>The market rate: India's cycles are a coin flip</a:t>
+            </a:r>
+            <a:endParaRPr lang="en-US" sz="2600" dirty="0"/>
+          </a:p>
+        </p:txBody>
+      </p:sp>
+      <p:graphicFrame>
+        <p:nvGraphicFramePr>
+          <p:cNvPr id="19" name="Table 0"/>
+          <p:cNvGraphicFramePr>
+            <a:graphicFrameLocks noGrp="1"/>
+          </p:cNvGraphicFramePr>
+          <p:nvPr>
+            <p:extLst>
+              <p:ext uri="{D42A27DB-BD31-4B8C-83A1-F6EECF244321}">
+                <p14:modId xmlns:p14="http://schemas.microsoft.com/office/powerpoint/2010/main" val="1579011935"/>
+              </p:ext>
+            </p:extLst>
+          </p:nvPr>
+        </p:nvGraphicFramePr>
+        <p:xfrm>
+          <a:off x="457200" y="1005840"/>
+          <a:ext cx="5669280" cy="914400"/>
+        </p:xfrm>
+        <a:graphic>
+          <a:graphicData uri="http://schemas.openxmlformats.org/drawingml/2006/table">
+            <a:tbl>
+              <a:tblPr/>
+              <a:tblGrid>
+                <a:gridCol w="1325880"/>
+                <a:gridCol w="868680"/>
+                <a:gridCol w="1051560"/>
+                <a:gridCol w="777240"/>
+                <a:gridCol w="914400"/>
+                <a:gridCol w="731520"/>
+              </a:tblGrid>
+              <a:tr h="265176">
+                <a:tc>
+                  <a:txBody>
+                    <a:bodyPr/>
+                    <a:lstStyle/>
+                    <a:p>
+                      <a:pPr algn="ctr" indent="0" marL="0">
+                        <a:buNone/>
+                      </a:pPr>
+                      <a:r>
+                        <a:rPr lang="en-US" sz="950" b="1" dirty="0">
+                          <a:solidFill>
+                            <a:schemeClr val="bg1"/>
+                          </a:solidFill>
+                          <a:latin typeface="Calibri" pitchFamily="34" charset="0"/>
+                          <a:ea typeface="Calibri" pitchFamily="34" charset="-122"/>
+                          <a:cs typeface="Calibri" pitchFamily="34" charset="-120"/>
+                        </a:rPr>
+                        <a:t>RBI cycle</a:t>
+                      </a:r>
+                      <a:endParaRPr lang="en-US" sz="950" dirty="0">
+                        <a:latin typeface="Calibri" charset="0"/>
+                        <a:ea typeface="Calibri" charset="0"/>
+                        <a:cs typeface="Calibri" charset="0"/>
+                      </a:endParaRPr>
+                    </a:p>
+                  </a:txBody>
+                  <a:tcPr marL="27432" marR="27432" marT="27432" marB="27432">
+                    <a:lnL w="6350" cap="flat" cmpd="sng" algn="ctr">
+                      <a:solidFill>
+                        <a:srgbClr val="D9DCE1"/>
+                      </a:solidFill>
+                      <a:prstDash val="solid"/>
+                      <a:round/>
+                      <a:headEnd type="none" w="med" len="med"/>
+                      <a:tailEnd type="none" w="med" len="med"/>
+                    </a:lnL>
+                    <a:lnR w="6350" cap="flat" cmpd="sng" algn="ctr">
+                      <a:solidFill>
+                        <a:srgbClr val="D9DCE1"/>
+                      </a:solidFill>
+                      <a:prstDash val="solid"/>
+                      <a:round/>
+                      <a:headEnd type="none" w="med" len="med"/>
+                      <a:tailEnd type="none" w="med" len="med"/>
+                    </a:lnR>
+                    <a:lnT w="6350" cap="flat" cmpd="sng" algn="ctr">
+                      <a:solidFill>
+                        <a:srgbClr val="D9DCE1"/>
+                      </a:solidFill>
+                      <a:prstDash val="solid"/>
+                      <a:round/>
+                      <a:headEnd type="none" w="med" len="med"/>
+                      <a:tailEnd type="none" w="med" len="med"/>
+                    </a:lnT>
+                    <a:lnB w="6350" cap="flat" cmpd="sng" algn="ctr">
+                      <a:solidFill>
+                        <a:srgbClr val="D9DCE1"/>
+                      </a:solidFill>
+                      <a:prstDash val="solid"/>
+                      <a:round/>
+                      <a:headEnd type="none" w="med" len="med"/>
+                      <a:tailEnd type="none" w="med" len="med"/>
+                    </a:lnB>
+                    <a:solidFill>
+                      <a:schemeClr val="tx2"/>
+                    </a:solidFill>
+                  </a:tcPr>
+                </a:tc>
+                <a:tc>
+                  <a:txBody>
+                    <a:bodyPr/>
+                    <a:lstStyle/>
+                    <a:p>
+                      <a:pPr algn="ctr" indent="0" marL="0">
+                        <a:buNone/>
+                      </a:pPr>
+                      <a:r>
+                        <a:rPr lang="en-US" sz="950" b="1" dirty="0">
+                          <a:solidFill>
+                            <a:schemeClr val="bg1"/>
+                          </a:solidFill>
+                          <a:latin typeface="Calibri" pitchFamily="34" charset="0"/>
+                          <a:ea typeface="Calibri" pitchFamily="34" charset="-122"/>
+                          <a:cs typeface="Calibri" pitchFamily="34" charset="-120"/>
+                        </a:rPr>
+                        <a:t>RBI change</a:t>
+                      </a:r>
+                      <a:endParaRPr lang="en-US" sz="950" dirty="0">
+                        <a:latin typeface="Calibri" charset="0"/>
+                        <a:ea typeface="Calibri" charset="0"/>
+                        <a:cs typeface="Calibri" charset="0"/>
+                      </a:endParaRPr>
+                    </a:p>
+                  </a:txBody>
+                  <a:tcPr marL="27432" marR="27432" marT="27432" marB="27432">
+                    <a:lnL w="6350" cap="flat" cmpd="sng" algn="ctr">
+                      <a:solidFill>
+                        <a:srgbClr val="D9DCE1"/>
+                      </a:solidFill>
+                      <a:prstDash val="solid"/>
+                      <a:round/>
+                      <a:headEnd type="none" w="med" len="med"/>
+                      <a:tailEnd type="none" w="med" len="med"/>
+                    </a:lnL>
+                    <a:lnR w="6350" cap="flat" cmpd="sng" algn="ctr">
+                      <a:solidFill>
+                        <a:srgbClr val="D9DCE1"/>
+                      </a:solidFill>
+                      <a:prstDash val="solid"/>
+                      <a:round/>
+                      <a:headEnd type="none" w="med" len="med"/>
+                      <a:tailEnd type="none" w="med" len="med"/>
+                    </a:lnR>
+                    <a:lnT w="6350" cap="flat" cmpd="sng" algn="ctr">
+                      <a:solidFill>
+                        <a:srgbClr val="D9DCE1"/>
+                      </a:solidFill>
+                      <a:prstDash val="solid"/>
+                      <a:round/>
+                      <a:headEnd type="none" w="med" len="med"/>
+                      <a:tailEnd type="none" w="med" len="med"/>
+                    </a:lnT>
+                    <a:lnB w="6350" cap="flat" cmpd="sng" algn="ctr">
+                      <a:solidFill>
+                        <a:srgbClr val="D9DCE1"/>
+                      </a:solidFill>
+                      <a:prstDash val="solid"/>
+                      <a:round/>
+                      <a:headEnd type="none" w="med" len="med"/>
+                      <a:tailEnd type="none" w="med" len="med"/>
+                    </a:lnB>
+                    <a:solidFill>
+                      <a:schemeClr val="tx2"/>
+                    </a:solidFill>
+                  </a:tcPr>
+                </a:tc>
+                <a:tc>
+                  <a:txBody>
+                    <a:bodyPr/>
+                    <a:lstStyle/>
+                    <a:p>
+                      <a:pPr algn="ctr" indent="0" marL="0">
+                        <a:buNone/>
+                      </a:pPr>
+                      <a:r>
+                        <a:rPr lang="en-US" sz="950" b="1" dirty="0">
+                          <a:solidFill>
+                            <a:schemeClr val="bg1"/>
+                          </a:solidFill>
+                          <a:latin typeface="Calibri" pitchFamily="34" charset="0"/>
+                          <a:ea typeface="Calibri" pitchFamily="34" charset="-122"/>
+                          <a:cs typeface="Calibri" pitchFamily="34" charset="-120"/>
+                        </a:rPr>
+                        <a:t>Nepal interbank</a:t>
+                      </a:r>
+                      <a:endParaRPr lang="en-US" sz="950" dirty="0">
+                        <a:latin typeface="Calibri" charset="0"/>
+                        <a:ea typeface="Calibri" charset="0"/>
+                        <a:cs typeface="Calibri" charset="0"/>
+                      </a:endParaRPr>
+                    </a:p>
+                  </a:txBody>
+                  <a:tcPr marL="27432" marR="27432" marT="27432" marB="27432">
+                    <a:lnL w="6350" cap="flat" cmpd="sng" algn="ctr">
+                      <a:solidFill>
+                        <a:srgbClr val="D9DCE1"/>
+                      </a:solidFill>
+                      <a:prstDash val="solid"/>
+                      <a:round/>
+                      <a:headEnd type="none" w="med" len="med"/>
+                      <a:tailEnd type="none" w="med" len="med"/>
+                    </a:lnL>
+                    <a:lnR w="6350" cap="flat" cmpd="sng" algn="ctr">
+                      <a:solidFill>
+                        <a:srgbClr val="D9DCE1"/>
+                      </a:solidFill>
+                      <a:prstDash val="solid"/>
+                      <a:round/>
+                      <a:headEnd type="none" w="med" len="med"/>
+                      <a:tailEnd type="none" w="med" len="med"/>
+                    </a:lnR>
+                    <a:lnT w="6350" cap="flat" cmpd="sng" algn="ctr">
+                      <a:solidFill>
+                        <a:srgbClr val="D9DCE1"/>
+                      </a:solidFill>
+                      <a:prstDash val="solid"/>
+                      <a:round/>
+                      <a:headEnd type="none" w="med" len="med"/>
+                      <a:tailEnd type="none" w="med" len="med"/>
+                    </a:lnT>
+                    <a:lnB w="6350" cap="flat" cmpd="sng" algn="ctr">
+                      <a:solidFill>
+                        <a:srgbClr val="D9DCE1"/>
+                      </a:solidFill>
+                      <a:prstDash val="solid"/>
+                      <a:round/>
+                      <a:headEnd type="none" w="med" len="med"/>
+                      <a:tailEnd type="none" w="med" len="med"/>
+                    </a:lnB>
+                    <a:solidFill>
+                      <a:schemeClr val="tx2"/>
+                    </a:solidFill>
+                  </a:tcPr>
+                </a:tc>
+                <a:tc>
+                  <a:txBody>
+                    <a:bodyPr/>
+                    <a:lstStyle/>
+                    <a:p>
+                      <a:pPr algn="ctr" indent="0" marL="0">
+                        <a:buNone/>
+                      </a:pPr>
+                      <a:r>
+                        <a:rPr lang="en-US" sz="950" b="1" dirty="0">
+                          <a:solidFill>
+                            <a:schemeClr val="bg1"/>
+                          </a:solidFill>
+                          <a:latin typeface="Calibri" pitchFamily="34" charset="0"/>
+                          <a:ea typeface="Calibri" pitchFamily="34" charset="-122"/>
+                          <a:cs typeface="Calibri" pitchFamily="34" charset="-120"/>
+                        </a:rPr>
+                        <a:t>Followed?</a:t>
+                      </a:r>
+                      <a:endParaRPr lang="en-US" sz="950" dirty="0">
+                        <a:latin typeface="Calibri" charset="0"/>
+                        <a:ea typeface="Calibri" charset="0"/>
+                        <a:cs typeface="Calibri" charset="0"/>
+                      </a:endParaRPr>
+                    </a:p>
+                  </a:txBody>
+                  <a:tcPr marL="27432" marR="27432" marT="27432" marB="27432">
+                    <a:lnL w="6350" cap="flat" cmpd="sng" algn="ctr">
+                      <a:solidFill>
+                        <a:srgbClr val="D9DCE1"/>
+                      </a:solidFill>
+                      <a:prstDash val="solid"/>
+                      <a:round/>
+                      <a:headEnd type="none" w="med" len="med"/>
+                      <a:tailEnd type="none" w="med" len="med"/>
+                    </a:lnL>
+                    <a:lnR w="6350" cap="flat" cmpd="sng" algn="ctr">
+                      <a:solidFill>
+                        <a:srgbClr val="D9DCE1"/>
+                      </a:solidFill>
+                      <a:prstDash val="solid"/>
+                      <a:round/>
+                      <a:headEnd type="none" w="med" len="med"/>
+                      <a:tailEnd type="none" w="med" len="med"/>
+                    </a:lnR>
+                    <a:lnT w="6350" cap="flat" cmpd="sng" algn="ctr">
+                      <a:solidFill>
+                        <a:srgbClr val="D9DCE1"/>
+                      </a:solidFill>
+                      <a:prstDash val="solid"/>
+                      <a:round/>
+                      <a:headEnd type="none" w="med" len="med"/>
+                      <a:tailEnd type="none" w="med" len="med"/>
+                    </a:lnT>
+                    <a:lnB w="6350" cap="flat" cmpd="sng" algn="ctr">
+                      <a:solidFill>
+                        <a:srgbClr val="D9DCE1"/>
+                      </a:solidFill>
+                      <a:prstDash val="solid"/>
+                      <a:round/>
+                      <a:headEnd type="none" w="med" len="med"/>
+                      <a:tailEnd type="none" w="med" len="med"/>
+                    </a:lnB>
+                    <a:solidFill>
+                      <a:schemeClr val="tx2"/>
+                    </a:solidFill>
+                  </a:tcPr>
+                </a:tc>
+                <a:tc>
+                  <a:txBody>
+                    <a:bodyPr/>
+                    <a:lstStyle/>
+                    <a:p>
+                      <a:pPr algn="ctr" indent="0" marL="0">
+                        <a:buNone/>
+                      </a:pPr>
+                      <a:r>
+                        <a:rPr lang="en-US" sz="950" b="1" dirty="0">
+                          <a:solidFill>
+                            <a:schemeClr val="bg1"/>
+                          </a:solidFill>
+                          <a:latin typeface="Calibri" pitchFamily="34" charset="0"/>
+                          <a:ea typeface="Calibri" pitchFamily="34" charset="-122"/>
+                          <a:cs typeface="Calibri" pitchFamily="34" charset="-120"/>
+                        </a:rPr>
+                        <a:t>NRB bank rate</a:t>
+                      </a:r>
+                      <a:endParaRPr lang="en-US" sz="950" dirty="0">
+                        <a:latin typeface="Calibri" charset="0"/>
+                        <a:ea typeface="Calibri" charset="0"/>
+                        <a:cs typeface="Calibri" charset="0"/>
+                      </a:endParaRPr>
+                    </a:p>
+                  </a:txBody>
+                  <a:tcPr marL="27432" marR="27432" marT="27432" marB="27432">
+                    <a:lnL w="6350" cap="flat" cmpd="sng" algn="ctr">
+                      <a:solidFill>
+                        <a:srgbClr val="D9DCE1"/>
+                      </a:solidFill>
+                      <a:prstDash val="solid"/>
+                      <a:round/>
+                      <a:headEnd type="none" w="med" len="med"/>
+                      <a:tailEnd type="none" w="med" len="med"/>
+                    </a:lnL>
+                    <a:lnR w="6350" cap="flat" cmpd="sng" algn="ctr">
+                      <a:solidFill>
+                        <a:srgbClr val="D9DCE1"/>
+                      </a:solidFill>
+                      <a:prstDash val="solid"/>
+                      <a:round/>
+                      <a:headEnd type="none" w="med" len="med"/>
+                      <a:tailEnd type="none" w="med" len="med"/>
+                    </a:lnR>
+                    <a:lnT w="6350" cap="flat" cmpd="sng" algn="ctr">
+                      <a:solidFill>
+                        <a:srgbClr val="D9DCE1"/>
+                      </a:solidFill>
+                      <a:prstDash val="solid"/>
+                      <a:round/>
+                      <a:headEnd type="none" w="med" len="med"/>
+                      <a:tailEnd type="none" w="med" len="med"/>
+                    </a:lnT>
+                    <a:lnB w="6350" cap="flat" cmpd="sng" algn="ctr">
+                      <a:solidFill>
+                        <a:srgbClr val="D9DCE1"/>
+                      </a:solidFill>
+                      <a:prstDash val="solid"/>
+                      <a:round/>
+                      <a:headEnd type="none" w="med" len="med"/>
+                      <a:tailEnd type="none" w="med" len="med"/>
+                    </a:lnB>
+                    <a:solidFill>
+                      <a:schemeClr val="tx2"/>
+                    </a:solidFill>
+                  </a:tcPr>
+                </a:tc>
+                <a:tc>
+                  <a:txBody>
+                    <a:bodyPr/>
+                    <a:lstStyle/>
+                    <a:p>
+                      <a:pPr algn="ctr" indent="0" marL="0">
+                        <a:buNone/>
+                      </a:pPr>
+                      <a:r>
+                        <a:rPr lang="en-US" sz="950" b="1" dirty="0">
+                          <a:solidFill>
+                            <a:schemeClr val="bg1"/>
+                          </a:solidFill>
+                          <a:latin typeface="Calibri" pitchFamily="34" charset="0"/>
+                          <a:ea typeface="Calibri" pitchFamily="34" charset="-122"/>
+                          <a:cs typeface="Calibri" pitchFamily="34" charset="-120"/>
+                        </a:rPr>
+                        <a:t>Followed?</a:t>
+                      </a:r>
+                      <a:endParaRPr lang="en-US" sz="950" dirty="0">
+                        <a:latin typeface="Calibri" charset="0"/>
+                        <a:ea typeface="Calibri" charset="0"/>
+                        <a:cs typeface="Calibri" charset="0"/>
+                      </a:endParaRPr>
+                    </a:p>
+                  </a:txBody>
+                  <a:tcPr marL="27432" marR="27432" marT="27432" marB="27432">
+                    <a:lnL w="6350" cap="flat" cmpd="sng" algn="ctr">
+                      <a:solidFill>
+                        <a:srgbClr val="D9DCE1"/>
+                      </a:solidFill>
+                      <a:prstDash val="solid"/>
+                      <a:round/>
+                      <a:headEnd type="none" w="med" len="med"/>
+                      <a:tailEnd type="none" w="med" len="med"/>
+                    </a:lnL>
+                    <a:lnR w="6350" cap="flat" cmpd="sng" algn="ctr">
+                      <a:solidFill>
+                        <a:srgbClr val="D9DCE1"/>
+                      </a:solidFill>
+                      <a:prstDash val="solid"/>
+                      <a:round/>
+                      <a:headEnd type="none" w="med" len="med"/>
+                      <a:tailEnd type="none" w="med" len="med"/>
+                    </a:lnR>
+                    <a:lnT w="6350" cap="flat" cmpd="sng" algn="ctr">
+                      <a:solidFill>
+                        <a:srgbClr val="D9DCE1"/>
+                      </a:solidFill>
+                      <a:prstDash val="solid"/>
+                      <a:round/>
+                      <a:headEnd type="none" w="med" len="med"/>
+                      <a:tailEnd type="none" w="med" len="med"/>
+                    </a:lnT>
+                    <a:lnB w="6350" cap="flat" cmpd="sng" algn="ctr">
+                      <a:solidFill>
+                        <a:srgbClr val="D9DCE1"/>
+                      </a:solidFill>
+                      <a:prstDash val="solid"/>
+                      <a:round/>
+                      <a:headEnd type="none" w="med" len="med"/>
+                      <a:tailEnd type="none" w="med" len="med"/>
+                    </a:lnB>
+                    <a:solidFill>
+                      <a:schemeClr val="tx2"/>
+                    </a:solidFill>
+                  </a:tcPr>
+                </a:tc>
+              </a:tr>
+              <a:tr h="265176">
+                <a:tc>
+                  <a:txBody>
+                    <a:bodyPr/>
+                    <a:lstStyle/>
+                    <a:p>
+                      <a:pPr algn="l" indent="0" marL="0">
+                        <a:buNone/>
+                      </a:pPr>
+                      <a:r>
+                        <a:rPr lang="en-US" sz="950" dirty="0">
+                          <a:solidFill>
+                            <a:schemeClr val="tx1"/>
+                          </a:solidFill>
+                          <a:latin typeface="Calibri" pitchFamily="34" charset="0"/>
+                          <a:ea typeface="Calibri" pitchFamily="34" charset="-122"/>
+                          <a:cs typeface="Calibri" pitchFamily="34" charset="-120"/>
+                        </a:rPr>
+                        <a:t>Hike 2001</a:t>
+                      </a:r>
+                      <a:endParaRPr lang="en-US" sz="950" dirty="0">
+                        <a:latin typeface="Calibri" charset="0"/>
+                        <a:ea typeface="Calibri" charset="0"/>
+                        <a:cs typeface="Calibri" charset="0"/>
+                      </a:endParaRPr>
+                    </a:p>
+                  </a:txBody>
+                  <a:tcPr marL="27432" marR="27432" marT="27432" marB="27432">
+                    <a:lnL w="6350" cap="flat" cmpd="sng" algn="ctr">
+                      <a:solidFill>
+                        <a:srgbClr val="D9DCE1"/>
+                      </a:solidFill>
+                      <a:prstDash val="solid"/>
+                      <a:round/>
+                      <a:headEnd type="none" w="med" len="med"/>
+                      <a:tailEnd type="none" w="med" len="med"/>
+                    </a:lnL>
+                    <a:lnR w="6350" cap="flat" cmpd="sng" algn="ctr">
+                      <a:solidFill>
+                        <a:srgbClr val="D9DCE1"/>
+                      </a:solidFill>
+                      <a:prstDash val="solid"/>
+                      <a:round/>
+                      <a:headEnd type="none" w="med" len="med"/>
+                      <a:tailEnd type="none" w="med" len="med"/>
+                    </a:lnR>
+                    <a:lnT w="6350" cap="flat" cmpd="sng" algn="ctr">
+                      <a:solidFill>
+                        <a:srgbClr val="D9DCE1"/>
+                      </a:solidFill>
+                      <a:prstDash val="solid"/>
+                      <a:round/>
+                      <a:headEnd type="none" w="med" len="med"/>
+                      <a:tailEnd type="none" w="med" len="med"/>
+                    </a:lnT>
+                    <a:lnB w="6350" cap="flat" cmpd="sng" algn="ctr">
+                      <a:solidFill>
+                        <a:srgbClr val="D9DCE1"/>
+                      </a:solidFill>
+                      <a:prstDash val="solid"/>
+                      <a:round/>
+                      <a:headEnd type="none" w="med" len="med"/>
+                      <a:tailEnd type="none" w="med" len="med"/>
+                    </a:lnB>
+                  </a:tcPr>
+                </a:tc>
+                <a:tc>
+                  <a:txBody>
+                    <a:bodyPr/>
+                    <a:lstStyle/>
+                    <a:p>
+                      <a:pPr algn="ctr" indent="0" marL="0">
+                        <a:buNone/>
+                      </a:pPr>
+                      <a:r>
+                        <a:rPr lang="en-US" sz="950" dirty="0">
+                          <a:solidFill>
+                            <a:schemeClr val="tx1"/>
+                          </a:solidFill>
+                          <a:latin typeface="Calibri" pitchFamily="34" charset="0"/>
+                          <a:ea typeface="Calibri" pitchFamily="34" charset="-122"/>
+                          <a:cs typeface="Calibri" pitchFamily="34" charset="-120"/>
+                        </a:rPr>
+                        <a:t>0.50</a:t>
+                      </a:r>
+                      <a:endParaRPr lang="en-US" sz="950" dirty="0">
+                        <a:latin typeface="Calibri" charset="0"/>
+                        <a:ea typeface="Calibri" charset="0"/>
+                        <a:cs typeface="Calibri" charset="0"/>
+                      </a:endParaRPr>
+                    </a:p>
+                  </a:txBody>
+                  <a:tcPr marL="27432" marR="27432" marT="27432" marB="27432">
+                    <a:lnL w="6350" cap="flat" cmpd="sng" algn="ctr">
+                      <a:solidFill>
+                        <a:srgbClr val="D9DCE1"/>
+                      </a:solidFill>
+                      <a:prstDash val="solid"/>
+                      <a:round/>
+                      <a:headEnd type="none" w="med" len="med"/>
+                      <a:tailEnd type="none" w="med" len="med"/>
+                    </a:lnL>
+                    <a:lnR w="6350" cap="flat" cmpd="sng" algn="ctr">
+                      <a:solidFill>
+                        <a:srgbClr val="D9DCE1"/>
+                      </a:solidFill>
+                      <a:prstDash val="solid"/>
+                      <a:round/>
+                      <a:headEnd type="none" w="med" len="med"/>
+                      <a:tailEnd type="none" w="med" len="med"/>
+                    </a:lnR>
+                    <a:lnT w="6350" cap="flat" cmpd="sng" algn="ctr">
+                      <a:solidFill>
+                        <a:srgbClr val="D9DCE1"/>
+                      </a:solidFill>
+                      <a:prstDash val="solid"/>
+                      <a:round/>
+                      <a:headEnd type="none" w="med" len="med"/>
+                      <a:tailEnd type="none" w="med" len="med"/>
+                    </a:lnT>
+                    <a:lnB w="6350" cap="flat" cmpd="sng" algn="ctr">
+                      <a:solidFill>
+                        <a:srgbClr val="D9DCE1"/>
+                      </a:solidFill>
+                      <a:prstDash val="solid"/>
+                      <a:round/>
+                      <a:headEnd type="none" w="med" len="med"/>
+                      <a:tailEnd type="none" w="med" len="med"/>
+                    </a:lnB>
+                  </a:tcPr>
+                </a:tc>
+                <a:tc>
+                  <a:txBody>
+                    <a:bodyPr/>
+                    <a:lstStyle/>
+                    <a:p>
+                      <a:pPr algn="ctr" indent="0" marL="0">
+                        <a:buNone/>
+                      </a:pPr>
+                      <a:r>
+                        <a:rPr lang="en-US" sz="950" dirty="0">
+                          <a:solidFill>
+                            <a:schemeClr val="tx1"/>
+                          </a:solidFill>
+                          <a:latin typeface="Calibri" pitchFamily="34" charset="0"/>
+                          <a:ea typeface="Calibri" pitchFamily="34" charset="-122"/>
+                          <a:cs typeface="Calibri" pitchFamily="34" charset="-120"/>
+                        </a:rPr>
+                        <a:t>0.44</a:t>
+                      </a:r>
+                      <a:endParaRPr lang="en-US" sz="950" dirty="0">
+                        <a:latin typeface="Calibri" charset="0"/>
+                        <a:ea typeface="Calibri" charset="0"/>
+                        <a:cs typeface="Calibri" charset="0"/>
+                      </a:endParaRPr>
+                    </a:p>
+                  </a:txBody>
+                  <a:tcPr marL="27432" marR="27432" marT="27432" marB="27432">
+                    <a:lnL w="6350" cap="flat" cmpd="sng" algn="ctr">
+                      <a:solidFill>
+                        <a:srgbClr val="D9DCE1"/>
+                      </a:solidFill>
+                      <a:prstDash val="solid"/>
+                      <a:round/>
+                      <a:headEnd type="none" w="med" len="med"/>
+                      <a:tailEnd type="none" w="med" len="med"/>
+                    </a:lnL>
+                    <a:lnR w="6350" cap="flat" cmpd="sng" algn="ctr">
+                      <a:solidFill>
+                        <a:srgbClr val="D9DCE1"/>
+                      </a:solidFill>
+                      <a:prstDash val="solid"/>
+                      <a:round/>
+                      <a:headEnd type="none" w="med" len="med"/>
+                      <a:tailEnd type="none" w="med" len="med"/>
+                    </a:lnR>
+                    <a:lnT w="6350" cap="flat" cmpd="sng" algn="ctr">
+                      <a:solidFill>
+                        <a:srgbClr val="D9DCE1"/>
+                      </a:solidFill>
+                      <a:prstDash val="solid"/>
+                      <a:round/>
+                      <a:headEnd type="none" w="med" len="med"/>
+                      <a:tailEnd type="none" w="med" len="med"/>
+                    </a:lnT>
+                    <a:lnB w="6350" cap="flat" cmpd="sng" algn="ctr">
+                      <a:solidFill>
+                        <a:srgbClr val="D9DCE1"/>
+                      </a:solidFill>
+                      <a:prstDash val="solid"/>
+                      <a:round/>
+                      <a:headEnd type="none" w="med" len="med"/>
+                      <a:tailEnd type="none" w="med" len="med"/>
+                    </a:lnB>
+                  </a:tcPr>
+                </a:tc>
+                <a:tc>
+                  <a:txBody>
+                    <a:bodyPr/>
+                    <a:lstStyle/>
+                    <a:p>
+                      <a:pPr algn="ctr" indent="0" marL="0">
+                        <a:buNone/>
+                      </a:pPr>
+                      <a:r>
+                        <a:rPr lang="en-US" sz="950" b="1" dirty="0">
+                          <a:solidFill>
+                            <a:schemeClr val="accent3"/>
+                          </a:solidFill>
+                          <a:latin typeface="Calibri" pitchFamily="34" charset="0"/>
+                          <a:ea typeface="Calibri" pitchFamily="34" charset="-122"/>
+                          <a:cs typeface="Calibri" pitchFamily="34" charset="-120"/>
+                        </a:rPr>
+                        <a:t>same way</a:t>
+                      </a:r>
+                      <a:endParaRPr lang="en-US" sz="950" dirty="0">
+                        <a:latin typeface="Calibri" charset="0"/>
+                        <a:ea typeface="Calibri" charset="0"/>
+                        <a:cs typeface="Calibri" charset="0"/>
+                      </a:endParaRPr>
+                    </a:p>
+                  </a:txBody>
+                  <a:tcPr marL="27432" marR="27432" marT="27432" marB="27432">
+                    <a:lnL w="6350" cap="flat" cmpd="sng" algn="ctr">
+                      <a:solidFill>
+                        <a:srgbClr val="D9DCE1"/>
+                      </a:solidFill>
+                      <a:prstDash val="solid"/>
+                      <a:round/>
+                      <a:headEnd type="none" w="med" len="med"/>
+                      <a:tailEnd type="none" w="med" len="med"/>
+                    </a:lnL>
+                    <a:lnR w="6350" cap="flat" cmpd="sng" algn="ctr">
+                      <a:solidFill>
+                        <a:srgbClr val="D9DCE1"/>
+                      </a:solidFill>
+                      <a:prstDash val="solid"/>
+                      <a:round/>
+                      <a:headEnd type="none" w="med" len="med"/>
+                      <a:tailEnd type="none" w="med" len="med"/>
+                    </a:lnR>
+                    <a:lnT w="6350" cap="flat" cmpd="sng" algn="ctr">
+                      <a:solidFill>
+                        <a:srgbClr val="D9DCE1"/>
+                      </a:solidFill>
+                      <a:prstDash val="solid"/>
+                      <a:round/>
+                      <a:headEnd type="none" w="med" len="med"/>
+                      <a:tailEnd type="none" w="med" len="med"/>
+                    </a:lnT>
+                    <a:lnB w="6350" cap="flat" cmpd="sng" algn="ctr">
+                      <a:solidFill>
+                        <a:srgbClr val="D9DCE1"/>
+                      </a:solidFill>
+                      <a:prstDash val="solid"/>
+                      <a:round/>
+                      <a:headEnd type="none" w="med" len="med"/>
+                      <a:tailEnd type="none" w="med" len="med"/>
+                    </a:lnB>
+                  </a:tcPr>
+                </a:tc>
+                <a:tc>
+                  <a:txBody>
+                    <a:bodyPr/>
+                    <a:lstStyle/>
+                    <a:p>
+                      <a:pPr algn="ctr" indent="0" marL="0">
+                        <a:buNone/>
+                      </a:pPr>
+                      <a:r>
+                        <a:rPr lang="en-US" sz="950" dirty="0">
+                          <a:solidFill>
+                            <a:schemeClr val="tx1"/>
+                          </a:solidFill>
+                          <a:latin typeface="Calibri" pitchFamily="34" charset="0"/>
+                          <a:ea typeface="Calibri" pitchFamily="34" charset="-122"/>
+                          <a:cs typeface="Calibri" pitchFamily="34" charset="-120"/>
+                        </a:rPr>
+                        <a:t>0.00</a:t>
+                      </a:r>
+                      <a:endParaRPr lang="en-US" sz="950" dirty="0">
+                        <a:latin typeface="Calibri" charset="0"/>
+                        <a:ea typeface="Calibri" charset="0"/>
+                        <a:cs typeface="Calibri" charset="0"/>
+                      </a:endParaRPr>
+                    </a:p>
+                  </a:txBody>
+                  <a:tcPr marL="27432" marR="27432" marT="27432" marB="27432">
+                    <a:lnL w="6350" cap="flat" cmpd="sng" algn="ctr">
+                      <a:solidFill>
+                        <a:srgbClr val="D9DCE1"/>
+                      </a:solidFill>
+                      <a:prstDash val="solid"/>
+                      <a:round/>
+                      <a:headEnd type="none" w="med" len="med"/>
+                      <a:tailEnd type="none" w="med" len="med"/>
+                    </a:lnL>
+                    <a:lnR w="6350" cap="flat" cmpd="sng" algn="ctr">
+                      <a:solidFill>
+                        <a:srgbClr val="D9DCE1"/>
+                      </a:solidFill>
+                      <a:prstDash val="solid"/>
+                      <a:round/>
+                      <a:headEnd type="none" w="med" len="med"/>
+                      <a:tailEnd type="none" w="med" len="med"/>
+                    </a:lnR>
+                    <a:lnT w="6350" cap="flat" cmpd="sng" algn="ctr">
+                      <a:solidFill>
+                        <a:srgbClr val="D9DCE1"/>
+                      </a:solidFill>
+                      <a:prstDash val="solid"/>
+                      <a:round/>
+                      <a:headEnd type="none" w="med" len="med"/>
+                      <a:tailEnd type="none" w="med" len="med"/>
+                    </a:lnT>
+                    <a:lnB w="6350" cap="flat" cmpd="sng" algn="ctr">
+                      <a:solidFill>
+                        <a:srgbClr val="D9DCE1"/>
+                      </a:solidFill>
+                      <a:prstDash val="solid"/>
+                      <a:round/>
+                      <a:headEnd type="none" w="med" len="med"/>
+                      <a:tailEnd type="none" w="med" len="med"/>
+                    </a:lnB>
+                  </a:tcPr>
+                </a:tc>
+                <a:tc>
+                  <a:txBody>
+                    <a:bodyPr/>
+                    <a:lstStyle/>
+                    <a:p>
+                      <a:pPr algn="ctr" indent="0" marL="0">
+                        <a:buNone/>
+                      </a:pPr>
+                      <a:r>
+                        <a:rPr lang="en-US" sz="950" dirty="0">
+                          <a:solidFill>
+                            <a:schemeClr val="accent4"/>
+                          </a:solidFill>
+                          <a:latin typeface="Calibri" pitchFamily="34" charset="0"/>
+                          <a:ea typeface="Calibri" pitchFamily="34" charset="-122"/>
+                          <a:cs typeface="Calibri" pitchFamily="34" charset="-120"/>
+                        </a:rPr>
+                        <a:t>no</a:t>
+                      </a:r>
+                      <a:endParaRPr lang="en-US" sz="950" dirty="0">
+                        <a:latin typeface="Calibri" charset="0"/>
+                        <a:ea typeface="Calibri" charset="0"/>
+                        <a:cs typeface="Calibri" charset="0"/>
+                      </a:endParaRPr>
+                    </a:p>
+                  </a:txBody>
+                  <a:tcPr marL="27432" marR="27432" marT="27432" marB="27432">
+                    <a:lnL w="6350" cap="flat" cmpd="sng" algn="ctr">
+                      <a:solidFill>
+                        <a:srgbClr val="D9DCE1"/>
+                      </a:solidFill>
+                      <a:prstDash val="solid"/>
+                      <a:round/>
+                      <a:headEnd type="none" w="med" len="med"/>
+                      <a:tailEnd type="none" w="med" len="med"/>
+                    </a:lnL>
+                    <a:lnR w="6350" cap="flat" cmpd="sng" algn="ctr">
+                      <a:solidFill>
+                        <a:srgbClr val="D9DCE1"/>
+                      </a:solidFill>
+                      <a:prstDash val="solid"/>
+                      <a:round/>
+                      <a:headEnd type="none" w="med" len="med"/>
+                      <a:tailEnd type="none" w="med" len="med"/>
+                    </a:lnR>
+                    <a:lnT w="6350" cap="flat" cmpd="sng" algn="ctr">
+                      <a:solidFill>
+                        <a:srgbClr val="D9DCE1"/>
+                      </a:solidFill>
+                      <a:prstDash val="solid"/>
+                      <a:round/>
+                      <a:headEnd type="none" w="med" len="med"/>
+                      <a:tailEnd type="none" w="med" len="med"/>
+                    </a:lnT>
+                    <a:lnB w="6350" cap="flat" cmpd="sng" algn="ctr">
+                      <a:solidFill>
+                        <a:srgbClr val="D9DCE1"/>
+                      </a:solidFill>
+                      <a:prstDash val="solid"/>
+                      <a:round/>
+                      <a:headEnd type="none" w="med" len="med"/>
+                      <a:tailEnd type="none" w="med" len="med"/>
+                    </a:lnB>
+                  </a:tcPr>
+                </a:tc>
+              </a:tr>
+              <a:tr h="265176">
+                <a:tc>
+                  <a:txBody>
+                    <a:bodyPr/>
+                    <a:lstStyle/>
+                    <a:p>
+                      <a:pPr algn="l" indent="0" marL="0">
+                        <a:buNone/>
+                      </a:pPr>
+                      <a:r>
+                        <a:rPr lang="en-US" sz="950" dirty="0">
+                          <a:solidFill>
+                            <a:schemeClr val="tx1"/>
+                          </a:solidFill>
+                          <a:latin typeface="Calibri" pitchFamily="34" charset="0"/>
+                          <a:ea typeface="Calibri" pitchFamily="34" charset="-122"/>
+                          <a:cs typeface="Calibri" pitchFamily="34" charset="-120"/>
+                        </a:rPr>
+                        <a:t>Cut 2001 to 2004</a:t>
+                      </a:r>
+                      <a:endParaRPr lang="en-US" sz="950" dirty="0">
+                        <a:latin typeface="Calibri" charset="0"/>
+                        <a:ea typeface="Calibri" charset="0"/>
+                        <a:cs typeface="Calibri" charset="0"/>
+                      </a:endParaRPr>
+                    </a:p>
+                  </a:txBody>
+                  <a:tcPr marL="27432" marR="27432" marT="27432" marB="27432">
+                    <a:lnL w="6350" cap="flat" cmpd="sng" algn="ctr">
+                      <a:solidFill>
+                        <a:srgbClr val="D9DCE1"/>
+                      </a:solidFill>
+                      <a:prstDash val="solid"/>
+                      <a:round/>
+                      <a:headEnd type="none" w="med" len="med"/>
+                      <a:tailEnd type="none" w="med" len="med"/>
+                    </a:lnL>
+                    <a:lnR w="6350" cap="flat" cmpd="sng" algn="ctr">
+                      <a:solidFill>
+                        <a:srgbClr val="D9DCE1"/>
+                      </a:solidFill>
+                      <a:prstDash val="solid"/>
+                      <a:round/>
+                      <a:headEnd type="none" w="med" len="med"/>
+                      <a:tailEnd type="none" w="med" len="med"/>
+                    </a:lnR>
+                    <a:lnT w="6350" cap="flat" cmpd="sng" algn="ctr">
+                      <a:solidFill>
+                        <a:srgbClr val="D9DCE1"/>
+                      </a:solidFill>
+                      <a:prstDash val="solid"/>
+                      <a:round/>
+                      <a:headEnd type="none" w="med" len="med"/>
+                      <a:tailEnd type="none" w="med" len="med"/>
+                    </a:lnT>
+                    <a:lnB w="6350" cap="flat" cmpd="sng" algn="ctr">
+                      <a:solidFill>
+                        <a:srgbClr val="D9DCE1"/>
+                      </a:solidFill>
+                      <a:prstDash val="solid"/>
+                      <a:round/>
+                      <a:headEnd type="none" w="med" len="med"/>
+                      <a:tailEnd type="none" w="med" len="med"/>
+                    </a:lnB>
+                  </a:tcPr>
+                </a:tc>
+                <a:tc>
+                  <a:txBody>
+                    <a:bodyPr/>
+                    <a:lstStyle/>
+                    <a:p>
+                      <a:pPr algn="ctr" indent="0" marL="0">
+                        <a:buNone/>
+                      </a:pPr>
+                      <a:r>
+                        <a:rPr lang="en-US" sz="950" dirty="0">
+                          <a:solidFill>
+                            <a:schemeClr val="tx1"/>
+                          </a:solidFill>
+                          <a:latin typeface="Calibri" pitchFamily="34" charset="0"/>
+                          <a:ea typeface="Calibri" pitchFamily="34" charset="-122"/>
+                          <a:cs typeface="Calibri" pitchFamily="34" charset="-120"/>
+                        </a:rPr>
+                        <a:t>minus 3.00</a:t>
+                      </a:r>
+                      <a:endParaRPr lang="en-US" sz="950" dirty="0">
+                        <a:latin typeface="Calibri" charset="0"/>
+                        <a:ea typeface="Calibri" charset="0"/>
+                        <a:cs typeface="Calibri" charset="0"/>
+                      </a:endParaRPr>
+                    </a:p>
+                  </a:txBody>
+                  <a:tcPr marL="27432" marR="27432" marT="27432" marB="27432">
+                    <a:lnL w="6350" cap="flat" cmpd="sng" algn="ctr">
+                      <a:solidFill>
+                        <a:srgbClr val="D9DCE1"/>
+                      </a:solidFill>
+                      <a:prstDash val="solid"/>
+                      <a:round/>
+                      <a:headEnd type="none" w="med" len="med"/>
+                      <a:tailEnd type="none" w="med" len="med"/>
+                    </a:lnL>
+                    <a:lnR w="6350" cap="flat" cmpd="sng" algn="ctr">
+                      <a:solidFill>
+                        <a:srgbClr val="D9DCE1"/>
+                      </a:solidFill>
+                      <a:prstDash val="solid"/>
+                      <a:round/>
+                      <a:headEnd type="none" w="med" len="med"/>
+                      <a:tailEnd type="none" w="med" len="med"/>
+                    </a:lnR>
+                    <a:lnT w="6350" cap="flat" cmpd="sng" algn="ctr">
+                      <a:solidFill>
+                        <a:srgbClr val="D9DCE1"/>
+                      </a:solidFill>
+                      <a:prstDash val="solid"/>
+                      <a:round/>
+                      <a:headEnd type="none" w="med" len="med"/>
+                      <a:tailEnd type="none" w="med" len="med"/>
+                    </a:lnT>
+                    <a:lnB w="6350" cap="flat" cmpd="sng" algn="ctr">
+                      <a:solidFill>
+                        <a:srgbClr val="D9DCE1"/>
+                      </a:solidFill>
+                      <a:prstDash val="solid"/>
+                      <a:round/>
+                      <a:headEnd type="none" w="med" len="med"/>
+                      <a:tailEnd type="none" w="med" len="med"/>
+                    </a:lnB>
+                  </a:tcPr>
+                </a:tc>
+                <a:tc>
+                  <a:txBody>
+                    <a:bodyPr/>
+                    <a:lstStyle/>
+                    <a:p>
+                      <a:pPr algn="ctr" indent="0" marL="0">
+                        <a:buNone/>
+                      </a:pPr>
+                      <a:r>
+                        <a:rPr lang="en-US" sz="950" dirty="0">
+                          <a:solidFill>
+                            <a:schemeClr val="tx1"/>
+                          </a:solidFill>
+                          <a:latin typeface="Calibri" pitchFamily="34" charset="0"/>
+                          <a:ea typeface="Calibri" pitchFamily="34" charset="-122"/>
+                          <a:cs typeface="Calibri" pitchFamily="34" charset="-120"/>
+                        </a:rPr>
+                        <a:t>minus 3.30</a:t>
+                      </a:r>
+                      <a:endParaRPr lang="en-US" sz="950" dirty="0">
+                        <a:latin typeface="Calibri" charset="0"/>
+                        <a:ea typeface="Calibri" charset="0"/>
+                        <a:cs typeface="Calibri" charset="0"/>
+                      </a:endParaRPr>
+                    </a:p>
+                  </a:txBody>
+                  <a:tcPr marL="27432" marR="27432" marT="27432" marB="27432">
+                    <a:lnL w="6350" cap="flat" cmpd="sng" algn="ctr">
+                      <a:solidFill>
+                        <a:srgbClr val="D9DCE1"/>
+                      </a:solidFill>
+                      <a:prstDash val="solid"/>
+                      <a:round/>
+                      <a:headEnd type="none" w="med" len="med"/>
+                      <a:tailEnd type="none" w="med" len="med"/>
+                    </a:lnL>
+                    <a:lnR w="6350" cap="flat" cmpd="sng" algn="ctr">
+                      <a:solidFill>
+                        <a:srgbClr val="D9DCE1"/>
+                      </a:solidFill>
+                      <a:prstDash val="solid"/>
+                      <a:round/>
+                      <a:headEnd type="none" w="med" len="med"/>
+                      <a:tailEnd type="none" w="med" len="med"/>
+                    </a:lnR>
+                    <a:lnT w="6350" cap="flat" cmpd="sng" algn="ctr">
+                      <a:solidFill>
+                        <a:srgbClr val="D9DCE1"/>
+                      </a:solidFill>
+                      <a:prstDash val="solid"/>
+                      <a:round/>
+                      <a:headEnd type="none" w="med" len="med"/>
+                      <a:tailEnd type="none" w="med" len="med"/>
+                    </a:lnT>
+                    <a:lnB w="6350" cap="flat" cmpd="sng" algn="ctr">
+                      <a:solidFill>
+                        <a:srgbClr val="D9DCE1"/>
+                      </a:solidFill>
+                      <a:prstDash val="solid"/>
+                      <a:round/>
+                      <a:headEnd type="none" w="med" len="med"/>
+                      <a:tailEnd type="none" w="med" len="med"/>
+                    </a:lnB>
+                  </a:tcPr>
+                </a:tc>
+                <a:tc>
+                  <a:txBody>
+                    <a:bodyPr/>
+                    <a:lstStyle/>
+                    <a:p>
+                      <a:pPr algn="ctr" indent="0" marL="0">
+                        <a:buNone/>
+                      </a:pPr>
+                      <a:r>
+                        <a:rPr lang="en-US" sz="950" b="1" dirty="0">
+                          <a:solidFill>
+                            <a:schemeClr val="accent3"/>
+                          </a:solidFill>
+                          <a:latin typeface="Calibri" pitchFamily="34" charset="0"/>
+                          <a:ea typeface="Calibri" pitchFamily="34" charset="-122"/>
+                          <a:cs typeface="Calibri" pitchFamily="34" charset="-120"/>
+                        </a:rPr>
+                        <a:t>same way</a:t>
+                      </a:r>
+                      <a:endParaRPr lang="en-US" sz="950" dirty="0">
+                        <a:latin typeface="Calibri" charset="0"/>
+                        <a:ea typeface="Calibri" charset="0"/>
+                        <a:cs typeface="Calibri" charset="0"/>
+                      </a:endParaRPr>
+                    </a:p>
+                  </a:txBody>
+                  <a:tcPr marL="27432" marR="27432" marT="27432" marB="27432">
+                    <a:lnL w="6350" cap="flat" cmpd="sng" algn="ctr">
+                      <a:solidFill>
+                        <a:srgbClr val="D9DCE1"/>
+                      </a:solidFill>
+                      <a:prstDash val="solid"/>
+                      <a:round/>
+                      <a:headEnd type="none" w="med" len="med"/>
+                      <a:tailEnd type="none" w="med" len="med"/>
+                    </a:lnL>
+                    <a:lnR w="6350" cap="flat" cmpd="sng" algn="ctr">
+                      <a:solidFill>
+                        <a:srgbClr val="D9DCE1"/>
+                      </a:solidFill>
+                      <a:prstDash val="solid"/>
+                      <a:round/>
+                      <a:headEnd type="none" w="med" len="med"/>
+                      <a:tailEnd type="none" w="med" len="med"/>
+                    </a:lnR>
+                    <a:lnT w="6350" cap="flat" cmpd="sng" algn="ctr">
+                      <a:solidFill>
+                        <a:srgbClr val="D9DCE1"/>
+                      </a:solidFill>
+                      <a:prstDash val="solid"/>
+                      <a:round/>
+                      <a:headEnd type="none" w="med" len="med"/>
+                      <a:tailEnd type="none" w="med" len="med"/>
+                    </a:lnT>
+                    <a:lnB w="6350" cap="flat" cmpd="sng" algn="ctr">
+                      <a:solidFill>
+                        <a:srgbClr val="D9DCE1"/>
+                      </a:solidFill>
+                      <a:prstDash val="solid"/>
+                      <a:round/>
+                      <a:headEnd type="none" w="med" len="med"/>
+                      <a:tailEnd type="none" w="med" len="med"/>
+                    </a:lnB>
+                  </a:tcPr>
+                </a:tc>
+                <a:tc>
+                  <a:txBody>
+                    <a:bodyPr/>
+                    <a:lstStyle/>
+                    <a:p>
+                      <a:pPr algn="ctr" indent="0" marL="0">
+                        <a:buNone/>
+                      </a:pPr>
+                      <a:r>
+                        <a:rPr lang="en-US" sz="950" dirty="0">
+                          <a:solidFill>
+                            <a:schemeClr val="tx1"/>
+                          </a:solidFill>
+                          <a:latin typeface="Calibri" pitchFamily="34" charset="0"/>
+                          <a:ea typeface="Calibri" pitchFamily="34" charset="-122"/>
+                          <a:cs typeface="Calibri" pitchFamily="34" charset="-120"/>
+                        </a:rPr>
+                        <a:t>minus 2.00</a:t>
+                      </a:r>
+                      <a:endParaRPr lang="en-US" sz="950" dirty="0">
+                        <a:latin typeface="Calibri" charset="0"/>
+                        <a:ea typeface="Calibri" charset="0"/>
+                        <a:cs typeface="Calibri" charset="0"/>
+                      </a:endParaRPr>
+                    </a:p>
+                  </a:txBody>
+                  <a:tcPr marL="27432" marR="27432" marT="27432" marB="27432">
+                    <a:lnL w="6350" cap="flat" cmpd="sng" algn="ctr">
+                      <a:solidFill>
+                        <a:srgbClr val="D9DCE1"/>
+                      </a:solidFill>
+                      <a:prstDash val="solid"/>
+                      <a:round/>
+                      <a:headEnd type="none" w="med" len="med"/>
+                      <a:tailEnd type="none" w="med" len="med"/>
+                    </a:lnL>
+                    <a:lnR w="6350" cap="flat" cmpd="sng" algn="ctr">
+                      <a:solidFill>
+                        <a:srgbClr val="D9DCE1"/>
+                      </a:solidFill>
+                      <a:prstDash val="solid"/>
+                      <a:round/>
+                      <a:headEnd type="none" w="med" len="med"/>
+                      <a:tailEnd type="none" w="med" len="med"/>
+                    </a:lnR>
+                    <a:lnT w="6350" cap="flat" cmpd="sng" algn="ctr">
+                      <a:solidFill>
+                        <a:srgbClr val="D9DCE1"/>
+                      </a:solidFill>
+                      <a:prstDash val="solid"/>
+                      <a:round/>
+                      <a:headEnd type="none" w="med" len="med"/>
+                      <a:tailEnd type="none" w="med" len="med"/>
+                    </a:lnT>
+                    <a:lnB w="6350" cap="flat" cmpd="sng" algn="ctr">
+                      <a:solidFill>
+                        <a:srgbClr val="D9DCE1"/>
+                      </a:solidFill>
+                      <a:prstDash val="solid"/>
+                      <a:round/>
+                      <a:headEnd type="none" w="med" len="med"/>
+                      <a:tailEnd type="none" w="med" len="med"/>
+                    </a:lnB>
+                  </a:tcPr>
+                </a:tc>
+                <a:tc>
+                  <a:txBody>
+                    <a:bodyPr/>
+                    <a:lstStyle/>
+                    <a:p>
+                      <a:pPr algn="ctr" indent="0" marL="0">
+                        <a:buNone/>
+                      </a:pPr>
+                      <a:r>
+                        <a:rPr lang="en-US" sz="950" b="1" dirty="0">
+                          <a:solidFill>
+                            <a:schemeClr val="accent3"/>
+                          </a:solidFill>
+                          <a:latin typeface="Calibri" pitchFamily="34" charset="0"/>
+                          <a:ea typeface="Calibri" pitchFamily="34" charset="-122"/>
+                          <a:cs typeface="Calibri" pitchFamily="34" charset="-120"/>
+                        </a:rPr>
+                        <a:t>same way</a:t>
+                      </a:r>
+                      <a:endParaRPr lang="en-US" sz="950" dirty="0">
+                        <a:latin typeface="Calibri" charset="0"/>
+                        <a:ea typeface="Calibri" charset="0"/>
+                        <a:cs typeface="Calibri" charset="0"/>
+                      </a:endParaRPr>
+                    </a:p>
+                  </a:txBody>
+                  <a:tcPr marL="27432" marR="27432" marT="27432" marB="27432">
+                    <a:lnL w="6350" cap="flat" cmpd="sng" algn="ctr">
+                      <a:solidFill>
+                        <a:srgbClr val="D9DCE1"/>
+                      </a:solidFill>
+                      <a:prstDash val="solid"/>
+                      <a:round/>
+                      <a:headEnd type="none" w="med" len="med"/>
+                      <a:tailEnd type="none" w="med" len="med"/>
+                    </a:lnL>
+                    <a:lnR w="6350" cap="flat" cmpd="sng" algn="ctr">
+                      <a:solidFill>
+                        <a:srgbClr val="D9DCE1"/>
+                      </a:solidFill>
+                      <a:prstDash val="solid"/>
+                      <a:round/>
+                      <a:headEnd type="none" w="med" len="med"/>
+                      <a:tailEnd type="none" w="med" len="med"/>
+                    </a:lnR>
+                    <a:lnT w="6350" cap="flat" cmpd="sng" algn="ctr">
+                      <a:solidFill>
+                        <a:srgbClr val="D9DCE1"/>
+                      </a:solidFill>
+                      <a:prstDash val="solid"/>
+                      <a:round/>
+                      <a:headEnd type="none" w="med" len="med"/>
+                      <a:tailEnd type="none" w="med" len="med"/>
+                    </a:lnT>
+                    <a:lnB w="6350" cap="flat" cmpd="sng" algn="ctr">
+                      <a:solidFill>
+                        <a:srgbClr val="D9DCE1"/>
+                      </a:solidFill>
+                      <a:prstDash val="solid"/>
+                      <a:round/>
+                      <a:headEnd type="none" w="med" len="med"/>
+                      <a:tailEnd type="none" w="med" len="med"/>
+                    </a:lnB>
+                  </a:tcPr>
+                </a:tc>
+              </a:tr>
+              <a:tr h="265176">
+                <a:tc>
+                  <a:txBody>
+                    <a:bodyPr/>
+                    <a:lstStyle/>
+                    <a:p>
+                      <a:pPr algn="l" indent="0" marL="0">
+                        <a:buNone/>
+                      </a:pPr>
+                      <a:r>
+                        <a:rPr lang="en-US" sz="950" dirty="0">
+                          <a:solidFill>
+                            <a:schemeClr val="tx1"/>
+                          </a:solidFill>
+                          <a:latin typeface="Calibri" pitchFamily="34" charset="0"/>
+                          <a:ea typeface="Calibri" pitchFamily="34" charset="-122"/>
+                          <a:cs typeface="Calibri" pitchFamily="34" charset="-120"/>
+                        </a:rPr>
+                        <a:t>Hike 2005 to 2008</a:t>
+                      </a:r>
+                      <a:endParaRPr lang="en-US" sz="950" dirty="0">
+                        <a:latin typeface="Calibri" charset="0"/>
+                        <a:ea typeface="Calibri" charset="0"/>
+                        <a:cs typeface="Calibri" charset="0"/>
+                      </a:endParaRPr>
+                    </a:p>
+                  </a:txBody>
+                  <a:tcPr marL="27432" marR="27432" marT="27432" marB="27432">
+                    <a:lnL w="6350" cap="flat" cmpd="sng" algn="ctr">
+                      <a:solidFill>
+                        <a:srgbClr val="D9DCE1"/>
+                      </a:solidFill>
+                      <a:prstDash val="solid"/>
+                      <a:round/>
+                      <a:headEnd type="none" w="med" len="med"/>
+                      <a:tailEnd type="none" w="med" len="med"/>
+                    </a:lnL>
+                    <a:lnR w="6350" cap="flat" cmpd="sng" algn="ctr">
+                      <a:solidFill>
+                        <a:srgbClr val="D9DCE1"/>
+                      </a:solidFill>
+                      <a:prstDash val="solid"/>
+                      <a:round/>
+                      <a:headEnd type="none" w="med" len="med"/>
+                      <a:tailEnd type="none" w="med" len="med"/>
+                    </a:lnR>
+                    <a:lnT w="6350" cap="flat" cmpd="sng" algn="ctr">
+                      <a:solidFill>
+                        <a:srgbClr val="D9DCE1"/>
+                      </a:solidFill>
+                      <a:prstDash val="solid"/>
+                      <a:round/>
+                      <a:headEnd type="none" w="med" len="med"/>
+                      <a:tailEnd type="none" w="med" len="med"/>
+                    </a:lnT>
+                    <a:lnB w="6350" cap="flat" cmpd="sng" algn="ctr">
+                      <a:solidFill>
+                        <a:srgbClr val="D9DCE1"/>
+                      </a:solidFill>
+                      <a:prstDash val="solid"/>
+                      <a:round/>
+                      <a:headEnd type="none" w="med" len="med"/>
+                      <a:tailEnd type="none" w="med" len="med"/>
+                    </a:lnB>
+                  </a:tcPr>
+                </a:tc>
+                <a:tc>
+                  <a:txBody>
+                    <a:bodyPr/>
+                    <a:lstStyle/>
+                    <a:p>
+                      <a:pPr algn="ctr" indent="0" marL="0">
+                        <a:buNone/>
+                      </a:pPr>
+                      <a:r>
+                        <a:rPr lang="en-US" sz="950" dirty="0">
+                          <a:solidFill>
+                            <a:schemeClr val="tx1"/>
+                          </a:solidFill>
+                          <a:latin typeface="Calibri" pitchFamily="34" charset="0"/>
+                          <a:ea typeface="Calibri" pitchFamily="34" charset="-122"/>
+                          <a:cs typeface="Calibri" pitchFamily="34" charset="-120"/>
+                        </a:rPr>
+                        <a:t>3.00</a:t>
+                      </a:r>
+                      <a:endParaRPr lang="en-US" sz="950" dirty="0">
+                        <a:latin typeface="Calibri" charset="0"/>
+                        <a:ea typeface="Calibri" charset="0"/>
+                        <a:cs typeface="Calibri" charset="0"/>
+                      </a:endParaRPr>
+                    </a:p>
+                  </a:txBody>
+                  <a:tcPr marL="27432" marR="27432" marT="27432" marB="27432">
+                    <a:lnL w="6350" cap="flat" cmpd="sng" algn="ctr">
+                      <a:solidFill>
+                        <a:srgbClr val="D9DCE1"/>
+                      </a:solidFill>
+                      <a:prstDash val="solid"/>
+                      <a:round/>
+                      <a:headEnd type="none" w="med" len="med"/>
+                      <a:tailEnd type="none" w="med" len="med"/>
+                    </a:lnL>
+                    <a:lnR w="6350" cap="flat" cmpd="sng" algn="ctr">
+                      <a:solidFill>
+                        <a:srgbClr val="D9DCE1"/>
+                      </a:solidFill>
+                      <a:prstDash val="solid"/>
+                      <a:round/>
+                      <a:headEnd type="none" w="med" len="med"/>
+                      <a:tailEnd type="none" w="med" len="med"/>
+                    </a:lnR>
+                    <a:lnT w="6350" cap="flat" cmpd="sng" algn="ctr">
+                      <a:solidFill>
+                        <a:srgbClr val="D9DCE1"/>
+                      </a:solidFill>
+                      <a:prstDash val="solid"/>
+                      <a:round/>
+                      <a:headEnd type="none" w="med" len="med"/>
+                      <a:tailEnd type="none" w="med" len="med"/>
+                    </a:lnT>
+                    <a:lnB w="6350" cap="flat" cmpd="sng" algn="ctr">
+                      <a:solidFill>
+                        <a:srgbClr val="D9DCE1"/>
+                      </a:solidFill>
+                      <a:prstDash val="solid"/>
+                      <a:round/>
+                      <a:headEnd type="none" w="med" len="med"/>
+                      <a:tailEnd type="none" w="med" len="med"/>
+                    </a:lnB>
+                  </a:tcPr>
+                </a:tc>
+                <a:tc>
+                  <a:txBody>
+                    <a:bodyPr/>
+                    <a:lstStyle/>
+                    <a:p>
+                      <a:pPr algn="ctr" indent="0" marL="0">
+                        <a:buNone/>
+                      </a:pPr>
+                      <a:r>
+                        <a:rPr lang="en-US" sz="950" dirty="0">
+                          <a:solidFill>
+                            <a:schemeClr val="tx1"/>
+                          </a:solidFill>
+                          <a:latin typeface="Calibri" pitchFamily="34" charset="0"/>
+                          <a:ea typeface="Calibri" pitchFamily="34" charset="-122"/>
+                          <a:cs typeface="Calibri" pitchFamily="34" charset="-120"/>
+                        </a:rPr>
+                        <a:t>1.29</a:t>
+                      </a:r>
+                      <a:endParaRPr lang="en-US" sz="950" dirty="0">
+                        <a:latin typeface="Calibri" charset="0"/>
+                        <a:ea typeface="Calibri" charset="0"/>
+                        <a:cs typeface="Calibri" charset="0"/>
+                      </a:endParaRPr>
+                    </a:p>
+                  </a:txBody>
+                  <a:tcPr marL="27432" marR="27432" marT="27432" marB="27432">
+                    <a:lnL w="6350" cap="flat" cmpd="sng" algn="ctr">
+                      <a:solidFill>
+                        <a:srgbClr val="D9DCE1"/>
+                      </a:solidFill>
+                      <a:prstDash val="solid"/>
+                      <a:round/>
+                      <a:headEnd type="none" w="med" len="med"/>
+                      <a:tailEnd type="none" w="med" len="med"/>
+                    </a:lnL>
+                    <a:lnR w="6350" cap="flat" cmpd="sng" algn="ctr">
+                      <a:solidFill>
+                        <a:srgbClr val="D9DCE1"/>
+                      </a:solidFill>
+                      <a:prstDash val="solid"/>
+                      <a:round/>
+                      <a:headEnd type="none" w="med" len="med"/>
+                      <a:tailEnd type="none" w="med" len="med"/>
+                    </a:lnR>
+                    <a:lnT w="6350" cap="flat" cmpd="sng" algn="ctr">
+                      <a:solidFill>
+                        <a:srgbClr val="D9DCE1"/>
+                      </a:solidFill>
+                      <a:prstDash val="solid"/>
+                      <a:round/>
+                      <a:headEnd type="none" w="med" len="med"/>
+                      <a:tailEnd type="none" w="med" len="med"/>
+                    </a:lnT>
+                    <a:lnB w="6350" cap="flat" cmpd="sng" algn="ctr">
+                      <a:solidFill>
+                        <a:srgbClr val="D9DCE1"/>
+                      </a:solidFill>
+                      <a:prstDash val="solid"/>
+                      <a:round/>
+                      <a:headEnd type="none" w="med" len="med"/>
+                      <a:tailEnd type="none" w="med" len="med"/>
+                    </a:lnB>
+                  </a:tcPr>
+                </a:tc>
+                <a:tc>
+                  <a:txBody>
+                    <a:bodyPr/>
+                    <a:lstStyle/>
+                    <a:p>
+                      <a:pPr algn="ctr" indent="0" marL="0">
+                        <a:buNone/>
+                      </a:pPr>
+                      <a:r>
+                        <a:rPr lang="en-US" sz="950" b="1" dirty="0">
+                          <a:solidFill>
+                            <a:schemeClr val="accent3"/>
+                          </a:solidFill>
+                          <a:latin typeface="Calibri" pitchFamily="34" charset="0"/>
+                          <a:ea typeface="Calibri" pitchFamily="34" charset="-122"/>
+                          <a:cs typeface="Calibri" pitchFamily="34" charset="-120"/>
+                        </a:rPr>
+                        <a:t>same way</a:t>
+                      </a:r>
+                      <a:endParaRPr lang="en-US" sz="950" dirty="0">
+                        <a:latin typeface="Calibri" charset="0"/>
+                        <a:ea typeface="Calibri" charset="0"/>
+                        <a:cs typeface="Calibri" charset="0"/>
+                      </a:endParaRPr>
+                    </a:p>
+                  </a:txBody>
+                  <a:tcPr marL="27432" marR="27432" marT="27432" marB="27432">
+                    <a:lnL w="6350" cap="flat" cmpd="sng" algn="ctr">
+                      <a:solidFill>
+                        <a:srgbClr val="D9DCE1"/>
+                      </a:solidFill>
+                      <a:prstDash val="solid"/>
+                      <a:round/>
+                      <a:headEnd type="none" w="med" len="med"/>
+                      <a:tailEnd type="none" w="med" len="med"/>
+                    </a:lnL>
+                    <a:lnR w="6350" cap="flat" cmpd="sng" algn="ctr">
+                      <a:solidFill>
+                        <a:srgbClr val="D9DCE1"/>
+                      </a:solidFill>
+                      <a:prstDash val="solid"/>
+                      <a:round/>
+                      <a:headEnd type="none" w="med" len="med"/>
+                      <a:tailEnd type="none" w="med" len="med"/>
+                    </a:lnR>
+                    <a:lnT w="6350" cap="flat" cmpd="sng" algn="ctr">
+                      <a:solidFill>
+                        <a:srgbClr val="D9DCE1"/>
+                      </a:solidFill>
+                      <a:prstDash val="solid"/>
+                      <a:round/>
+                      <a:headEnd type="none" w="med" len="med"/>
+                      <a:tailEnd type="none" w="med" len="med"/>
+                    </a:lnT>
+                    <a:lnB w="6350" cap="flat" cmpd="sng" algn="ctr">
+                      <a:solidFill>
+                        <a:srgbClr val="D9DCE1"/>
+                      </a:solidFill>
+                      <a:prstDash val="solid"/>
+                      <a:round/>
+                      <a:headEnd type="none" w="med" len="med"/>
+                      <a:tailEnd type="none" w="med" len="med"/>
+                    </a:lnB>
+                  </a:tcPr>
+                </a:tc>
+                <a:tc>
+                  <a:txBody>
+                    <a:bodyPr/>
+                    <a:lstStyle/>
+                    <a:p>
+                      <a:pPr algn="ctr" indent="0" marL="0">
+                        <a:buNone/>
+                      </a:pPr>
+                      <a:r>
+                        <a:rPr lang="en-US" sz="950" dirty="0">
+                          <a:solidFill>
+                            <a:schemeClr val="tx1"/>
+                          </a:solidFill>
+                          <a:latin typeface="Calibri" pitchFamily="34" charset="0"/>
+                          <a:ea typeface="Calibri" pitchFamily="34" charset="-122"/>
+                          <a:cs typeface="Calibri" pitchFamily="34" charset="-120"/>
+                        </a:rPr>
+                        <a:t>0.50</a:t>
+                      </a:r>
+                      <a:endParaRPr lang="en-US" sz="950" dirty="0">
+                        <a:latin typeface="Calibri" charset="0"/>
+                        <a:ea typeface="Calibri" charset="0"/>
+                        <a:cs typeface="Calibri" charset="0"/>
+                      </a:endParaRPr>
+                    </a:p>
+                  </a:txBody>
+                  <a:tcPr marL="27432" marR="27432" marT="27432" marB="27432">
+                    <a:lnL w="6350" cap="flat" cmpd="sng" algn="ctr">
+                      <a:solidFill>
+                        <a:srgbClr val="D9DCE1"/>
+                      </a:solidFill>
+                      <a:prstDash val="solid"/>
+                      <a:round/>
+                      <a:headEnd type="none" w="med" len="med"/>
+                      <a:tailEnd type="none" w="med" len="med"/>
+                    </a:lnL>
+                    <a:lnR w="6350" cap="flat" cmpd="sng" algn="ctr">
+                      <a:solidFill>
+                        <a:srgbClr val="D9DCE1"/>
+                      </a:solidFill>
+                      <a:prstDash val="solid"/>
+                      <a:round/>
+                      <a:headEnd type="none" w="med" len="med"/>
+                      <a:tailEnd type="none" w="med" len="med"/>
+                    </a:lnR>
+                    <a:lnT w="6350" cap="flat" cmpd="sng" algn="ctr">
+                      <a:solidFill>
+                        <a:srgbClr val="D9DCE1"/>
+                      </a:solidFill>
+                      <a:prstDash val="solid"/>
+                      <a:round/>
+                      <a:headEnd type="none" w="med" len="med"/>
+                      <a:tailEnd type="none" w="med" len="med"/>
+                    </a:lnT>
+                    <a:lnB w="6350" cap="flat" cmpd="sng" algn="ctr">
+                      <a:solidFill>
+                        <a:srgbClr val="D9DCE1"/>
+                      </a:solidFill>
+                      <a:prstDash val="solid"/>
+                      <a:round/>
+                      <a:headEnd type="none" w="med" len="med"/>
+                      <a:tailEnd type="none" w="med" len="med"/>
+                    </a:lnB>
+                  </a:tcPr>
+                </a:tc>
+                <a:tc>
+                  <a:txBody>
+                    <a:bodyPr/>
+                    <a:lstStyle/>
+                    <a:p>
+                      <a:pPr algn="ctr" indent="0" marL="0">
+                        <a:buNone/>
+                      </a:pPr>
+                      <a:r>
+                        <a:rPr lang="en-US" sz="950" b="1" dirty="0">
+                          <a:solidFill>
+                            <a:schemeClr val="accent3"/>
+                          </a:solidFill>
+                          <a:latin typeface="Calibri" pitchFamily="34" charset="0"/>
+                          <a:ea typeface="Calibri" pitchFamily="34" charset="-122"/>
+                          <a:cs typeface="Calibri" pitchFamily="34" charset="-120"/>
+                        </a:rPr>
+                        <a:t>same way</a:t>
+                      </a:r>
+                      <a:endParaRPr lang="en-US" sz="950" dirty="0">
+                        <a:latin typeface="Calibri" charset="0"/>
+                        <a:ea typeface="Calibri" charset="0"/>
+                        <a:cs typeface="Calibri" charset="0"/>
+                      </a:endParaRPr>
+                    </a:p>
+                  </a:txBody>
+                  <a:tcPr marL="27432" marR="27432" marT="27432" marB="27432">
+                    <a:lnL w="6350" cap="flat" cmpd="sng" algn="ctr">
+                      <a:solidFill>
+                        <a:srgbClr val="D9DCE1"/>
+                      </a:solidFill>
+                      <a:prstDash val="solid"/>
+                      <a:round/>
+                      <a:headEnd type="none" w="med" len="med"/>
+                      <a:tailEnd type="none" w="med" len="med"/>
+                    </a:lnL>
+                    <a:lnR w="6350" cap="flat" cmpd="sng" algn="ctr">
+                      <a:solidFill>
+                        <a:srgbClr val="D9DCE1"/>
+                      </a:solidFill>
+                      <a:prstDash val="solid"/>
+                      <a:round/>
+                      <a:headEnd type="none" w="med" len="med"/>
+                      <a:tailEnd type="none" w="med" len="med"/>
+                    </a:lnR>
+                    <a:lnT w="6350" cap="flat" cmpd="sng" algn="ctr">
+                      <a:solidFill>
+                        <a:srgbClr val="D9DCE1"/>
+                      </a:solidFill>
+                      <a:prstDash val="solid"/>
+                      <a:round/>
+                      <a:headEnd type="none" w="med" len="med"/>
+                      <a:tailEnd type="none" w="med" len="med"/>
+                    </a:lnT>
+                    <a:lnB w="6350" cap="flat" cmpd="sng" algn="ctr">
+                      <a:solidFill>
+                        <a:srgbClr val="D9DCE1"/>
+                      </a:solidFill>
+                      <a:prstDash val="solid"/>
+                      <a:round/>
+                      <a:headEnd type="none" w="med" len="med"/>
+                      <a:tailEnd type="none" w="med" len="med"/>
+                    </a:lnB>
+                  </a:tcPr>
+                </a:tc>
+              </a:tr>
+              <a:tr h="265176">
+                <a:tc>
+                  <a:txBody>
+                    <a:bodyPr/>
+                    <a:lstStyle/>
+                    <a:p>
+                      <a:pPr algn="l" indent="0" marL="0">
+                        <a:buNone/>
+                      </a:pPr>
+                      <a:r>
+                        <a:rPr lang="en-US" sz="950" dirty="0">
+                          <a:solidFill>
+                            <a:schemeClr val="tx1"/>
+                          </a:solidFill>
+                          <a:latin typeface="Calibri" pitchFamily="34" charset="0"/>
+                          <a:ea typeface="Calibri" pitchFamily="34" charset="-122"/>
+                          <a:cs typeface="Calibri" pitchFamily="34" charset="-120"/>
+                        </a:rPr>
+                        <a:t>Cut 2008 to 2009</a:t>
+                      </a:r>
+                      <a:endParaRPr lang="en-US" sz="950" dirty="0">
+                        <a:latin typeface="Calibri" charset="0"/>
+                        <a:ea typeface="Calibri" charset="0"/>
+                        <a:cs typeface="Calibri" charset="0"/>
+                      </a:endParaRPr>
+                    </a:p>
+                  </a:txBody>
+                  <a:tcPr marL="27432" marR="27432" marT="27432" marB="27432">
+                    <a:lnL w="6350" cap="flat" cmpd="sng" algn="ctr">
+                      <a:solidFill>
+                        <a:srgbClr val="D9DCE1"/>
+                      </a:solidFill>
+                      <a:prstDash val="solid"/>
+                      <a:round/>
+                      <a:headEnd type="none" w="med" len="med"/>
+                      <a:tailEnd type="none" w="med" len="med"/>
+                    </a:lnL>
+                    <a:lnR w="6350" cap="flat" cmpd="sng" algn="ctr">
+                      <a:solidFill>
+                        <a:srgbClr val="D9DCE1"/>
+                      </a:solidFill>
+                      <a:prstDash val="solid"/>
+                      <a:round/>
+                      <a:headEnd type="none" w="med" len="med"/>
+                      <a:tailEnd type="none" w="med" len="med"/>
+                    </a:lnR>
+                    <a:lnT w="6350" cap="flat" cmpd="sng" algn="ctr">
+                      <a:solidFill>
+                        <a:srgbClr val="D9DCE1"/>
+                      </a:solidFill>
+                      <a:prstDash val="solid"/>
+                      <a:round/>
+                      <a:headEnd type="none" w="med" len="med"/>
+                      <a:tailEnd type="none" w="med" len="med"/>
+                    </a:lnT>
+                    <a:lnB w="6350" cap="flat" cmpd="sng" algn="ctr">
+                      <a:solidFill>
+                        <a:srgbClr val="D9DCE1"/>
+                      </a:solidFill>
+                      <a:prstDash val="solid"/>
+                      <a:round/>
+                      <a:headEnd type="none" w="med" len="med"/>
+                      <a:tailEnd type="none" w="med" len="med"/>
+                    </a:lnB>
+                  </a:tcPr>
+                </a:tc>
+                <a:tc>
+                  <a:txBody>
+                    <a:bodyPr/>
+                    <a:lstStyle/>
+                    <a:p>
+                      <a:pPr algn="ctr" indent="0" marL="0">
+                        <a:buNone/>
+                      </a:pPr>
+                      <a:r>
+                        <a:rPr lang="en-US" sz="950" dirty="0">
+                          <a:solidFill>
+                            <a:schemeClr val="tx1"/>
+                          </a:solidFill>
+                          <a:latin typeface="Calibri" pitchFamily="34" charset="0"/>
+                          <a:ea typeface="Calibri" pitchFamily="34" charset="-122"/>
+                          <a:cs typeface="Calibri" pitchFamily="34" charset="-120"/>
+                        </a:rPr>
+                        <a:t>minus 4.25</a:t>
+                      </a:r>
+                      <a:endParaRPr lang="en-US" sz="950" dirty="0">
+                        <a:latin typeface="Calibri" charset="0"/>
+                        <a:ea typeface="Calibri" charset="0"/>
+                        <a:cs typeface="Calibri" charset="0"/>
+                      </a:endParaRPr>
+                    </a:p>
+                  </a:txBody>
+                  <a:tcPr marL="27432" marR="27432" marT="27432" marB="27432">
+                    <a:lnL w="6350" cap="flat" cmpd="sng" algn="ctr">
+                      <a:solidFill>
+                        <a:srgbClr val="D9DCE1"/>
+                      </a:solidFill>
+                      <a:prstDash val="solid"/>
+                      <a:round/>
+                      <a:headEnd type="none" w="med" len="med"/>
+                      <a:tailEnd type="none" w="med" len="med"/>
+                    </a:lnL>
+                    <a:lnR w="6350" cap="flat" cmpd="sng" algn="ctr">
+                      <a:solidFill>
+                        <a:srgbClr val="D9DCE1"/>
+                      </a:solidFill>
+                      <a:prstDash val="solid"/>
+                      <a:round/>
+                      <a:headEnd type="none" w="med" len="med"/>
+                      <a:tailEnd type="none" w="med" len="med"/>
+                    </a:lnR>
+                    <a:lnT w="6350" cap="flat" cmpd="sng" algn="ctr">
+                      <a:solidFill>
+                        <a:srgbClr val="D9DCE1"/>
+                      </a:solidFill>
+                      <a:prstDash val="solid"/>
+                      <a:round/>
+                      <a:headEnd type="none" w="med" len="med"/>
+                      <a:tailEnd type="none" w="med" len="med"/>
+                    </a:lnT>
+                    <a:lnB w="6350" cap="flat" cmpd="sng" algn="ctr">
+                      <a:solidFill>
+                        <a:srgbClr val="D9DCE1"/>
+                      </a:solidFill>
+                      <a:prstDash val="solid"/>
+                      <a:round/>
+                      <a:headEnd type="none" w="med" len="med"/>
+                      <a:tailEnd type="none" w="med" len="med"/>
+                    </a:lnB>
+                  </a:tcPr>
+                </a:tc>
+                <a:tc>
+                  <a:txBody>
+                    <a:bodyPr/>
+                    <a:lstStyle/>
+                    <a:p>
+                      <a:pPr algn="ctr" indent="0" marL="0">
+                        <a:buNone/>
+                      </a:pPr>
+                      <a:r>
+                        <a:rPr lang="en-US" sz="950" dirty="0">
+                          <a:solidFill>
+                            <a:schemeClr val="tx1"/>
+                          </a:solidFill>
+                          <a:latin typeface="Calibri" pitchFamily="34" charset="0"/>
+                          <a:ea typeface="Calibri" pitchFamily="34" charset="-122"/>
+                          <a:cs typeface="Calibri" pitchFamily="34" charset="-120"/>
+                        </a:rPr>
+                        <a:t>1.33</a:t>
+                      </a:r>
+                      <a:endParaRPr lang="en-US" sz="950" dirty="0">
+                        <a:latin typeface="Calibri" charset="0"/>
+                        <a:ea typeface="Calibri" charset="0"/>
+                        <a:cs typeface="Calibri" charset="0"/>
+                      </a:endParaRPr>
+                    </a:p>
+                  </a:txBody>
+                  <a:tcPr marL="27432" marR="27432" marT="27432" marB="27432">
+                    <a:lnL w="6350" cap="flat" cmpd="sng" algn="ctr">
+                      <a:solidFill>
+                        <a:srgbClr val="D9DCE1"/>
+                      </a:solidFill>
+                      <a:prstDash val="solid"/>
+                      <a:round/>
+                      <a:headEnd type="none" w="med" len="med"/>
+                      <a:tailEnd type="none" w="med" len="med"/>
+                    </a:lnL>
+                    <a:lnR w="6350" cap="flat" cmpd="sng" algn="ctr">
+                      <a:solidFill>
+                        <a:srgbClr val="D9DCE1"/>
+                      </a:solidFill>
+                      <a:prstDash val="solid"/>
+                      <a:round/>
+                      <a:headEnd type="none" w="med" len="med"/>
+                      <a:tailEnd type="none" w="med" len="med"/>
+                    </a:lnR>
+                    <a:lnT w="6350" cap="flat" cmpd="sng" algn="ctr">
+                      <a:solidFill>
+                        <a:srgbClr val="D9DCE1"/>
+                      </a:solidFill>
+                      <a:prstDash val="solid"/>
+                      <a:round/>
+                      <a:headEnd type="none" w="med" len="med"/>
+                      <a:tailEnd type="none" w="med" len="med"/>
+                    </a:lnT>
+                    <a:lnB w="6350" cap="flat" cmpd="sng" algn="ctr">
+                      <a:solidFill>
+                        <a:srgbClr val="D9DCE1"/>
+                      </a:solidFill>
+                      <a:prstDash val="solid"/>
+                      <a:round/>
+                      <a:headEnd type="none" w="med" len="med"/>
+                      <a:tailEnd type="none" w="med" len="med"/>
+                    </a:lnB>
+                  </a:tcPr>
+                </a:tc>
+                <a:tc>
+                  <a:txBody>
+                    <a:bodyPr/>
+                    <a:lstStyle/>
+                    <a:p>
+                      <a:pPr algn="ctr" indent="0" marL="0">
+                        <a:buNone/>
+                      </a:pPr>
+                      <a:r>
+                        <a:rPr lang="en-US" sz="950" dirty="0">
+                          <a:solidFill>
+                            <a:schemeClr val="accent4"/>
+                          </a:solidFill>
+                          <a:latin typeface="Calibri" pitchFamily="34" charset="0"/>
+                          <a:ea typeface="Calibri" pitchFamily="34" charset="-122"/>
+                          <a:cs typeface="Calibri" pitchFamily="34" charset="-120"/>
+                        </a:rPr>
+                        <a:t>no</a:t>
+                      </a:r>
+                      <a:endParaRPr lang="en-US" sz="950" dirty="0">
+                        <a:latin typeface="Calibri" charset="0"/>
+                        <a:ea typeface="Calibri" charset="0"/>
+                        <a:cs typeface="Calibri" charset="0"/>
+                      </a:endParaRPr>
+                    </a:p>
+                  </a:txBody>
+                  <a:tcPr marL="27432" marR="27432" marT="27432" marB="27432">
+                    <a:lnL w="6350" cap="flat" cmpd="sng" algn="ctr">
+                      <a:solidFill>
+                        <a:srgbClr val="D9DCE1"/>
+                      </a:solidFill>
+                      <a:prstDash val="solid"/>
+                      <a:round/>
+                      <a:headEnd type="none" w="med" len="med"/>
+                      <a:tailEnd type="none" w="med" len="med"/>
+                    </a:lnL>
+                    <a:lnR w="6350" cap="flat" cmpd="sng" algn="ctr">
+                      <a:solidFill>
+                        <a:srgbClr val="D9DCE1"/>
+                      </a:solidFill>
+                      <a:prstDash val="solid"/>
+                      <a:round/>
+                      <a:headEnd type="none" w="med" len="med"/>
+                      <a:tailEnd type="none" w="med" len="med"/>
+                    </a:lnR>
+                    <a:lnT w="6350" cap="flat" cmpd="sng" algn="ctr">
+                      <a:solidFill>
+                        <a:srgbClr val="D9DCE1"/>
+                      </a:solidFill>
+                      <a:prstDash val="solid"/>
+                      <a:round/>
+                      <a:headEnd type="none" w="med" len="med"/>
+                      <a:tailEnd type="none" w="med" len="med"/>
+                    </a:lnT>
+                    <a:lnB w="6350" cap="flat" cmpd="sng" algn="ctr">
+                      <a:solidFill>
+                        <a:srgbClr val="D9DCE1"/>
+                      </a:solidFill>
+                      <a:prstDash val="solid"/>
+                      <a:round/>
+                      <a:headEnd type="none" w="med" len="med"/>
+                      <a:tailEnd type="none" w="med" len="med"/>
+                    </a:lnB>
+                  </a:tcPr>
+                </a:tc>
+                <a:tc>
+                  <a:txBody>
+                    <a:bodyPr/>
+                    <a:lstStyle/>
+                    <a:p>
+                      <a:pPr algn="ctr" indent="0" marL="0">
+                        <a:buNone/>
+                      </a:pPr>
+                      <a:r>
+                        <a:rPr lang="en-US" sz="950" dirty="0">
+                          <a:solidFill>
+                            <a:schemeClr val="tx1"/>
+                          </a:solidFill>
+                          <a:latin typeface="Calibri" pitchFamily="34" charset="0"/>
+                          <a:ea typeface="Calibri" pitchFamily="34" charset="-122"/>
+                          <a:cs typeface="Calibri" pitchFamily="34" charset="-120"/>
+                        </a:rPr>
+                        <a:t>0.25</a:t>
+                      </a:r>
+                      <a:endParaRPr lang="en-US" sz="950" dirty="0">
+                        <a:latin typeface="Calibri" charset="0"/>
+                        <a:ea typeface="Calibri" charset="0"/>
+                        <a:cs typeface="Calibri" charset="0"/>
+                      </a:endParaRPr>
+                    </a:p>
+                  </a:txBody>
+                  <a:tcPr marL="27432" marR="27432" marT="27432" marB="27432">
+                    <a:lnL w="6350" cap="flat" cmpd="sng" algn="ctr">
+                      <a:solidFill>
+                        <a:srgbClr val="D9DCE1"/>
+                      </a:solidFill>
+                      <a:prstDash val="solid"/>
+                      <a:round/>
+                      <a:headEnd type="none" w="med" len="med"/>
+                      <a:tailEnd type="none" w="med" len="med"/>
+                    </a:lnL>
+                    <a:lnR w="6350" cap="flat" cmpd="sng" algn="ctr">
+                      <a:solidFill>
+                        <a:srgbClr val="D9DCE1"/>
+                      </a:solidFill>
+                      <a:prstDash val="solid"/>
+                      <a:round/>
+                      <a:headEnd type="none" w="med" len="med"/>
+                      <a:tailEnd type="none" w="med" len="med"/>
+                    </a:lnR>
+                    <a:lnT w="6350" cap="flat" cmpd="sng" algn="ctr">
+                      <a:solidFill>
+                        <a:srgbClr val="D9DCE1"/>
+                      </a:solidFill>
+                      <a:prstDash val="solid"/>
+                      <a:round/>
+                      <a:headEnd type="none" w="med" len="med"/>
+                      <a:tailEnd type="none" w="med" len="med"/>
+                    </a:lnT>
+                    <a:lnB w="6350" cap="flat" cmpd="sng" algn="ctr">
+                      <a:solidFill>
+                        <a:srgbClr val="D9DCE1"/>
+                      </a:solidFill>
+                      <a:prstDash val="solid"/>
+                      <a:round/>
+                      <a:headEnd type="none" w="med" len="med"/>
+                      <a:tailEnd type="none" w="med" len="med"/>
+                    </a:lnB>
+                  </a:tcPr>
+                </a:tc>
+                <a:tc>
+                  <a:txBody>
+                    <a:bodyPr/>
+                    <a:lstStyle/>
+                    <a:p>
+                      <a:pPr algn="ctr" indent="0" marL="0">
+                        <a:buNone/>
+                      </a:pPr>
+                      <a:r>
+                        <a:rPr lang="en-US" sz="950" dirty="0">
+                          <a:solidFill>
+                            <a:schemeClr val="accent4"/>
+                          </a:solidFill>
+                          <a:latin typeface="Calibri" pitchFamily="34" charset="0"/>
+                          <a:ea typeface="Calibri" pitchFamily="34" charset="-122"/>
+                          <a:cs typeface="Calibri" pitchFamily="34" charset="-120"/>
+                        </a:rPr>
+                        <a:t>no</a:t>
+                      </a:r>
+                      <a:endParaRPr lang="en-US" sz="950" dirty="0">
+                        <a:latin typeface="Calibri" charset="0"/>
+                        <a:ea typeface="Calibri" charset="0"/>
+                        <a:cs typeface="Calibri" charset="0"/>
+                      </a:endParaRPr>
+                    </a:p>
+                  </a:txBody>
+                  <a:tcPr marL="27432" marR="27432" marT="27432" marB="27432">
+                    <a:lnL w="6350" cap="flat" cmpd="sng" algn="ctr">
+                      <a:solidFill>
+                        <a:srgbClr val="D9DCE1"/>
+                      </a:solidFill>
+                      <a:prstDash val="solid"/>
+                      <a:round/>
+                      <a:headEnd type="none" w="med" len="med"/>
+                      <a:tailEnd type="none" w="med" len="med"/>
+                    </a:lnL>
+                    <a:lnR w="6350" cap="flat" cmpd="sng" algn="ctr">
+                      <a:solidFill>
+                        <a:srgbClr val="D9DCE1"/>
+                      </a:solidFill>
+                      <a:prstDash val="solid"/>
+                      <a:round/>
+                      <a:headEnd type="none" w="med" len="med"/>
+                      <a:tailEnd type="none" w="med" len="med"/>
+                    </a:lnR>
+                    <a:lnT w="6350" cap="flat" cmpd="sng" algn="ctr">
+                      <a:solidFill>
+                        <a:srgbClr val="D9DCE1"/>
+                      </a:solidFill>
+                      <a:prstDash val="solid"/>
+                      <a:round/>
+                      <a:headEnd type="none" w="med" len="med"/>
+                      <a:tailEnd type="none" w="med" len="med"/>
+                    </a:lnT>
+                    <a:lnB w="6350" cap="flat" cmpd="sng" algn="ctr">
+                      <a:solidFill>
+                        <a:srgbClr val="D9DCE1"/>
+                      </a:solidFill>
+                      <a:prstDash val="solid"/>
+                      <a:round/>
+                      <a:headEnd type="none" w="med" len="med"/>
+                      <a:tailEnd type="none" w="med" len="med"/>
+                    </a:lnB>
+                  </a:tcPr>
+                </a:tc>
+              </a:tr>
+              <a:tr h="265176">
+                <a:tc>
+                  <a:txBody>
+                    <a:bodyPr/>
+                    <a:lstStyle/>
+                    <a:p>
+                      <a:pPr algn="l" indent="0" marL="0">
+                        <a:buNone/>
+                      </a:pPr>
+                      <a:r>
+                        <a:rPr lang="en-US" sz="950" dirty="0">
+                          <a:solidFill>
+                            <a:schemeClr val="tx1"/>
+                          </a:solidFill>
+                          <a:latin typeface="Calibri" pitchFamily="34" charset="0"/>
+                          <a:ea typeface="Calibri" pitchFamily="34" charset="-122"/>
+                          <a:cs typeface="Calibri" pitchFamily="34" charset="-120"/>
+                        </a:rPr>
+                        <a:t>Hike 2010 to 2011</a:t>
+                      </a:r>
+                      <a:endParaRPr lang="en-US" sz="950" dirty="0">
+                        <a:latin typeface="Calibri" charset="0"/>
+                        <a:ea typeface="Calibri" charset="0"/>
+                        <a:cs typeface="Calibri" charset="0"/>
+                      </a:endParaRPr>
+                    </a:p>
+                  </a:txBody>
+                  <a:tcPr marL="27432" marR="27432" marT="27432" marB="27432">
+                    <a:lnL w="6350" cap="flat" cmpd="sng" algn="ctr">
+                      <a:solidFill>
+                        <a:srgbClr val="D9DCE1"/>
+                      </a:solidFill>
+                      <a:prstDash val="solid"/>
+                      <a:round/>
+                      <a:headEnd type="none" w="med" len="med"/>
+                      <a:tailEnd type="none" w="med" len="med"/>
+                    </a:lnL>
+                    <a:lnR w="6350" cap="flat" cmpd="sng" algn="ctr">
+                      <a:solidFill>
+                        <a:srgbClr val="D9DCE1"/>
+                      </a:solidFill>
+                      <a:prstDash val="solid"/>
+                      <a:round/>
+                      <a:headEnd type="none" w="med" len="med"/>
+                      <a:tailEnd type="none" w="med" len="med"/>
+                    </a:lnR>
+                    <a:lnT w="6350" cap="flat" cmpd="sng" algn="ctr">
+                      <a:solidFill>
+                        <a:srgbClr val="D9DCE1"/>
+                      </a:solidFill>
+                      <a:prstDash val="solid"/>
+                      <a:round/>
+                      <a:headEnd type="none" w="med" len="med"/>
+                      <a:tailEnd type="none" w="med" len="med"/>
+                    </a:lnT>
+                    <a:lnB w="6350" cap="flat" cmpd="sng" algn="ctr">
+                      <a:solidFill>
+                        <a:srgbClr val="D9DCE1"/>
+                      </a:solidFill>
+                      <a:prstDash val="solid"/>
+                      <a:round/>
+                      <a:headEnd type="none" w="med" len="med"/>
+                      <a:tailEnd type="none" w="med" len="med"/>
+                    </a:lnB>
+                  </a:tcPr>
+                </a:tc>
+                <a:tc>
+                  <a:txBody>
+                    <a:bodyPr/>
+                    <a:lstStyle/>
+                    <a:p>
+                      <a:pPr algn="ctr" indent="0" marL="0">
+                        <a:buNone/>
+                      </a:pPr>
+                      <a:r>
+                        <a:rPr lang="en-US" sz="950" dirty="0">
+                          <a:solidFill>
+                            <a:schemeClr val="tx1"/>
+                          </a:solidFill>
+                          <a:latin typeface="Calibri" pitchFamily="34" charset="0"/>
+                          <a:ea typeface="Calibri" pitchFamily="34" charset="-122"/>
+                          <a:cs typeface="Calibri" pitchFamily="34" charset="-120"/>
+                        </a:rPr>
+                        <a:t>3.75</a:t>
+                      </a:r>
+                      <a:endParaRPr lang="en-US" sz="950" dirty="0">
+                        <a:latin typeface="Calibri" charset="0"/>
+                        <a:ea typeface="Calibri" charset="0"/>
+                        <a:cs typeface="Calibri" charset="0"/>
+                      </a:endParaRPr>
+                    </a:p>
+                  </a:txBody>
+                  <a:tcPr marL="27432" marR="27432" marT="27432" marB="27432">
+                    <a:lnL w="6350" cap="flat" cmpd="sng" algn="ctr">
+                      <a:solidFill>
+                        <a:srgbClr val="D9DCE1"/>
+                      </a:solidFill>
+                      <a:prstDash val="solid"/>
+                      <a:round/>
+                      <a:headEnd type="none" w="med" len="med"/>
+                      <a:tailEnd type="none" w="med" len="med"/>
+                    </a:lnL>
+                    <a:lnR w="6350" cap="flat" cmpd="sng" algn="ctr">
+                      <a:solidFill>
+                        <a:srgbClr val="D9DCE1"/>
+                      </a:solidFill>
+                      <a:prstDash val="solid"/>
+                      <a:round/>
+                      <a:headEnd type="none" w="med" len="med"/>
+                      <a:tailEnd type="none" w="med" len="med"/>
+                    </a:lnR>
+                    <a:lnT w="6350" cap="flat" cmpd="sng" algn="ctr">
+                      <a:solidFill>
+                        <a:srgbClr val="D9DCE1"/>
+                      </a:solidFill>
+                      <a:prstDash val="solid"/>
+                      <a:round/>
+                      <a:headEnd type="none" w="med" len="med"/>
+                      <a:tailEnd type="none" w="med" len="med"/>
+                    </a:lnT>
+                    <a:lnB w="6350" cap="flat" cmpd="sng" algn="ctr">
+                      <a:solidFill>
+                        <a:srgbClr val="D9DCE1"/>
+                      </a:solidFill>
+                      <a:prstDash val="solid"/>
+                      <a:round/>
+                      <a:headEnd type="none" w="med" len="med"/>
+                      <a:tailEnd type="none" w="med" len="med"/>
+                    </a:lnB>
+                  </a:tcPr>
+                </a:tc>
+                <a:tc>
+                  <a:txBody>
+                    <a:bodyPr/>
+                    <a:lstStyle/>
+                    <a:p>
+                      <a:pPr algn="ctr" indent="0" marL="0">
+                        <a:buNone/>
+                      </a:pPr>
+                      <a:r>
+                        <a:rPr lang="en-US" sz="950" dirty="0">
+                          <a:solidFill>
+                            <a:schemeClr val="tx1"/>
+                          </a:solidFill>
+                          <a:latin typeface="Calibri" pitchFamily="34" charset="0"/>
+                          <a:ea typeface="Calibri" pitchFamily="34" charset="-122"/>
+                          <a:cs typeface="Calibri" pitchFamily="34" charset="-120"/>
+                        </a:rPr>
+                        <a:t>minus 10.74</a:t>
+                      </a:r>
+                      <a:endParaRPr lang="en-US" sz="950" dirty="0">
+                        <a:latin typeface="Calibri" charset="0"/>
+                        <a:ea typeface="Calibri" charset="0"/>
+                        <a:cs typeface="Calibri" charset="0"/>
+                      </a:endParaRPr>
+                    </a:p>
+                  </a:txBody>
+                  <a:tcPr marL="27432" marR="27432" marT="27432" marB="27432">
+                    <a:lnL w="6350" cap="flat" cmpd="sng" algn="ctr">
+                      <a:solidFill>
+                        <a:srgbClr val="D9DCE1"/>
+                      </a:solidFill>
+                      <a:prstDash val="solid"/>
+                      <a:round/>
+                      <a:headEnd type="none" w="med" len="med"/>
+                      <a:tailEnd type="none" w="med" len="med"/>
+                    </a:lnL>
+                    <a:lnR w="6350" cap="flat" cmpd="sng" algn="ctr">
+                      <a:solidFill>
+                        <a:srgbClr val="D9DCE1"/>
+                      </a:solidFill>
+                      <a:prstDash val="solid"/>
+                      <a:round/>
+                      <a:headEnd type="none" w="med" len="med"/>
+                      <a:tailEnd type="none" w="med" len="med"/>
+                    </a:lnR>
+                    <a:lnT w="6350" cap="flat" cmpd="sng" algn="ctr">
+                      <a:solidFill>
+                        <a:srgbClr val="D9DCE1"/>
+                      </a:solidFill>
+                      <a:prstDash val="solid"/>
+                      <a:round/>
+                      <a:headEnd type="none" w="med" len="med"/>
+                      <a:tailEnd type="none" w="med" len="med"/>
+                    </a:lnT>
+                    <a:lnB w="6350" cap="flat" cmpd="sng" algn="ctr">
+                      <a:solidFill>
+                        <a:srgbClr val="D9DCE1"/>
+                      </a:solidFill>
+                      <a:prstDash val="solid"/>
+                      <a:round/>
+                      <a:headEnd type="none" w="med" len="med"/>
+                      <a:tailEnd type="none" w="med" len="med"/>
+                    </a:lnB>
+                  </a:tcPr>
+                </a:tc>
+                <a:tc>
+                  <a:txBody>
+                    <a:bodyPr/>
+                    <a:lstStyle/>
+                    <a:p>
+                      <a:pPr algn="ctr" indent="0" marL="0">
+                        <a:buNone/>
+                      </a:pPr>
+                      <a:r>
+                        <a:rPr lang="en-US" sz="950" dirty="0">
+                          <a:solidFill>
+                            <a:schemeClr val="accent4"/>
+                          </a:solidFill>
+                          <a:latin typeface="Calibri" pitchFamily="34" charset="0"/>
+                          <a:ea typeface="Calibri" pitchFamily="34" charset="-122"/>
+                          <a:cs typeface="Calibri" pitchFamily="34" charset="-120"/>
+                        </a:rPr>
+                        <a:t>no</a:t>
+                      </a:r>
+                      <a:endParaRPr lang="en-US" sz="950" dirty="0">
+                        <a:latin typeface="Calibri" charset="0"/>
+                        <a:ea typeface="Calibri" charset="0"/>
+                        <a:cs typeface="Calibri" charset="0"/>
+                      </a:endParaRPr>
+                    </a:p>
+                  </a:txBody>
+                  <a:tcPr marL="27432" marR="27432" marT="27432" marB="27432">
+                    <a:lnL w="6350" cap="flat" cmpd="sng" algn="ctr">
+                      <a:solidFill>
+                        <a:srgbClr val="D9DCE1"/>
+                      </a:solidFill>
+                      <a:prstDash val="solid"/>
+                      <a:round/>
+                      <a:headEnd type="none" w="med" len="med"/>
+                      <a:tailEnd type="none" w="med" len="med"/>
+                    </a:lnL>
+                    <a:lnR w="6350" cap="flat" cmpd="sng" algn="ctr">
+                      <a:solidFill>
+                        <a:srgbClr val="D9DCE1"/>
+                      </a:solidFill>
+                      <a:prstDash val="solid"/>
+                      <a:round/>
+                      <a:headEnd type="none" w="med" len="med"/>
+                      <a:tailEnd type="none" w="med" len="med"/>
+                    </a:lnR>
+                    <a:lnT w="6350" cap="flat" cmpd="sng" algn="ctr">
+                      <a:solidFill>
+                        <a:srgbClr val="D9DCE1"/>
+                      </a:solidFill>
+                      <a:prstDash val="solid"/>
+                      <a:round/>
+                      <a:headEnd type="none" w="med" len="med"/>
+                      <a:tailEnd type="none" w="med" len="med"/>
+                    </a:lnT>
+                    <a:lnB w="6350" cap="flat" cmpd="sng" algn="ctr">
+                      <a:solidFill>
+                        <a:srgbClr val="D9DCE1"/>
+                      </a:solidFill>
+                      <a:prstDash val="solid"/>
+                      <a:round/>
+                      <a:headEnd type="none" w="med" len="med"/>
+                      <a:tailEnd type="none" w="med" len="med"/>
+                    </a:lnB>
+                  </a:tcPr>
+                </a:tc>
+                <a:tc>
+                  <a:txBody>
+                    <a:bodyPr/>
+                    <a:lstStyle/>
+                    <a:p>
+                      <a:pPr algn="ctr" indent="0" marL="0">
+                        <a:buNone/>
+                      </a:pPr>
+                      <a:r>
+                        <a:rPr lang="en-US" sz="950" dirty="0">
+                          <a:solidFill>
+                            <a:schemeClr val="tx1"/>
+                          </a:solidFill>
+                          <a:latin typeface="Calibri" pitchFamily="34" charset="0"/>
+                          <a:ea typeface="Calibri" pitchFamily="34" charset="-122"/>
+                          <a:cs typeface="Calibri" pitchFamily="34" charset="-120"/>
+                        </a:rPr>
+                        <a:t>0.50</a:t>
+                      </a:r>
+                      <a:endParaRPr lang="en-US" sz="950" dirty="0">
+                        <a:latin typeface="Calibri" charset="0"/>
+                        <a:ea typeface="Calibri" charset="0"/>
+                        <a:cs typeface="Calibri" charset="0"/>
+                      </a:endParaRPr>
+                    </a:p>
+                  </a:txBody>
+                  <a:tcPr marL="27432" marR="27432" marT="27432" marB="27432">
+                    <a:lnL w="6350" cap="flat" cmpd="sng" algn="ctr">
+                      <a:solidFill>
+                        <a:srgbClr val="D9DCE1"/>
+                      </a:solidFill>
+                      <a:prstDash val="solid"/>
+                      <a:round/>
+                      <a:headEnd type="none" w="med" len="med"/>
+                      <a:tailEnd type="none" w="med" len="med"/>
+                    </a:lnL>
+                    <a:lnR w="6350" cap="flat" cmpd="sng" algn="ctr">
+                      <a:solidFill>
+                        <a:srgbClr val="D9DCE1"/>
+                      </a:solidFill>
+                      <a:prstDash val="solid"/>
+                      <a:round/>
+                      <a:headEnd type="none" w="med" len="med"/>
+                      <a:tailEnd type="none" w="med" len="med"/>
+                    </a:lnR>
+                    <a:lnT w="6350" cap="flat" cmpd="sng" algn="ctr">
+                      <a:solidFill>
+                        <a:srgbClr val="D9DCE1"/>
+                      </a:solidFill>
+                      <a:prstDash val="solid"/>
+                      <a:round/>
+                      <a:headEnd type="none" w="med" len="med"/>
+                      <a:tailEnd type="none" w="med" len="med"/>
+                    </a:lnT>
+                    <a:lnB w="6350" cap="flat" cmpd="sng" algn="ctr">
+                      <a:solidFill>
+                        <a:srgbClr val="D9DCE1"/>
+                      </a:solidFill>
+                      <a:prstDash val="solid"/>
+                      <a:round/>
+                      <a:headEnd type="none" w="med" len="med"/>
+                      <a:tailEnd type="none" w="med" len="med"/>
+                    </a:lnB>
+                  </a:tcPr>
+                </a:tc>
+                <a:tc>
+                  <a:txBody>
+                    <a:bodyPr/>
+                    <a:lstStyle/>
+                    <a:p>
+                      <a:pPr algn="ctr" indent="0" marL="0">
+                        <a:buNone/>
+                      </a:pPr>
+                      <a:r>
+                        <a:rPr lang="en-US" sz="950" b="1" dirty="0">
+                          <a:solidFill>
+                            <a:schemeClr val="accent3"/>
+                          </a:solidFill>
+                          <a:latin typeface="Calibri" pitchFamily="34" charset="0"/>
+                          <a:ea typeface="Calibri" pitchFamily="34" charset="-122"/>
+                          <a:cs typeface="Calibri" pitchFamily="34" charset="-120"/>
+                        </a:rPr>
+                        <a:t>same way</a:t>
+                      </a:r>
+                      <a:endParaRPr lang="en-US" sz="950" dirty="0">
+                        <a:latin typeface="Calibri" charset="0"/>
+                        <a:ea typeface="Calibri" charset="0"/>
+                        <a:cs typeface="Calibri" charset="0"/>
+                      </a:endParaRPr>
+                    </a:p>
+                  </a:txBody>
+                  <a:tcPr marL="27432" marR="27432" marT="27432" marB="27432">
+                    <a:lnL w="6350" cap="flat" cmpd="sng" algn="ctr">
+                      <a:solidFill>
+                        <a:srgbClr val="D9DCE1"/>
+                      </a:solidFill>
+                      <a:prstDash val="solid"/>
+                      <a:round/>
+                      <a:headEnd type="none" w="med" len="med"/>
+                      <a:tailEnd type="none" w="med" len="med"/>
+                    </a:lnL>
+                    <a:lnR w="6350" cap="flat" cmpd="sng" algn="ctr">
+                      <a:solidFill>
+                        <a:srgbClr val="D9DCE1"/>
+                      </a:solidFill>
+                      <a:prstDash val="solid"/>
+                      <a:round/>
+                      <a:headEnd type="none" w="med" len="med"/>
+                      <a:tailEnd type="none" w="med" len="med"/>
+                    </a:lnR>
+                    <a:lnT w="6350" cap="flat" cmpd="sng" algn="ctr">
+                      <a:solidFill>
+                        <a:srgbClr val="D9DCE1"/>
+                      </a:solidFill>
+                      <a:prstDash val="solid"/>
+                      <a:round/>
+                      <a:headEnd type="none" w="med" len="med"/>
+                      <a:tailEnd type="none" w="med" len="med"/>
+                    </a:lnT>
+                    <a:lnB w="6350" cap="flat" cmpd="sng" algn="ctr">
+                      <a:solidFill>
+                        <a:srgbClr val="D9DCE1"/>
+                      </a:solidFill>
+                      <a:prstDash val="solid"/>
+                      <a:round/>
+                      <a:headEnd type="none" w="med" len="med"/>
+                      <a:tailEnd type="none" w="med" len="med"/>
+                    </a:lnB>
+                  </a:tcPr>
+                </a:tc>
+              </a:tr>
+              <a:tr h="265176">
+                <a:tc>
+                  <a:txBody>
+                    <a:bodyPr/>
+                    <a:lstStyle/>
+                    <a:p>
+                      <a:pPr algn="l" indent="0" marL="0">
+                        <a:buNone/>
+                      </a:pPr>
+                      <a:r>
+                        <a:rPr lang="en-US" sz="950" dirty="0">
+                          <a:solidFill>
+                            <a:schemeClr val="tx1"/>
+                          </a:solidFill>
+                          <a:latin typeface="Calibri" pitchFamily="34" charset="0"/>
+                          <a:ea typeface="Calibri" pitchFamily="34" charset="-122"/>
+                          <a:cs typeface="Calibri" pitchFamily="34" charset="-120"/>
+                        </a:rPr>
+                        <a:t>Cut 2012 to 2013</a:t>
+                      </a:r>
+                      <a:endParaRPr lang="en-US" sz="950" dirty="0">
+                        <a:latin typeface="Calibri" charset="0"/>
+                        <a:ea typeface="Calibri" charset="0"/>
+                        <a:cs typeface="Calibri" charset="0"/>
+                      </a:endParaRPr>
+                    </a:p>
+                  </a:txBody>
+                  <a:tcPr marL="27432" marR="27432" marT="27432" marB="27432">
+                    <a:lnL w="6350" cap="flat" cmpd="sng" algn="ctr">
+                      <a:solidFill>
+                        <a:srgbClr val="D9DCE1"/>
+                      </a:solidFill>
+                      <a:prstDash val="solid"/>
+                      <a:round/>
+                      <a:headEnd type="none" w="med" len="med"/>
+                      <a:tailEnd type="none" w="med" len="med"/>
+                    </a:lnL>
+                    <a:lnR w="6350" cap="flat" cmpd="sng" algn="ctr">
+                      <a:solidFill>
+                        <a:srgbClr val="D9DCE1"/>
+                      </a:solidFill>
+                      <a:prstDash val="solid"/>
+                      <a:round/>
+                      <a:headEnd type="none" w="med" len="med"/>
+                      <a:tailEnd type="none" w="med" len="med"/>
+                    </a:lnR>
+                    <a:lnT w="6350" cap="flat" cmpd="sng" algn="ctr">
+                      <a:solidFill>
+                        <a:srgbClr val="D9DCE1"/>
+                      </a:solidFill>
+                      <a:prstDash val="solid"/>
+                      <a:round/>
+                      <a:headEnd type="none" w="med" len="med"/>
+                      <a:tailEnd type="none" w="med" len="med"/>
+                    </a:lnT>
+                    <a:lnB w="6350" cap="flat" cmpd="sng" algn="ctr">
+                      <a:solidFill>
+                        <a:srgbClr val="D9DCE1"/>
+                      </a:solidFill>
+                      <a:prstDash val="solid"/>
+                      <a:round/>
+                      <a:headEnd type="none" w="med" len="med"/>
+                      <a:tailEnd type="none" w="med" len="med"/>
+                    </a:lnB>
+                  </a:tcPr>
+                </a:tc>
+                <a:tc>
+                  <a:txBody>
+                    <a:bodyPr/>
+                    <a:lstStyle/>
+                    <a:p>
+                      <a:pPr algn="ctr" indent="0" marL="0">
+                        <a:buNone/>
+                      </a:pPr>
+                      <a:r>
+                        <a:rPr lang="en-US" sz="950" dirty="0">
+                          <a:solidFill>
+                            <a:schemeClr val="tx1"/>
+                          </a:solidFill>
+                          <a:latin typeface="Calibri" pitchFamily="34" charset="0"/>
+                          <a:ea typeface="Calibri" pitchFamily="34" charset="-122"/>
+                          <a:cs typeface="Calibri" pitchFamily="34" charset="-120"/>
+                        </a:rPr>
+                        <a:t>minus 1.25</a:t>
+                      </a:r>
+                      <a:endParaRPr lang="en-US" sz="950" dirty="0">
+                        <a:latin typeface="Calibri" charset="0"/>
+                        <a:ea typeface="Calibri" charset="0"/>
+                        <a:cs typeface="Calibri" charset="0"/>
+                      </a:endParaRPr>
+                    </a:p>
+                  </a:txBody>
+                  <a:tcPr marL="27432" marR="27432" marT="27432" marB="27432">
+                    <a:lnL w="6350" cap="flat" cmpd="sng" algn="ctr">
+                      <a:solidFill>
+                        <a:srgbClr val="D9DCE1"/>
+                      </a:solidFill>
+                      <a:prstDash val="solid"/>
+                      <a:round/>
+                      <a:headEnd type="none" w="med" len="med"/>
+                      <a:tailEnd type="none" w="med" len="med"/>
+                    </a:lnL>
+                    <a:lnR w="6350" cap="flat" cmpd="sng" algn="ctr">
+                      <a:solidFill>
+                        <a:srgbClr val="D9DCE1"/>
+                      </a:solidFill>
+                      <a:prstDash val="solid"/>
+                      <a:round/>
+                      <a:headEnd type="none" w="med" len="med"/>
+                      <a:tailEnd type="none" w="med" len="med"/>
+                    </a:lnR>
+                    <a:lnT w="6350" cap="flat" cmpd="sng" algn="ctr">
+                      <a:solidFill>
+                        <a:srgbClr val="D9DCE1"/>
+                      </a:solidFill>
+                      <a:prstDash val="solid"/>
+                      <a:round/>
+                      <a:headEnd type="none" w="med" len="med"/>
+                      <a:tailEnd type="none" w="med" len="med"/>
+                    </a:lnT>
+                    <a:lnB w="6350" cap="flat" cmpd="sng" algn="ctr">
+                      <a:solidFill>
+                        <a:srgbClr val="D9DCE1"/>
+                      </a:solidFill>
+                      <a:prstDash val="solid"/>
+                      <a:round/>
+                      <a:headEnd type="none" w="med" len="med"/>
+                      <a:tailEnd type="none" w="med" len="med"/>
+                    </a:lnB>
+                  </a:tcPr>
+                </a:tc>
+                <a:tc>
+                  <a:txBody>
+                    <a:bodyPr/>
+                    <a:lstStyle/>
+                    <a:p>
+                      <a:pPr algn="ctr" indent="0" marL="0">
+                        <a:buNone/>
+                      </a:pPr>
+                      <a:r>
+                        <a:rPr lang="en-US" sz="950" dirty="0">
+                          <a:solidFill>
+                            <a:schemeClr val="tx1"/>
+                          </a:solidFill>
+                          <a:latin typeface="Calibri" pitchFamily="34" charset="0"/>
+                          <a:ea typeface="Calibri" pitchFamily="34" charset="-122"/>
+                          <a:cs typeface="Calibri" pitchFamily="34" charset="-120"/>
+                        </a:rPr>
+                        <a:t>minus 0.39</a:t>
+                      </a:r>
+                      <a:endParaRPr lang="en-US" sz="950" dirty="0">
+                        <a:latin typeface="Calibri" charset="0"/>
+                        <a:ea typeface="Calibri" charset="0"/>
+                        <a:cs typeface="Calibri" charset="0"/>
+                      </a:endParaRPr>
+                    </a:p>
+                  </a:txBody>
+                  <a:tcPr marL="27432" marR="27432" marT="27432" marB="27432">
+                    <a:lnL w="6350" cap="flat" cmpd="sng" algn="ctr">
+                      <a:solidFill>
+                        <a:srgbClr val="D9DCE1"/>
+                      </a:solidFill>
+                      <a:prstDash val="solid"/>
+                      <a:round/>
+                      <a:headEnd type="none" w="med" len="med"/>
+                      <a:tailEnd type="none" w="med" len="med"/>
+                    </a:lnL>
+                    <a:lnR w="6350" cap="flat" cmpd="sng" algn="ctr">
+                      <a:solidFill>
+                        <a:srgbClr val="D9DCE1"/>
+                      </a:solidFill>
+                      <a:prstDash val="solid"/>
+                      <a:round/>
+                      <a:headEnd type="none" w="med" len="med"/>
+                      <a:tailEnd type="none" w="med" len="med"/>
+                    </a:lnR>
+                    <a:lnT w="6350" cap="flat" cmpd="sng" algn="ctr">
+                      <a:solidFill>
+                        <a:srgbClr val="D9DCE1"/>
+                      </a:solidFill>
+                      <a:prstDash val="solid"/>
+                      <a:round/>
+                      <a:headEnd type="none" w="med" len="med"/>
+                      <a:tailEnd type="none" w="med" len="med"/>
+                    </a:lnT>
+                    <a:lnB w="6350" cap="flat" cmpd="sng" algn="ctr">
+                      <a:solidFill>
+                        <a:srgbClr val="D9DCE1"/>
+                      </a:solidFill>
+                      <a:prstDash val="solid"/>
+                      <a:round/>
+                      <a:headEnd type="none" w="med" len="med"/>
+                      <a:tailEnd type="none" w="med" len="med"/>
+                    </a:lnB>
+                  </a:tcPr>
+                </a:tc>
+                <a:tc>
+                  <a:txBody>
+                    <a:bodyPr/>
+                    <a:lstStyle/>
+                    <a:p>
+                      <a:pPr algn="ctr" indent="0" marL="0">
+                        <a:buNone/>
+                      </a:pPr>
+                      <a:r>
+                        <a:rPr lang="en-US" sz="950" b="1" dirty="0">
+                          <a:solidFill>
+                            <a:schemeClr val="accent3"/>
+                          </a:solidFill>
+                          <a:latin typeface="Calibri" pitchFamily="34" charset="0"/>
+                          <a:ea typeface="Calibri" pitchFamily="34" charset="-122"/>
+                          <a:cs typeface="Calibri" pitchFamily="34" charset="-120"/>
+                        </a:rPr>
+                        <a:t>same way</a:t>
+                      </a:r>
+                      <a:endParaRPr lang="en-US" sz="950" dirty="0">
+                        <a:latin typeface="Calibri" charset="0"/>
+                        <a:ea typeface="Calibri" charset="0"/>
+                        <a:cs typeface="Calibri" charset="0"/>
+                      </a:endParaRPr>
+                    </a:p>
+                  </a:txBody>
+                  <a:tcPr marL="27432" marR="27432" marT="27432" marB="27432">
+                    <a:lnL w="6350" cap="flat" cmpd="sng" algn="ctr">
+                      <a:solidFill>
+                        <a:srgbClr val="D9DCE1"/>
+                      </a:solidFill>
+                      <a:prstDash val="solid"/>
+                      <a:round/>
+                      <a:headEnd type="none" w="med" len="med"/>
+                      <a:tailEnd type="none" w="med" len="med"/>
+                    </a:lnL>
+                    <a:lnR w="6350" cap="flat" cmpd="sng" algn="ctr">
+                      <a:solidFill>
+                        <a:srgbClr val="D9DCE1"/>
+                      </a:solidFill>
+                      <a:prstDash val="solid"/>
+                      <a:round/>
+                      <a:headEnd type="none" w="med" len="med"/>
+                      <a:tailEnd type="none" w="med" len="med"/>
+                    </a:lnR>
+                    <a:lnT w="6350" cap="flat" cmpd="sng" algn="ctr">
+                      <a:solidFill>
+                        <a:srgbClr val="D9DCE1"/>
+                      </a:solidFill>
+                      <a:prstDash val="solid"/>
+                      <a:round/>
+                      <a:headEnd type="none" w="med" len="med"/>
+                      <a:tailEnd type="none" w="med" len="med"/>
+                    </a:lnT>
+                    <a:lnB w="6350" cap="flat" cmpd="sng" algn="ctr">
+                      <a:solidFill>
+                        <a:srgbClr val="D9DCE1"/>
+                      </a:solidFill>
+                      <a:prstDash val="solid"/>
+                      <a:round/>
+                      <a:headEnd type="none" w="med" len="med"/>
+                      <a:tailEnd type="none" w="med" len="med"/>
+                    </a:lnB>
+                  </a:tcPr>
+                </a:tc>
+                <a:tc>
+                  <a:txBody>
+                    <a:bodyPr/>
+                    <a:lstStyle/>
+                    <a:p>
+                      <a:pPr algn="ctr" indent="0" marL="0">
+                        <a:buNone/>
+                      </a:pPr>
+                      <a:r>
+                        <a:rPr lang="en-US" sz="950" dirty="0">
+                          <a:solidFill>
+                            <a:schemeClr val="tx1"/>
+                          </a:solidFill>
+                          <a:latin typeface="Calibri" pitchFamily="34" charset="0"/>
+                          <a:ea typeface="Calibri" pitchFamily="34" charset="-122"/>
+                          <a:cs typeface="Calibri" pitchFamily="34" charset="-120"/>
+                        </a:rPr>
+                        <a:t>1.00</a:t>
+                      </a:r>
+                      <a:endParaRPr lang="en-US" sz="950" dirty="0">
+                        <a:latin typeface="Calibri" charset="0"/>
+                        <a:ea typeface="Calibri" charset="0"/>
+                        <a:cs typeface="Calibri" charset="0"/>
+                      </a:endParaRPr>
+                    </a:p>
+                  </a:txBody>
+                  <a:tcPr marL="27432" marR="27432" marT="27432" marB="27432">
+                    <a:lnL w="6350" cap="flat" cmpd="sng" algn="ctr">
+                      <a:solidFill>
+                        <a:srgbClr val="D9DCE1"/>
+                      </a:solidFill>
+                      <a:prstDash val="solid"/>
+                      <a:round/>
+                      <a:headEnd type="none" w="med" len="med"/>
+                      <a:tailEnd type="none" w="med" len="med"/>
+                    </a:lnL>
+                    <a:lnR w="6350" cap="flat" cmpd="sng" algn="ctr">
+                      <a:solidFill>
+                        <a:srgbClr val="D9DCE1"/>
+                      </a:solidFill>
+                      <a:prstDash val="solid"/>
+                      <a:round/>
+                      <a:headEnd type="none" w="med" len="med"/>
+                      <a:tailEnd type="none" w="med" len="med"/>
+                    </a:lnR>
+                    <a:lnT w="6350" cap="flat" cmpd="sng" algn="ctr">
+                      <a:solidFill>
+                        <a:srgbClr val="D9DCE1"/>
+                      </a:solidFill>
+                      <a:prstDash val="solid"/>
+                      <a:round/>
+                      <a:headEnd type="none" w="med" len="med"/>
+                      <a:tailEnd type="none" w="med" len="med"/>
+                    </a:lnT>
+                    <a:lnB w="6350" cap="flat" cmpd="sng" algn="ctr">
+                      <a:solidFill>
+                        <a:srgbClr val="D9DCE1"/>
+                      </a:solidFill>
+                      <a:prstDash val="solid"/>
+                      <a:round/>
+                      <a:headEnd type="none" w="med" len="med"/>
+                      <a:tailEnd type="none" w="med" len="med"/>
+                    </a:lnB>
+                  </a:tcPr>
+                </a:tc>
+                <a:tc>
+                  <a:txBody>
+                    <a:bodyPr/>
+                    <a:lstStyle/>
+                    <a:p>
+                      <a:pPr algn="ctr" indent="0" marL="0">
+                        <a:buNone/>
+                      </a:pPr>
+                      <a:r>
+                        <a:rPr lang="en-US" sz="950" dirty="0">
+                          <a:solidFill>
+                            <a:schemeClr val="accent4"/>
+                          </a:solidFill>
+                          <a:latin typeface="Calibri" pitchFamily="34" charset="0"/>
+                          <a:ea typeface="Calibri" pitchFamily="34" charset="-122"/>
+                          <a:cs typeface="Calibri" pitchFamily="34" charset="-120"/>
+                        </a:rPr>
+                        <a:t>no</a:t>
+                      </a:r>
+                      <a:endParaRPr lang="en-US" sz="950" dirty="0">
+                        <a:latin typeface="Calibri" charset="0"/>
+                        <a:ea typeface="Calibri" charset="0"/>
+                        <a:cs typeface="Calibri" charset="0"/>
+                      </a:endParaRPr>
+                    </a:p>
+                  </a:txBody>
+                  <a:tcPr marL="27432" marR="27432" marT="27432" marB="27432">
+                    <a:lnL w="6350" cap="flat" cmpd="sng" algn="ctr">
+                      <a:solidFill>
+                        <a:srgbClr val="D9DCE1"/>
+                      </a:solidFill>
+                      <a:prstDash val="solid"/>
+                      <a:round/>
+                      <a:headEnd type="none" w="med" len="med"/>
+                      <a:tailEnd type="none" w="med" len="med"/>
+                    </a:lnL>
+                    <a:lnR w="6350" cap="flat" cmpd="sng" algn="ctr">
+                      <a:solidFill>
+                        <a:srgbClr val="D9DCE1"/>
+                      </a:solidFill>
+                      <a:prstDash val="solid"/>
+                      <a:round/>
+                      <a:headEnd type="none" w="med" len="med"/>
+                      <a:tailEnd type="none" w="med" len="med"/>
+                    </a:lnR>
+                    <a:lnT w="6350" cap="flat" cmpd="sng" algn="ctr">
+                      <a:solidFill>
+                        <a:srgbClr val="D9DCE1"/>
+                      </a:solidFill>
+                      <a:prstDash val="solid"/>
+                      <a:round/>
+                      <a:headEnd type="none" w="med" len="med"/>
+                      <a:tailEnd type="none" w="med" len="med"/>
+                    </a:lnT>
+                    <a:lnB w="6350" cap="flat" cmpd="sng" algn="ctr">
+                      <a:solidFill>
+                        <a:srgbClr val="D9DCE1"/>
+                      </a:solidFill>
+                      <a:prstDash val="solid"/>
+                      <a:round/>
+                      <a:headEnd type="none" w="med" len="med"/>
+                      <a:tailEnd type="none" w="med" len="med"/>
+                    </a:lnB>
+                  </a:tcPr>
+                </a:tc>
+              </a:tr>
+              <a:tr h="265176">
+                <a:tc>
+                  <a:txBody>
+                    <a:bodyPr/>
+                    <a:lstStyle/>
+                    <a:p>
+                      <a:pPr algn="l" indent="0" marL="0">
+                        <a:buNone/>
+                      </a:pPr>
+                      <a:r>
+                        <a:rPr lang="en-US" sz="950" dirty="0">
+                          <a:solidFill>
+                            <a:schemeClr val="tx1"/>
+                          </a:solidFill>
+                          <a:latin typeface="Calibri" pitchFamily="34" charset="0"/>
+                          <a:ea typeface="Calibri" pitchFamily="34" charset="-122"/>
+                          <a:cs typeface="Calibri" pitchFamily="34" charset="-120"/>
+                        </a:rPr>
+                        <a:t>Hike 2013 to 2014</a:t>
+                      </a:r>
+                      <a:endParaRPr lang="en-US" sz="950" dirty="0">
+                        <a:latin typeface="Calibri" charset="0"/>
+                        <a:ea typeface="Calibri" charset="0"/>
+                        <a:cs typeface="Calibri" charset="0"/>
+                      </a:endParaRPr>
+                    </a:p>
+                  </a:txBody>
+                  <a:tcPr marL="27432" marR="27432" marT="27432" marB="27432">
+                    <a:lnL w="6350" cap="flat" cmpd="sng" algn="ctr">
+                      <a:solidFill>
+                        <a:srgbClr val="D9DCE1"/>
+                      </a:solidFill>
+                      <a:prstDash val="solid"/>
+                      <a:round/>
+                      <a:headEnd type="none" w="med" len="med"/>
+                      <a:tailEnd type="none" w="med" len="med"/>
+                    </a:lnL>
+                    <a:lnR w="6350" cap="flat" cmpd="sng" algn="ctr">
+                      <a:solidFill>
+                        <a:srgbClr val="D9DCE1"/>
+                      </a:solidFill>
+                      <a:prstDash val="solid"/>
+                      <a:round/>
+                      <a:headEnd type="none" w="med" len="med"/>
+                      <a:tailEnd type="none" w="med" len="med"/>
+                    </a:lnR>
+                    <a:lnT w="6350" cap="flat" cmpd="sng" algn="ctr">
+                      <a:solidFill>
+                        <a:srgbClr val="D9DCE1"/>
+                      </a:solidFill>
+                      <a:prstDash val="solid"/>
+                      <a:round/>
+                      <a:headEnd type="none" w="med" len="med"/>
+                      <a:tailEnd type="none" w="med" len="med"/>
+                    </a:lnT>
+                    <a:lnB w="6350" cap="flat" cmpd="sng" algn="ctr">
+                      <a:solidFill>
+                        <a:srgbClr val="D9DCE1"/>
+                      </a:solidFill>
+                      <a:prstDash val="solid"/>
+                      <a:round/>
+                      <a:headEnd type="none" w="med" len="med"/>
+                      <a:tailEnd type="none" w="med" len="med"/>
+                    </a:lnB>
+                  </a:tcPr>
+                </a:tc>
+                <a:tc>
+                  <a:txBody>
+                    <a:bodyPr/>
+                    <a:lstStyle/>
+                    <a:p>
+                      <a:pPr algn="ctr" indent="0" marL="0">
+                        <a:buNone/>
+                      </a:pPr>
+                      <a:r>
+                        <a:rPr lang="en-US" sz="950" dirty="0">
+                          <a:solidFill>
+                            <a:schemeClr val="tx1"/>
+                          </a:solidFill>
+                          <a:latin typeface="Calibri" pitchFamily="34" charset="0"/>
+                          <a:ea typeface="Calibri" pitchFamily="34" charset="-122"/>
+                          <a:cs typeface="Calibri" pitchFamily="34" charset="-120"/>
+                        </a:rPr>
+                        <a:t>0.75</a:t>
+                      </a:r>
+                      <a:endParaRPr lang="en-US" sz="950" dirty="0">
+                        <a:latin typeface="Calibri" charset="0"/>
+                        <a:ea typeface="Calibri" charset="0"/>
+                        <a:cs typeface="Calibri" charset="0"/>
+                      </a:endParaRPr>
+                    </a:p>
+                  </a:txBody>
+                  <a:tcPr marL="27432" marR="27432" marT="27432" marB="27432">
+                    <a:lnL w="6350" cap="flat" cmpd="sng" algn="ctr">
+                      <a:solidFill>
+                        <a:srgbClr val="D9DCE1"/>
+                      </a:solidFill>
+                      <a:prstDash val="solid"/>
+                      <a:round/>
+                      <a:headEnd type="none" w="med" len="med"/>
+                      <a:tailEnd type="none" w="med" len="med"/>
+                    </a:lnL>
+                    <a:lnR w="6350" cap="flat" cmpd="sng" algn="ctr">
+                      <a:solidFill>
+                        <a:srgbClr val="D9DCE1"/>
+                      </a:solidFill>
+                      <a:prstDash val="solid"/>
+                      <a:round/>
+                      <a:headEnd type="none" w="med" len="med"/>
+                      <a:tailEnd type="none" w="med" len="med"/>
+                    </a:lnR>
+                    <a:lnT w="6350" cap="flat" cmpd="sng" algn="ctr">
+                      <a:solidFill>
+                        <a:srgbClr val="D9DCE1"/>
+                      </a:solidFill>
+                      <a:prstDash val="solid"/>
+                      <a:round/>
+                      <a:headEnd type="none" w="med" len="med"/>
+                      <a:tailEnd type="none" w="med" len="med"/>
+                    </a:lnT>
+                    <a:lnB w="6350" cap="flat" cmpd="sng" algn="ctr">
+                      <a:solidFill>
+                        <a:srgbClr val="D9DCE1"/>
+                      </a:solidFill>
+                      <a:prstDash val="solid"/>
+                      <a:round/>
+                      <a:headEnd type="none" w="med" len="med"/>
+                      <a:tailEnd type="none" w="med" len="med"/>
+                    </a:lnB>
+                  </a:tcPr>
+                </a:tc>
+                <a:tc>
+                  <a:txBody>
+                    <a:bodyPr/>
+                    <a:lstStyle/>
+                    <a:p>
+                      <a:pPr algn="ctr" indent="0" marL="0">
+                        <a:buNone/>
+                      </a:pPr>
+                      <a:r>
+                        <a:rPr lang="en-US" sz="950" dirty="0">
+                          <a:solidFill>
+                            <a:schemeClr val="tx1"/>
+                          </a:solidFill>
+                          <a:latin typeface="Calibri" pitchFamily="34" charset="0"/>
+                          <a:ea typeface="Calibri" pitchFamily="34" charset="-122"/>
+                          <a:cs typeface="Calibri" pitchFamily="34" charset="-120"/>
+                        </a:rPr>
+                        <a:t>minus 0.11</a:t>
+                      </a:r>
+                      <a:endParaRPr lang="en-US" sz="950" dirty="0">
+                        <a:latin typeface="Calibri" charset="0"/>
+                        <a:ea typeface="Calibri" charset="0"/>
+                        <a:cs typeface="Calibri" charset="0"/>
+                      </a:endParaRPr>
+                    </a:p>
+                  </a:txBody>
+                  <a:tcPr marL="27432" marR="27432" marT="27432" marB="27432">
+                    <a:lnL w="6350" cap="flat" cmpd="sng" algn="ctr">
+                      <a:solidFill>
+                        <a:srgbClr val="D9DCE1"/>
+                      </a:solidFill>
+                      <a:prstDash val="solid"/>
+                      <a:round/>
+                      <a:headEnd type="none" w="med" len="med"/>
+                      <a:tailEnd type="none" w="med" len="med"/>
+                    </a:lnL>
+                    <a:lnR w="6350" cap="flat" cmpd="sng" algn="ctr">
+                      <a:solidFill>
+                        <a:srgbClr val="D9DCE1"/>
+                      </a:solidFill>
+                      <a:prstDash val="solid"/>
+                      <a:round/>
+                      <a:headEnd type="none" w="med" len="med"/>
+                      <a:tailEnd type="none" w="med" len="med"/>
+                    </a:lnR>
+                    <a:lnT w="6350" cap="flat" cmpd="sng" algn="ctr">
+                      <a:solidFill>
+                        <a:srgbClr val="D9DCE1"/>
+                      </a:solidFill>
+                      <a:prstDash val="solid"/>
+                      <a:round/>
+                      <a:headEnd type="none" w="med" len="med"/>
+                      <a:tailEnd type="none" w="med" len="med"/>
+                    </a:lnT>
+                    <a:lnB w="6350" cap="flat" cmpd="sng" algn="ctr">
+                      <a:solidFill>
+                        <a:srgbClr val="D9DCE1"/>
+                      </a:solidFill>
+                      <a:prstDash val="solid"/>
+                      <a:round/>
+                      <a:headEnd type="none" w="med" len="med"/>
+                      <a:tailEnd type="none" w="med" len="med"/>
+                    </a:lnB>
+                  </a:tcPr>
+                </a:tc>
+                <a:tc>
+                  <a:txBody>
+                    <a:bodyPr/>
+                    <a:lstStyle/>
+                    <a:p>
+                      <a:pPr algn="ctr" indent="0" marL="0">
+                        <a:buNone/>
+                      </a:pPr>
+                      <a:r>
+                        <a:rPr lang="en-US" sz="950" dirty="0">
+                          <a:solidFill>
+                            <a:schemeClr val="accent4"/>
+                          </a:solidFill>
+                          <a:latin typeface="Calibri" pitchFamily="34" charset="0"/>
+                          <a:ea typeface="Calibri" pitchFamily="34" charset="-122"/>
+                          <a:cs typeface="Calibri" pitchFamily="34" charset="-120"/>
+                        </a:rPr>
+                        <a:t>no</a:t>
+                      </a:r>
+                      <a:endParaRPr lang="en-US" sz="950" dirty="0">
+                        <a:latin typeface="Calibri" charset="0"/>
+                        <a:ea typeface="Calibri" charset="0"/>
+                        <a:cs typeface="Calibri" charset="0"/>
+                      </a:endParaRPr>
+                    </a:p>
+                  </a:txBody>
+                  <a:tcPr marL="27432" marR="27432" marT="27432" marB="27432">
+                    <a:lnL w="6350" cap="flat" cmpd="sng" algn="ctr">
+                      <a:solidFill>
+                        <a:srgbClr val="D9DCE1"/>
+                      </a:solidFill>
+                      <a:prstDash val="solid"/>
+                      <a:round/>
+                      <a:headEnd type="none" w="med" len="med"/>
+                      <a:tailEnd type="none" w="med" len="med"/>
+                    </a:lnL>
+                    <a:lnR w="6350" cap="flat" cmpd="sng" algn="ctr">
+                      <a:solidFill>
+                        <a:srgbClr val="D9DCE1"/>
+                      </a:solidFill>
+                      <a:prstDash val="solid"/>
+                      <a:round/>
+                      <a:headEnd type="none" w="med" len="med"/>
+                      <a:tailEnd type="none" w="med" len="med"/>
+                    </a:lnR>
+                    <a:lnT w="6350" cap="flat" cmpd="sng" algn="ctr">
+                      <a:solidFill>
+                        <a:srgbClr val="D9DCE1"/>
+                      </a:solidFill>
+                      <a:prstDash val="solid"/>
+                      <a:round/>
+                      <a:headEnd type="none" w="med" len="med"/>
+                      <a:tailEnd type="none" w="med" len="med"/>
+                    </a:lnT>
+                    <a:lnB w="6350" cap="flat" cmpd="sng" algn="ctr">
+                      <a:solidFill>
+                        <a:srgbClr val="D9DCE1"/>
+                      </a:solidFill>
+                      <a:prstDash val="solid"/>
+                      <a:round/>
+                      <a:headEnd type="none" w="med" len="med"/>
+                      <a:tailEnd type="none" w="med" len="med"/>
+                    </a:lnB>
+                  </a:tcPr>
+                </a:tc>
+                <a:tc>
+                  <a:txBody>
+                    <a:bodyPr/>
+                    <a:lstStyle/>
+                    <a:p>
+                      <a:pPr algn="ctr" indent="0" marL="0">
+                        <a:buNone/>
+                      </a:pPr>
+                      <a:r>
+                        <a:rPr lang="en-US" sz="950" dirty="0">
+                          <a:solidFill>
+                            <a:schemeClr val="tx1"/>
+                          </a:solidFill>
+                          <a:latin typeface="Calibri" pitchFamily="34" charset="0"/>
+                          <a:ea typeface="Calibri" pitchFamily="34" charset="-122"/>
+                          <a:cs typeface="Calibri" pitchFamily="34" charset="-120"/>
+                        </a:rPr>
+                        <a:t>0.00</a:t>
+                      </a:r>
+                      <a:endParaRPr lang="en-US" sz="950" dirty="0">
+                        <a:latin typeface="Calibri" charset="0"/>
+                        <a:ea typeface="Calibri" charset="0"/>
+                        <a:cs typeface="Calibri" charset="0"/>
+                      </a:endParaRPr>
+                    </a:p>
+                  </a:txBody>
+                  <a:tcPr marL="27432" marR="27432" marT="27432" marB="27432">
+                    <a:lnL w="6350" cap="flat" cmpd="sng" algn="ctr">
+                      <a:solidFill>
+                        <a:srgbClr val="D9DCE1"/>
+                      </a:solidFill>
+                      <a:prstDash val="solid"/>
+                      <a:round/>
+                      <a:headEnd type="none" w="med" len="med"/>
+                      <a:tailEnd type="none" w="med" len="med"/>
+                    </a:lnL>
+                    <a:lnR w="6350" cap="flat" cmpd="sng" algn="ctr">
+                      <a:solidFill>
+                        <a:srgbClr val="D9DCE1"/>
+                      </a:solidFill>
+                      <a:prstDash val="solid"/>
+                      <a:round/>
+                      <a:headEnd type="none" w="med" len="med"/>
+                      <a:tailEnd type="none" w="med" len="med"/>
+                    </a:lnR>
+                    <a:lnT w="6350" cap="flat" cmpd="sng" algn="ctr">
+                      <a:solidFill>
+                        <a:srgbClr val="D9DCE1"/>
+                      </a:solidFill>
+                      <a:prstDash val="solid"/>
+                      <a:round/>
+                      <a:headEnd type="none" w="med" len="med"/>
+                      <a:tailEnd type="none" w="med" len="med"/>
+                    </a:lnT>
+                    <a:lnB w="6350" cap="flat" cmpd="sng" algn="ctr">
+                      <a:solidFill>
+                        <a:srgbClr val="D9DCE1"/>
+                      </a:solidFill>
+                      <a:prstDash val="solid"/>
+                      <a:round/>
+                      <a:headEnd type="none" w="med" len="med"/>
+                      <a:tailEnd type="none" w="med" len="med"/>
+                    </a:lnB>
+                  </a:tcPr>
+                </a:tc>
+                <a:tc>
+                  <a:txBody>
+                    <a:bodyPr/>
+                    <a:lstStyle/>
+                    <a:p>
+                      <a:pPr algn="ctr" indent="0" marL="0">
+                        <a:buNone/>
+                      </a:pPr>
+                      <a:r>
+                        <a:rPr lang="en-US" sz="950" dirty="0">
+                          <a:solidFill>
+                            <a:schemeClr val="accent4"/>
+                          </a:solidFill>
+                          <a:latin typeface="Calibri" pitchFamily="34" charset="0"/>
+                          <a:ea typeface="Calibri" pitchFamily="34" charset="-122"/>
+                          <a:cs typeface="Calibri" pitchFamily="34" charset="-120"/>
+                        </a:rPr>
+                        <a:t>no</a:t>
+                      </a:r>
+                      <a:endParaRPr lang="en-US" sz="950" dirty="0">
+                        <a:latin typeface="Calibri" charset="0"/>
+                        <a:ea typeface="Calibri" charset="0"/>
+                        <a:cs typeface="Calibri" charset="0"/>
+                      </a:endParaRPr>
+                    </a:p>
+                  </a:txBody>
+                  <a:tcPr marL="27432" marR="27432" marT="27432" marB="27432">
+                    <a:lnL w="6350" cap="flat" cmpd="sng" algn="ctr">
+                      <a:solidFill>
+                        <a:srgbClr val="D9DCE1"/>
+                      </a:solidFill>
+                      <a:prstDash val="solid"/>
+                      <a:round/>
+                      <a:headEnd type="none" w="med" len="med"/>
+                      <a:tailEnd type="none" w="med" len="med"/>
+                    </a:lnL>
+                    <a:lnR w="6350" cap="flat" cmpd="sng" algn="ctr">
+                      <a:solidFill>
+                        <a:srgbClr val="D9DCE1"/>
+                      </a:solidFill>
+                      <a:prstDash val="solid"/>
+                      <a:round/>
+                      <a:headEnd type="none" w="med" len="med"/>
+                      <a:tailEnd type="none" w="med" len="med"/>
+                    </a:lnR>
+                    <a:lnT w="6350" cap="flat" cmpd="sng" algn="ctr">
+                      <a:solidFill>
+                        <a:srgbClr val="D9DCE1"/>
+                      </a:solidFill>
+                      <a:prstDash val="solid"/>
+                      <a:round/>
+                      <a:headEnd type="none" w="med" len="med"/>
+                      <a:tailEnd type="none" w="med" len="med"/>
+                    </a:lnT>
+                    <a:lnB w="6350" cap="flat" cmpd="sng" algn="ctr">
+                      <a:solidFill>
+                        <a:srgbClr val="D9DCE1"/>
+                      </a:solidFill>
+                      <a:prstDash val="solid"/>
+                      <a:round/>
+                      <a:headEnd type="none" w="med" len="med"/>
+                      <a:tailEnd type="none" w="med" len="med"/>
+                    </a:lnB>
+                  </a:tcPr>
+                </a:tc>
+              </a:tr>
+              <a:tr h="265176">
+                <a:tc>
+                  <a:txBody>
+                    <a:bodyPr/>
+                    <a:lstStyle/>
+                    <a:p>
+                      <a:pPr algn="l" indent="0" marL="0">
+                        <a:buNone/>
+                      </a:pPr>
+                      <a:r>
+                        <a:rPr lang="en-US" sz="950" dirty="0">
+                          <a:solidFill>
+                            <a:schemeClr val="tx1"/>
+                          </a:solidFill>
+                          <a:latin typeface="Calibri" pitchFamily="34" charset="0"/>
+                          <a:ea typeface="Calibri" pitchFamily="34" charset="-122"/>
+                          <a:cs typeface="Calibri" pitchFamily="34" charset="-120"/>
+                        </a:rPr>
+                        <a:t>Cut 2015 to 2017</a:t>
+                      </a:r>
+                      <a:endParaRPr lang="en-US" sz="950" dirty="0">
+                        <a:latin typeface="Calibri" charset="0"/>
+                        <a:ea typeface="Calibri" charset="0"/>
+                        <a:cs typeface="Calibri" charset="0"/>
+                      </a:endParaRPr>
+                    </a:p>
+                  </a:txBody>
+                  <a:tcPr marL="27432" marR="27432" marT="27432" marB="27432">
+                    <a:lnL w="6350" cap="flat" cmpd="sng" algn="ctr">
+                      <a:solidFill>
+                        <a:srgbClr val="D9DCE1"/>
+                      </a:solidFill>
+                      <a:prstDash val="solid"/>
+                      <a:round/>
+                      <a:headEnd type="none" w="med" len="med"/>
+                      <a:tailEnd type="none" w="med" len="med"/>
+                    </a:lnL>
+                    <a:lnR w="6350" cap="flat" cmpd="sng" algn="ctr">
+                      <a:solidFill>
+                        <a:srgbClr val="D9DCE1"/>
+                      </a:solidFill>
+                      <a:prstDash val="solid"/>
+                      <a:round/>
+                      <a:headEnd type="none" w="med" len="med"/>
+                      <a:tailEnd type="none" w="med" len="med"/>
+                    </a:lnR>
+                    <a:lnT w="6350" cap="flat" cmpd="sng" algn="ctr">
+                      <a:solidFill>
+                        <a:srgbClr val="D9DCE1"/>
+                      </a:solidFill>
+                      <a:prstDash val="solid"/>
+                      <a:round/>
+                      <a:headEnd type="none" w="med" len="med"/>
+                      <a:tailEnd type="none" w="med" len="med"/>
+                    </a:lnT>
+                    <a:lnB w="6350" cap="flat" cmpd="sng" algn="ctr">
+                      <a:solidFill>
+                        <a:srgbClr val="D9DCE1"/>
+                      </a:solidFill>
+                      <a:prstDash val="solid"/>
+                      <a:round/>
+                      <a:headEnd type="none" w="med" len="med"/>
+                      <a:tailEnd type="none" w="med" len="med"/>
+                    </a:lnB>
+                  </a:tcPr>
+                </a:tc>
+                <a:tc>
+                  <a:txBody>
+                    <a:bodyPr/>
+                    <a:lstStyle/>
+                    <a:p>
+                      <a:pPr algn="ctr" indent="0" marL="0">
+                        <a:buNone/>
+                      </a:pPr>
+                      <a:r>
+                        <a:rPr lang="en-US" sz="950" dirty="0">
+                          <a:solidFill>
+                            <a:schemeClr val="tx1"/>
+                          </a:solidFill>
+                          <a:latin typeface="Calibri" pitchFamily="34" charset="0"/>
+                          <a:ea typeface="Calibri" pitchFamily="34" charset="-122"/>
+                          <a:cs typeface="Calibri" pitchFamily="34" charset="-120"/>
+                        </a:rPr>
+                        <a:t>minus 2.00</a:t>
+                      </a:r>
+                      <a:endParaRPr lang="en-US" sz="950" dirty="0">
+                        <a:latin typeface="Calibri" charset="0"/>
+                        <a:ea typeface="Calibri" charset="0"/>
+                        <a:cs typeface="Calibri" charset="0"/>
+                      </a:endParaRPr>
+                    </a:p>
+                  </a:txBody>
+                  <a:tcPr marL="27432" marR="27432" marT="27432" marB="27432">
+                    <a:lnL w="6350" cap="flat" cmpd="sng" algn="ctr">
+                      <a:solidFill>
+                        <a:srgbClr val="D9DCE1"/>
+                      </a:solidFill>
+                      <a:prstDash val="solid"/>
+                      <a:round/>
+                      <a:headEnd type="none" w="med" len="med"/>
+                      <a:tailEnd type="none" w="med" len="med"/>
+                    </a:lnL>
+                    <a:lnR w="6350" cap="flat" cmpd="sng" algn="ctr">
+                      <a:solidFill>
+                        <a:srgbClr val="D9DCE1"/>
+                      </a:solidFill>
+                      <a:prstDash val="solid"/>
+                      <a:round/>
+                      <a:headEnd type="none" w="med" len="med"/>
+                      <a:tailEnd type="none" w="med" len="med"/>
+                    </a:lnR>
+                    <a:lnT w="6350" cap="flat" cmpd="sng" algn="ctr">
+                      <a:solidFill>
+                        <a:srgbClr val="D9DCE1"/>
+                      </a:solidFill>
+                      <a:prstDash val="solid"/>
+                      <a:round/>
+                      <a:headEnd type="none" w="med" len="med"/>
+                      <a:tailEnd type="none" w="med" len="med"/>
+                    </a:lnT>
+                    <a:lnB w="6350" cap="flat" cmpd="sng" algn="ctr">
+                      <a:solidFill>
+                        <a:srgbClr val="D9DCE1"/>
+                      </a:solidFill>
+                      <a:prstDash val="solid"/>
+                      <a:round/>
+                      <a:headEnd type="none" w="med" len="med"/>
+                      <a:tailEnd type="none" w="med" len="med"/>
+                    </a:lnB>
+                  </a:tcPr>
+                </a:tc>
+                <a:tc>
+                  <a:txBody>
+                    <a:bodyPr/>
+                    <a:lstStyle/>
+                    <a:p>
+                      <a:pPr algn="ctr" indent="0" marL="0">
+                        <a:buNone/>
+                      </a:pPr>
+                      <a:r>
+                        <a:rPr lang="en-US" sz="950" dirty="0">
+                          <a:solidFill>
+                            <a:schemeClr val="tx1"/>
+                          </a:solidFill>
+                          <a:latin typeface="Calibri" pitchFamily="34" charset="0"/>
+                          <a:ea typeface="Calibri" pitchFamily="34" charset="-122"/>
+                          <a:cs typeface="Calibri" pitchFamily="34" charset="-120"/>
+                        </a:rPr>
+                        <a:t>2.53</a:t>
+                      </a:r>
+                      <a:endParaRPr lang="en-US" sz="950" dirty="0">
+                        <a:latin typeface="Calibri" charset="0"/>
+                        <a:ea typeface="Calibri" charset="0"/>
+                        <a:cs typeface="Calibri" charset="0"/>
+                      </a:endParaRPr>
+                    </a:p>
+                  </a:txBody>
+                  <a:tcPr marL="27432" marR="27432" marT="27432" marB="27432">
+                    <a:lnL w="6350" cap="flat" cmpd="sng" algn="ctr">
+                      <a:solidFill>
+                        <a:srgbClr val="D9DCE1"/>
+                      </a:solidFill>
+                      <a:prstDash val="solid"/>
+                      <a:round/>
+                      <a:headEnd type="none" w="med" len="med"/>
+                      <a:tailEnd type="none" w="med" len="med"/>
+                    </a:lnL>
+                    <a:lnR w="6350" cap="flat" cmpd="sng" algn="ctr">
+                      <a:solidFill>
+                        <a:srgbClr val="D9DCE1"/>
+                      </a:solidFill>
+                      <a:prstDash val="solid"/>
+                      <a:round/>
+                      <a:headEnd type="none" w="med" len="med"/>
+                      <a:tailEnd type="none" w="med" len="med"/>
+                    </a:lnR>
+                    <a:lnT w="6350" cap="flat" cmpd="sng" algn="ctr">
+                      <a:solidFill>
+                        <a:srgbClr val="D9DCE1"/>
+                      </a:solidFill>
+                      <a:prstDash val="solid"/>
+                      <a:round/>
+                      <a:headEnd type="none" w="med" len="med"/>
+                      <a:tailEnd type="none" w="med" len="med"/>
+                    </a:lnT>
+                    <a:lnB w="6350" cap="flat" cmpd="sng" algn="ctr">
+                      <a:solidFill>
+                        <a:srgbClr val="D9DCE1"/>
+                      </a:solidFill>
+                      <a:prstDash val="solid"/>
+                      <a:round/>
+                      <a:headEnd type="none" w="med" len="med"/>
+                      <a:tailEnd type="none" w="med" len="med"/>
+                    </a:lnB>
+                  </a:tcPr>
+                </a:tc>
+                <a:tc>
+                  <a:txBody>
+                    <a:bodyPr/>
+                    <a:lstStyle/>
+                    <a:p>
+                      <a:pPr algn="ctr" indent="0" marL="0">
+                        <a:buNone/>
+                      </a:pPr>
+                      <a:r>
+                        <a:rPr lang="en-US" sz="950" dirty="0">
+                          <a:solidFill>
+                            <a:schemeClr val="accent4"/>
+                          </a:solidFill>
+                          <a:latin typeface="Calibri" pitchFamily="34" charset="0"/>
+                          <a:ea typeface="Calibri" pitchFamily="34" charset="-122"/>
+                          <a:cs typeface="Calibri" pitchFamily="34" charset="-120"/>
+                        </a:rPr>
+                        <a:t>no</a:t>
+                      </a:r>
+                      <a:endParaRPr lang="en-US" sz="950" dirty="0">
+                        <a:latin typeface="Calibri" charset="0"/>
+                        <a:ea typeface="Calibri" charset="0"/>
+                        <a:cs typeface="Calibri" charset="0"/>
+                      </a:endParaRPr>
+                    </a:p>
+                  </a:txBody>
+                  <a:tcPr marL="27432" marR="27432" marT="27432" marB="27432">
+                    <a:lnL w="6350" cap="flat" cmpd="sng" algn="ctr">
+                      <a:solidFill>
+                        <a:srgbClr val="D9DCE1"/>
+                      </a:solidFill>
+                      <a:prstDash val="solid"/>
+                      <a:round/>
+                      <a:headEnd type="none" w="med" len="med"/>
+                      <a:tailEnd type="none" w="med" len="med"/>
+                    </a:lnL>
+                    <a:lnR w="6350" cap="flat" cmpd="sng" algn="ctr">
+                      <a:solidFill>
+                        <a:srgbClr val="D9DCE1"/>
+                      </a:solidFill>
+                      <a:prstDash val="solid"/>
+                      <a:round/>
+                      <a:headEnd type="none" w="med" len="med"/>
+                      <a:tailEnd type="none" w="med" len="med"/>
+                    </a:lnR>
+                    <a:lnT w="6350" cap="flat" cmpd="sng" algn="ctr">
+                      <a:solidFill>
+                        <a:srgbClr val="D9DCE1"/>
+                      </a:solidFill>
+                      <a:prstDash val="solid"/>
+                      <a:round/>
+                      <a:headEnd type="none" w="med" len="med"/>
+                      <a:tailEnd type="none" w="med" len="med"/>
+                    </a:lnT>
+                    <a:lnB w="6350" cap="flat" cmpd="sng" algn="ctr">
+                      <a:solidFill>
+                        <a:srgbClr val="D9DCE1"/>
+                      </a:solidFill>
+                      <a:prstDash val="solid"/>
+                      <a:round/>
+                      <a:headEnd type="none" w="med" len="med"/>
+                      <a:tailEnd type="none" w="med" len="med"/>
+                    </a:lnB>
+                  </a:tcPr>
+                </a:tc>
+                <a:tc>
+                  <a:txBody>
+                    <a:bodyPr/>
+                    <a:lstStyle/>
+                    <a:p>
+                      <a:pPr algn="ctr" indent="0" marL="0">
+                        <a:buNone/>
+                      </a:pPr>
+                      <a:r>
+                        <a:rPr lang="en-US" sz="950" dirty="0">
+                          <a:solidFill>
+                            <a:schemeClr val="tx1"/>
+                          </a:solidFill>
+                          <a:latin typeface="Calibri" pitchFamily="34" charset="0"/>
+                          <a:ea typeface="Calibri" pitchFamily="34" charset="-122"/>
+                          <a:cs typeface="Calibri" pitchFamily="34" charset="-120"/>
+                        </a:rPr>
+                        <a:t>minus 1.00</a:t>
+                      </a:r>
+                      <a:endParaRPr lang="en-US" sz="950" dirty="0">
+                        <a:latin typeface="Calibri" charset="0"/>
+                        <a:ea typeface="Calibri" charset="0"/>
+                        <a:cs typeface="Calibri" charset="0"/>
+                      </a:endParaRPr>
+                    </a:p>
+                  </a:txBody>
+                  <a:tcPr marL="27432" marR="27432" marT="27432" marB="27432">
+                    <a:lnL w="6350" cap="flat" cmpd="sng" algn="ctr">
+                      <a:solidFill>
+                        <a:srgbClr val="D9DCE1"/>
+                      </a:solidFill>
+                      <a:prstDash val="solid"/>
+                      <a:round/>
+                      <a:headEnd type="none" w="med" len="med"/>
+                      <a:tailEnd type="none" w="med" len="med"/>
+                    </a:lnL>
+                    <a:lnR w="6350" cap="flat" cmpd="sng" algn="ctr">
+                      <a:solidFill>
+                        <a:srgbClr val="D9DCE1"/>
+                      </a:solidFill>
+                      <a:prstDash val="solid"/>
+                      <a:round/>
+                      <a:headEnd type="none" w="med" len="med"/>
+                      <a:tailEnd type="none" w="med" len="med"/>
+                    </a:lnR>
+                    <a:lnT w="6350" cap="flat" cmpd="sng" algn="ctr">
+                      <a:solidFill>
+                        <a:srgbClr val="D9DCE1"/>
+                      </a:solidFill>
+                      <a:prstDash val="solid"/>
+                      <a:round/>
+                      <a:headEnd type="none" w="med" len="med"/>
+                      <a:tailEnd type="none" w="med" len="med"/>
+                    </a:lnT>
+                    <a:lnB w="6350" cap="flat" cmpd="sng" algn="ctr">
+                      <a:solidFill>
+                        <a:srgbClr val="D9DCE1"/>
+                      </a:solidFill>
+                      <a:prstDash val="solid"/>
+                      <a:round/>
+                      <a:headEnd type="none" w="med" len="med"/>
+                      <a:tailEnd type="none" w="med" len="med"/>
+                    </a:lnB>
+                  </a:tcPr>
+                </a:tc>
+                <a:tc>
+                  <a:txBody>
+                    <a:bodyPr/>
+                    <a:lstStyle/>
+                    <a:p>
+                      <a:pPr algn="ctr" indent="0" marL="0">
+                        <a:buNone/>
+                      </a:pPr>
+                      <a:r>
+                        <a:rPr lang="en-US" sz="950" b="1" dirty="0">
+                          <a:solidFill>
+                            <a:schemeClr val="accent3"/>
+                          </a:solidFill>
+                          <a:latin typeface="Calibri" pitchFamily="34" charset="0"/>
+                          <a:ea typeface="Calibri" pitchFamily="34" charset="-122"/>
+                          <a:cs typeface="Calibri" pitchFamily="34" charset="-120"/>
+                        </a:rPr>
+                        <a:t>same way</a:t>
+                      </a:r>
+                      <a:endParaRPr lang="en-US" sz="950" dirty="0">
+                        <a:latin typeface="Calibri" charset="0"/>
+                        <a:ea typeface="Calibri" charset="0"/>
+                        <a:cs typeface="Calibri" charset="0"/>
+                      </a:endParaRPr>
+                    </a:p>
+                  </a:txBody>
+                  <a:tcPr marL="27432" marR="27432" marT="27432" marB="27432">
+                    <a:lnL w="6350" cap="flat" cmpd="sng" algn="ctr">
+                      <a:solidFill>
+                        <a:srgbClr val="D9DCE1"/>
+                      </a:solidFill>
+                      <a:prstDash val="solid"/>
+                      <a:round/>
+                      <a:headEnd type="none" w="med" len="med"/>
+                      <a:tailEnd type="none" w="med" len="med"/>
+                    </a:lnL>
+                    <a:lnR w="6350" cap="flat" cmpd="sng" algn="ctr">
+                      <a:solidFill>
+                        <a:srgbClr val="D9DCE1"/>
+                      </a:solidFill>
+                      <a:prstDash val="solid"/>
+                      <a:round/>
+                      <a:headEnd type="none" w="med" len="med"/>
+                      <a:tailEnd type="none" w="med" len="med"/>
+                    </a:lnR>
+                    <a:lnT w="6350" cap="flat" cmpd="sng" algn="ctr">
+                      <a:solidFill>
+                        <a:srgbClr val="D9DCE1"/>
+                      </a:solidFill>
+                      <a:prstDash val="solid"/>
+                      <a:round/>
+                      <a:headEnd type="none" w="med" len="med"/>
+                      <a:tailEnd type="none" w="med" len="med"/>
+                    </a:lnT>
+                    <a:lnB w="6350" cap="flat" cmpd="sng" algn="ctr">
+                      <a:solidFill>
+                        <a:srgbClr val="D9DCE1"/>
+                      </a:solidFill>
+                      <a:prstDash val="solid"/>
+                      <a:round/>
+                      <a:headEnd type="none" w="med" len="med"/>
+                      <a:tailEnd type="none" w="med" len="med"/>
+                    </a:lnB>
+                  </a:tcPr>
+                </a:tc>
+              </a:tr>
+              <a:tr h="265176">
+                <a:tc>
+                  <a:txBody>
+                    <a:bodyPr/>
+                    <a:lstStyle/>
+                    <a:p>
+                      <a:pPr algn="l" indent="0" marL="0">
+                        <a:buNone/>
+                      </a:pPr>
+                      <a:r>
+                        <a:rPr lang="en-US" sz="950" dirty="0">
+                          <a:solidFill>
+                            <a:schemeClr val="tx1"/>
+                          </a:solidFill>
+                          <a:latin typeface="Calibri" pitchFamily="34" charset="0"/>
+                          <a:ea typeface="Calibri" pitchFamily="34" charset="-122"/>
+                          <a:cs typeface="Calibri" pitchFamily="34" charset="-120"/>
+                        </a:rPr>
+                        <a:t>Hike 2018</a:t>
+                      </a:r>
+                      <a:endParaRPr lang="en-US" sz="950" dirty="0">
+                        <a:latin typeface="Calibri" charset="0"/>
+                        <a:ea typeface="Calibri" charset="0"/>
+                        <a:cs typeface="Calibri" charset="0"/>
+                      </a:endParaRPr>
+                    </a:p>
+                  </a:txBody>
+                  <a:tcPr marL="27432" marR="27432" marT="27432" marB="27432">
+                    <a:lnL w="6350" cap="flat" cmpd="sng" algn="ctr">
+                      <a:solidFill>
+                        <a:srgbClr val="D9DCE1"/>
+                      </a:solidFill>
+                      <a:prstDash val="solid"/>
+                      <a:round/>
+                      <a:headEnd type="none" w="med" len="med"/>
+                      <a:tailEnd type="none" w="med" len="med"/>
+                    </a:lnL>
+                    <a:lnR w="6350" cap="flat" cmpd="sng" algn="ctr">
+                      <a:solidFill>
+                        <a:srgbClr val="D9DCE1"/>
+                      </a:solidFill>
+                      <a:prstDash val="solid"/>
+                      <a:round/>
+                      <a:headEnd type="none" w="med" len="med"/>
+                      <a:tailEnd type="none" w="med" len="med"/>
+                    </a:lnR>
+                    <a:lnT w="6350" cap="flat" cmpd="sng" algn="ctr">
+                      <a:solidFill>
+                        <a:srgbClr val="D9DCE1"/>
+                      </a:solidFill>
+                      <a:prstDash val="solid"/>
+                      <a:round/>
+                      <a:headEnd type="none" w="med" len="med"/>
+                      <a:tailEnd type="none" w="med" len="med"/>
+                    </a:lnT>
+                    <a:lnB w="6350" cap="flat" cmpd="sng" algn="ctr">
+                      <a:solidFill>
+                        <a:srgbClr val="D9DCE1"/>
+                      </a:solidFill>
+                      <a:prstDash val="solid"/>
+                      <a:round/>
+                      <a:headEnd type="none" w="med" len="med"/>
+                      <a:tailEnd type="none" w="med" len="med"/>
+                    </a:lnB>
+                  </a:tcPr>
+                </a:tc>
+                <a:tc>
+                  <a:txBody>
+                    <a:bodyPr/>
+                    <a:lstStyle/>
+                    <a:p>
+                      <a:pPr algn="ctr" indent="0" marL="0">
+                        <a:buNone/>
+                      </a:pPr>
+                      <a:r>
+                        <a:rPr lang="en-US" sz="950" dirty="0">
+                          <a:solidFill>
+                            <a:schemeClr val="tx1"/>
+                          </a:solidFill>
+                          <a:latin typeface="Calibri" pitchFamily="34" charset="0"/>
+                          <a:ea typeface="Calibri" pitchFamily="34" charset="-122"/>
+                          <a:cs typeface="Calibri" pitchFamily="34" charset="-120"/>
+                        </a:rPr>
+                        <a:t>0.50</a:t>
+                      </a:r>
+                      <a:endParaRPr lang="en-US" sz="950" dirty="0">
+                        <a:latin typeface="Calibri" charset="0"/>
+                        <a:ea typeface="Calibri" charset="0"/>
+                        <a:cs typeface="Calibri" charset="0"/>
+                      </a:endParaRPr>
+                    </a:p>
+                  </a:txBody>
+                  <a:tcPr marL="27432" marR="27432" marT="27432" marB="27432">
+                    <a:lnL w="6350" cap="flat" cmpd="sng" algn="ctr">
+                      <a:solidFill>
+                        <a:srgbClr val="D9DCE1"/>
+                      </a:solidFill>
+                      <a:prstDash val="solid"/>
+                      <a:round/>
+                      <a:headEnd type="none" w="med" len="med"/>
+                      <a:tailEnd type="none" w="med" len="med"/>
+                    </a:lnL>
+                    <a:lnR w="6350" cap="flat" cmpd="sng" algn="ctr">
+                      <a:solidFill>
+                        <a:srgbClr val="D9DCE1"/>
+                      </a:solidFill>
+                      <a:prstDash val="solid"/>
+                      <a:round/>
+                      <a:headEnd type="none" w="med" len="med"/>
+                      <a:tailEnd type="none" w="med" len="med"/>
+                    </a:lnR>
+                    <a:lnT w="6350" cap="flat" cmpd="sng" algn="ctr">
+                      <a:solidFill>
+                        <a:srgbClr val="D9DCE1"/>
+                      </a:solidFill>
+                      <a:prstDash val="solid"/>
+                      <a:round/>
+                      <a:headEnd type="none" w="med" len="med"/>
+                      <a:tailEnd type="none" w="med" len="med"/>
+                    </a:lnT>
+                    <a:lnB w="6350" cap="flat" cmpd="sng" algn="ctr">
+                      <a:solidFill>
+                        <a:srgbClr val="D9DCE1"/>
+                      </a:solidFill>
+                      <a:prstDash val="solid"/>
+                      <a:round/>
+                      <a:headEnd type="none" w="med" len="med"/>
+                      <a:tailEnd type="none" w="med" len="med"/>
+                    </a:lnB>
+                  </a:tcPr>
+                </a:tc>
+                <a:tc>
+                  <a:txBody>
+                    <a:bodyPr/>
+                    <a:lstStyle/>
+                    <a:p>
+                      <a:pPr algn="ctr" indent="0" marL="0">
+                        <a:buNone/>
+                      </a:pPr>
+                      <a:r>
+                        <a:rPr lang="en-US" sz="950" dirty="0">
+                          <a:solidFill>
+                            <a:schemeClr val="tx1"/>
+                          </a:solidFill>
+                          <a:latin typeface="Calibri" pitchFamily="34" charset="0"/>
+                          <a:ea typeface="Calibri" pitchFamily="34" charset="-122"/>
+                          <a:cs typeface="Calibri" pitchFamily="34" charset="-120"/>
+                        </a:rPr>
+                        <a:t>minus 2.85</a:t>
+                      </a:r>
+                      <a:endParaRPr lang="en-US" sz="950" dirty="0">
+                        <a:latin typeface="Calibri" charset="0"/>
+                        <a:ea typeface="Calibri" charset="0"/>
+                        <a:cs typeface="Calibri" charset="0"/>
+                      </a:endParaRPr>
+                    </a:p>
+                  </a:txBody>
+                  <a:tcPr marL="27432" marR="27432" marT="27432" marB="27432">
+                    <a:lnL w="6350" cap="flat" cmpd="sng" algn="ctr">
+                      <a:solidFill>
+                        <a:srgbClr val="D9DCE1"/>
+                      </a:solidFill>
+                      <a:prstDash val="solid"/>
+                      <a:round/>
+                      <a:headEnd type="none" w="med" len="med"/>
+                      <a:tailEnd type="none" w="med" len="med"/>
+                    </a:lnL>
+                    <a:lnR w="6350" cap="flat" cmpd="sng" algn="ctr">
+                      <a:solidFill>
+                        <a:srgbClr val="D9DCE1"/>
+                      </a:solidFill>
+                      <a:prstDash val="solid"/>
+                      <a:round/>
+                      <a:headEnd type="none" w="med" len="med"/>
+                      <a:tailEnd type="none" w="med" len="med"/>
+                    </a:lnR>
+                    <a:lnT w="6350" cap="flat" cmpd="sng" algn="ctr">
+                      <a:solidFill>
+                        <a:srgbClr val="D9DCE1"/>
+                      </a:solidFill>
+                      <a:prstDash val="solid"/>
+                      <a:round/>
+                      <a:headEnd type="none" w="med" len="med"/>
+                      <a:tailEnd type="none" w="med" len="med"/>
+                    </a:lnT>
+                    <a:lnB w="6350" cap="flat" cmpd="sng" algn="ctr">
+                      <a:solidFill>
+                        <a:srgbClr val="D9DCE1"/>
+                      </a:solidFill>
+                      <a:prstDash val="solid"/>
+                      <a:round/>
+                      <a:headEnd type="none" w="med" len="med"/>
+                      <a:tailEnd type="none" w="med" len="med"/>
+                    </a:lnB>
+                  </a:tcPr>
+                </a:tc>
+                <a:tc>
+                  <a:txBody>
+                    <a:bodyPr/>
+                    <a:lstStyle/>
+                    <a:p>
+                      <a:pPr algn="ctr" indent="0" marL="0">
+                        <a:buNone/>
+                      </a:pPr>
+                      <a:r>
+                        <a:rPr lang="en-US" sz="950" dirty="0">
+                          <a:solidFill>
+                            <a:schemeClr val="accent4"/>
+                          </a:solidFill>
+                          <a:latin typeface="Calibri" pitchFamily="34" charset="0"/>
+                          <a:ea typeface="Calibri" pitchFamily="34" charset="-122"/>
+                          <a:cs typeface="Calibri" pitchFamily="34" charset="-120"/>
+                        </a:rPr>
+                        <a:t>no</a:t>
+                      </a:r>
+                      <a:endParaRPr lang="en-US" sz="950" dirty="0">
+                        <a:latin typeface="Calibri" charset="0"/>
+                        <a:ea typeface="Calibri" charset="0"/>
+                        <a:cs typeface="Calibri" charset="0"/>
+                      </a:endParaRPr>
+                    </a:p>
+                  </a:txBody>
+                  <a:tcPr marL="27432" marR="27432" marT="27432" marB="27432">
+                    <a:lnL w="6350" cap="flat" cmpd="sng" algn="ctr">
+                      <a:solidFill>
+                        <a:srgbClr val="D9DCE1"/>
+                      </a:solidFill>
+                      <a:prstDash val="solid"/>
+                      <a:round/>
+                      <a:headEnd type="none" w="med" len="med"/>
+                      <a:tailEnd type="none" w="med" len="med"/>
+                    </a:lnL>
+                    <a:lnR w="6350" cap="flat" cmpd="sng" algn="ctr">
+                      <a:solidFill>
+                        <a:srgbClr val="D9DCE1"/>
+                      </a:solidFill>
+                      <a:prstDash val="solid"/>
+                      <a:round/>
+                      <a:headEnd type="none" w="med" len="med"/>
+                      <a:tailEnd type="none" w="med" len="med"/>
+                    </a:lnR>
+                    <a:lnT w="6350" cap="flat" cmpd="sng" algn="ctr">
+                      <a:solidFill>
+                        <a:srgbClr val="D9DCE1"/>
+                      </a:solidFill>
+                      <a:prstDash val="solid"/>
+                      <a:round/>
+                      <a:headEnd type="none" w="med" len="med"/>
+                      <a:tailEnd type="none" w="med" len="med"/>
+                    </a:lnT>
+                    <a:lnB w="6350" cap="flat" cmpd="sng" algn="ctr">
+                      <a:solidFill>
+                        <a:srgbClr val="D9DCE1"/>
+                      </a:solidFill>
+                      <a:prstDash val="solid"/>
+                      <a:round/>
+                      <a:headEnd type="none" w="med" len="med"/>
+                      <a:tailEnd type="none" w="med" len="med"/>
+                    </a:lnB>
+                  </a:tcPr>
+                </a:tc>
+                <a:tc>
+                  <a:txBody>
+                    <a:bodyPr/>
+                    <a:lstStyle/>
+                    <a:p>
+                      <a:pPr algn="ctr" indent="0" marL="0">
+                        <a:buNone/>
+                      </a:pPr>
+                      <a:r>
+                        <a:rPr lang="en-US" sz="950" dirty="0">
+                          <a:solidFill>
+                            <a:schemeClr val="tx1"/>
+                          </a:solidFill>
+                          <a:latin typeface="Calibri" pitchFamily="34" charset="0"/>
+                          <a:ea typeface="Calibri" pitchFamily="34" charset="-122"/>
+                          <a:cs typeface="Calibri" pitchFamily="34" charset="-120"/>
+                        </a:rPr>
+                        <a:t>minus 0.50</a:t>
+                      </a:r>
+                      <a:endParaRPr lang="en-US" sz="950" dirty="0">
+                        <a:latin typeface="Calibri" charset="0"/>
+                        <a:ea typeface="Calibri" charset="0"/>
+                        <a:cs typeface="Calibri" charset="0"/>
+                      </a:endParaRPr>
+                    </a:p>
+                  </a:txBody>
+                  <a:tcPr marL="27432" marR="27432" marT="27432" marB="27432">
+                    <a:lnL w="6350" cap="flat" cmpd="sng" algn="ctr">
+                      <a:solidFill>
+                        <a:srgbClr val="D9DCE1"/>
+                      </a:solidFill>
+                      <a:prstDash val="solid"/>
+                      <a:round/>
+                      <a:headEnd type="none" w="med" len="med"/>
+                      <a:tailEnd type="none" w="med" len="med"/>
+                    </a:lnL>
+                    <a:lnR w="6350" cap="flat" cmpd="sng" algn="ctr">
+                      <a:solidFill>
+                        <a:srgbClr val="D9DCE1"/>
+                      </a:solidFill>
+                      <a:prstDash val="solid"/>
+                      <a:round/>
+                      <a:headEnd type="none" w="med" len="med"/>
+                      <a:tailEnd type="none" w="med" len="med"/>
+                    </a:lnR>
+                    <a:lnT w="6350" cap="flat" cmpd="sng" algn="ctr">
+                      <a:solidFill>
+                        <a:srgbClr val="D9DCE1"/>
+                      </a:solidFill>
+                      <a:prstDash val="solid"/>
+                      <a:round/>
+                      <a:headEnd type="none" w="med" len="med"/>
+                      <a:tailEnd type="none" w="med" len="med"/>
+                    </a:lnT>
+                    <a:lnB w="6350" cap="flat" cmpd="sng" algn="ctr">
+                      <a:solidFill>
+                        <a:srgbClr val="D9DCE1"/>
+                      </a:solidFill>
+                      <a:prstDash val="solid"/>
+                      <a:round/>
+                      <a:headEnd type="none" w="med" len="med"/>
+                      <a:tailEnd type="none" w="med" len="med"/>
+                    </a:lnB>
+                  </a:tcPr>
+                </a:tc>
+                <a:tc>
+                  <a:txBody>
+                    <a:bodyPr/>
+                    <a:lstStyle/>
+                    <a:p>
+                      <a:pPr algn="ctr" indent="0" marL="0">
+                        <a:buNone/>
+                      </a:pPr>
+                      <a:r>
+                        <a:rPr lang="en-US" sz="950" dirty="0">
+                          <a:solidFill>
+                            <a:schemeClr val="accent4"/>
+                          </a:solidFill>
+                          <a:latin typeface="Calibri" pitchFamily="34" charset="0"/>
+                          <a:ea typeface="Calibri" pitchFamily="34" charset="-122"/>
+                          <a:cs typeface="Calibri" pitchFamily="34" charset="-120"/>
+                        </a:rPr>
+                        <a:t>no</a:t>
+                      </a:r>
+                      <a:endParaRPr lang="en-US" sz="950" dirty="0">
+                        <a:latin typeface="Calibri" charset="0"/>
+                        <a:ea typeface="Calibri" charset="0"/>
+                        <a:cs typeface="Calibri" charset="0"/>
+                      </a:endParaRPr>
+                    </a:p>
+                  </a:txBody>
+                  <a:tcPr marL="27432" marR="27432" marT="27432" marB="27432">
+                    <a:lnL w="6350" cap="flat" cmpd="sng" algn="ctr">
+                      <a:solidFill>
+                        <a:srgbClr val="D9DCE1"/>
+                      </a:solidFill>
+                      <a:prstDash val="solid"/>
+                      <a:round/>
+                      <a:headEnd type="none" w="med" len="med"/>
+                      <a:tailEnd type="none" w="med" len="med"/>
+                    </a:lnL>
+                    <a:lnR w="6350" cap="flat" cmpd="sng" algn="ctr">
+                      <a:solidFill>
+                        <a:srgbClr val="D9DCE1"/>
+                      </a:solidFill>
+                      <a:prstDash val="solid"/>
+                      <a:round/>
+                      <a:headEnd type="none" w="med" len="med"/>
+                      <a:tailEnd type="none" w="med" len="med"/>
+                    </a:lnR>
+                    <a:lnT w="6350" cap="flat" cmpd="sng" algn="ctr">
+                      <a:solidFill>
+                        <a:srgbClr val="D9DCE1"/>
+                      </a:solidFill>
+                      <a:prstDash val="solid"/>
+                      <a:round/>
+                      <a:headEnd type="none" w="med" len="med"/>
+                      <a:tailEnd type="none" w="med" len="med"/>
+                    </a:lnT>
+                    <a:lnB w="6350" cap="flat" cmpd="sng" algn="ctr">
+                      <a:solidFill>
+                        <a:srgbClr val="D9DCE1"/>
+                      </a:solidFill>
+                      <a:prstDash val="solid"/>
+                      <a:round/>
+                      <a:headEnd type="none" w="med" len="med"/>
+                      <a:tailEnd type="none" w="med" len="med"/>
+                    </a:lnB>
+                  </a:tcPr>
+                </a:tc>
+              </a:tr>
+              <a:tr h="265176">
+                <a:tc>
+                  <a:txBody>
+                    <a:bodyPr/>
+                    <a:lstStyle/>
+                    <a:p>
+                      <a:pPr algn="l" indent="0" marL="0">
+                        <a:buNone/>
+                      </a:pPr>
+                      <a:r>
+                        <a:rPr lang="en-US" sz="950" dirty="0">
+                          <a:solidFill>
+                            <a:schemeClr val="tx1"/>
+                          </a:solidFill>
+                          <a:latin typeface="Calibri" pitchFamily="34" charset="0"/>
+                          <a:ea typeface="Calibri" pitchFamily="34" charset="-122"/>
+                          <a:cs typeface="Calibri" pitchFamily="34" charset="-120"/>
+                        </a:rPr>
+                        <a:t>Cut 2019 to 2020</a:t>
+                      </a:r>
+                      <a:endParaRPr lang="en-US" sz="950" dirty="0">
+                        <a:latin typeface="Calibri" charset="0"/>
+                        <a:ea typeface="Calibri" charset="0"/>
+                        <a:cs typeface="Calibri" charset="0"/>
+                      </a:endParaRPr>
+                    </a:p>
+                  </a:txBody>
+                  <a:tcPr marL="27432" marR="27432" marT="27432" marB="27432">
+                    <a:lnL w="6350" cap="flat" cmpd="sng" algn="ctr">
+                      <a:solidFill>
+                        <a:srgbClr val="D9DCE1"/>
+                      </a:solidFill>
+                      <a:prstDash val="solid"/>
+                      <a:round/>
+                      <a:headEnd type="none" w="med" len="med"/>
+                      <a:tailEnd type="none" w="med" len="med"/>
+                    </a:lnL>
+                    <a:lnR w="6350" cap="flat" cmpd="sng" algn="ctr">
+                      <a:solidFill>
+                        <a:srgbClr val="D9DCE1"/>
+                      </a:solidFill>
+                      <a:prstDash val="solid"/>
+                      <a:round/>
+                      <a:headEnd type="none" w="med" len="med"/>
+                      <a:tailEnd type="none" w="med" len="med"/>
+                    </a:lnR>
+                    <a:lnT w="6350" cap="flat" cmpd="sng" algn="ctr">
+                      <a:solidFill>
+                        <a:srgbClr val="D9DCE1"/>
+                      </a:solidFill>
+                      <a:prstDash val="solid"/>
+                      <a:round/>
+                      <a:headEnd type="none" w="med" len="med"/>
+                      <a:tailEnd type="none" w="med" len="med"/>
+                    </a:lnT>
+                    <a:lnB w="6350" cap="flat" cmpd="sng" algn="ctr">
+                      <a:solidFill>
+                        <a:srgbClr val="D9DCE1"/>
+                      </a:solidFill>
+                      <a:prstDash val="solid"/>
+                      <a:round/>
+                      <a:headEnd type="none" w="med" len="med"/>
+                      <a:tailEnd type="none" w="med" len="med"/>
+                    </a:lnB>
+                  </a:tcPr>
+                </a:tc>
+                <a:tc>
+                  <a:txBody>
+                    <a:bodyPr/>
+                    <a:lstStyle/>
+                    <a:p>
+                      <a:pPr algn="ctr" indent="0" marL="0">
+                        <a:buNone/>
+                      </a:pPr>
+                      <a:r>
+                        <a:rPr lang="en-US" sz="950" dirty="0">
+                          <a:solidFill>
+                            <a:schemeClr val="tx1"/>
+                          </a:solidFill>
+                          <a:latin typeface="Calibri" pitchFamily="34" charset="0"/>
+                          <a:ea typeface="Calibri" pitchFamily="34" charset="-122"/>
+                          <a:cs typeface="Calibri" pitchFamily="34" charset="-120"/>
+                        </a:rPr>
+                        <a:t>minus 2.50</a:t>
+                      </a:r>
+                      <a:endParaRPr lang="en-US" sz="950" dirty="0">
+                        <a:latin typeface="Calibri" charset="0"/>
+                        <a:ea typeface="Calibri" charset="0"/>
+                        <a:cs typeface="Calibri" charset="0"/>
+                      </a:endParaRPr>
+                    </a:p>
+                  </a:txBody>
+                  <a:tcPr marL="27432" marR="27432" marT="27432" marB="27432">
+                    <a:lnL w="6350" cap="flat" cmpd="sng" algn="ctr">
+                      <a:solidFill>
+                        <a:srgbClr val="D9DCE1"/>
+                      </a:solidFill>
+                      <a:prstDash val="solid"/>
+                      <a:round/>
+                      <a:headEnd type="none" w="med" len="med"/>
+                      <a:tailEnd type="none" w="med" len="med"/>
+                    </a:lnL>
+                    <a:lnR w="6350" cap="flat" cmpd="sng" algn="ctr">
+                      <a:solidFill>
+                        <a:srgbClr val="D9DCE1"/>
+                      </a:solidFill>
+                      <a:prstDash val="solid"/>
+                      <a:round/>
+                      <a:headEnd type="none" w="med" len="med"/>
+                      <a:tailEnd type="none" w="med" len="med"/>
+                    </a:lnR>
+                    <a:lnT w="6350" cap="flat" cmpd="sng" algn="ctr">
+                      <a:solidFill>
+                        <a:srgbClr val="D9DCE1"/>
+                      </a:solidFill>
+                      <a:prstDash val="solid"/>
+                      <a:round/>
+                      <a:headEnd type="none" w="med" len="med"/>
+                      <a:tailEnd type="none" w="med" len="med"/>
+                    </a:lnT>
+                    <a:lnB w="6350" cap="flat" cmpd="sng" algn="ctr">
+                      <a:solidFill>
+                        <a:srgbClr val="D9DCE1"/>
+                      </a:solidFill>
+                      <a:prstDash val="solid"/>
+                      <a:round/>
+                      <a:headEnd type="none" w="med" len="med"/>
+                      <a:tailEnd type="none" w="med" len="med"/>
+                    </a:lnB>
+                  </a:tcPr>
+                </a:tc>
+                <a:tc>
+                  <a:txBody>
+                    <a:bodyPr/>
+                    <a:lstStyle/>
+                    <a:p>
+                      <a:pPr algn="ctr" indent="0" marL="0">
+                        <a:buNone/>
+                      </a:pPr>
+                      <a:r>
+                        <a:rPr lang="en-US" sz="950" dirty="0">
+                          <a:solidFill>
+                            <a:schemeClr val="tx1"/>
+                          </a:solidFill>
+                          <a:latin typeface="Calibri" pitchFamily="34" charset="0"/>
+                          <a:ea typeface="Calibri" pitchFamily="34" charset="-122"/>
+                          <a:cs typeface="Calibri" pitchFamily="34" charset="-120"/>
+                        </a:rPr>
+                        <a:t>minus 2.82</a:t>
+                      </a:r>
+                      <a:endParaRPr lang="en-US" sz="950" dirty="0">
+                        <a:latin typeface="Calibri" charset="0"/>
+                        <a:ea typeface="Calibri" charset="0"/>
+                        <a:cs typeface="Calibri" charset="0"/>
+                      </a:endParaRPr>
+                    </a:p>
+                  </a:txBody>
+                  <a:tcPr marL="27432" marR="27432" marT="27432" marB="27432">
+                    <a:lnL w="6350" cap="flat" cmpd="sng" algn="ctr">
+                      <a:solidFill>
+                        <a:srgbClr val="D9DCE1"/>
+                      </a:solidFill>
+                      <a:prstDash val="solid"/>
+                      <a:round/>
+                      <a:headEnd type="none" w="med" len="med"/>
+                      <a:tailEnd type="none" w="med" len="med"/>
+                    </a:lnL>
+                    <a:lnR w="6350" cap="flat" cmpd="sng" algn="ctr">
+                      <a:solidFill>
+                        <a:srgbClr val="D9DCE1"/>
+                      </a:solidFill>
+                      <a:prstDash val="solid"/>
+                      <a:round/>
+                      <a:headEnd type="none" w="med" len="med"/>
+                      <a:tailEnd type="none" w="med" len="med"/>
+                    </a:lnR>
+                    <a:lnT w="6350" cap="flat" cmpd="sng" algn="ctr">
+                      <a:solidFill>
+                        <a:srgbClr val="D9DCE1"/>
+                      </a:solidFill>
+                      <a:prstDash val="solid"/>
+                      <a:round/>
+                      <a:headEnd type="none" w="med" len="med"/>
+                      <a:tailEnd type="none" w="med" len="med"/>
+                    </a:lnT>
+                    <a:lnB w="6350" cap="flat" cmpd="sng" algn="ctr">
+                      <a:solidFill>
+                        <a:srgbClr val="D9DCE1"/>
+                      </a:solidFill>
+                      <a:prstDash val="solid"/>
+                      <a:round/>
+                      <a:headEnd type="none" w="med" len="med"/>
+                      <a:tailEnd type="none" w="med" len="med"/>
+                    </a:lnB>
+                  </a:tcPr>
+                </a:tc>
+                <a:tc>
+                  <a:txBody>
+                    <a:bodyPr/>
+                    <a:lstStyle/>
+                    <a:p>
+                      <a:pPr algn="ctr" indent="0" marL="0">
+                        <a:buNone/>
+                      </a:pPr>
+                      <a:r>
+                        <a:rPr lang="en-US" sz="950" b="1" dirty="0">
+                          <a:solidFill>
+                            <a:schemeClr val="accent3"/>
+                          </a:solidFill>
+                          <a:latin typeface="Calibri" pitchFamily="34" charset="0"/>
+                          <a:ea typeface="Calibri" pitchFamily="34" charset="-122"/>
+                          <a:cs typeface="Calibri" pitchFamily="34" charset="-120"/>
+                        </a:rPr>
+                        <a:t>same way</a:t>
+                      </a:r>
+                      <a:endParaRPr lang="en-US" sz="950" dirty="0">
+                        <a:latin typeface="Calibri" charset="0"/>
+                        <a:ea typeface="Calibri" charset="0"/>
+                        <a:cs typeface="Calibri" charset="0"/>
+                      </a:endParaRPr>
+                    </a:p>
+                  </a:txBody>
+                  <a:tcPr marL="27432" marR="27432" marT="27432" marB="27432">
+                    <a:lnL w="6350" cap="flat" cmpd="sng" algn="ctr">
+                      <a:solidFill>
+                        <a:srgbClr val="D9DCE1"/>
+                      </a:solidFill>
+                      <a:prstDash val="solid"/>
+                      <a:round/>
+                      <a:headEnd type="none" w="med" len="med"/>
+                      <a:tailEnd type="none" w="med" len="med"/>
+                    </a:lnL>
+                    <a:lnR w="6350" cap="flat" cmpd="sng" algn="ctr">
+                      <a:solidFill>
+                        <a:srgbClr val="D9DCE1"/>
+                      </a:solidFill>
+                      <a:prstDash val="solid"/>
+                      <a:round/>
+                      <a:headEnd type="none" w="med" len="med"/>
+                      <a:tailEnd type="none" w="med" len="med"/>
+                    </a:lnR>
+                    <a:lnT w="6350" cap="flat" cmpd="sng" algn="ctr">
+                      <a:solidFill>
+                        <a:srgbClr val="D9DCE1"/>
+                      </a:solidFill>
+                      <a:prstDash val="solid"/>
+                      <a:round/>
+                      <a:headEnd type="none" w="med" len="med"/>
+                      <a:tailEnd type="none" w="med" len="med"/>
+                    </a:lnT>
+                    <a:lnB w="6350" cap="flat" cmpd="sng" algn="ctr">
+                      <a:solidFill>
+                        <a:srgbClr val="D9DCE1"/>
+                      </a:solidFill>
+                      <a:prstDash val="solid"/>
+                      <a:round/>
+                      <a:headEnd type="none" w="med" len="med"/>
+                      <a:tailEnd type="none" w="med" len="med"/>
+                    </a:lnB>
+                  </a:tcPr>
+                </a:tc>
+                <a:tc>
+                  <a:txBody>
+                    <a:bodyPr/>
+                    <a:lstStyle/>
+                    <a:p>
+                      <a:pPr algn="ctr" indent="0" marL="0">
+                        <a:buNone/>
+                      </a:pPr>
+                      <a:r>
+                        <a:rPr lang="en-US" sz="950" dirty="0">
+                          <a:solidFill>
+                            <a:schemeClr val="tx1"/>
+                          </a:solidFill>
+                          <a:latin typeface="Calibri" pitchFamily="34" charset="0"/>
+                          <a:ea typeface="Calibri" pitchFamily="34" charset="-122"/>
+                          <a:cs typeface="Calibri" pitchFamily="34" charset="-120"/>
+                        </a:rPr>
+                        <a:t>minus 1.50</a:t>
+                      </a:r>
+                      <a:endParaRPr lang="en-US" sz="950" dirty="0">
+                        <a:latin typeface="Calibri" charset="0"/>
+                        <a:ea typeface="Calibri" charset="0"/>
+                        <a:cs typeface="Calibri" charset="0"/>
+                      </a:endParaRPr>
+                    </a:p>
+                  </a:txBody>
+                  <a:tcPr marL="27432" marR="27432" marT="27432" marB="27432">
+                    <a:lnL w="6350" cap="flat" cmpd="sng" algn="ctr">
+                      <a:solidFill>
+                        <a:srgbClr val="D9DCE1"/>
+                      </a:solidFill>
+                      <a:prstDash val="solid"/>
+                      <a:round/>
+                      <a:headEnd type="none" w="med" len="med"/>
+                      <a:tailEnd type="none" w="med" len="med"/>
+                    </a:lnL>
+                    <a:lnR w="6350" cap="flat" cmpd="sng" algn="ctr">
+                      <a:solidFill>
+                        <a:srgbClr val="D9DCE1"/>
+                      </a:solidFill>
+                      <a:prstDash val="solid"/>
+                      <a:round/>
+                      <a:headEnd type="none" w="med" len="med"/>
+                      <a:tailEnd type="none" w="med" len="med"/>
+                    </a:lnR>
+                    <a:lnT w="6350" cap="flat" cmpd="sng" algn="ctr">
+                      <a:solidFill>
+                        <a:srgbClr val="D9DCE1"/>
+                      </a:solidFill>
+                      <a:prstDash val="solid"/>
+                      <a:round/>
+                      <a:headEnd type="none" w="med" len="med"/>
+                      <a:tailEnd type="none" w="med" len="med"/>
+                    </a:lnT>
+                    <a:lnB w="6350" cap="flat" cmpd="sng" algn="ctr">
+                      <a:solidFill>
+                        <a:srgbClr val="D9DCE1"/>
+                      </a:solidFill>
+                      <a:prstDash val="solid"/>
+                      <a:round/>
+                      <a:headEnd type="none" w="med" len="med"/>
+                      <a:tailEnd type="none" w="med" len="med"/>
+                    </a:lnB>
+                  </a:tcPr>
+                </a:tc>
+                <a:tc>
+                  <a:txBody>
+                    <a:bodyPr/>
+                    <a:lstStyle/>
+                    <a:p>
+                      <a:pPr algn="ctr" indent="0" marL="0">
+                        <a:buNone/>
+                      </a:pPr>
+                      <a:r>
+                        <a:rPr lang="en-US" sz="950" b="1" dirty="0">
+                          <a:solidFill>
+                            <a:schemeClr val="accent3"/>
+                          </a:solidFill>
+                          <a:latin typeface="Calibri" pitchFamily="34" charset="0"/>
+                          <a:ea typeface="Calibri" pitchFamily="34" charset="-122"/>
+                          <a:cs typeface="Calibri" pitchFamily="34" charset="-120"/>
+                        </a:rPr>
+                        <a:t>same way</a:t>
+                      </a:r>
+                      <a:endParaRPr lang="en-US" sz="950" dirty="0">
+                        <a:latin typeface="Calibri" charset="0"/>
+                        <a:ea typeface="Calibri" charset="0"/>
+                        <a:cs typeface="Calibri" charset="0"/>
+                      </a:endParaRPr>
+                    </a:p>
+                  </a:txBody>
+                  <a:tcPr marL="27432" marR="27432" marT="27432" marB="27432">
+                    <a:lnL w="6350" cap="flat" cmpd="sng" algn="ctr">
+                      <a:solidFill>
+                        <a:srgbClr val="D9DCE1"/>
+                      </a:solidFill>
+                      <a:prstDash val="solid"/>
+                      <a:round/>
+                      <a:headEnd type="none" w="med" len="med"/>
+                      <a:tailEnd type="none" w="med" len="med"/>
+                    </a:lnL>
+                    <a:lnR w="6350" cap="flat" cmpd="sng" algn="ctr">
+                      <a:solidFill>
+                        <a:srgbClr val="D9DCE1"/>
+                      </a:solidFill>
+                      <a:prstDash val="solid"/>
+                      <a:round/>
+                      <a:headEnd type="none" w="med" len="med"/>
+                      <a:tailEnd type="none" w="med" len="med"/>
+                    </a:lnR>
+                    <a:lnT w="6350" cap="flat" cmpd="sng" algn="ctr">
+                      <a:solidFill>
+                        <a:srgbClr val="D9DCE1"/>
+                      </a:solidFill>
+                      <a:prstDash val="solid"/>
+                      <a:round/>
+                      <a:headEnd type="none" w="med" len="med"/>
+                      <a:tailEnd type="none" w="med" len="med"/>
+                    </a:lnT>
+                    <a:lnB w="6350" cap="flat" cmpd="sng" algn="ctr">
+                      <a:solidFill>
+                        <a:srgbClr val="D9DCE1"/>
+                      </a:solidFill>
+                      <a:prstDash val="solid"/>
+                      <a:round/>
+                      <a:headEnd type="none" w="med" len="med"/>
+                      <a:tailEnd type="none" w="med" len="med"/>
+                    </a:lnB>
+                  </a:tcPr>
+                </a:tc>
+              </a:tr>
+              <a:tr h="265176">
+                <a:tc>
+                  <a:txBody>
+                    <a:bodyPr/>
+                    <a:lstStyle/>
+                    <a:p>
+                      <a:pPr algn="l" indent="0" marL="0">
+                        <a:buNone/>
+                      </a:pPr>
+                      <a:r>
+                        <a:rPr lang="en-US" sz="950" dirty="0">
+                          <a:solidFill>
+                            <a:schemeClr val="tx1"/>
+                          </a:solidFill>
+                          <a:latin typeface="Calibri" pitchFamily="34" charset="0"/>
+                          <a:ea typeface="Calibri" pitchFamily="34" charset="-122"/>
+                          <a:cs typeface="Calibri" pitchFamily="34" charset="-120"/>
+                        </a:rPr>
+                        <a:t>Hike 2022 to 2023</a:t>
+                      </a:r>
+                      <a:endParaRPr lang="en-US" sz="950" dirty="0">
+                        <a:latin typeface="Calibri" charset="0"/>
+                        <a:ea typeface="Calibri" charset="0"/>
+                        <a:cs typeface="Calibri" charset="0"/>
+                      </a:endParaRPr>
+                    </a:p>
+                  </a:txBody>
+                  <a:tcPr marL="27432" marR="27432" marT="27432" marB="27432">
+                    <a:lnL w="6350" cap="flat" cmpd="sng" algn="ctr">
+                      <a:solidFill>
+                        <a:srgbClr val="D9DCE1"/>
+                      </a:solidFill>
+                      <a:prstDash val="solid"/>
+                      <a:round/>
+                      <a:headEnd type="none" w="med" len="med"/>
+                      <a:tailEnd type="none" w="med" len="med"/>
+                    </a:lnL>
+                    <a:lnR w="6350" cap="flat" cmpd="sng" algn="ctr">
+                      <a:solidFill>
+                        <a:srgbClr val="D9DCE1"/>
+                      </a:solidFill>
+                      <a:prstDash val="solid"/>
+                      <a:round/>
+                      <a:headEnd type="none" w="med" len="med"/>
+                      <a:tailEnd type="none" w="med" len="med"/>
+                    </a:lnR>
+                    <a:lnT w="6350" cap="flat" cmpd="sng" algn="ctr">
+                      <a:solidFill>
+                        <a:srgbClr val="D9DCE1"/>
+                      </a:solidFill>
+                      <a:prstDash val="solid"/>
+                      <a:round/>
+                      <a:headEnd type="none" w="med" len="med"/>
+                      <a:tailEnd type="none" w="med" len="med"/>
+                    </a:lnT>
+                    <a:lnB w="6350" cap="flat" cmpd="sng" algn="ctr">
+                      <a:solidFill>
+                        <a:srgbClr val="D9DCE1"/>
+                      </a:solidFill>
+                      <a:prstDash val="solid"/>
+                      <a:round/>
+                      <a:headEnd type="none" w="med" len="med"/>
+                      <a:tailEnd type="none" w="med" len="med"/>
+                    </a:lnB>
+                  </a:tcPr>
+                </a:tc>
+                <a:tc>
+                  <a:txBody>
+                    <a:bodyPr/>
+                    <a:lstStyle/>
+                    <a:p>
+                      <a:pPr algn="ctr" indent="0" marL="0">
+                        <a:buNone/>
+                      </a:pPr>
+                      <a:r>
+                        <a:rPr lang="en-US" sz="950" dirty="0">
+                          <a:solidFill>
+                            <a:schemeClr val="tx1"/>
+                          </a:solidFill>
+                          <a:latin typeface="Calibri" pitchFamily="34" charset="0"/>
+                          <a:ea typeface="Calibri" pitchFamily="34" charset="-122"/>
+                          <a:cs typeface="Calibri" pitchFamily="34" charset="-120"/>
+                        </a:rPr>
+                        <a:t>2.50</a:t>
+                      </a:r>
+                      <a:endParaRPr lang="en-US" sz="950" dirty="0">
+                        <a:latin typeface="Calibri" charset="0"/>
+                        <a:ea typeface="Calibri" charset="0"/>
+                        <a:cs typeface="Calibri" charset="0"/>
+                      </a:endParaRPr>
+                    </a:p>
+                  </a:txBody>
+                  <a:tcPr marL="27432" marR="27432" marT="27432" marB="27432">
+                    <a:lnL w="6350" cap="flat" cmpd="sng" algn="ctr">
+                      <a:solidFill>
+                        <a:srgbClr val="D9DCE1"/>
+                      </a:solidFill>
+                      <a:prstDash val="solid"/>
+                      <a:round/>
+                      <a:headEnd type="none" w="med" len="med"/>
+                      <a:tailEnd type="none" w="med" len="med"/>
+                    </a:lnL>
+                    <a:lnR w="6350" cap="flat" cmpd="sng" algn="ctr">
+                      <a:solidFill>
+                        <a:srgbClr val="D9DCE1"/>
+                      </a:solidFill>
+                      <a:prstDash val="solid"/>
+                      <a:round/>
+                      <a:headEnd type="none" w="med" len="med"/>
+                      <a:tailEnd type="none" w="med" len="med"/>
+                    </a:lnR>
+                    <a:lnT w="6350" cap="flat" cmpd="sng" algn="ctr">
+                      <a:solidFill>
+                        <a:srgbClr val="D9DCE1"/>
+                      </a:solidFill>
+                      <a:prstDash val="solid"/>
+                      <a:round/>
+                      <a:headEnd type="none" w="med" len="med"/>
+                      <a:tailEnd type="none" w="med" len="med"/>
+                    </a:lnT>
+                    <a:lnB w="6350" cap="flat" cmpd="sng" algn="ctr">
+                      <a:solidFill>
+                        <a:srgbClr val="D9DCE1"/>
+                      </a:solidFill>
+                      <a:prstDash val="solid"/>
+                      <a:round/>
+                      <a:headEnd type="none" w="med" len="med"/>
+                      <a:tailEnd type="none" w="med" len="med"/>
+                    </a:lnB>
+                  </a:tcPr>
+                </a:tc>
+                <a:tc>
+                  <a:txBody>
+                    <a:bodyPr/>
+                    <a:lstStyle/>
+                    <a:p>
+                      <a:pPr algn="ctr" indent="0" marL="0">
+                        <a:buNone/>
+                      </a:pPr>
+                      <a:r>
+                        <a:rPr lang="en-US" sz="950" dirty="0">
+                          <a:solidFill>
+                            <a:schemeClr val="tx1"/>
+                          </a:solidFill>
+                          <a:latin typeface="Calibri" pitchFamily="34" charset="0"/>
+                          <a:ea typeface="Calibri" pitchFamily="34" charset="-122"/>
+                          <a:cs typeface="Calibri" pitchFamily="34" charset="-120"/>
+                        </a:rPr>
+                        <a:t>0.02</a:t>
+                      </a:r>
+                      <a:endParaRPr lang="en-US" sz="950" dirty="0">
+                        <a:latin typeface="Calibri" charset="0"/>
+                        <a:ea typeface="Calibri" charset="0"/>
+                        <a:cs typeface="Calibri" charset="0"/>
+                      </a:endParaRPr>
+                    </a:p>
+                  </a:txBody>
+                  <a:tcPr marL="27432" marR="27432" marT="27432" marB="27432">
+                    <a:lnL w="6350" cap="flat" cmpd="sng" algn="ctr">
+                      <a:solidFill>
+                        <a:srgbClr val="D9DCE1"/>
+                      </a:solidFill>
+                      <a:prstDash val="solid"/>
+                      <a:round/>
+                      <a:headEnd type="none" w="med" len="med"/>
+                      <a:tailEnd type="none" w="med" len="med"/>
+                    </a:lnL>
+                    <a:lnR w="6350" cap="flat" cmpd="sng" algn="ctr">
+                      <a:solidFill>
+                        <a:srgbClr val="D9DCE1"/>
+                      </a:solidFill>
+                      <a:prstDash val="solid"/>
+                      <a:round/>
+                      <a:headEnd type="none" w="med" len="med"/>
+                      <a:tailEnd type="none" w="med" len="med"/>
+                    </a:lnR>
+                    <a:lnT w="6350" cap="flat" cmpd="sng" algn="ctr">
+                      <a:solidFill>
+                        <a:srgbClr val="D9DCE1"/>
+                      </a:solidFill>
+                      <a:prstDash val="solid"/>
+                      <a:round/>
+                      <a:headEnd type="none" w="med" len="med"/>
+                      <a:tailEnd type="none" w="med" len="med"/>
+                    </a:lnT>
+                    <a:lnB w="6350" cap="flat" cmpd="sng" algn="ctr">
+                      <a:solidFill>
+                        <a:srgbClr val="D9DCE1"/>
+                      </a:solidFill>
+                      <a:prstDash val="solid"/>
+                      <a:round/>
+                      <a:headEnd type="none" w="med" len="med"/>
+                      <a:tailEnd type="none" w="med" len="med"/>
+                    </a:lnB>
+                  </a:tcPr>
+                </a:tc>
+                <a:tc>
+                  <a:txBody>
+                    <a:bodyPr/>
+                    <a:lstStyle/>
+                    <a:p>
+                      <a:pPr algn="ctr" indent="0" marL="0">
+                        <a:buNone/>
+                      </a:pPr>
+                      <a:r>
+                        <a:rPr lang="en-US" sz="950" dirty="0">
+                          <a:solidFill>
+                            <a:schemeClr val="accent4"/>
+                          </a:solidFill>
+                          <a:latin typeface="Calibri" pitchFamily="34" charset="0"/>
+                          <a:ea typeface="Calibri" pitchFamily="34" charset="-122"/>
+                          <a:cs typeface="Calibri" pitchFamily="34" charset="-120"/>
+                        </a:rPr>
+                        <a:t>no</a:t>
+                      </a:r>
+                      <a:endParaRPr lang="en-US" sz="950" dirty="0">
+                        <a:latin typeface="Calibri" charset="0"/>
+                        <a:ea typeface="Calibri" charset="0"/>
+                        <a:cs typeface="Calibri" charset="0"/>
+                      </a:endParaRPr>
+                    </a:p>
+                  </a:txBody>
+                  <a:tcPr marL="27432" marR="27432" marT="27432" marB="27432">
+                    <a:lnL w="6350" cap="flat" cmpd="sng" algn="ctr">
+                      <a:solidFill>
+                        <a:srgbClr val="D9DCE1"/>
+                      </a:solidFill>
+                      <a:prstDash val="solid"/>
+                      <a:round/>
+                      <a:headEnd type="none" w="med" len="med"/>
+                      <a:tailEnd type="none" w="med" len="med"/>
+                    </a:lnL>
+                    <a:lnR w="6350" cap="flat" cmpd="sng" algn="ctr">
+                      <a:solidFill>
+                        <a:srgbClr val="D9DCE1"/>
+                      </a:solidFill>
+                      <a:prstDash val="solid"/>
+                      <a:round/>
+                      <a:headEnd type="none" w="med" len="med"/>
+                      <a:tailEnd type="none" w="med" len="med"/>
+                    </a:lnR>
+                    <a:lnT w="6350" cap="flat" cmpd="sng" algn="ctr">
+                      <a:solidFill>
+                        <a:srgbClr val="D9DCE1"/>
+                      </a:solidFill>
+                      <a:prstDash val="solid"/>
+                      <a:round/>
+                      <a:headEnd type="none" w="med" len="med"/>
+                      <a:tailEnd type="none" w="med" len="med"/>
+                    </a:lnT>
+                    <a:lnB w="6350" cap="flat" cmpd="sng" algn="ctr">
+                      <a:solidFill>
+                        <a:srgbClr val="D9DCE1"/>
+                      </a:solidFill>
+                      <a:prstDash val="solid"/>
+                      <a:round/>
+                      <a:headEnd type="none" w="med" len="med"/>
+                      <a:tailEnd type="none" w="med" len="med"/>
+                    </a:lnB>
+                  </a:tcPr>
+                </a:tc>
+                <a:tc>
+                  <a:txBody>
+                    <a:bodyPr/>
+                    <a:lstStyle/>
+                    <a:p>
+                      <a:pPr algn="ctr" indent="0" marL="0">
+                        <a:buNone/>
+                      </a:pPr>
+                      <a:r>
+                        <a:rPr lang="en-US" sz="950" dirty="0">
+                          <a:solidFill>
+                            <a:schemeClr val="tx1"/>
+                          </a:solidFill>
+                          <a:latin typeface="Calibri" pitchFamily="34" charset="0"/>
+                          <a:ea typeface="Calibri" pitchFamily="34" charset="-122"/>
+                          <a:cs typeface="Calibri" pitchFamily="34" charset="-120"/>
+                        </a:rPr>
+                        <a:t>1.50</a:t>
+                      </a:r>
+                      <a:endParaRPr lang="en-US" sz="950" dirty="0">
+                        <a:latin typeface="Calibri" charset="0"/>
+                        <a:ea typeface="Calibri" charset="0"/>
+                        <a:cs typeface="Calibri" charset="0"/>
+                      </a:endParaRPr>
+                    </a:p>
+                  </a:txBody>
+                  <a:tcPr marL="27432" marR="27432" marT="27432" marB="27432">
+                    <a:lnL w="6350" cap="flat" cmpd="sng" algn="ctr">
+                      <a:solidFill>
+                        <a:srgbClr val="D9DCE1"/>
+                      </a:solidFill>
+                      <a:prstDash val="solid"/>
+                      <a:round/>
+                      <a:headEnd type="none" w="med" len="med"/>
+                      <a:tailEnd type="none" w="med" len="med"/>
+                    </a:lnL>
+                    <a:lnR w="6350" cap="flat" cmpd="sng" algn="ctr">
+                      <a:solidFill>
+                        <a:srgbClr val="D9DCE1"/>
+                      </a:solidFill>
+                      <a:prstDash val="solid"/>
+                      <a:round/>
+                      <a:headEnd type="none" w="med" len="med"/>
+                      <a:tailEnd type="none" w="med" len="med"/>
+                    </a:lnR>
+                    <a:lnT w="6350" cap="flat" cmpd="sng" algn="ctr">
+                      <a:solidFill>
+                        <a:srgbClr val="D9DCE1"/>
+                      </a:solidFill>
+                      <a:prstDash val="solid"/>
+                      <a:round/>
+                      <a:headEnd type="none" w="med" len="med"/>
+                      <a:tailEnd type="none" w="med" len="med"/>
+                    </a:lnT>
+                    <a:lnB w="6350" cap="flat" cmpd="sng" algn="ctr">
+                      <a:solidFill>
+                        <a:srgbClr val="D9DCE1"/>
+                      </a:solidFill>
+                      <a:prstDash val="solid"/>
+                      <a:round/>
+                      <a:headEnd type="none" w="med" len="med"/>
+                      <a:tailEnd type="none" w="med" len="med"/>
+                    </a:lnB>
+                  </a:tcPr>
+                </a:tc>
+                <a:tc>
+                  <a:txBody>
+                    <a:bodyPr/>
+                    <a:lstStyle/>
+                    <a:p>
+                      <a:pPr algn="ctr" indent="0" marL="0">
+                        <a:buNone/>
+                      </a:pPr>
+                      <a:r>
+                        <a:rPr lang="en-US" sz="950" b="1" dirty="0">
+                          <a:solidFill>
+                            <a:schemeClr val="accent3"/>
+                          </a:solidFill>
+                          <a:latin typeface="Calibri" pitchFamily="34" charset="0"/>
+                          <a:ea typeface="Calibri" pitchFamily="34" charset="-122"/>
+                          <a:cs typeface="Calibri" pitchFamily="34" charset="-120"/>
+                        </a:rPr>
+                        <a:t>same way</a:t>
+                      </a:r>
+                      <a:endParaRPr lang="en-US" sz="950" dirty="0">
+                        <a:latin typeface="Calibri" charset="0"/>
+                        <a:ea typeface="Calibri" charset="0"/>
+                        <a:cs typeface="Calibri" charset="0"/>
+                      </a:endParaRPr>
+                    </a:p>
+                  </a:txBody>
+                  <a:tcPr marL="27432" marR="27432" marT="27432" marB="27432">
+                    <a:lnL w="6350" cap="flat" cmpd="sng" algn="ctr">
+                      <a:solidFill>
+                        <a:srgbClr val="D9DCE1"/>
+                      </a:solidFill>
+                      <a:prstDash val="solid"/>
+                      <a:round/>
+                      <a:headEnd type="none" w="med" len="med"/>
+                      <a:tailEnd type="none" w="med" len="med"/>
+                    </a:lnL>
+                    <a:lnR w="6350" cap="flat" cmpd="sng" algn="ctr">
+                      <a:solidFill>
+                        <a:srgbClr val="D9DCE1"/>
+                      </a:solidFill>
+                      <a:prstDash val="solid"/>
+                      <a:round/>
+                      <a:headEnd type="none" w="med" len="med"/>
+                      <a:tailEnd type="none" w="med" len="med"/>
+                    </a:lnR>
+                    <a:lnT w="6350" cap="flat" cmpd="sng" algn="ctr">
+                      <a:solidFill>
+                        <a:srgbClr val="D9DCE1"/>
+                      </a:solidFill>
+                      <a:prstDash val="solid"/>
+                      <a:round/>
+                      <a:headEnd type="none" w="med" len="med"/>
+                      <a:tailEnd type="none" w="med" len="med"/>
+                    </a:lnT>
+                    <a:lnB w="6350" cap="flat" cmpd="sng" algn="ctr">
+                      <a:solidFill>
+                        <a:srgbClr val="D9DCE1"/>
+                      </a:solidFill>
+                      <a:prstDash val="solid"/>
+                      <a:round/>
+                      <a:headEnd type="none" w="med" len="med"/>
+                      <a:tailEnd type="none" w="med" len="med"/>
+                    </a:lnB>
+                  </a:tcPr>
+                </a:tc>
+              </a:tr>
+              <a:tr h="265176">
+                <a:tc>
+                  <a:txBody>
+                    <a:bodyPr/>
+                    <a:lstStyle/>
+                    <a:p>
+                      <a:pPr algn="l" indent="0" marL="0">
+                        <a:buNone/>
+                      </a:pPr>
+                      <a:r>
+                        <a:rPr lang="en-US" sz="950" dirty="0">
+                          <a:solidFill>
+                            <a:schemeClr val="tx1"/>
+                          </a:solidFill>
+                          <a:latin typeface="Calibri" pitchFamily="34" charset="0"/>
+                          <a:ea typeface="Calibri" pitchFamily="34" charset="-122"/>
+                          <a:cs typeface="Calibri" pitchFamily="34" charset="-120"/>
+                        </a:rPr>
+                        <a:t>Cut 2025</a:t>
+                      </a:r>
+                      <a:endParaRPr lang="en-US" sz="950" dirty="0">
+                        <a:latin typeface="Calibri" charset="0"/>
+                        <a:ea typeface="Calibri" charset="0"/>
+                        <a:cs typeface="Calibri" charset="0"/>
+                      </a:endParaRPr>
+                    </a:p>
+                  </a:txBody>
+                  <a:tcPr marL="27432" marR="27432" marT="27432" marB="27432">
+                    <a:lnL w="6350" cap="flat" cmpd="sng" algn="ctr">
+                      <a:solidFill>
+                        <a:srgbClr val="D9DCE1"/>
+                      </a:solidFill>
+                      <a:prstDash val="solid"/>
+                      <a:round/>
+                      <a:headEnd type="none" w="med" len="med"/>
+                      <a:tailEnd type="none" w="med" len="med"/>
+                    </a:lnL>
+                    <a:lnR w="6350" cap="flat" cmpd="sng" algn="ctr">
+                      <a:solidFill>
+                        <a:srgbClr val="D9DCE1"/>
+                      </a:solidFill>
+                      <a:prstDash val="solid"/>
+                      <a:round/>
+                      <a:headEnd type="none" w="med" len="med"/>
+                      <a:tailEnd type="none" w="med" len="med"/>
+                    </a:lnR>
+                    <a:lnT w="6350" cap="flat" cmpd="sng" algn="ctr">
+                      <a:solidFill>
+                        <a:srgbClr val="D9DCE1"/>
+                      </a:solidFill>
+                      <a:prstDash val="solid"/>
+                      <a:round/>
+                      <a:headEnd type="none" w="med" len="med"/>
+                      <a:tailEnd type="none" w="med" len="med"/>
+                    </a:lnT>
+                    <a:lnB w="6350" cap="flat" cmpd="sng" algn="ctr">
+                      <a:solidFill>
+                        <a:srgbClr val="D9DCE1"/>
+                      </a:solidFill>
+                      <a:prstDash val="solid"/>
+                      <a:round/>
+                      <a:headEnd type="none" w="med" len="med"/>
+                      <a:tailEnd type="none" w="med" len="med"/>
+                    </a:lnB>
+                  </a:tcPr>
+                </a:tc>
+                <a:tc>
+                  <a:txBody>
+                    <a:bodyPr/>
+                    <a:lstStyle/>
+                    <a:p>
+                      <a:pPr algn="ctr" indent="0" marL="0">
+                        <a:buNone/>
+                      </a:pPr>
+                      <a:r>
+                        <a:rPr lang="en-US" sz="950" dirty="0">
+                          <a:solidFill>
+                            <a:schemeClr val="tx1"/>
+                          </a:solidFill>
+                          <a:latin typeface="Calibri" pitchFamily="34" charset="0"/>
+                          <a:ea typeface="Calibri" pitchFamily="34" charset="-122"/>
+                          <a:cs typeface="Calibri" pitchFamily="34" charset="-120"/>
+                        </a:rPr>
+                        <a:t>minus 1.25</a:t>
+                      </a:r>
+                      <a:endParaRPr lang="en-US" sz="950" dirty="0">
+                        <a:latin typeface="Calibri" charset="0"/>
+                        <a:ea typeface="Calibri" charset="0"/>
+                        <a:cs typeface="Calibri" charset="0"/>
+                      </a:endParaRPr>
+                    </a:p>
+                  </a:txBody>
+                  <a:tcPr marL="27432" marR="27432" marT="27432" marB="27432">
+                    <a:lnL w="6350" cap="flat" cmpd="sng" algn="ctr">
+                      <a:solidFill>
+                        <a:srgbClr val="D9DCE1"/>
+                      </a:solidFill>
+                      <a:prstDash val="solid"/>
+                      <a:round/>
+                      <a:headEnd type="none" w="med" len="med"/>
+                      <a:tailEnd type="none" w="med" len="med"/>
+                    </a:lnL>
+                    <a:lnR w="6350" cap="flat" cmpd="sng" algn="ctr">
+                      <a:solidFill>
+                        <a:srgbClr val="D9DCE1"/>
+                      </a:solidFill>
+                      <a:prstDash val="solid"/>
+                      <a:round/>
+                      <a:headEnd type="none" w="med" len="med"/>
+                      <a:tailEnd type="none" w="med" len="med"/>
+                    </a:lnR>
+                    <a:lnT w="6350" cap="flat" cmpd="sng" algn="ctr">
+                      <a:solidFill>
+                        <a:srgbClr val="D9DCE1"/>
+                      </a:solidFill>
+                      <a:prstDash val="solid"/>
+                      <a:round/>
+                      <a:headEnd type="none" w="med" len="med"/>
+                      <a:tailEnd type="none" w="med" len="med"/>
+                    </a:lnT>
+                    <a:lnB w="6350" cap="flat" cmpd="sng" algn="ctr">
+                      <a:solidFill>
+                        <a:srgbClr val="D9DCE1"/>
+                      </a:solidFill>
+                      <a:prstDash val="solid"/>
+                      <a:round/>
+                      <a:headEnd type="none" w="med" len="med"/>
+                      <a:tailEnd type="none" w="med" len="med"/>
+                    </a:lnB>
+                  </a:tcPr>
+                </a:tc>
+                <a:tc>
+                  <a:txBody>
+                    <a:bodyPr/>
+                    <a:lstStyle/>
+                    <a:p>
+                      <a:pPr algn="ctr" indent="0" marL="0">
+                        <a:buNone/>
+                      </a:pPr>
+                      <a:r>
+                        <a:rPr lang="en-US" sz="950" dirty="0">
+                          <a:solidFill>
+                            <a:schemeClr val="tx1"/>
+                          </a:solidFill>
+                          <a:latin typeface="Calibri" pitchFamily="34" charset="0"/>
+                          <a:ea typeface="Calibri" pitchFamily="34" charset="-122"/>
+                          <a:cs typeface="Calibri" pitchFamily="34" charset="-120"/>
+                        </a:rPr>
+                        <a:t>minus 0.30</a:t>
+                      </a:r>
+                      <a:endParaRPr lang="en-US" sz="950" dirty="0">
+                        <a:latin typeface="Calibri" charset="0"/>
+                        <a:ea typeface="Calibri" charset="0"/>
+                        <a:cs typeface="Calibri" charset="0"/>
+                      </a:endParaRPr>
+                    </a:p>
+                  </a:txBody>
+                  <a:tcPr marL="27432" marR="27432" marT="27432" marB="27432">
+                    <a:lnL w="6350" cap="flat" cmpd="sng" algn="ctr">
+                      <a:solidFill>
+                        <a:srgbClr val="D9DCE1"/>
+                      </a:solidFill>
+                      <a:prstDash val="solid"/>
+                      <a:round/>
+                      <a:headEnd type="none" w="med" len="med"/>
+                      <a:tailEnd type="none" w="med" len="med"/>
+                    </a:lnL>
+                    <a:lnR w="6350" cap="flat" cmpd="sng" algn="ctr">
+                      <a:solidFill>
+                        <a:srgbClr val="D9DCE1"/>
+                      </a:solidFill>
+                      <a:prstDash val="solid"/>
+                      <a:round/>
+                      <a:headEnd type="none" w="med" len="med"/>
+                      <a:tailEnd type="none" w="med" len="med"/>
+                    </a:lnR>
+                    <a:lnT w="6350" cap="flat" cmpd="sng" algn="ctr">
+                      <a:solidFill>
+                        <a:srgbClr val="D9DCE1"/>
+                      </a:solidFill>
+                      <a:prstDash val="solid"/>
+                      <a:round/>
+                      <a:headEnd type="none" w="med" len="med"/>
+                      <a:tailEnd type="none" w="med" len="med"/>
+                    </a:lnT>
+                    <a:lnB w="6350" cap="flat" cmpd="sng" algn="ctr">
+                      <a:solidFill>
+                        <a:srgbClr val="D9DCE1"/>
+                      </a:solidFill>
+                      <a:prstDash val="solid"/>
+                      <a:round/>
+                      <a:headEnd type="none" w="med" len="med"/>
+                      <a:tailEnd type="none" w="med" len="med"/>
+                    </a:lnB>
+                  </a:tcPr>
+                </a:tc>
+                <a:tc>
+                  <a:txBody>
+                    <a:bodyPr/>
+                    <a:lstStyle/>
+                    <a:p>
+                      <a:pPr algn="ctr" indent="0" marL="0">
+                        <a:buNone/>
+                      </a:pPr>
+                      <a:r>
+                        <a:rPr lang="en-US" sz="950" b="1" dirty="0">
+                          <a:solidFill>
+                            <a:schemeClr val="accent3"/>
+                          </a:solidFill>
+                          <a:latin typeface="Calibri" pitchFamily="34" charset="0"/>
+                          <a:ea typeface="Calibri" pitchFamily="34" charset="-122"/>
+                          <a:cs typeface="Calibri" pitchFamily="34" charset="-120"/>
+                        </a:rPr>
+                        <a:t>same way</a:t>
+                      </a:r>
+                      <a:endParaRPr lang="en-US" sz="950" dirty="0">
+                        <a:latin typeface="Calibri" charset="0"/>
+                        <a:ea typeface="Calibri" charset="0"/>
+                        <a:cs typeface="Calibri" charset="0"/>
+                      </a:endParaRPr>
+                    </a:p>
+                  </a:txBody>
+                  <a:tcPr marL="27432" marR="27432" marT="27432" marB="27432">
+                    <a:lnL w="6350" cap="flat" cmpd="sng" algn="ctr">
+                      <a:solidFill>
+                        <a:srgbClr val="D9DCE1"/>
+                      </a:solidFill>
+                      <a:prstDash val="solid"/>
+                      <a:round/>
+                      <a:headEnd type="none" w="med" len="med"/>
+                      <a:tailEnd type="none" w="med" len="med"/>
+                    </a:lnL>
+                    <a:lnR w="6350" cap="flat" cmpd="sng" algn="ctr">
+                      <a:solidFill>
+                        <a:srgbClr val="D9DCE1"/>
+                      </a:solidFill>
+                      <a:prstDash val="solid"/>
+                      <a:round/>
+                      <a:headEnd type="none" w="med" len="med"/>
+                      <a:tailEnd type="none" w="med" len="med"/>
+                    </a:lnR>
+                    <a:lnT w="6350" cap="flat" cmpd="sng" algn="ctr">
+                      <a:solidFill>
+                        <a:srgbClr val="D9DCE1"/>
+                      </a:solidFill>
+                      <a:prstDash val="solid"/>
+                      <a:round/>
+                      <a:headEnd type="none" w="med" len="med"/>
+                      <a:tailEnd type="none" w="med" len="med"/>
+                    </a:lnT>
+                    <a:lnB w="6350" cap="flat" cmpd="sng" algn="ctr">
+                      <a:solidFill>
+                        <a:srgbClr val="D9DCE1"/>
+                      </a:solidFill>
+                      <a:prstDash val="solid"/>
+                      <a:round/>
+                      <a:headEnd type="none" w="med" len="med"/>
+                      <a:tailEnd type="none" w="med" len="med"/>
+                    </a:lnB>
+                  </a:tcPr>
+                </a:tc>
+                <a:tc>
+                  <a:txBody>
+                    <a:bodyPr/>
+                    <a:lstStyle/>
+                    <a:p>
+                      <a:pPr algn="ctr" indent="0" marL="0">
+                        <a:buNone/>
+                      </a:pPr>
+                      <a:r>
+                        <a:rPr lang="en-US" sz="950" dirty="0">
+                          <a:solidFill>
+                            <a:schemeClr val="tx1"/>
+                          </a:solidFill>
+                          <a:latin typeface="Calibri" pitchFamily="34" charset="0"/>
+                          <a:ea typeface="Calibri" pitchFamily="34" charset="-122"/>
+                          <a:cs typeface="Calibri" pitchFamily="34" charset="-120"/>
+                        </a:rPr>
+                        <a:t>minus 0.75</a:t>
+                      </a:r>
+                      <a:endParaRPr lang="en-US" sz="950" dirty="0">
+                        <a:latin typeface="Calibri" charset="0"/>
+                        <a:ea typeface="Calibri" charset="0"/>
+                        <a:cs typeface="Calibri" charset="0"/>
+                      </a:endParaRPr>
+                    </a:p>
+                  </a:txBody>
+                  <a:tcPr marL="27432" marR="27432" marT="27432" marB="27432">
+                    <a:lnL w="6350" cap="flat" cmpd="sng" algn="ctr">
+                      <a:solidFill>
+                        <a:srgbClr val="D9DCE1"/>
+                      </a:solidFill>
+                      <a:prstDash val="solid"/>
+                      <a:round/>
+                      <a:headEnd type="none" w="med" len="med"/>
+                      <a:tailEnd type="none" w="med" len="med"/>
+                    </a:lnL>
+                    <a:lnR w="6350" cap="flat" cmpd="sng" algn="ctr">
+                      <a:solidFill>
+                        <a:srgbClr val="D9DCE1"/>
+                      </a:solidFill>
+                      <a:prstDash val="solid"/>
+                      <a:round/>
+                      <a:headEnd type="none" w="med" len="med"/>
+                      <a:tailEnd type="none" w="med" len="med"/>
+                    </a:lnR>
+                    <a:lnT w="6350" cap="flat" cmpd="sng" algn="ctr">
+                      <a:solidFill>
+                        <a:srgbClr val="D9DCE1"/>
+                      </a:solidFill>
+                      <a:prstDash val="solid"/>
+                      <a:round/>
+                      <a:headEnd type="none" w="med" len="med"/>
+                      <a:tailEnd type="none" w="med" len="med"/>
+                    </a:lnT>
+                    <a:lnB w="6350" cap="flat" cmpd="sng" algn="ctr">
+                      <a:solidFill>
+                        <a:srgbClr val="D9DCE1"/>
+                      </a:solidFill>
+                      <a:prstDash val="solid"/>
+                      <a:round/>
+                      <a:headEnd type="none" w="med" len="med"/>
+                      <a:tailEnd type="none" w="med" len="med"/>
+                    </a:lnB>
+                  </a:tcPr>
+                </a:tc>
+                <a:tc>
+                  <a:txBody>
+                    <a:bodyPr/>
+                    <a:lstStyle/>
+                    <a:p>
+                      <a:pPr algn="ctr" indent="0" marL="0">
+                        <a:buNone/>
+                      </a:pPr>
+                      <a:r>
+                        <a:rPr lang="en-US" sz="950" b="1" dirty="0">
+                          <a:solidFill>
+                            <a:schemeClr val="accent3"/>
+                          </a:solidFill>
+                          <a:latin typeface="Calibri" pitchFamily="34" charset="0"/>
+                          <a:ea typeface="Calibri" pitchFamily="34" charset="-122"/>
+                          <a:cs typeface="Calibri" pitchFamily="34" charset="-120"/>
+                        </a:rPr>
+                        <a:t>same way</a:t>
+                      </a:r>
+                      <a:endParaRPr lang="en-US" sz="950" dirty="0">
+                        <a:latin typeface="Calibri" charset="0"/>
+                        <a:ea typeface="Calibri" charset="0"/>
+                        <a:cs typeface="Calibri" charset="0"/>
+                      </a:endParaRPr>
+                    </a:p>
+                  </a:txBody>
+                  <a:tcPr marL="27432" marR="27432" marT="27432" marB="27432">
+                    <a:lnL w="6350" cap="flat" cmpd="sng" algn="ctr">
+                      <a:solidFill>
+                        <a:srgbClr val="D9DCE1"/>
+                      </a:solidFill>
+                      <a:prstDash val="solid"/>
+                      <a:round/>
+                      <a:headEnd type="none" w="med" len="med"/>
+                      <a:tailEnd type="none" w="med" len="med"/>
+                    </a:lnL>
+                    <a:lnR w="6350" cap="flat" cmpd="sng" algn="ctr">
+                      <a:solidFill>
+                        <a:srgbClr val="D9DCE1"/>
+                      </a:solidFill>
+                      <a:prstDash val="solid"/>
+                      <a:round/>
+                      <a:headEnd type="none" w="med" len="med"/>
+                      <a:tailEnd type="none" w="med" len="med"/>
+                    </a:lnR>
+                    <a:lnT w="6350" cap="flat" cmpd="sng" algn="ctr">
+                      <a:solidFill>
+                        <a:srgbClr val="D9DCE1"/>
+                      </a:solidFill>
+                      <a:prstDash val="solid"/>
+                      <a:round/>
+                      <a:headEnd type="none" w="med" len="med"/>
+                      <a:tailEnd type="none" w="med" len="med"/>
+                    </a:lnT>
+                    <a:lnB w="6350" cap="flat" cmpd="sng" algn="ctr">
+                      <a:solidFill>
+                        <a:srgbClr val="D9DCE1"/>
+                      </a:solidFill>
+                      <a:prstDash val="solid"/>
+                      <a:round/>
+                      <a:headEnd type="none" w="med" len="med"/>
+                      <a:tailEnd type="none" w="med" len="med"/>
+                    </a:lnB>
+                  </a:tcPr>
+                </a:tc>
+              </a:tr>
+            </a:tbl>
+          </a:graphicData>
+        </a:graphic>
+      </p:graphicFrame>
+      <p:sp>
+        <p:nvSpPr>
+          <p:cNvPr id="4" name="nc-read"/>
+          <p:cNvSpPr/>
+          <p:nvPr/>
+        </p:nvSpPr>
+        <p:spPr>
+          <a:xfrm>
+            <a:off x="6355080" y="1005840"/>
+            <a:ext cx="2331720" cy="3566160"/>
+          </a:xfrm>
+          <a:prstGeom prst="roundRect">
+            <a:avLst>
+              <a:gd name="adj" fmla="val 3137"/>
+            </a:avLst>
+          </a:prstGeom>
+          <a:solidFill>
+            <a:schemeClr val="bg2"/>
+          </a:solidFill>
+          <a:ln/>
+        </p:spPr>
+      </p:sp>
+      <p:sp>
+        <p:nvSpPr>
+          <p:cNvPr id="5" name="Text 2"/>
+          <p:cNvSpPr txBox="1"/>
+          <p:nvPr/>
+        </p:nvSpPr>
+        <p:spPr>
+          <a:xfrm>
+            <a:off x="6492240" y="1143000"/>
+            <a:ext cx="2103120" cy="3337560"/>
+          </a:xfrm>
+          <a:prstGeom prst="rect">
+            <a:avLst/>
+          </a:prstGeom>
+          <a:noFill/>
+          <a:ln/>
+        </p:spPr>
+        <p:txBody>
+          <a:bodyPr wrap="square" lIns="0" tIns="0" rIns="0" bIns="0" rtlCol="0" anchor="t"/>
+          <a:lstStyle/>
+          <a:p>
+            <a:pPr indent="0" marL="0">
+              <a:buNone/>
+            </a:pPr>
+            <a:r>
+              <a:rPr lang="en-US" sz="1100" b="1" dirty="0">
+                <a:solidFill>
+                  <a:schemeClr val="accent2"/>
+                </a:solidFill>
+                <a:latin typeface="Calibri" pitchFamily="34" charset="0"/>
+                <a:ea typeface="Calibri" pitchFamily="34" charset="-122"/>
+                <a:cs typeface="Calibri" pitchFamily="34" charset="-120"/>
+              </a:rPr>
+              <a:t>Market rate: 6 of 12</a:t>
+            </a:r>
+            <a:endParaRPr lang="en-US" sz="1100" dirty="0"/>
+          </a:p>
+          <a:p>
+            <a:pPr indent="0" marL="0">
+              <a:buNone/>
+            </a:pPr>
+            <a:r>
+              <a:rPr lang="en-US" sz="1100" dirty="0">
+                <a:solidFill>
+                  <a:schemeClr val="tx1"/>
+                </a:solidFill>
+                <a:latin typeface="Calibri" pitchFamily="34" charset="0"/>
+                <a:ea typeface="Calibri" pitchFamily="34" charset="-122"/>
+                <a:cs typeface="Calibri" pitchFamily="34" charset="-120"/>
+              </a:rPr>
+              <a:t>Nepal's interbank rate moved the RBI's way only half the time: in 2010 it fell 10.7 points while India hiked.</a:t>
+            </a:r>
+            <a:endParaRPr lang="en-US" sz="1100" dirty="0"/>
+          </a:p>
+          <a:p>
+            <a:pPr indent="0" marL="0">
+              <a:buNone/>
+            </a:pPr>
+            <a:r>
+              <a:rPr lang="en-US" sz="600" dirty="0">
+                <a:solidFill>
+                  <a:schemeClr val="tx1"/>
+                </a:solidFill>
+                <a:latin typeface="Calibri" pitchFamily="34" charset="0"/>
+                <a:ea typeface="Calibri" pitchFamily="34" charset="-122"/>
+                <a:cs typeface="Calibri" pitchFamily="34" charset="-120"/>
+              </a:rPr>
+              <a:t> </a:t>
+            </a:r>
+            <a:endParaRPr lang="en-US" sz="1100" dirty="0"/>
+          </a:p>
+          <a:p>
+            <a:pPr indent="0" marL="0">
+              <a:buNone/>
+            </a:pPr>
+            <a:r>
+              <a:rPr lang="en-US" sz="1100" b="1" dirty="0">
+                <a:solidFill>
+                  <a:schemeClr val="accent1"/>
+                </a:solidFill>
+                <a:latin typeface="Calibri" pitchFamily="34" charset="0"/>
+                <a:ea typeface="Calibri" pitchFamily="34" charset="-122"/>
+                <a:cs typeface="Calibri" pitchFamily="34" charset="-120"/>
+              </a:rPr>
+              <a:t>Why it matters</a:t>
+            </a:r>
+            <a:endParaRPr lang="en-US" sz="1100" dirty="0"/>
+          </a:p>
+          <a:p>
+            <a:pPr indent="0" marL="0">
+              <a:buNone/>
+            </a:pPr>
+            <a:r>
+              <a:rPr lang="en-US" sz="1100" dirty="0">
+                <a:solidFill>
+                  <a:schemeClr val="tx1"/>
+                </a:solidFill>
+                <a:latin typeface="Calibri" pitchFamily="34" charset="0"/>
+                <a:ea typeface="Calibri" pitchFamily="34" charset="-122"/>
+                <a:cs typeface="Calibri" pitchFamily="34" charset="-120"/>
+              </a:rPr>
+              <a:t>Textbook theory says a peg imports the anchor's interest rate. Capital controls stop that: the peg alone does not carry India's rate.</a:t>
+            </a:r>
+            <a:endParaRPr lang="en-US" sz="1100" dirty="0"/>
+          </a:p>
+        </p:txBody>
+      </p:sp>
+      <p:sp>
+        <p:nvSpPr>
+          <p:cNvPr id="25" name="Slide Number Placeholder 0"/>
+          <p:cNvSpPr>
+            <a:spLocks noGrp="1"/>
+          </p:cNvSpPr>
+          <p:nvPr>
+            <p:ph type="sldNum" sz="quarter" idx="4294967295"/>
+          </p:nvPr>
+        </p:nvSpPr>
+        <p:spPr>
+          <a:xfrm>
+            <a:off x="8229600" y="4800600"/>
+            <a:ext cx="457200" cy="228600"/>
+          </a:xfrm>
+          <a:prstGeom prst="rect">
+            <a:avLst/>
+          </a:prstGeom>
+          <a:extLst>
+            <a:ext uri="{C572A759-6A51-4108-AA02-DFA0A04FC94B}">
+              <ma14:wrappingTextBoxFlag xmlns:ma14="http://schemas.microsoft.com/office/mac/drawingml/2011/main" val="0"/>
+            </a:ext>
+          </a:extLst>
+        </p:spPr>
+        <p:txBody>
+          <a:bodyPr lIns="0" tIns="0" rIns="0" bIns="0"/>
+          <a:lstStyle>
+            <a:lvl1pPr>
+              <a:defRPr sz="900">
+                <a:solidFill>
+                  <a:schemeClr val="accent4"/>
+                </a:solidFill>
+              </a:defRPr>
+            </a:lvl1pPr>
+          </a:lstStyle>
+          <a:p>
+            <a:pPr algn="r"/>
+            <a:fld id="{F7021451-1387-4CA6-816F-3879F97B5CBC}" type="slidenum">
+              <a:rPr b="0" lang="en-US"/>
+              <a:t>18</a:t>
+            </a:fld>
+            <a:endParaRPr lang="en-US"/>
+          </a:p>
+        </p:txBody>
+      </p:sp>
+    </p:spTree>
+  </p:cSld>
+  <p:clrMapOvr>
+    <a:masterClrMapping/>
+  </p:clrMapOvr>
+</p:sld>
+</file>
+
+<file path=ppt/slides/slide19.xml><?xml version="1.0" encoding="utf-8"?>
+<p:sld xmlns:a="http://schemas.openxmlformats.org/drawingml/2006/main" xmlns:r="http://schemas.openxmlformats.org/officeDocument/2006/relationships" xmlns:p="http://schemas.openxmlformats.org/presentationml/2006/main">
+  <p:cSld name="Slide 19">
     <p:spTree>
       <p:nvGrpSpPr>
         <p:cNvPr id="1" name=""/>
@@ -26938,1303 +32416,6 @@
               <a:t>An RBI hike that cools India's inflation cools Nepal's too, without the NRB moving.</a:t>
             </a:r>
             <a:endParaRPr lang="en-US" sz="1100" dirty="0"/>
-          </a:p>
-        </p:txBody>
-      </p:sp>
-      <p:sp>
-        <p:nvSpPr>
-          <p:cNvPr id="25" name="Slide Number Placeholder 0"/>
-          <p:cNvSpPr>
-            <a:spLocks noGrp="1"/>
-          </p:cNvSpPr>
-          <p:nvPr>
-            <p:ph type="sldNum" sz="quarter" idx="4294967295"/>
-          </p:nvPr>
-        </p:nvSpPr>
-        <p:spPr>
-          <a:xfrm>
-            <a:off x="8229600" y="4800600"/>
-            <a:ext cx="457200" cy="228600"/>
-          </a:xfrm>
-          <a:prstGeom prst="rect">
-            <a:avLst/>
-          </a:prstGeom>
-          <a:extLst>
-            <a:ext uri="{C572A759-6A51-4108-AA02-DFA0A04FC94B}">
-              <ma14:wrappingTextBoxFlag xmlns:ma14="http://schemas.microsoft.com/office/mac/drawingml/2011/main" val="0"/>
-            </a:ext>
-          </a:extLst>
-        </p:spPr>
-        <p:txBody>
-          <a:bodyPr lIns="0" tIns="0" rIns="0" bIns="0"/>
-          <a:lstStyle>
-            <a:lvl1pPr>
-              <a:defRPr sz="900">
-                <a:solidFill>
-                  <a:schemeClr val="accent4"/>
-                </a:solidFill>
-              </a:defRPr>
-            </a:lvl1pPr>
-          </a:lstStyle>
-          <a:p>
-            <a:pPr algn="r"/>
-            <a:fld id="{F7021451-1387-4CA6-816F-3879F97B5CBC}" type="slidenum">
-              <a:rPr b="0" lang="en-US"/>
-              <a:t>18</a:t>
-            </a:fld>
-            <a:endParaRPr lang="en-US"/>
-          </a:p>
-        </p:txBody>
-      </p:sp>
-    </p:spTree>
-  </p:cSld>
-  <p:clrMapOvr>
-    <a:masterClrMapping/>
-  </p:clrMapOvr>
-</p:sld>
-</file>
-
-<file path=ppt/slides/slide19.xml><?xml version="1.0" encoding="utf-8"?>
-<p:sld xmlns:a="http://schemas.openxmlformats.org/drawingml/2006/main" xmlns:r="http://schemas.openxmlformats.org/officeDocument/2006/relationships" xmlns:p="http://schemas.openxmlformats.org/presentationml/2006/main">
-  <p:cSld name="Slide 19">
-    <p:spTree>
-      <p:nvGrpSpPr>
-        <p:cNvPr id="1" name=""/>
-        <p:cNvGrpSpPr/>
-        <p:nvPr/>
-      </p:nvGrpSpPr>
-      <p:grpSpPr>
-        <a:xfrm>
-          <a:off x="0" y="0"/>
-          <a:ext cx="0" cy="0"/>
-          <a:chOff x="0" y="0"/>
-          <a:chExt cx="0" cy="0"/>
-        </a:xfrm>
-      </p:grpSpPr>
-      <p:sp>
-        <p:nvSpPr>
-          <p:cNvPr id="2" name="Text 0"/>
-          <p:cNvSpPr/>
-          <p:nvPr>
-            <p:ph idx="100" type="title" hasCustomPrompt="1"/>
-          </p:nvPr>
-        </p:nvSpPr>
-        <p:spPr>
-          <a:xfrm>
-            <a:off x="457200" y="274320"/>
-            <a:ext cx="8229600" cy="685800"/>
-          </a:xfrm>
-          <a:prstGeom prst="rect">
-            <a:avLst/>
-          </a:prstGeom>
-          <a:noFill/>
-          <a:ln/>
-        </p:spPr>
-        <p:txBody>
-          <a:bodyPr wrap="square" lIns="0" tIns="0" rIns="0" bIns="0" rtlCol="0" anchor="ctr"/>
-          <a:lstStyle/>
-          <a:p>
-            <a:pPr algn="l" indent="0" marL="0">
-              <a:buNone/>
-            </a:pPr>
-            <a:r>
-              <a:rPr lang="en-US" sz="2600" b="1" dirty="0">
-                <a:solidFill>
-                  <a:schemeClr val="tx2"/>
-                </a:solidFill>
-                <a:latin typeface="Cambria" pitchFamily="34" charset="0"/>
-                <a:ea typeface="Cambria" pitchFamily="34" charset="-122"/>
-                <a:cs typeface="Cambria" pitchFamily="34" charset="-120"/>
-              </a:rPr>
-              <a:t>Channel 2: the NRB follows the RBI at 0.6</a:t>
-            </a:r>
-            <a:endParaRPr lang="en-US" sz="2600" dirty="0"/>
-          </a:p>
-        </p:txBody>
-      </p:sp>
-      <p:graphicFrame>
-        <p:nvGraphicFramePr>
-          <p:cNvPr id="3" name="Chart 0" descr=""/>
-          <p:cNvGraphicFramePr/>
-          <p:nvPr/>
-        </p:nvGraphicFramePr>
-        <p:xfrm>
-          <a:off x="365760" y="1005840"/>
-          <a:ext cx="4937760" cy="3611880"/>
-        </p:xfrm>
-        <a:graphic xmlns:a="http://schemas.openxmlformats.org/drawingml/2006/main">
-          <a:graphicData uri="http://schemas.openxmlformats.org/drawingml/2006/chart">
-            <c:chart xmlns:c="http://schemas.openxmlformats.org/drawingml/2006/chart" r:id="rId1"/>
-          </a:graphicData>
-        </a:graphic>
-      </p:graphicFrame>
-      <p:graphicFrame>
-        <p:nvGraphicFramePr>
-          <p:cNvPr id="20" name="Table 0"/>
-          <p:cNvGraphicFramePr>
-            <a:graphicFrameLocks noGrp="1"/>
-          </p:cNvGraphicFramePr>
-          <p:nvPr>
-            <p:extLst>
-              <p:ext uri="{D42A27DB-BD31-4B8C-83A1-F6EECF244321}">
-                <p14:modId xmlns:p14="http://schemas.microsoft.com/office/powerpoint/2010/main" val="1579011935"/>
-              </p:ext>
-            </p:extLst>
-          </p:nvPr>
-        </p:nvGraphicFramePr>
-        <p:xfrm>
-          <a:off x="5486400" y="1097280"/>
-          <a:ext cx="3200400" cy="914400"/>
-        </p:xfrm>
-        <a:graphic>
-          <a:graphicData uri="http://schemas.openxmlformats.org/drawingml/2006/table">
-            <a:tbl>
-              <a:tblPr/>
-              <a:tblGrid>
-                <a:gridCol w="1097280"/>
-                <a:gridCol w="777240"/>
-                <a:gridCol w="777240"/>
-                <a:gridCol w="548640"/>
-              </a:tblGrid>
-              <a:tr h="292608">
-                <a:tc>
-                  <a:txBody>
-                    <a:bodyPr/>
-                    <a:lstStyle/>
-                    <a:p>
-                      <a:pPr algn="ctr" indent="0" marL="0">
-                        <a:buNone/>
-                      </a:pPr>
-                      <a:r>
-                        <a:rPr lang="en-US" sz="1000" b="1" dirty="0">
-                          <a:solidFill>
-                            <a:schemeClr val="bg1"/>
-                          </a:solidFill>
-                          <a:latin typeface="Calibri" pitchFamily="34" charset="0"/>
-                          <a:ea typeface="Calibri" pitchFamily="34" charset="-122"/>
-                          <a:cs typeface="Calibri" pitchFamily="34" charset="-120"/>
-                        </a:rPr>
-                        <a:t>RBI cycle</a:t>
-                      </a:r>
-                      <a:endParaRPr lang="en-US" sz="1000" dirty="0">
-                        <a:latin typeface="Calibri" charset="0"/>
-                        <a:ea typeface="Calibri" charset="0"/>
-                        <a:cs typeface="Calibri" charset="0"/>
-                      </a:endParaRPr>
-                    </a:p>
-                  </a:txBody>
-                  <a:tcPr marL="36576" marR="36576" marT="36576" marB="36576">
-                    <a:lnL w="6350" cap="flat" cmpd="sng" algn="ctr">
-                      <a:solidFill>
-                        <a:srgbClr val="D9DCE1"/>
-                      </a:solidFill>
-                      <a:prstDash val="solid"/>
-                      <a:round/>
-                      <a:headEnd type="none" w="med" len="med"/>
-                      <a:tailEnd type="none" w="med" len="med"/>
-                    </a:lnL>
-                    <a:lnR w="6350" cap="flat" cmpd="sng" algn="ctr">
-                      <a:solidFill>
-                        <a:srgbClr val="D9DCE1"/>
-                      </a:solidFill>
-                      <a:prstDash val="solid"/>
-                      <a:round/>
-                      <a:headEnd type="none" w="med" len="med"/>
-                      <a:tailEnd type="none" w="med" len="med"/>
-                    </a:lnR>
-                    <a:lnT w="6350" cap="flat" cmpd="sng" algn="ctr">
-                      <a:solidFill>
-                        <a:srgbClr val="D9DCE1"/>
-                      </a:solidFill>
-                      <a:prstDash val="solid"/>
-                      <a:round/>
-                      <a:headEnd type="none" w="med" len="med"/>
-                      <a:tailEnd type="none" w="med" len="med"/>
-                    </a:lnT>
-                    <a:lnB w="6350" cap="flat" cmpd="sng" algn="ctr">
-                      <a:solidFill>
-                        <a:srgbClr val="D9DCE1"/>
-                      </a:solidFill>
-                      <a:prstDash val="solid"/>
-                      <a:round/>
-                      <a:headEnd type="none" w="med" len="med"/>
-                      <a:tailEnd type="none" w="med" len="med"/>
-                    </a:lnB>
-                    <a:solidFill>
-                      <a:schemeClr val="tx2"/>
-                    </a:solidFill>
-                  </a:tcPr>
-                </a:tc>
-                <a:tc>
-                  <a:txBody>
-                    <a:bodyPr/>
-                    <a:lstStyle/>
-                    <a:p>
-                      <a:pPr algn="ctr" indent="0" marL="0">
-                        <a:buNone/>
-                      </a:pPr>
-                      <a:r>
-                        <a:rPr lang="en-US" sz="1000" b="1" dirty="0">
-                          <a:solidFill>
-                            <a:schemeClr val="bg1"/>
-                          </a:solidFill>
-                          <a:latin typeface="Calibri" pitchFamily="34" charset="0"/>
-                          <a:ea typeface="Calibri" pitchFamily="34" charset="-122"/>
-                          <a:cs typeface="Calibri" pitchFamily="34" charset="-120"/>
-                        </a:rPr>
-                        <a:t>RBI</a:t>
-                      </a:r>
-                      <a:endParaRPr lang="en-US" sz="1000" dirty="0">
-                        <a:latin typeface="Calibri" charset="0"/>
-                        <a:ea typeface="Calibri" charset="0"/>
-                        <a:cs typeface="Calibri" charset="0"/>
-                      </a:endParaRPr>
-                    </a:p>
-                  </a:txBody>
-                  <a:tcPr marL="36576" marR="36576" marT="36576" marB="36576">
-                    <a:lnL w="6350" cap="flat" cmpd="sng" algn="ctr">
-                      <a:solidFill>
-                        <a:srgbClr val="D9DCE1"/>
-                      </a:solidFill>
-                      <a:prstDash val="solid"/>
-                      <a:round/>
-                      <a:headEnd type="none" w="med" len="med"/>
-                      <a:tailEnd type="none" w="med" len="med"/>
-                    </a:lnL>
-                    <a:lnR w="6350" cap="flat" cmpd="sng" algn="ctr">
-                      <a:solidFill>
-                        <a:srgbClr val="D9DCE1"/>
-                      </a:solidFill>
-                      <a:prstDash val="solid"/>
-                      <a:round/>
-                      <a:headEnd type="none" w="med" len="med"/>
-                      <a:tailEnd type="none" w="med" len="med"/>
-                    </a:lnR>
-                    <a:lnT w="6350" cap="flat" cmpd="sng" algn="ctr">
-                      <a:solidFill>
-                        <a:srgbClr val="D9DCE1"/>
-                      </a:solidFill>
-                      <a:prstDash val="solid"/>
-                      <a:round/>
-                      <a:headEnd type="none" w="med" len="med"/>
-                      <a:tailEnd type="none" w="med" len="med"/>
-                    </a:lnT>
-                    <a:lnB w="6350" cap="flat" cmpd="sng" algn="ctr">
-                      <a:solidFill>
-                        <a:srgbClr val="D9DCE1"/>
-                      </a:solidFill>
-                      <a:prstDash val="solid"/>
-                      <a:round/>
-                      <a:headEnd type="none" w="med" len="med"/>
-                      <a:tailEnd type="none" w="med" len="med"/>
-                    </a:lnB>
-                    <a:solidFill>
-                      <a:schemeClr val="tx2"/>
-                    </a:solidFill>
-                  </a:tcPr>
-                </a:tc>
-                <a:tc>
-                  <a:txBody>
-                    <a:bodyPr/>
-                    <a:lstStyle/>
-                    <a:p>
-                      <a:pPr algn="ctr" indent="0" marL="0">
-                        <a:buNone/>
-                      </a:pPr>
-                      <a:r>
-                        <a:rPr lang="en-US" sz="1000" b="1" dirty="0">
-                          <a:solidFill>
-                            <a:schemeClr val="bg1"/>
-                          </a:solidFill>
-                          <a:latin typeface="Calibri" pitchFamily="34" charset="0"/>
-                          <a:ea typeface="Calibri" pitchFamily="34" charset="-122"/>
-                          <a:cs typeface="Calibri" pitchFamily="34" charset="-120"/>
-                        </a:rPr>
-                        <a:t>NRB</a:t>
-                      </a:r>
-                      <a:endParaRPr lang="en-US" sz="1000" dirty="0">
-                        <a:latin typeface="Calibri" charset="0"/>
-                        <a:ea typeface="Calibri" charset="0"/>
-                        <a:cs typeface="Calibri" charset="0"/>
-                      </a:endParaRPr>
-                    </a:p>
-                  </a:txBody>
-                  <a:tcPr marL="36576" marR="36576" marT="36576" marB="36576">
-                    <a:lnL w="6350" cap="flat" cmpd="sng" algn="ctr">
-                      <a:solidFill>
-                        <a:srgbClr val="D9DCE1"/>
-                      </a:solidFill>
-                      <a:prstDash val="solid"/>
-                      <a:round/>
-                      <a:headEnd type="none" w="med" len="med"/>
-                      <a:tailEnd type="none" w="med" len="med"/>
-                    </a:lnL>
-                    <a:lnR w="6350" cap="flat" cmpd="sng" algn="ctr">
-                      <a:solidFill>
-                        <a:srgbClr val="D9DCE1"/>
-                      </a:solidFill>
-                      <a:prstDash val="solid"/>
-                      <a:round/>
-                      <a:headEnd type="none" w="med" len="med"/>
-                      <a:tailEnd type="none" w="med" len="med"/>
-                    </a:lnR>
-                    <a:lnT w="6350" cap="flat" cmpd="sng" algn="ctr">
-                      <a:solidFill>
-                        <a:srgbClr val="D9DCE1"/>
-                      </a:solidFill>
-                      <a:prstDash val="solid"/>
-                      <a:round/>
-                      <a:headEnd type="none" w="med" len="med"/>
-                      <a:tailEnd type="none" w="med" len="med"/>
-                    </a:lnT>
-                    <a:lnB w="6350" cap="flat" cmpd="sng" algn="ctr">
-                      <a:solidFill>
-                        <a:srgbClr val="D9DCE1"/>
-                      </a:solidFill>
-                      <a:prstDash val="solid"/>
-                      <a:round/>
-                      <a:headEnd type="none" w="med" len="med"/>
-                      <a:tailEnd type="none" w="med" len="med"/>
-                    </a:lnB>
-                    <a:solidFill>
-                      <a:schemeClr val="tx2"/>
-                    </a:solidFill>
-                  </a:tcPr>
-                </a:tc>
-                <a:tc>
-                  <a:txBody>
-                    <a:bodyPr/>
-                    <a:lstStyle/>
-                    <a:p>
-                      <a:pPr algn="ctr" indent="0" marL="0">
-                        <a:buNone/>
-                      </a:pPr>
-                      <a:r>
-                        <a:rPr lang="en-US" sz="1000" b="1" dirty="0">
-                          <a:solidFill>
-                            <a:schemeClr val="bg1"/>
-                          </a:solidFill>
-                          <a:latin typeface="Calibri" pitchFamily="34" charset="0"/>
-                          <a:ea typeface="Calibri" pitchFamily="34" charset="-122"/>
-                          <a:cs typeface="Calibri" pitchFamily="34" charset="-120"/>
-                        </a:rPr>
-                        <a:t>Ratio</a:t>
-                      </a:r>
-                      <a:endParaRPr lang="en-US" sz="1000" dirty="0">
-                        <a:latin typeface="Calibri" charset="0"/>
-                        <a:ea typeface="Calibri" charset="0"/>
-                        <a:cs typeface="Calibri" charset="0"/>
-                      </a:endParaRPr>
-                    </a:p>
-                  </a:txBody>
-                  <a:tcPr marL="36576" marR="36576" marT="36576" marB="36576">
-                    <a:lnL w="6350" cap="flat" cmpd="sng" algn="ctr">
-                      <a:solidFill>
-                        <a:srgbClr val="D9DCE1"/>
-                      </a:solidFill>
-                      <a:prstDash val="solid"/>
-                      <a:round/>
-                      <a:headEnd type="none" w="med" len="med"/>
-                      <a:tailEnd type="none" w="med" len="med"/>
-                    </a:lnL>
-                    <a:lnR w="6350" cap="flat" cmpd="sng" algn="ctr">
-                      <a:solidFill>
-                        <a:srgbClr val="D9DCE1"/>
-                      </a:solidFill>
-                      <a:prstDash val="solid"/>
-                      <a:round/>
-                      <a:headEnd type="none" w="med" len="med"/>
-                      <a:tailEnd type="none" w="med" len="med"/>
-                    </a:lnR>
-                    <a:lnT w="6350" cap="flat" cmpd="sng" algn="ctr">
-                      <a:solidFill>
-                        <a:srgbClr val="D9DCE1"/>
-                      </a:solidFill>
-                      <a:prstDash val="solid"/>
-                      <a:round/>
-                      <a:headEnd type="none" w="med" len="med"/>
-                      <a:tailEnd type="none" w="med" len="med"/>
-                    </a:lnT>
-                    <a:lnB w="6350" cap="flat" cmpd="sng" algn="ctr">
-                      <a:solidFill>
-                        <a:srgbClr val="D9DCE1"/>
-                      </a:solidFill>
-                      <a:prstDash val="solid"/>
-                      <a:round/>
-                      <a:headEnd type="none" w="med" len="med"/>
-                      <a:tailEnd type="none" w="med" len="med"/>
-                    </a:lnB>
-                    <a:solidFill>
-                      <a:schemeClr val="tx2"/>
-                    </a:solidFill>
-                  </a:tcPr>
-                </a:tc>
-              </a:tr>
-              <a:tr h="292608">
-                <a:tc>
-                  <a:txBody>
-                    <a:bodyPr/>
-                    <a:lstStyle/>
-                    <a:p>
-                      <a:pPr algn="l" indent="0" marL="0">
-                        <a:buNone/>
-                      </a:pPr>
-                      <a:r>
-                        <a:rPr lang="en-US" sz="1000" dirty="0">
-                          <a:solidFill>
-                            <a:schemeClr val="tx1"/>
-                          </a:solidFill>
-                          <a:latin typeface="Calibri" pitchFamily="34" charset="0"/>
-                          <a:ea typeface="Calibri" pitchFamily="34" charset="-122"/>
-                          <a:cs typeface="Calibri" pitchFamily="34" charset="-120"/>
-                        </a:rPr>
-                        <a:t>Cut 2019 to 2020</a:t>
-                      </a:r>
-                      <a:endParaRPr lang="en-US" sz="1000" dirty="0">
-                        <a:latin typeface="Calibri" charset="0"/>
-                        <a:ea typeface="Calibri" charset="0"/>
-                        <a:cs typeface="Calibri" charset="0"/>
-                      </a:endParaRPr>
-                    </a:p>
-                  </a:txBody>
-                  <a:tcPr marL="36576" marR="36576" marT="36576" marB="36576">
-                    <a:lnL w="6350" cap="flat" cmpd="sng" algn="ctr">
-                      <a:solidFill>
-                        <a:srgbClr val="D9DCE1"/>
-                      </a:solidFill>
-                      <a:prstDash val="solid"/>
-                      <a:round/>
-                      <a:headEnd type="none" w="med" len="med"/>
-                      <a:tailEnd type="none" w="med" len="med"/>
-                    </a:lnL>
-                    <a:lnR w="6350" cap="flat" cmpd="sng" algn="ctr">
-                      <a:solidFill>
-                        <a:srgbClr val="D9DCE1"/>
-                      </a:solidFill>
-                      <a:prstDash val="solid"/>
-                      <a:round/>
-                      <a:headEnd type="none" w="med" len="med"/>
-                      <a:tailEnd type="none" w="med" len="med"/>
-                    </a:lnR>
-                    <a:lnT w="6350" cap="flat" cmpd="sng" algn="ctr">
-                      <a:solidFill>
-                        <a:srgbClr val="D9DCE1"/>
-                      </a:solidFill>
-                      <a:prstDash val="solid"/>
-                      <a:round/>
-                      <a:headEnd type="none" w="med" len="med"/>
-                      <a:tailEnd type="none" w="med" len="med"/>
-                    </a:lnT>
-                    <a:lnB w="6350" cap="flat" cmpd="sng" algn="ctr">
-                      <a:solidFill>
-                        <a:srgbClr val="D9DCE1"/>
-                      </a:solidFill>
-                      <a:prstDash val="solid"/>
-                      <a:round/>
-                      <a:headEnd type="none" w="med" len="med"/>
-                      <a:tailEnd type="none" w="med" len="med"/>
-                    </a:lnB>
-                  </a:tcPr>
-                </a:tc>
-                <a:tc>
-                  <a:txBody>
-                    <a:bodyPr/>
-                    <a:lstStyle/>
-                    <a:p>
-                      <a:pPr algn="ctr" indent="0" marL="0">
-                        <a:buNone/>
-                      </a:pPr>
-                      <a:r>
-                        <a:rPr lang="en-US" sz="1000" dirty="0">
-                          <a:solidFill>
-                            <a:schemeClr val="tx1"/>
-                          </a:solidFill>
-                          <a:latin typeface="Calibri" pitchFamily="34" charset="0"/>
-                          <a:ea typeface="Calibri" pitchFamily="34" charset="-122"/>
-                          <a:cs typeface="Calibri" pitchFamily="34" charset="-120"/>
-                        </a:rPr>
-                        <a:t>minus 2.50</a:t>
-                      </a:r>
-                      <a:endParaRPr lang="en-US" sz="1000" dirty="0">
-                        <a:latin typeface="Calibri" charset="0"/>
-                        <a:ea typeface="Calibri" charset="0"/>
-                        <a:cs typeface="Calibri" charset="0"/>
-                      </a:endParaRPr>
-                    </a:p>
-                  </a:txBody>
-                  <a:tcPr marL="36576" marR="36576" marT="36576" marB="36576">
-                    <a:lnL w="6350" cap="flat" cmpd="sng" algn="ctr">
-                      <a:solidFill>
-                        <a:srgbClr val="D9DCE1"/>
-                      </a:solidFill>
-                      <a:prstDash val="solid"/>
-                      <a:round/>
-                      <a:headEnd type="none" w="med" len="med"/>
-                      <a:tailEnd type="none" w="med" len="med"/>
-                    </a:lnL>
-                    <a:lnR w="6350" cap="flat" cmpd="sng" algn="ctr">
-                      <a:solidFill>
-                        <a:srgbClr val="D9DCE1"/>
-                      </a:solidFill>
-                      <a:prstDash val="solid"/>
-                      <a:round/>
-                      <a:headEnd type="none" w="med" len="med"/>
-                      <a:tailEnd type="none" w="med" len="med"/>
-                    </a:lnR>
-                    <a:lnT w="6350" cap="flat" cmpd="sng" algn="ctr">
-                      <a:solidFill>
-                        <a:srgbClr val="D9DCE1"/>
-                      </a:solidFill>
-                      <a:prstDash val="solid"/>
-                      <a:round/>
-                      <a:headEnd type="none" w="med" len="med"/>
-                      <a:tailEnd type="none" w="med" len="med"/>
-                    </a:lnT>
-                    <a:lnB w="6350" cap="flat" cmpd="sng" algn="ctr">
-                      <a:solidFill>
-                        <a:srgbClr val="D9DCE1"/>
-                      </a:solidFill>
-                      <a:prstDash val="solid"/>
-                      <a:round/>
-                      <a:headEnd type="none" w="med" len="med"/>
-                      <a:tailEnd type="none" w="med" len="med"/>
-                    </a:lnB>
-                  </a:tcPr>
-                </a:tc>
-                <a:tc>
-                  <a:txBody>
-                    <a:bodyPr/>
-                    <a:lstStyle/>
-                    <a:p>
-                      <a:pPr algn="ctr" indent="0" marL="0">
-                        <a:buNone/>
-                      </a:pPr>
-                      <a:r>
-                        <a:rPr lang="en-US" sz="1000" dirty="0">
-                          <a:solidFill>
-                            <a:schemeClr val="tx1"/>
-                          </a:solidFill>
-                          <a:latin typeface="Calibri" pitchFamily="34" charset="0"/>
-                          <a:ea typeface="Calibri" pitchFamily="34" charset="-122"/>
-                          <a:cs typeface="Calibri" pitchFamily="34" charset="-120"/>
-                        </a:rPr>
-                        <a:t>minus 1.50</a:t>
-                      </a:r>
-                      <a:endParaRPr lang="en-US" sz="1000" dirty="0">
-                        <a:latin typeface="Calibri" charset="0"/>
-                        <a:ea typeface="Calibri" charset="0"/>
-                        <a:cs typeface="Calibri" charset="0"/>
-                      </a:endParaRPr>
-                    </a:p>
-                  </a:txBody>
-                  <a:tcPr marL="36576" marR="36576" marT="36576" marB="36576">
-                    <a:lnL w="6350" cap="flat" cmpd="sng" algn="ctr">
-                      <a:solidFill>
-                        <a:srgbClr val="D9DCE1"/>
-                      </a:solidFill>
-                      <a:prstDash val="solid"/>
-                      <a:round/>
-                      <a:headEnd type="none" w="med" len="med"/>
-                      <a:tailEnd type="none" w="med" len="med"/>
-                    </a:lnL>
-                    <a:lnR w="6350" cap="flat" cmpd="sng" algn="ctr">
-                      <a:solidFill>
-                        <a:srgbClr val="D9DCE1"/>
-                      </a:solidFill>
-                      <a:prstDash val="solid"/>
-                      <a:round/>
-                      <a:headEnd type="none" w="med" len="med"/>
-                      <a:tailEnd type="none" w="med" len="med"/>
-                    </a:lnR>
-                    <a:lnT w="6350" cap="flat" cmpd="sng" algn="ctr">
-                      <a:solidFill>
-                        <a:srgbClr val="D9DCE1"/>
-                      </a:solidFill>
-                      <a:prstDash val="solid"/>
-                      <a:round/>
-                      <a:headEnd type="none" w="med" len="med"/>
-                      <a:tailEnd type="none" w="med" len="med"/>
-                    </a:lnT>
-                    <a:lnB w="6350" cap="flat" cmpd="sng" algn="ctr">
-                      <a:solidFill>
-                        <a:srgbClr val="D9DCE1"/>
-                      </a:solidFill>
-                      <a:prstDash val="solid"/>
-                      <a:round/>
-                      <a:headEnd type="none" w="med" len="med"/>
-                      <a:tailEnd type="none" w="med" len="med"/>
-                    </a:lnB>
-                  </a:tcPr>
-                </a:tc>
-                <a:tc>
-                  <a:txBody>
-                    <a:bodyPr/>
-                    <a:lstStyle/>
-                    <a:p>
-                      <a:pPr algn="ctr" indent="0" marL="0">
-                        <a:buNone/>
-                      </a:pPr>
-                      <a:r>
-                        <a:rPr lang="en-US" sz="1000" b="1" dirty="0">
-                          <a:solidFill>
-                            <a:schemeClr val="accent2"/>
-                          </a:solidFill>
-                          <a:latin typeface="Calibri" pitchFamily="34" charset="0"/>
-                          <a:ea typeface="Calibri" pitchFamily="34" charset="-122"/>
-                          <a:cs typeface="Calibri" pitchFamily="34" charset="-120"/>
-                        </a:rPr>
-                        <a:t>0.6</a:t>
-                      </a:r>
-                      <a:endParaRPr lang="en-US" sz="1000" dirty="0">
-                        <a:latin typeface="Calibri" charset="0"/>
-                        <a:ea typeface="Calibri" charset="0"/>
-                        <a:cs typeface="Calibri" charset="0"/>
-                      </a:endParaRPr>
-                    </a:p>
-                  </a:txBody>
-                  <a:tcPr marL="36576" marR="36576" marT="36576" marB="36576">
-                    <a:lnL w="6350" cap="flat" cmpd="sng" algn="ctr">
-                      <a:solidFill>
-                        <a:srgbClr val="D9DCE1"/>
-                      </a:solidFill>
-                      <a:prstDash val="solid"/>
-                      <a:round/>
-                      <a:headEnd type="none" w="med" len="med"/>
-                      <a:tailEnd type="none" w="med" len="med"/>
-                    </a:lnL>
-                    <a:lnR w="6350" cap="flat" cmpd="sng" algn="ctr">
-                      <a:solidFill>
-                        <a:srgbClr val="D9DCE1"/>
-                      </a:solidFill>
-                      <a:prstDash val="solid"/>
-                      <a:round/>
-                      <a:headEnd type="none" w="med" len="med"/>
-                      <a:tailEnd type="none" w="med" len="med"/>
-                    </a:lnR>
-                    <a:lnT w="6350" cap="flat" cmpd="sng" algn="ctr">
-                      <a:solidFill>
-                        <a:srgbClr val="D9DCE1"/>
-                      </a:solidFill>
-                      <a:prstDash val="solid"/>
-                      <a:round/>
-                      <a:headEnd type="none" w="med" len="med"/>
-                      <a:tailEnd type="none" w="med" len="med"/>
-                    </a:lnT>
-                    <a:lnB w="6350" cap="flat" cmpd="sng" algn="ctr">
-                      <a:solidFill>
-                        <a:srgbClr val="D9DCE1"/>
-                      </a:solidFill>
-                      <a:prstDash val="solid"/>
-                      <a:round/>
-                      <a:headEnd type="none" w="med" len="med"/>
-                      <a:tailEnd type="none" w="med" len="med"/>
-                    </a:lnB>
-                  </a:tcPr>
-                </a:tc>
-              </a:tr>
-              <a:tr h="292608">
-                <a:tc>
-                  <a:txBody>
-                    <a:bodyPr/>
-                    <a:lstStyle/>
-                    <a:p>
-                      <a:pPr algn="l" indent="0" marL="0">
-                        <a:buNone/>
-                      </a:pPr>
-                      <a:r>
-                        <a:rPr lang="en-US" sz="1000" dirty="0">
-                          <a:solidFill>
-                            <a:schemeClr val="tx1"/>
-                          </a:solidFill>
-                          <a:latin typeface="Calibri" pitchFamily="34" charset="0"/>
-                          <a:ea typeface="Calibri" pitchFamily="34" charset="-122"/>
-                          <a:cs typeface="Calibri" pitchFamily="34" charset="-120"/>
-                        </a:rPr>
-                        <a:t>Hike 2022 to 2023</a:t>
-                      </a:r>
-                      <a:endParaRPr lang="en-US" sz="1000" dirty="0">
-                        <a:latin typeface="Calibri" charset="0"/>
-                        <a:ea typeface="Calibri" charset="0"/>
-                        <a:cs typeface="Calibri" charset="0"/>
-                      </a:endParaRPr>
-                    </a:p>
-                  </a:txBody>
-                  <a:tcPr marL="36576" marR="36576" marT="36576" marB="36576">
-                    <a:lnL w="6350" cap="flat" cmpd="sng" algn="ctr">
-                      <a:solidFill>
-                        <a:srgbClr val="D9DCE1"/>
-                      </a:solidFill>
-                      <a:prstDash val="solid"/>
-                      <a:round/>
-                      <a:headEnd type="none" w="med" len="med"/>
-                      <a:tailEnd type="none" w="med" len="med"/>
-                    </a:lnL>
-                    <a:lnR w="6350" cap="flat" cmpd="sng" algn="ctr">
-                      <a:solidFill>
-                        <a:srgbClr val="D9DCE1"/>
-                      </a:solidFill>
-                      <a:prstDash val="solid"/>
-                      <a:round/>
-                      <a:headEnd type="none" w="med" len="med"/>
-                      <a:tailEnd type="none" w="med" len="med"/>
-                    </a:lnR>
-                    <a:lnT w="6350" cap="flat" cmpd="sng" algn="ctr">
-                      <a:solidFill>
-                        <a:srgbClr val="D9DCE1"/>
-                      </a:solidFill>
-                      <a:prstDash val="solid"/>
-                      <a:round/>
-                      <a:headEnd type="none" w="med" len="med"/>
-                      <a:tailEnd type="none" w="med" len="med"/>
-                    </a:lnT>
-                    <a:lnB w="6350" cap="flat" cmpd="sng" algn="ctr">
-                      <a:solidFill>
-                        <a:srgbClr val="D9DCE1"/>
-                      </a:solidFill>
-                      <a:prstDash val="solid"/>
-                      <a:round/>
-                      <a:headEnd type="none" w="med" len="med"/>
-                      <a:tailEnd type="none" w="med" len="med"/>
-                    </a:lnB>
-                  </a:tcPr>
-                </a:tc>
-                <a:tc>
-                  <a:txBody>
-                    <a:bodyPr/>
-                    <a:lstStyle/>
-                    <a:p>
-                      <a:pPr algn="ctr" indent="0" marL="0">
-                        <a:buNone/>
-                      </a:pPr>
-                      <a:r>
-                        <a:rPr lang="en-US" sz="1000" dirty="0">
-                          <a:solidFill>
-                            <a:schemeClr val="tx1"/>
-                          </a:solidFill>
-                          <a:latin typeface="Calibri" pitchFamily="34" charset="0"/>
-                          <a:ea typeface="Calibri" pitchFamily="34" charset="-122"/>
-                          <a:cs typeface="Calibri" pitchFamily="34" charset="-120"/>
-                        </a:rPr>
-                        <a:t>2.50</a:t>
-                      </a:r>
-                      <a:endParaRPr lang="en-US" sz="1000" dirty="0">
-                        <a:latin typeface="Calibri" charset="0"/>
-                        <a:ea typeface="Calibri" charset="0"/>
-                        <a:cs typeface="Calibri" charset="0"/>
-                      </a:endParaRPr>
-                    </a:p>
-                  </a:txBody>
-                  <a:tcPr marL="36576" marR="36576" marT="36576" marB="36576">
-                    <a:lnL w="6350" cap="flat" cmpd="sng" algn="ctr">
-                      <a:solidFill>
-                        <a:srgbClr val="D9DCE1"/>
-                      </a:solidFill>
-                      <a:prstDash val="solid"/>
-                      <a:round/>
-                      <a:headEnd type="none" w="med" len="med"/>
-                      <a:tailEnd type="none" w="med" len="med"/>
-                    </a:lnL>
-                    <a:lnR w="6350" cap="flat" cmpd="sng" algn="ctr">
-                      <a:solidFill>
-                        <a:srgbClr val="D9DCE1"/>
-                      </a:solidFill>
-                      <a:prstDash val="solid"/>
-                      <a:round/>
-                      <a:headEnd type="none" w="med" len="med"/>
-                      <a:tailEnd type="none" w="med" len="med"/>
-                    </a:lnR>
-                    <a:lnT w="6350" cap="flat" cmpd="sng" algn="ctr">
-                      <a:solidFill>
-                        <a:srgbClr val="D9DCE1"/>
-                      </a:solidFill>
-                      <a:prstDash val="solid"/>
-                      <a:round/>
-                      <a:headEnd type="none" w="med" len="med"/>
-                      <a:tailEnd type="none" w="med" len="med"/>
-                    </a:lnT>
-                    <a:lnB w="6350" cap="flat" cmpd="sng" algn="ctr">
-                      <a:solidFill>
-                        <a:srgbClr val="D9DCE1"/>
-                      </a:solidFill>
-                      <a:prstDash val="solid"/>
-                      <a:round/>
-                      <a:headEnd type="none" w="med" len="med"/>
-                      <a:tailEnd type="none" w="med" len="med"/>
-                    </a:lnB>
-                  </a:tcPr>
-                </a:tc>
-                <a:tc>
-                  <a:txBody>
-                    <a:bodyPr/>
-                    <a:lstStyle/>
-                    <a:p>
-                      <a:pPr algn="ctr" indent="0" marL="0">
-                        <a:buNone/>
-                      </a:pPr>
-                      <a:r>
-                        <a:rPr lang="en-US" sz="1000" dirty="0">
-                          <a:solidFill>
-                            <a:schemeClr val="tx1"/>
-                          </a:solidFill>
-                          <a:latin typeface="Calibri" pitchFamily="34" charset="0"/>
-                          <a:ea typeface="Calibri" pitchFamily="34" charset="-122"/>
-                          <a:cs typeface="Calibri" pitchFamily="34" charset="-120"/>
-                        </a:rPr>
-                        <a:t>1.50</a:t>
-                      </a:r>
-                      <a:endParaRPr lang="en-US" sz="1000" dirty="0">
-                        <a:latin typeface="Calibri" charset="0"/>
-                        <a:ea typeface="Calibri" charset="0"/>
-                        <a:cs typeface="Calibri" charset="0"/>
-                      </a:endParaRPr>
-                    </a:p>
-                  </a:txBody>
-                  <a:tcPr marL="36576" marR="36576" marT="36576" marB="36576">
-                    <a:lnL w="6350" cap="flat" cmpd="sng" algn="ctr">
-                      <a:solidFill>
-                        <a:srgbClr val="D9DCE1"/>
-                      </a:solidFill>
-                      <a:prstDash val="solid"/>
-                      <a:round/>
-                      <a:headEnd type="none" w="med" len="med"/>
-                      <a:tailEnd type="none" w="med" len="med"/>
-                    </a:lnL>
-                    <a:lnR w="6350" cap="flat" cmpd="sng" algn="ctr">
-                      <a:solidFill>
-                        <a:srgbClr val="D9DCE1"/>
-                      </a:solidFill>
-                      <a:prstDash val="solid"/>
-                      <a:round/>
-                      <a:headEnd type="none" w="med" len="med"/>
-                      <a:tailEnd type="none" w="med" len="med"/>
-                    </a:lnR>
-                    <a:lnT w="6350" cap="flat" cmpd="sng" algn="ctr">
-                      <a:solidFill>
-                        <a:srgbClr val="D9DCE1"/>
-                      </a:solidFill>
-                      <a:prstDash val="solid"/>
-                      <a:round/>
-                      <a:headEnd type="none" w="med" len="med"/>
-                      <a:tailEnd type="none" w="med" len="med"/>
-                    </a:lnT>
-                    <a:lnB w="6350" cap="flat" cmpd="sng" algn="ctr">
-                      <a:solidFill>
-                        <a:srgbClr val="D9DCE1"/>
-                      </a:solidFill>
-                      <a:prstDash val="solid"/>
-                      <a:round/>
-                      <a:headEnd type="none" w="med" len="med"/>
-                      <a:tailEnd type="none" w="med" len="med"/>
-                    </a:lnB>
-                  </a:tcPr>
-                </a:tc>
-                <a:tc>
-                  <a:txBody>
-                    <a:bodyPr/>
-                    <a:lstStyle/>
-                    <a:p>
-                      <a:pPr algn="ctr" indent="0" marL="0">
-                        <a:buNone/>
-                      </a:pPr>
-                      <a:r>
-                        <a:rPr lang="en-US" sz="1000" b="1" dirty="0">
-                          <a:solidFill>
-                            <a:schemeClr val="accent2"/>
-                          </a:solidFill>
-                          <a:latin typeface="Calibri" pitchFamily="34" charset="0"/>
-                          <a:ea typeface="Calibri" pitchFamily="34" charset="-122"/>
-                          <a:cs typeface="Calibri" pitchFamily="34" charset="-120"/>
-                        </a:rPr>
-                        <a:t>0.6</a:t>
-                      </a:r>
-                      <a:endParaRPr lang="en-US" sz="1000" dirty="0">
-                        <a:latin typeface="Calibri" charset="0"/>
-                        <a:ea typeface="Calibri" charset="0"/>
-                        <a:cs typeface="Calibri" charset="0"/>
-                      </a:endParaRPr>
-                    </a:p>
-                  </a:txBody>
-                  <a:tcPr marL="36576" marR="36576" marT="36576" marB="36576">
-                    <a:lnL w="6350" cap="flat" cmpd="sng" algn="ctr">
-                      <a:solidFill>
-                        <a:srgbClr val="D9DCE1"/>
-                      </a:solidFill>
-                      <a:prstDash val="solid"/>
-                      <a:round/>
-                      <a:headEnd type="none" w="med" len="med"/>
-                      <a:tailEnd type="none" w="med" len="med"/>
-                    </a:lnL>
-                    <a:lnR w="6350" cap="flat" cmpd="sng" algn="ctr">
-                      <a:solidFill>
-                        <a:srgbClr val="D9DCE1"/>
-                      </a:solidFill>
-                      <a:prstDash val="solid"/>
-                      <a:round/>
-                      <a:headEnd type="none" w="med" len="med"/>
-                      <a:tailEnd type="none" w="med" len="med"/>
-                    </a:lnR>
-                    <a:lnT w="6350" cap="flat" cmpd="sng" algn="ctr">
-                      <a:solidFill>
-                        <a:srgbClr val="D9DCE1"/>
-                      </a:solidFill>
-                      <a:prstDash val="solid"/>
-                      <a:round/>
-                      <a:headEnd type="none" w="med" len="med"/>
-                      <a:tailEnd type="none" w="med" len="med"/>
-                    </a:lnT>
-                    <a:lnB w="6350" cap="flat" cmpd="sng" algn="ctr">
-                      <a:solidFill>
-                        <a:srgbClr val="D9DCE1"/>
-                      </a:solidFill>
-                      <a:prstDash val="solid"/>
-                      <a:round/>
-                      <a:headEnd type="none" w="med" len="med"/>
-                      <a:tailEnd type="none" w="med" len="med"/>
-                    </a:lnB>
-                  </a:tcPr>
-                </a:tc>
-              </a:tr>
-              <a:tr h="292608">
-                <a:tc>
-                  <a:txBody>
-                    <a:bodyPr/>
-                    <a:lstStyle/>
-                    <a:p>
-                      <a:pPr algn="l" indent="0" marL="0">
-                        <a:buNone/>
-                      </a:pPr>
-                      <a:r>
-                        <a:rPr lang="en-US" sz="1000" dirty="0">
-                          <a:solidFill>
-                            <a:schemeClr val="tx1"/>
-                          </a:solidFill>
-                          <a:latin typeface="Calibri" pitchFamily="34" charset="0"/>
-                          <a:ea typeface="Calibri" pitchFamily="34" charset="-122"/>
-                          <a:cs typeface="Calibri" pitchFamily="34" charset="-120"/>
-                        </a:rPr>
-                        <a:t>Cut 2025</a:t>
-                      </a:r>
-                      <a:endParaRPr lang="en-US" sz="1000" dirty="0">
-                        <a:latin typeface="Calibri" charset="0"/>
-                        <a:ea typeface="Calibri" charset="0"/>
-                        <a:cs typeface="Calibri" charset="0"/>
-                      </a:endParaRPr>
-                    </a:p>
-                  </a:txBody>
-                  <a:tcPr marL="36576" marR="36576" marT="36576" marB="36576">
-                    <a:lnL w="6350" cap="flat" cmpd="sng" algn="ctr">
-                      <a:solidFill>
-                        <a:srgbClr val="D9DCE1"/>
-                      </a:solidFill>
-                      <a:prstDash val="solid"/>
-                      <a:round/>
-                      <a:headEnd type="none" w="med" len="med"/>
-                      <a:tailEnd type="none" w="med" len="med"/>
-                    </a:lnL>
-                    <a:lnR w="6350" cap="flat" cmpd="sng" algn="ctr">
-                      <a:solidFill>
-                        <a:srgbClr val="D9DCE1"/>
-                      </a:solidFill>
-                      <a:prstDash val="solid"/>
-                      <a:round/>
-                      <a:headEnd type="none" w="med" len="med"/>
-                      <a:tailEnd type="none" w="med" len="med"/>
-                    </a:lnR>
-                    <a:lnT w="6350" cap="flat" cmpd="sng" algn="ctr">
-                      <a:solidFill>
-                        <a:srgbClr val="D9DCE1"/>
-                      </a:solidFill>
-                      <a:prstDash val="solid"/>
-                      <a:round/>
-                      <a:headEnd type="none" w="med" len="med"/>
-                      <a:tailEnd type="none" w="med" len="med"/>
-                    </a:lnT>
-                    <a:lnB w="6350" cap="flat" cmpd="sng" algn="ctr">
-                      <a:solidFill>
-                        <a:srgbClr val="D9DCE1"/>
-                      </a:solidFill>
-                      <a:prstDash val="solid"/>
-                      <a:round/>
-                      <a:headEnd type="none" w="med" len="med"/>
-                      <a:tailEnd type="none" w="med" len="med"/>
-                    </a:lnB>
-                  </a:tcPr>
-                </a:tc>
-                <a:tc>
-                  <a:txBody>
-                    <a:bodyPr/>
-                    <a:lstStyle/>
-                    <a:p>
-                      <a:pPr algn="ctr" indent="0" marL="0">
-                        <a:buNone/>
-                      </a:pPr>
-                      <a:r>
-                        <a:rPr lang="en-US" sz="1000" dirty="0">
-                          <a:solidFill>
-                            <a:schemeClr val="tx1"/>
-                          </a:solidFill>
-                          <a:latin typeface="Calibri" pitchFamily="34" charset="0"/>
-                          <a:ea typeface="Calibri" pitchFamily="34" charset="-122"/>
-                          <a:cs typeface="Calibri" pitchFamily="34" charset="-120"/>
-                        </a:rPr>
-                        <a:t>minus 1.25</a:t>
-                      </a:r>
-                      <a:endParaRPr lang="en-US" sz="1000" dirty="0">
-                        <a:latin typeface="Calibri" charset="0"/>
-                        <a:ea typeface="Calibri" charset="0"/>
-                        <a:cs typeface="Calibri" charset="0"/>
-                      </a:endParaRPr>
-                    </a:p>
-                  </a:txBody>
-                  <a:tcPr marL="36576" marR="36576" marT="36576" marB="36576">
-                    <a:lnL w="6350" cap="flat" cmpd="sng" algn="ctr">
-                      <a:solidFill>
-                        <a:srgbClr val="D9DCE1"/>
-                      </a:solidFill>
-                      <a:prstDash val="solid"/>
-                      <a:round/>
-                      <a:headEnd type="none" w="med" len="med"/>
-                      <a:tailEnd type="none" w="med" len="med"/>
-                    </a:lnL>
-                    <a:lnR w="6350" cap="flat" cmpd="sng" algn="ctr">
-                      <a:solidFill>
-                        <a:srgbClr val="D9DCE1"/>
-                      </a:solidFill>
-                      <a:prstDash val="solid"/>
-                      <a:round/>
-                      <a:headEnd type="none" w="med" len="med"/>
-                      <a:tailEnd type="none" w="med" len="med"/>
-                    </a:lnR>
-                    <a:lnT w="6350" cap="flat" cmpd="sng" algn="ctr">
-                      <a:solidFill>
-                        <a:srgbClr val="D9DCE1"/>
-                      </a:solidFill>
-                      <a:prstDash val="solid"/>
-                      <a:round/>
-                      <a:headEnd type="none" w="med" len="med"/>
-                      <a:tailEnd type="none" w="med" len="med"/>
-                    </a:lnT>
-                    <a:lnB w="6350" cap="flat" cmpd="sng" algn="ctr">
-                      <a:solidFill>
-                        <a:srgbClr val="D9DCE1"/>
-                      </a:solidFill>
-                      <a:prstDash val="solid"/>
-                      <a:round/>
-                      <a:headEnd type="none" w="med" len="med"/>
-                      <a:tailEnd type="none" w="med" len="med"/>
-                    </a:lnB>
-                  </a:tcPr>
-                </a:tc>
-                <a:tc>
-                  <a:txBody>
-                    <a:bodyPr/>
-                    <a:lstStyle/>
-                    <a:p>
-                      <a:pPr algn="ctr" indent="0" marL="0">
-                        <a:buNone/>
-                      </a:pPr>
-                      <a:r>
-                        <a:rPr lang="en-US" sz="1000" dirty="0">
-                          <a:solidFill>
-                            <a:schemeClr val="tx1"/>
-                          </a:solidFill>
-                          <a:latin typeface="Calibri" pitchFamily="34" charset="0"/>
-                          <a:ea typeface="Calibri" pitchFamily="34" charset="-122"/>
-                          <a:cs typeface="Calibri" pitchFamily="34" charset="-120"/>
-                        </a:rPr>
-                        <a:t>minus 0.75</a:t>
-                      </a:r>
-                      <a:endParaRPr lang="en-US" sz="1000" dirty="0">
-                        <a:latin typeface="Calibri" charset="0"/>
-                        <a:ea typeface="Calibri" charset="0"/>
-                        <a:cs typeface="Calibri" charset="0"/>
-                      </a:endParaRPr>
-                    </a:p>
-                  </a:txBody>
-                  <a:tcPr marL="36576" marR="36576" marT="36576" marB="36576">
-                    <a:lnL w="6350" cap="flat" cmpd="sng" algn="ctr">
-                      <a:solidFill>
-                        <a:srgbClr val="D9DCE1"/>
-                      </a:solidFill>
-                      <a:prstDash val="solid"/>
-                      <a:round/>
-                      <a:headEnd type="none" w="med" len="med"/>
-                      <a:tailEnd type="none" w="med" len="med"/>
-                    </a:lnL>
-                    <a:lnR w="6350" cap="flat" cmpd="sng" algn="ctr">
-                      <a:solidFill>
-                        <a:srgbClr val="D9DCE1"/>
-                      </a:solidFill>
-                      <a:prstDash val="solid"/>
-                      <a:round/>
-                      <a:headEnd type="none" w="med" len="med"/>
-                      <a:tailEnd type="none" w="med" len="med"/>
-                    </a:lnR>
-                    <a:lnT w="6350" cap="flat" cmpd="sng" algn="ctr">
-                      <a:solidFill>
-                        <a:srgbClr val="D9DCE1"/>
-                      </a:solidFill>
-                      <a:prstDash val="solid"/>
-                      <a:round/>
-                      <a:headEnd type="none" w="med" len="med"/>
-                      <a:tailEnd type="none" w="med" len="med"/>
-                    </a:lnT>
-                    <a:lnB w="6350" cap="flat" cmpd="sng" algn="ctr">
-                      <a:solidFill>
-                        <a:srgbClr val="D9DCE1"/>
-                      </a:solidFill>
-                      <a:prstDash val="solid"/>
-                      <a:round/>
-                      <a:headEnd type="none" w="med" len="med"/>
-                      <a:tailEnd type="none" w="med" len="med"/>
-                    </a:lnB>
-                  </a:tcPr>
-                </a:tc>
-                <a:tc>
-                  <a:txBody>
-                    <a:bodyPr/>
-                    <a:lstStyle/>
-                    <a:p>
-                      <a:pPr algn="ctr" indent="0" marL="0">
-                        <a:buNone/>
-                      </a:pPr>
-                      <a:r>
-                        <a:rPr lang="en-US" sz="1000" b="1" dirty="0">
-                          <a:solidFill>
-                            <a:schemeClr val="accent2"/>
-                          </a:solidFill>
-                          <a:latin typeface="Calibri" pitchFamily="34" charset="0"/>
-                          <a:ea typeface="Calibri" pitchFamily="34" charset="-122"/>
-                          <a:cs typeface="Calibri" pitchFamily="34" charset="-120"/>
-                        </a:rPr>
-                        <a:t>0.6</a:t>
-                      </a:r>
-                      <a:endParaRPr lang="en-US" sz="1000" dirty="0">
-                        <a:latin typeface="Calibri" charset="0"/>
-                        <a:ea typeface="Calibri" charset="0"/>
-                        <a:cs typeface="Calibri" charset="0"/>
-                      </a:endParaRPr>
-                    </a:p>
-                  </a:txBody>
-                  <a:tcPr marL="36576" marR="36576" marT="36576" marB="36576">
-                    <a:lnL w="6350" cap="flat" cmpd="sng" algn="ctr">
-                      <a:solidFill>
-                        <a:srgbClr val="D9DCE1"/>
-                      </a:solidFill>
-                      <a:prstDash val="solid"/>
-                      <a:round/>
-                      <a:headEnd type="none" w="med" len="med"/>
-                      <a:tailEnd type="none" w="med" len="med"/>
-                    </a:lnL>
-                    <a:lnR w="6350" cap="flat" cmpd="sng" algn="ctr">
-                      <a:solidFill>
-                        <a:srgbClr val="D9DCE1"/>
-                      </a:solidFill>
-                      <a:prstDash val="solid"/>
-                      <a:round/>
-                      <a:headEnd type="none" w="med" len="med"/>
-                      <a:tailEnd type="none" w="med" len="med"/>
-                    </a:lnR>
-                    <a:lnT w="6350" cap="flat" cmpd="sng" algn="ctr">
-                      <a:solidFill>
-                        <a:srgbClr val="D9DCE1"/>
-                      </a:solidFill>
-                      <a:prstDash val="solid"/>
-                      <a:round/>
-                      <a:headEnd type="none" w="med" len="med"/>
-                      <a:tailEnd type="none" w="med" len="med"/>
-                    </a:lnT>
-                    <a:lnB w="6350" cap="flat" cmpd="sng" algn="ctr">
-                      <a:solidFill>
-                        <a:srgbClr val="D9DCE1"/>
-                      </a:solidFill>
-                      <a:prstDash val="solid"/>
-                      <a:round/>
-                      <a:headEnd type="none" w="med" len="med"/>
-                      <a:tailEnd type="none" w="med" len="med"/>
-                    </a:lnB>
-                  </a:tcPr>
-                </a:tc>
-              </a:tr>
-            </a:tbl>
-          </a:graphicData>
-        </a:graphic>
-      </p:graphicFrame>
-      <p:sp>
-        <p:nvSpPr>
-          <p:cNvPr id="5" name="Text 1"/>
-          <p:cNvSpPr txBox="1"/>
-          <p:nvPr/>
-        </p:nvSpPr>
-        <p:spPr>
-          <a:xfrm>
-            <a:off x="5486400" y="2377440"/>
-            <a:ext cx="3200400" cy="1188720"/>
-          </a:xfrm>
-          <a:prstGeom prst="rect">
-            <a:avLst/>
-          </a:prstGeom>
-          <a:noFill/>
-          <a:ln/>
-        </p:spPr>
-        <p:txBody>
-          <a:bodyPr wrap="square" lIns="0" tIns="0" rIns="0" bIns="0" rtlCol="0" anchor="t"/>
-          <a:lstStyle/>
-          <a:p>
-            <a:pPr indent="0" marL="0">
-              <a:buNone/>
-            </a:pPr>
-            <a:r>
-              <a:rPr lang="en-US" sz="1150" dirty="0">
-                <a:solidFill>
-                  <a:schemeClr val="tx1"/>
-                </a:solidFill>
-                <a:latin typeface="Calibri" pitchFamily="34" charset="0"/>
-                <a:ea typeface="Calibri" pitchFamily="34" charset="-122"/>
-                <a:cs typeface="Calibri" pitchFamily="34" charset="-120"/>
-              </a:rPr>
-              <a:t>In every RBI cycle since 2019 the NRB moved its corridor the same way, by six tenths of the RBI's move. The 91 day treasury bill followed in all three as well.</a:t>
-            </a:r>
-            <a:endParaRPr lang="en-US" sz="1150" dirty="0"/>
-          </a:p>
-        </p:txBody>
-      </p:sp>
-      <p:sp>
-        <p:nvSpPr>
-          <p:cNvPr id="6" name="Text 2"/>
-          <p:cNvSpPr txBox="1"/>
-          <p:nvPr/>
-        </p:nvSpPr>
-        <p:spPr>
-          <a:xfrm>
-            <a:off x="5486400" y="3657600"/>
-            <a:ext cx="3200400" cy="822960"/>
-          </a:xfrm>
-          <a:prstGeom prst="rect">
-            <a:avLst/>
-          </a:prstGeom>
-          <a:noFill/>
-          <a:ln/>
-        </p:spPr>
-        <p:txBody>
-          <a:bodyPr wrap="square" lIns="0" tIns="0" rIns="0" bIns="0" rtlCol="0" anchor="t"/>
-          <a:lstStyle/>
-          <a:p>
-            <a:pPr indent="0" marL="0">
-              <a:buNone/>
-            </a:pPr>
-            <a:r>
-              <a:rPr lang="en-US" sz="1150" i="1" dirty="0">
-                <a:solidFill>
-                  <a:schemeClr val="tx2"/>
-                </a:solidFill>
-                <a:latin typeface="Calibri" pitchFamily="34" charset="0"/>
-                <a:ea typeface="Calibri" pitchFamily="34" charset="-122"/>
-                <a:cs typeface="Calibri" pitchFamily="34" charset="-120"/>
-              </a:rPr>
-              <a:t>At this ratio, a cycle ending at 5.75 to 6.00 implies an NRB move of about 0.3 to 0.45 point.</a:t>
-            </a:r>
-            <a:endParaRPr lang="en-US" sz="1150" dirty="0"/>
           </a:p>
         </p:txBody>
       </p:sp>
@@ -28596,7 +32777,7 @@
               <a:buNone/>
             </a:pPr>
             <a:r>
-              <a:rPr lang="en-US" sz="4400" b="1" dirty="0">
+              <a:rPr lang="en-US" sz="2100" b="1" dirty="0">
                 <a:solidFill>
                   <a:schemeClr val="accent2"/>
                 </a:solidFill>
@@ -28604,9 +32785,9 @@
                 <a:ea typeface="Cambria" pitchFamily="34" charset="-122"/>
                 <a:cs typeface="Cambria" pitchFamily="34" charset="-120"/>
               </a:rPr>
-              <a:t>0.6</a:t>
+              <a:t>6 of 12, then 0.5</a:t>
             </a:r>
-            <a:endParaRPr lang="en-US" sz="4400" dirty="0"/>
+            <a:endParaRPr lang="en-US" sz="2100" dirty="0"/>
           </a:p>
         </p:txBody>
       </p:sp>
@@ -28643,7 +32824,7 @@
                 <a:ea typeface="Calibri" pitchFamily="34" charset="-122"/>
                 <a:cs typeface="Calibri" pitchFamily="34" charset="-120"/>
               </a:rPr>
-              <a:t>Points the NRB moved its policy corridor per point of RBI move, in each of the three RBI cycles since 2019.</a:t>
+              <a:t>Nepal's market rate followed only 6 of 12 RBI cycles. Since the 2016 corridor the NRB moves 0.5 point per RBI point (p 0.007).</a:t>
             </a:r>
             <a:endParaRPr lang="en-US" sz="1250" dirty="0"/>
           </a:p>
@@ -28682,7 +32863,7 @@
                 <a:ea typeface="Calibri" pitchFamily="34" charset="-122"/>
                 <a:cs typeface="Calibri" pitchFamily="34" charset="-120"/>
               </a:rPr>
-              <a:t>Through the peg, Nepal's prices and policy rate are derived from India's cycle; remittance liquidity decides how much reaches Nepal's market rate.</a:t>
+              <a:t>The peg imports India's prices. India's interest rate cycle reaches Nepal through the NRB's own corridor since 2016, while remittance liquidity keeps the market rate on its own path.</a:t>
             </a:r>
             <a:endParaRPr lang="en-US" sz="1400" dirty="0"/>
           </a:p>
@@ -28744,6 +32925,1303 @@
 <file path=ppt/slides/slide20.xml><?xml version="1.0" encoding="utf-8"?>
 <p:sld xmlns:a="http://schemas.openxmlformats.org/drawingml/2006/main" xmlns:r="http://schemas.openxmlformats.org/officeDocument/2006/relationships" xmlns:p="http://schemas.openxmlformats.org/presentationml/2006/main">
   <p:cSld name="Slide 20">
+    <p:spTree>
+      <p:nvGrpSpPr>
+        <p:cNvPr id="1" name=""/>
+        <p:cNvGrpSpPr/>
+        <p:nvPr/>
+      </p:nvGrpSpPr>
+      <p:grpSpPr>
+        <a:xfrm>
+          <a:off x="0" y="0"/>
+          <a:ext cx="0" cy="0"/>
+          <a:chOff x="0" y="0"/>
+          <a:chExt cx="0" cy="0"/>
+        </a:xfrm>
+      </p:grpSpPr>
+      <p:sp>
+        <p:nvSpPr>
+          <p:cNvPr id="2" name="Text 0"/>
+          <p:cNvSpPr/>
+          <p:nvPr>
+            <p:ph idx="100" type="title" hasCustomPrompt="1"/>
+          </p:nvPr>
+        </p:nvSpPr>
+        <p:spPr>
+          <a:xfrm>
+            <a:off x="457200" y="274320"/>
+            <a:ext cx="8229600" cy="685800"/>
+          </a:xfrm>
+          <a:prstGeom prst="rect">
+            <a:avLst/>
+          </a:prstGeom>
+          <a:noFill/>
+          <a:ln/>
+        </p:spPr>
+        <p:txBody>
+          <a:bodyPr wrap="square" lIns="0" tIns="0" rIns="0" bIns="0" rtlCol="0" anchor="ctr"/>
+          <a:lstStyle/>
+          <a:p>
+            <a:pPr algn="l" indent="0" marL="0">
+              <a:buNone/>
+            </a:pPr>
+            <a:r>
+              <a:rPr lang="en-US" sz="2600" b="1" dirty="0">
+                <a:solidFill>
+                  <a:schemeClr val="tx2"/>
+                </a:solidFill>
+                <a:latin typeface="Cambria" pitchFamily="34" charset="0"/>
+                <a:ea typeface="Cambria" pitchFamily="34" charset="-122"/>
+                <a:cs typeface="Cambria" pitchFamily="34" charset="-120"/>
+              </a:rPr>
+              <a:t>Channel 2: since 2016 the NRB follows the RBI at 0.5</a:t>
+            </a:r>
+            <a:endParaRPr lang="en-US" sz="2600" dirty="0"/>
+          </a:p>
+        </p:txBody>
+      </p:sp>
+      <p:graphicFrame>
+        <p:nvGraphicFramePr>
+          <p:cNvPr id="3" name="Chart 0" descr=""/>
+          <p:cNvGraphicFramePr/>
+          <p:nvPr/>
+        </p:nvGraphicFramePr>
+        <p:xfrm>
+          <a:off x="365760" y="1005840"/>
+          <a:ext cx="4937760" cy="3611880"/>
+        </p:xfrm>
+        <a:graphic xmlns:a="http://schemas.openxmlformats.org/drawingml/2006/main">
+          <a:graphicData uri="http://schemas.openxmlformats.org/drawingml/2006/chart">
+            <c:chart xmlns:c="http://schemas.openxmlformats.org/drawingml/2006/chart" r:id="rId1"/>
+          </a:graphicData>
+        </a:graphic>
+      </p:graphicFrame>
+      <p:graphicFrame>
+        <p:nvGraphicFramePr>
+          <p:cNvPr id="21" name="Table 0"/>
+          <p:cNvGraphicFramePr>
+            <a:graphicFrameLocks noGrp="1"/>
+          </p:cNvGraphicFramePr>
+          <p:nvPr>
+            <p:extLst>
+              <p:ext uri="{D42A27DB-BD31-4B8C-83A1-F6EECF244321}">
+                <p14:modId xmlns:p14="http://schemas.microsoft.com/office/powerpoint/2010/main" val="1579011935"/>
+              </p:ext>
+            </p:extLst>
+          </p:nvPr>
+        </p:nvGraphicFramePr>
+        <p:xfrm>
+          <a:off x="5486400" y="1097280"/>
+          <a:ext cx="3200400" cy="914400"/>
+        </p:xfrm>
+        <a:graphic>
+          <a:graphicData uri="http://schemas.openxmlformats.org/drawingml/2006/table">
+            <a:tbl>
+              <a:tblPr/>
+              <a:tblGrid>
+                <a:gridCol w="1097280"/>
+                <a:gridCol w="777240"/>
+                <a:gridCol w="777240"/>
+                <a:gridCol w="548640"/>
+              </a:tblGrid>
+              <a:tr h="292608">
+                <a:tc>
+                  <a:txBody>
+                    <a:bodyPr/>
+                    <a:lstStyle/>
+                    <a:p>
+                      <a:pPr algn="ctr" indent="0" marL="0">
+                        <a:buNone/>
+                      </a:pPr>
+                      <a:r>
+                        <a:rPr lang="en-US" sz="1000" b="1" dirty="0">
+                          <a:solidFill>
+                            <a:schemeClr val="bg1"/>
+                          </a:solidFill>
+                          <a:latin typeface="Calibri" pitchFamily="34" charset="0"/>
+                          <a:ea typeface="Calibri" pitchFamily="34" charset="-122"/>
+                          <a:cs typeface="Calibri" pitchFamily="34" charset="-120"/>
+                        </a:rPr>
+                        <a:t>RBI cycle</a:t>
+                      </a:r>
+                      <a:endParaRPr lang="en-US" sz="1000" dirty="0">
+                        <a:latin typeface="Calibri" charset="0"/>
+                        <a:ea typeface="Calibri" charset="0"/>
+                        <a:cs typeface="Calibri" charset="0"/>
+                      </a:endParaRPr>
+                    </a:p>
+                  </a:txBody>
+                  <a:tcPr marL="36576" marR="36576" marT="36576" marB="36576">
+                    <a:lnL w="6350" cap="flat" cmpd="sng" algn="ctr">
+                      <a:solidFill>
+                        <a:srgbClr val="D9DCE1"/>
+                      </a:solidFill>
+                      <a:prstDash val="solid"/>
+                      <a:round/>
+                      <a:headEnd type="none" w="med" len="med"/>
+                      <a:tailEnd type="none" w="med" len="med"/>
+                    </a:lnL>
+                    <a:lnR w="6350" cap="flat" cmpd="sng" algn="ctr">
+                      <a:solidFill>
+                        <a:srgbClr val="D9DCE1"/>
+                      </a:solidFill>
+                      <a:prstDash val="solid"/>
+                      <a:round/>
+                      <a:headEnd type="none" w="med" len="med"/>
+                      <a:tailEnd type="none" w="med" len="med"/>
+                    </a:lnR>
+                    <a:lnT w="6350" cap="flat" cmpd="sng" algn="ctr">
+                      <a:solidFill>
+                        <a:srgbClr val="D9DCE1"/>
+                      </a:solidFill>
+                      <a:prstDash val="solid"/>
+                      <a:round/>
+                      <a:headEnd type="none" w="med" len="med"/>
+                      <a:tailEnd type="none" w="med" len="med"/>
+                    </a:lnT>
+                    <a:lnB w="6350" cap="flat" cmpd="sng" algn="ctr">
+                      <a:solidFill>
+                        <a:srgbClr val="D9DCE1"/>
+                      </a:solidFill>
+                      <a:prstDash val="solid"/>
+                      <a:round/>
+                      <a:headEnd type="none" w="med" len="med"/>
+                      <a:tailEnd type="none" w="med" len="med"/>
+                    </a:lnB>
+                    <a:solidFill>
+                      <a:schemeClr val="tx2"/>
+                    </a:solidFill>
+                  </a:tcPr>
+                </a:tc>
+                <a:tc>
+                  <a:txBody>
+                    <a:bodyPr/>
+                    <a:lstStyle/>
+                    <a:p>
+                      <a:pPr algn="ctr" indent="0" marL="0">
+                        <a:buNone/>
+                      </a:pPr>
+                      <a:r>
+                        <a:rPr lang="en-US" sz="1000" b="1" dirty="0">
+                          <a:solidFill>
+                            <a:schemeClr val="bg1"/>
+                          </a:solidFill>
+                          <a:latin typeface="Calibri" pitchFamily="34" charset="0"/>
+                          <a:ea typeface="Calibri" pitchFamily="34" charset="-122"/>
+                          <a:cs typeface="Calibri" pitchFamily="34" charset="-120"/>
+                        </a:rPr>
+                        <a:t>RBI</a:t>
+                      </a:r>
+                      <a:endParaRPr lang="en-US" sz="1000" dirty="0">
+                        <a:latin typeface="Calibri" charset="0"/>
+                        <a:ea typeface="Calibri" charset="0"/>
+                        <a:cs typeface="Calibri" charset="0"/>
+                      </a:endParaRPr>
+                    </a:p>
+                  </a:txBody>
+                  <a:tcPr marL="36576" marR="36576" marT="36576" marB="36576">
+                    <a:lnL w="6350" cap="flat" cmpd="sng" algn="ctr">
+                      <a:solidFill>
+                        <a:srgbClr val="D9DCE1"/>
+                      </a:solidFill>
+                      <a:prstDash val="solid"/>
+                      <a:round/>
+                      <a:headEnd type="none" w="med" len="med"/>
+                      <a:tailEnd type="none" w="med" len="med"/>
+                    </a:lnL>
+                    <a:lnR w="6350" cap="flat" cmpd="sng" algn="ctr">
+                      <a:solidFill>
+                        <a:srgbClr val="D9DCE1"/>
+                      </a:solidFill>
+                      <a:prstDash val="solid"/>
+                      <a:round/>
+                      <a:headEnd type="none" w="med" len="med"/>
+                      <a:tailEnd type="none" w="med" len="med"/>
+                    </a:lnR>
+                    <a:lnT w="6350" cap="flat" cmpd="sng" algn="ctr">
+                      <a:solidFill>
+                        <a:srgbClr val="D9DCE1"/>
+                      </a:solidFill>
+                      <a:prstDash val="solid"/>
+                      <a:round/>
+                      <a:headEnd type="none" w="med" len="med"/>
+                      <a:tailEnd type="none" w="med" len="med"/>
+                    </a:lnT>
+                    <a:lnB w="6350" cap="flat" cmpd="sng" algn="ctr">
+                      <a:solidFill>
+                        <a:srgbClr val="D9DCE1"/>
+                      </a:solidFill>
+                      <a:prstDash val="solid"/>
+                      <a:round/>
+                      <a:headEnd type="none" w="med" len="med"/>
+                      <a:tailEnd type="none" w="med" len="med"/>
+                    </a:lnB>
+                    <a:solidFill>
+                      <a:schemeClr val="tx2"/>
+                    </a:solidFill>
+                  </a:tcPr>
+                </a:tc>
+                <a:tc>
+                  <a:txBody>
+                    <a:bodyPr/>
+                    <a:lstStyle/>
+                    <a:p>
+                      <a:pPr algn="ctr" indent="0" marL="0">
+                        <a:buNone/>
+                      </a:pPr>
+                      <a:r>
+                        <a:rPr lang="en-US" sz="1000" b="1" dirty="0">
+                          <a:solidFill>
+                            <a:schemeClr val="bg1"/>
+                          </a:solidFill>
+                          <a:latin typeface="Calibri" pitchFamily="34" charset="0"/>
+                          <a:ea typeface="Calibri" pitchFamily="34" charset="-122"/>
+                          <a:cs typeface="Calibri" pitchFamily="34" charset="-120"/>
+                        </a:rPr>
+                        <a:t>NRB</a:t>
+                      </a:r>
+                      <a:endParaRPr lang="en-US" sz="1000" dirty="0">
+                        <a:latin typeface="Calibri" charset="0"/>
+                        <a:ea typeface="Calibri" charset="0"/>
+                        <a:cs typeface="Calibri" charset="0"/>
+                      </a:endParaRPr>
+                    </a:p>
+                  </a:txBody>
+                  <a:tcPr marL="36576" marR="36576" marT="36576" marB="36576">
+                    <a:lnL w="6350" cap="flat" cmpd="sng" algn="ctr">
+                      <a:solidFill>
+                        <a:srgbClr val="D9DCE1"/>
+                      </a:solidFill>
+                      <a:prstDash val="solid"/>
+                      <a:round/>
+                      <a:headEnd type="none" w="med" len="med"/>
+                      <a:tailEnd type="none" w="med" len="med"/>
+                    </a:lnL>
+                    <a:lnR w="6350" cap="flat" cmpd="sng" algn="ctr">
+                      <a:solidFill>
+                        <a:srgbClr val="D9DCE1"/>
+                      </a:solidFill>
+                      <a:prstDash val="solid"/>
+                      <a:round/>
+                      <a:headEnd type="none" w="med" len="med"/>
+                      <a:tailEnd type="none" w="med" len="med"/>
+                    </a:lnR>
+                    <a:lnT w="6350" cap="flat" cmpd="sng" algn="ctr">
+                      <a:solidFill>
+                        <a:srgbClr val="D9DCE1"/>
+                      </a:solidFill>
+                      <a:prstDash val="solid"/>
+                      <a:round/>
+                      <a:headEnd type="none" w="med" len="med"/>
+                      <a:tailEnd type="none" w="med" len="med"/>
+                    </a:lnT>
+                    <a:lnB w="6350" cap="flat" cmpd="sng" algn="ctr">
+                      <a:solidFill>
+                        <a:srgbClr val="D9DCE1"/>
+                      </a:solidFill>
+                      <a:prstDash val="solid"/>
+                      <a:round/>
+                      <a:headEnd type="none" w="med" len="med"/>
+                      <a:tailEnd type="none" w="med" len="med"/>
+                    </a:lnB>
+                    <a:solidFill>
+                      <a:schemeClr val="tx2"/>
+                    </a:solidFill>
+                  </a:tcPr>
+                </a:tc>
+                <a:tc>
+                  <a:txBody>
+                    <a:bodyPr/>
+                    <a:lstStyle/>
+                    <a:p>
+                      <a:pPr algn="ctr" indent="0" marL="0">
+                        <a:buNone/>
+                      </a:pPr>
+                      <a:r>
+                        <a:rPr lang="en-US" sz="1000" b="1" dirty="0">
+                          <a:solidFill>
+                            <a:schemeClr val="bg1"/>
+                          </a:solidFill>
+                          <a:latin typeface="Calibri" pitchFamily="34" charset="0"/>
+                          <a:ea typeface="Calibri" pitchFamily="34" charset="-122"/>
+                          <a:cs typeface="Calibri" pitchFamily="34" charset="-120"/>
+                        </a:rPr>
+                        <a:t>Ratio</a:t>
+                      </a:r>
+                      <a:endParaRPr lang="en-US" sz="1000" dirty="0">
+                        <a:latin typeface="Calibri" charset="0"/>
+                        <a:ea typeface="Calibri" charset="0"/>
+                        <a:cs typeface="Calibri" charset="0"/>
+                      </a:endParaRPr>
+                    </a:p>
+                  </a:txBody>
+                  <a:tcPr marL="36576" marR="36576" marT="36576" marB="36576">
+                    <a:lnL w="6350" cap="flat" cmpd="sng" algn="ctr">
+                      <a:solidFill>
+                        <a:srgbClr val="D9DCE1"/>
+                      </a:solidFill>
+                      <a:prstDash val="solid"/>
+                      <a:round/>
+                      <a:headEnd type="none" w="med" len="med"/>
+                      <a:tailEnd type="none" w="med" len="med"/>
+                    </a:lnL>
+                    <a:lnR w="6350" cap="flat" cmpd="sng" algn="ctr">
+                      <a:solidFill>
+                        <a:srgbClr val="D9DCE1"/>
+                      </a:solidFill>
+                      <a:prstDash val="solid"/>
+                      <a:round/>
+                      <a:headEnd type="none" w="med" len="med"/>
+                      <a:tailEnd type="none" w="med" len="med"/>
+                    </a:lnR>
+                    <a:lnT w="6350" cap="flat" cmpd="sng" algn="ctr">
+                      <a:solidFill>
+                        <a:srgbClr val="D9DCE1"/>
+                      </a:solidFill>
+                      <a:prstDash val="solid"/>
+                      <a:round/>
+                      <a:headEnd type="none" w="med" len="med"/>
+                      <a:tailEnd type="none" w="med" len="med"/>
+                    </a:lnT>
+                    <a:lnB w="6350" cap="flat" cmpd="sng" algn="ctr">
+                      <a:solidFill>
+                        <a:srgbClr val="D9DCE1"/>
+                      </a:solidFill>
+                      <a:prstDash val="solid"/>
+                      <a:round/>
+                      <a:headEnd type="none" w="med" len="med"/>
+                      <a:tailEnd type="none" w="med" len="med"/>
+                    </a:lnB>
+                    <a:solidFill>
+                      <a:schemeClr val="tx2"/>
+                    </a:solidFill>
+                  </a:tcPr>
+                </a:tc>
+              </a:tr>
+              <a:tr h="292608">
+                <a:tc>
+                  <a:txBody>
+                    <a:bodyPr/>
+                    <a:lstStyle/>
+                    <a:p>
+                      <a:pPr algn="l" indent="0" marL="0">
+                        <a:buNone/>
+                      </a:pPr>
+                      <a:r>
+                        <a:rPr lang="en-US" sz="1000" dirty="0">
+                          <a:solidFill>
+                            <a:schemeClr val="tx1"/>
+                          </a:solidFill>
+                          <a:latin typeface="Calibri" pitchFamily="34" charset="0"/>
+                          <a:ea typeface="Calibri" pitchFamily="34" charset="-122"/>
+                          <a:cs typeface="Calibri" pitchFamily="34" charset="-120"/>
+                        </a:rPr>
+                        <a:t>Cut 2019 to 2020</a:t>
+                      </a:r>
+                      <a:endParaRPr lang="en-US" sz="1000" dirty="0">
+                        <a:latin typeface="Calibri" charset="0"/>
+                        <a:ea typeface="Calibri" charset="0"/>
+                        <a:cs typeface="Calibri" charset="0"/>
+                      </a:endParaRPr>
+                    </a:p>
+                  </a:txBody>
+                  <a:tcPr marL="36576" marR="36576" marT="36576" marB="36576">
+                    <a:lnL w="6350" cap="flat" cmpd="sng" algn="ctr">
+                      <a:solidFill>
+                        <a:srgbClr val="D9DCE1"/>
+                      </a:solidFill>
+                      <a:prstDash val="solid"/>
+                      <a:round/>
+                      <a:headEnd type="none" w="med" len="med"/>
+                      <a:tailEnd type="none" w="med" len="med"/>
+                    </a:lnL>
+                    <a:lnR w="6350" cap="flat" cmpd="sng" algn="ctr">
+                      <a:solidFill>
+                        <a:srgbClr val="D9DCE1"/>
+                      </a:solidFill>
+                      <a:prstDash val="solid"/>
+                      <a:round/>
+                      <a:headEnd type="none" w="med" len="med"/>
+                      <a:tailEnd type="none" w="med" len="med"/>
+                    </a:lnR>
+                    <a:lnT w="6350" cap="flat" cmpd="sng" algn="ctr">
+                      <a:solidFill>
+                        <a:srgbClr val="D9DCE1"/>
+                      </a:solidFill>
+                      <a:prstDash val="solid"/>
+                      <a:round/>
+                      <a:headEnd type="none" w="med" len="med"/>
+                      <a:tailEnd type="none" w="med" len="med"/>
+                    </a:lnT>
+                    <a:lnB w="6350" cap="flat" cmpd="sng" algn="ctr">
+                      <a:solidFill>
+                        <a:srgbClr val="D9DCE1"/>
+                      </a:solidFill>
+                      <a:prstDash val="solid"/>
+                      <a:round/>
+                      <a:headEnd type="none" w="med" len="med"/>
+                      <a:tailEnd type="none" w="med" len="med"/>
+                    </a:lnB>
+                  </a:tcPr>
+                </a:tc>
+                <a:tc>
+                  <a:txBody>
+                    <a:bodyPr/>
+                    <a:lstStyle/>
+                    <a:p>
+                      <a:pPr algn="ctr" indent="0" marL="0">
+                        <a:buNone/>
+                      </a:pPr>
+                      <a:r>
+                        <a:rPr lang="en-US" sz="1000" dirty="0">
+                          <a:solidFill>
+                            <a:schemeClr val="tx1"/>
+                          </a:solidFill>
+                          <a:latin typeface="Calibri" pitchFamily="34" charset="0"/>
+                          <a:ea typeface="Calibri" pitchFamily="34" charset="-122"/>
+                          <a:cs typeface="Calibri" pitchFamily="34" charset="-120"/>
+                        </a:rPr>
+                        <a:t>minus 2.50</a:t>
+                      </a:r>
+                      <a:endParaRPr lang="en-US" sz="1000" dirty="0">
+                        <a:latin typeface="Calibri" charset="0"/>
+                        <a:ea typeface="Calibri" charset="0"/>
+                        <a:cs typeface="Calibri" charset="0"/>
+                      </a:endParaRPr>
+                    </a:p>
+                  </a:txBody>
+                  <a:tcPr marL="36576" marR="36576" marT="36576" marB="36576">
+                    <a:lnL w="6350" cap="flat" cmpd="sng" algn="ctr">
+                      <a:solidFill>
+                        <a:srgbClr val="D9DCE1"/>
+                      </a:solidFill>
+                      <a:prstDash val="solid"/>
+                      <a:round/>
+                      <a:headEnd type="none" w="med" len="med"/>
+                      <a:tailEnd type="none" w="med" len="med"/>
+                    </a:lnL>
+                    <a:lnR w="6350" cap="flat" cmpd="sng" algn="ctr">
+                      <a:solidFill>
+                        <a:srgbClr val="D9DCE1"/>
+                      </a:solidFill>
+                      <a:prstDash val="solid"/>
+                      <a:round/>
+                      <a:headEnd type="none" w="med" len="med"/>
+                      <a:tailEnd type="none" w="med" len="med"/>
+                    </a:lnR>
+                    <a:lnT w="6350" cap="flat" cmpd="sng" algn="ctr">
+                      <a:solidFill>
+                        <a:srgbClr val="D9DCE1"/>
+                      </a:solidFill>
+                      <a:prstDash val="solid"/>
+                      <a:round/>
+                      <a:headEnd type="none" w="med" len="med"/>
+                      <a:tailEnd type="none" w="med" len="med"/>
+                    </a:lnT>
+                    <a:lnB w="6350" cap="flat" cmpd="sng" algn="ctr">
+                      <a:solidFill>
+                        <a:srgbClr val="D9DCE1"/>
+                      </a:solidFill>
+                      <a:prstDash val="solid"/>
+                      <a:round/>
+                      <a:headEnd type="none" w="med" len="med"/>
+                      <a:tailEnd type="none" w="med" len="med"/>
+                    </a:lnB>
+                  </a:tcPr>
+                </a:tc>
+                <a:tc>
+                  <a:txBody>
+                    <a:bodyPr/>
+                    <a:lstStyle/>
+                    <a:p>
+                      <a:pPr algn="ctr" indent="0" marL="0">
+                        <a:buNone/>
+                      </a:pPr>
+                      <a:r>
+                        <a:rPr lang="en-US" sz="1000" dirty="0">
+                          <a:solidFill>
+                            <a:schemeClr val="tx1"/>
+                          </a:solidFill>
+                          <a:latin typeface="Calibri" pitchFamily="34" charset="0"/>
+                          <a:ea typeface="Calibri" pitchFamily="34" charset="-122"/>
+                          <a:cs typeface="Calibri" pitchFamily="34" charset="-120"/>
+                        </a:rPr>
+                        <a:t>minus 1.50</a:t>
+                      </a:r>
+                      <a:endParaRPr lang="en-US" sz="1000" dirty="0">
+                        <a:latin typeface="Calibri" charset="0"/>
+                        <a:ea typeface="Calibri" charset="0"/>
+                        <a:cs typeface="Calibri" charset="0"/>
+                      </a:endParaRPr>
+                    </a:p>
+                  </a:txBody>
+                  <a:tcPr marL="36576" marR="36576" marT="36576" marB="36576">
+                    <a:lnL w="6350" cap="flat" cmpd="sng" algn="ctr">
+                      <a:solidFill>
+                        <a:srgbClr val="D9DCE1"/>
+                      </a:solidFill>
+                      <a:prstDash val="solid"/>
+                      <a:round/>
+                      <a:headEnd type="none" w="med" len="med"/>
+                      <a:tailEnd type="none" w="med" len="med"/>
+                    </a:lnL>
+                    <a:lnR w="6350" cap="flat" cmpd="sng" algn="ctr">
+                      <a:solidFill>
+                        <a:srgbClr val="D9DCE1"/>
+                      </a:solidFill>
+                      <a:prstDash val="solid"/>
+                      <a:round/>
+                      <a:headEnd type="none" w="med" len="med"/>
+                      <a:tailEnd type="none" w="med" len="med"/>
+                    </a:lnR>
+                    <a:lnT w="6350" cap="flat" cmpd="sng" algn="ctr">
+                      <a:solidFill>
+                        <a:srgbClr val="D9DCE1"/>
+                      </a:solidFill>
+                      <a:prstDash val="solid"/>
+                      <a:round/>
+                      <a:headEnd type="none" w="med" len="med"/>
+                      <a:tailEnd type="none" w="med" len="med"/>
+                    </a:lnT>
+                    <a:lnB w="6350" cap="flat" cmpd="sng" algn="ctr">
+                      <a:solidFill>
+                        <a:srgbClr val="D9DCE1"/>
+                      </a:solidFill>
+                      <a:prstDash val="solid"/>
+                      <a:round/>
+                      <a:headEnd type="none" w="med" len="med"/>
+                      <a:tailEnd type="none" w="med" len="med"/>
+                    </a:lnB>
+                  </a:tcPr>
+                </a:tc>
+                <a:tc>
+                  <a:txBody>
+                    <a:bodyPr/>
+                    <a:lstStyle/>
+                    <a:p>
+                      <a:pPr algn="ctr" indent="0" marL="0">
+                        <a:buNone/>
+                      </a:pPr>
+                      <a:r>
+                        <a:rPr lang="en-US" sz="1000" b="1" dirty="0">
+                          <a:solidFill>
+                            <a:schemeClr val="accent2"/>
+                          </a:solidFill>
+                          <a:latin typeface="Calibri" pitchFamily="34" charset="0"/>
+                          <a:ea typeface="Calibri" pitchFamily="34" charset="-122"/>
+                          <a:cs typeface="Calibri" pitchFamily="34" charset="-120"/>
+                        </a:rPr>
+                        <a:t>0.6</a:t>
+                      </a:r>
+                      <a:endParaRPr lang="en-US" sz="1000" dirty="0">
+                        <a:latin typeface="Calibri" charset="0"/>
+                        <a:ea typeface="Calibri" charset="0"/>
+                        <a:cs typeface="Calibri" charset="0"/>
+                      </a:endParaRPr>
+                    </a:p>
+                  </a:txBody>
+                  <a:tcPr marL="36576" marR="36576" marT="36576" marB="36576">
+                    <a:lnL w="6350" cap="flat" cmpd="sng" algn="ctr">
+                      <a:solidFill>
+                        <a:srgbClr val="D9DCE1"/>
+                      </a:solidFill>
+                      <a:prstDash val="solid"/>
+                      <a:round/>
+                      <a:headEnd type="none" w="med" len="med"/>
+                      <a:tailEnd type="none" w="med" len="med"/>
+                    </a:lnL>
+                    <a:lnR w="6350" cap="flat" cmpd="sng" algn="ctr">
+                      <a:solidFill>
+                        <a:srgbClr val="D9DCE1"/>
+                      </a:solidFill>
+                      <a:prstDash val="solid"/>
+                      <a:round/>
+                      <a:headEnd type="none" w="med" len="med"/>
+                      <a:tailEnd type="none" w="med" len="med"/>
+                    </a:lnR>
+                    <a:lnT w="6350" cap="flat" cmpd="sng" algn="ctr">
+                      <a:solidFill>
+                        <a:srgbClr val="D9DCE1"/>
+                      </a:solidFill>
+                      <a:prstDash val="solid"/>
+                      <a:round/>
+                      <a:headEnd type="none" w="med" len="med"/>
+                      <a:tailEnd type="none" w="med" len="med"/>
+                    </a:lnT>
+                    <a:lnB w="6350" cap="flat" cmpd="sng" algn="ctr">
+                      <a:solidFill>
+                        <a:srgbClr val="D9DCE1"/>
+                      </a:solidFill>
+                      <a:prstDash val="solid"/>
+                      <a:round/>
+                      <a:headEnd type="none" w="med" len="med"/>
+                      <a:tailEnd type="none" w="med" len="med"/>
+                    </a:lnB>
+                  </a:tcPr>
+                </a:tc>
+              </a:tr>
+              <a:tr h="292608">
+                <a:tc>
+                  <a:txBody>
+                    <a:bodyPr/>
+                    <a:lstStyle/>
+                    <a:p>
+                      <a:pPr algn="l" indent="0" marL="0">
+                        <a:buNone/>
+                      </a:pPr>
+                      <a:r>
+                        <a:rPr lang="en-US" sz="1000" dirty="0">
+                          <a:solidFill>
+                            <a:schemeClr val="tx1"/>
+                          </a:solidFill>
+                          <a:latin typeface="Calibri" pitchFamily="34" charset="0"/>
+                          <a:ea typeface="Calibri" pitchFamily="34" charset="-122"/>
+                          <a:cs typeface="Calibri" pitchFamily="34" charset="-120"/>
+                        </a:rPr>
+                        <a:t>Hike 2022 to 2023</a:t>
+                      </a:r>
+                      <a:endParaRPr lang="en-US" sz="1000" dirty="0">
+                        <a:latin typeface="Calibri" charset="0"/>
+                        <a:ea typeface="Calibri" charset="0"/>
+                        <a:cs typeface="Calibri" charset="0"/>
+                      </a:endParaRPr>
+                    </a:p>
+                  </a:txBody>
+                  <a:tcPr marL="36576" marR="36576" marT="36576" marB="36576">
+                    <a:lnL w="6350" cap="flat" cmpd="sng" algn="ctr">
+                      <a:solidFill>
+                        <a:srgbClr val="D9DCE1"/>
+                      </a:solidFill>
+                      <a:prstDash val="solid"/>
+                      <a:round/>
+                      <a:headEnd type="none" w="med" len="med"/>
+                      <a:tailEnd type="none" w="med" len="med"/>
+                    </a:lnL>
+                    <a:lnR w="6350" cap="flat" cmpd="sng" algn="ctr">
+                      <a:solidFill>
+                        <a:srgbClr val="D9DCE1"/>
+                      </a:solidFill>
+                      <a:prstDash val="solid"/>
+                      <a:round/>
+                      <a:headEnd type="none" w="med" len="med"/>
+                      <a:tailEnd type="none" w="med" len="med"/>
+                    </a:lnR>
+                    <a:lnT w="6350" cap="flat" cmpd="sng" algn="ctr">
+                      <a:solidFill>
+                        <a:srgbClr val="D9DCE1"/>
+                      </a:solidFill>
+                      <a:prstDash val="solid"/>
+                      <a:round/>
+                      <a:headEnd type="none" w="med" len="med"/>
+                      <a:tailEnd type="none" w="med" len="med"/>
+                    </a:lnT>
+                    <a:lnB w="6350" cap="flat" cmpd="sng" algn="ctr">
+                      <a:solidFill>
+                        <a:srgbClr val="D9DCE1"/>
+                      </a:solidFill>
+                      <a:prstDash val="solid"/>
+                      <a:round/>
+                      <a:headEnd type="none" w="med" len="med"/>
+                      <a:tailEnd type="none" w="med" len="med"/>
+                    </a:lnB>
+                  </a:tcPr>
+                </a:tc>
+                <a:tc>
+                  <a:txBody>
+                    <a:bodyPr/>
+                    <a:lstStyle/>
+                    <a:p>
+                      <a:pPr algn="ctr" indent="0" marL="0">
+                        <a:buNone/>
+                      </a:pPr>
+                      <a:r>
+                        <a:rPr lang="en-US" sz="1000" dirty="0">
+                          <a:solidFill>
+                            <a:schemeClr val="tx1"/>
+                          </a:solidFill>
+                          <a:latin typeface="Calibri" pitchFamily="34" charset="0"/>
+                          <a:ea typeface="Calibri" pitchFamily="34" charset="-122"/>
+                          <a:cs typeface="Calibri" pitchFamily="34" charset="-120"/>
+                        </a:rPr>
+                        <a:t>2.50</a:t>
+                      </a:r>
+                      <a:endParaRPr lang="en-US" sz="1000" dirty="0">
+                        <a:latin typeface="Calibri" charset="0"/>
+                        <a:ea typeface="Calibri" charset="0"/>
+                        <a:cs typeface="Calibri" charset="0"/>
+                      </a:endParaRPr>
+                    </a:p>
+                  </a:txBody>
+                  <a:tcPr marL="36576" marR="36576" marT="36576" marB="36576">
+                    <a:lnL w="6350" cap="flat" cmpd="sng" algn="ctr">
+                      <a:solidFill>
+                        <a:srgbClr val="D9DCE1"/>
+                      </a:solidFill>
+                      <a:prstDash val="solid"/>
+                      <a:round/>
+                      <a:headEnd type="none" w="med" len="med"/>
+                      <a:tailEnd type="none" w="med" len="med"/>
+                    </a:lnL>
+                    <a:lnR w="6350" cap="flat" cmpd="sng" algn="ctr">
+                      <a:solidFill>
+                        <a:srgbClr val="D9DCE1"/>
+                      </a:solidFill>
+                      <a:prstDash val="solid"/>
+                      <a:round/>
+                      <a:headEnd type="none" w="med" len="med"/>
+                      <a:tailEnd type="none" w="med" len="med"/>
+                    </a:lnR>
+                    <a:lnT w="6350" cap="flat" cmpd="sng" algn="ctr">
+                      <a:solidFill>
+                        <a:srgbClr val="D9DCE1"/>
+                      </a:solidFill>
+                      <a:prstDash val="solid"/>
+                      <a:round/>
+                      <a:headEnd type="none" w="med" len="med"/>
+                      <a:tailEnd type="none" w="med" len="med"/>
+                    </a:lnT>
+                    <a:lnB w="6350" cap="flat" cmpd="sng" algn="ctr">
+                      <a:solidFill>
+                        <a:srgbClr val="D9DCE1"/>
+                      </a:solidFill>
+                      <a:prstDash val="solid"/>
+                      <a:round/>
+                      <a:headEnd type="none" w="med" len="med"/>
+                      <a:tailEnd type="none" w="med" len="med"/>
+                    </a:lnB>
+                  </a:tcPr>
+                </a:tc>
+                <a:tc>
+                  <a:txBody>
+                    <a:bodyPr/>
+                    <a:lstStyle/>
+                    <a:p>
+                      <a:pPr algn="ctr" indent="0" marL="0">
+                        <a:buNone/>
+                      </a:pPr>
+                      <a:r>
+                        <a:rPr lang="en-US" sz="1000" dirty="0">
+                          <a:solidFill>
+                            <a:schemeClr val="tx1"/>
+                          </a:solidFill>
+                          <a:latin typeface="Calibri" pitchFamily="34" charset="0"/>
+                          <a:ea typeface="Calibri" pitchFamily="34" charset="-122"/>
+                          <a:cs typeface="Calibri" pitchFamily="34" charset="-120"/>
+                        </a:rPr>
+                        <a:t>1.50</a:t>
+                      </a:r>
+                      <a:endParaRPr lang="en-US" sz="1000" dirty="0">
+                        <a:latin typeface="Calibri" charset="0"/>
+                        <a:ea typeface="Calibri" charset="0"/>
+                        <a:cs typeface="Calibri" charset="0"/>
+                      </a:endParaRPr>
+                    </a:p>
+                  </a:txBody>
+                  <a:tcPr marL="36576" marR="36576" marT="36576" marB="36576">
+                    <a:lnL w="6350" cap="flat" cmpd="sng" algn="ctr">
+                      <a:solidFill>
+                        <a:srgbClr val="D9DCE1"/>
+                      </a:solidFill>
+                      <a:prstDash val="solid"/>
+                      <a:round/>
+                      <a:headEnd type="none" w="med" len="med"/>
+                      <a:tailEnd type="none" w="med" len="med"/>
+                    </a:lnL>
+                    <a:lnR w="6350" cap="flat" cmpd="sng" algn="ctr">
+                      <a:solidFill>
+                        <a:srgbClr val="D9DCE1"/>
+                      </a:solidFill>
+                      <a:prstDash val="solid"/>
+                      <a:round/>
+                      <a:headEnd type="none" w="med" len="med"/>
+                      <a:tailEnd type="none" w="med" len="med"/>
+                    </a:lnR>
+                    <a:lnT w="6350" cap="flat" cmpd="sng" algn="ctr">
+                      <a:solidFill>
+                        <a:srgbClr val="D9DCE1"/>
+                      </a:solidFill>
+                      <a:prstDash val="solid"/>
+                      <a:round/>
+                      <a:headEnd type="none" w="med" len="med"/>
+                      <a:tailEnd type="none" w="med" len="med"/>
+                    </a:lnT>
+                    <a:lnB w="6350" cap="flat" cmpd="sng" algn="ctr">
+                      <a:solidFill>
+                        <a:srgbClr val="D9DCE1"/>
+                      </a:solidFill>
+                      <a:prstDash val="solid"/>
+                      <a:round/>
+                      <a:headEnd type="none" w="med" len="med"/>
+                      <a:tailEnd type="none" w="med" len="med"/>
+                    </a:lnB>
+                  </a:tcPr>
+                </a:tc>
+                <a:tc>
+                  <a:txBody>
+                    <a:bodyPr/>
+                    <a:lstStyle/>
+                    <a:p>
+                      <a:pPr algn="ctr" indent="0" marL="0">
+                        <a:buNone/>
+                      </a:pPr>
+                      <a:r>
+                        <a:rPr lang="en-US" sz="1000" b="1" dirty="0">
+                          <a:solidFill>
+                            <a:schemeClr val="accent2"/>
+                          </a:solidFill>
+                          <a:latin typeface="Calibri" pitchFamily="34" charset="0"/>
+                          <a:ea typeface="Calibri" pitchFamily="34" charset="-122"/>
+                          <a:cs typeface="Calibri" pitchFamily="34" charset="-120"/>
+                        </a:rPr>
+                        <a:t>0.6</a:t>
+                      </a:r>
+                      <a:endParaRPr lang="en-US" sz="1000" dirty="0">
+                        <a:latin typeface="Calibri" charset="0"/>
+                        <a:ea typeface="Calibri" charset="0"/>
+                        <a:cs typeface="Calibri" charset="0"/>
+                      </a:endParaRPr>
+                    </a:p>
+                  </a:txBody>
+                  <a:tcPr marL="36576" marR="36576" marT="36576" marB="36576">
+                    <a:lnL w="6350" cap="flat" cmpd="sng" algn="ctr">
+                      <a:solidFill>
+                        <a:srgbClr val="D9DCE1"/>
+                      </a:solidFill>
+                      <a:prstDash val="solid"/>
+                      <a:round/>
+                      <a:headEnd type="none" w="med" len="med"/>
+                      <a:tailEnd type="none" w="med" len="med"/>
+                    </a:lnL>
+                    <a:lnR w="6350" cap="flat" cmpd="sng" algn="ctr">
+                      <a:solidFill>
+                        <a:srgbClr val="D9DCE1"/>
+                      </a:solidFill>
+                      <a:prstDash val="solid"/>
+                      <a:round/>
+                      <a:headEnd type="none" w="med" len="med"/>
+                      <a:tailEnd type="none" w="med" len="med"/>
+                    </a:lnR>
+                    <a:lnT w="6350" cap="flat" cmpd="sng" algn="ctr">
+                      <a:solidFill>
+                        <a:srgbClr val="D9DCE1"/>
+                      </a:solidFill>
+                      <a:prstDash val="solid"/>
+                      <a:round/>
+                      <a:headEnd type="none" w="med" len="med"/>
+                      <a:tailEnd type="none" w="med" len="med"/>
+                    </a:lnT>
+                    <a:lnB w="6350" cap="flat" cmpd="sng" algn="ctr">
+                      <a:solidFill>
+                        <a:srgbClr val="D9DCE1"/>
+                      </a:solidFill>
+                      <a:prstDash val="solid"/>
+                      <a:round/>
+                      <a:headEnd type="none" w="med" len="med"/>
+                      <a:tailEnd type="none" w="med" len="med"/>
+                    </a:lnB>
+                  </a:tcPr>
+                </a:tc>
+              </a:tr>
+              <a:tr h="292608">
+                <a:tc>
+                  <a:txBody>
+                    <a:bodyPr/>
+                    <a:lstStyle/>
+                    <a:p>
+                      <a:pPr algn="l" indent="0" marL="0">
+                        <a:buNone/>
+                      </a:pPr>
+                      <a:r>
+                        <a:rPr lang="en-US" sz="1000" dirty="0">
+                          <a:solidFill>
+                            <a:schemeClr val="tx1"/>
+                          </a:solidFill>
+                          <a:latin typeface="Calibri" pitchFamily="34" charset="0"/>
+                          <a:ea typeface="Calibri" pitchFamily="34" charset="-122"/>
+                          <a:cs typeface="Calibri" pitchFamily="34" charset="-120"/>
+                        </a:rPr>
+                        <a:t>Cut 2025</a:t>
+                      </a:r>
+                      <a:endParaRPr lang="en-US" sz="1000" dirty="0">
+                        <a:latin typeface="Calibri" charset="0"/>
+                        <a:ea typeface="Calibri" charset="0"/>
+                        <a:cs typeface="Calibri" charset="0"/>
+                      </a:endParaRPr>
+                    </a:p>
+                  </a:txBody>
+                  <a:tcPr marL="36576" marR="36576" marT="36576" marB="36576">
+                    <a:lnL w="6350" cap="flat" cmpd="sng" algn="ctr">
+                      <a:solidFill>
+                        <a:srgbClr val="D9DCE1"/>
+                      </a:solidFill>
+                      <a:prstDash val="solid"/>
+                      <a:round/>
+                      <a:headEnd type="none" w="med" len="med"/>
+                      <a:tailEnd type="none" w="med" len="med"/>
+                    </a:lnL>
+                    <a:lnR w="6350" cap="flat" cmpd="sng" algn="ctr">
+                      <a:solidFill>
+                        <a:srgbClr val="D9DCE1"/>
+                      </a:solidFill>
+                      <a:prstDash val="solid"/>
+                      <a:round/>
+                      <a:headEnd type="none" w="med" len="med"/>
+                      <a:tailEnd type="none" w="med" len="med"/>
+                    </a:lnR>
+                    <a:lnT w="6350" cap="flat" cmpd="sng" algn="ctr">
+                      <a:solidFill>
+                        <a:srgbClr val="D9DCE1"/>
+                      </a:solidFill>
+                      <a:prstDash val="solid"/>
+                      <a:round/>
+                      <a:headEnd type="none" w="med" len="med"/>
+                      <a:tailEnd type="none" w="med" len="med"/>
+                    </a:lnT>
+                    <a:lnB w="6350" cap="flat" cmpd="sng" algn="ctr">
+                      <a:solidFill>
+                        <a:srgbClr val="D9DCE1"/>
+                      </a:solidFill>
+                      <a:prstDash val="solid"/>
+                      <a:round/>
+                      <a:headEnd type="none" w="med" len="med"/>
+                      <a:tailEnd type="none" w="med" len="med"/>
+                    </a:lnB>
+                  </a:tcPr>
+                </a:tc>
+                <a:tc>
+                  <a:txBody>
+                    <a:bodyPr/>
+                    <a:lstStyle/>
+                    <a:p>
+                      <a:pPr algn="ctr" indent="0" marL="0">
+                        <a:buNone/>
+                      </a:pPr>
+                      <a:r>
+                        <a:rPr lang="en-US" sz="1000" dirty="0">
+                          <a:solidFill>
+                            <a:schemeClr val="tx1"/>
+                          </a:solidFill>
+                          <a:latin typeface="Calibri" pitchFamily="34" charset="0"/>
+                          <a:ea typeface="Calibri" pitchFamily="34" charset="-122"/>
+                          <a:cs typeface="Calibri" pitchFamily="34" charset="-120"/>
+                        </a:rPr>
+                        <a:t>minus 1.25</a:t>
+                      </a:r>
+                      <a:endParaRPr lang="en-US" sz="1000" dirty="0">
+                        <a:latin typeface="Calibri" charset="0"/>
+                        <a:ea typeface="Calibri" charset="0"/>
+                        <a:cs typeface="Calibri" charset="0"/>
+                      </a:endParaRPr>
+                    </a:p>
+                  </a:txBody>
+                  <a:tcPr marL="36576" marR="36576" marT="36576" marB="36576">
+                    <a:lnL w="6350" cap="flat" cmpd="sng" algn="ctr">
+                      <a:solidFill>
+                        <a:srgbClr val="D9DCE1"/>
+                      </a:solidFill>
+                      <a:prstDash val="solid"/>
+                      <a:round/>
+                      <a:headEnd type="none" w="med" len="med"/>
+                      <a:tailEnd type="none" w="med" len="med"/>
+                    </a:lnL>
+                    <a:lnR w="6350" cap="flat" cmpd="sng" algn="ctr">
+                      <a:solidFill>
+                        <a:srgbClr val="D9DCE1"/>
+                      </a:solidFill>
+                      <a:prstDash val="solid"/>
+                      <a:round/>
+                      <a:headEnd type="none" w="med" len="med"/>
+                      <a:tailEnd type="none" w="med" len="med"/>
+                    </a:lnR>
+                    <a:lnT w="6350" cap="flat" cmpd="sng" algn="ctr">
+                      <a:solidFill>
+                        <a:srgbClr val="D9DCE1"/>
+                      </a:solidFill>
+                      <a:prstDash val="solid"/>
+                      <a:round/>
+                      <a:headEnd type="none" w="med" len="med"/>
+                      <a:tailEnd type="none" w="med" len="med"/>
+                    </a:lnT>
+                    <a:lnB w="6350" cap="flat" cmpd="sng" algn="ctr">
+                      <a:solidFill>
+                        <a:srgbClr val="D9DCE1"/>
+                      </a:solidFill>
+                      <a:prstDash val="solid"/>
+                      <a:round/>
+                      <a:headEnd type="none" w="med" len="med"/>
+                      <a:tailEnd type="none" w="med" len="med"/>
+                    </a:lnB>
+                  </a:tcPr>
+                </a:tc>
+                <a:tc>
+                  <a:txBody>
+                    <a:bodyPr/>
+                    <a:lstStyle/>
+                    <a:p>
+                      <a:pPr algn="ctr" indent="0" marL="0">
+                        <a:buNone/>
+                      </a:pPr>
+                      <a:r>
+                        <a:rPr lang="en-US" sz="1000" dirty="0">
+                          <a:solidFill>
+                            <a:schemeClr val="tx1"/>
+                          </a:solidFill>
+                          <a:latin typeface="Calibri" pitchFamily="34" charset="0"/>
+                          <a:ea typeface="Calibri" pitchFamily="34" charset="-122"/>
+                          <a:cs typeface="Calibri" pitchFamily="34" charset="-120"/>
+                        </a:rPr>
+                        <a:t>minus 0.75</a:t>
+                      </a:r>
+                      <a:endParaRPr lang="en-US" sz="1000" dirty="0">
+                        <a:latin typeface="Calibri" charset="0"/>
+                        <a:ea typeface="Calibri" charset="0"/>
+                        <a:cs typeface="Calibri" charset="0"/>
+                      </a:endParaRPr>
+                    </a:p>
+                  </a:txBody>
+                  <a:tcPr marL="36576" marR="36576" marT="36576" marB="36576">
+                    <a:lnL w="6350" cap="flat" cmpd="sng" algn="ctr">
+                      <a:solidFill>
+                        <a:srgbClr val="D9DCE1"/>
+                      </a:solidFill>
+                      <a:prstDash val="solid"/>
+                      <a:round/>
+                      <a:headEnd type="none" w="med" len="med"/>
+                      <a:tailEnd type="none" w="med" len="med"/>
+                    </a:lnL>
+                    <a:lnR w="6350" cap="flat" cmpd="sng" algn="ctr">
+                      <a:solidFill>
+                        <a:srgbClr val="D9DCE1"/>
+                      </a:solidFill>
+                      <a:prstDash val="solid"/>
+                      <a:round/>
+                      <a:headEnd type="none" w="med" len="med"/>
+                      <a:tailEnd type="none" w="med" len="med"/>
+                    </a:lnR>
+                    <a:lnT w="6350" cap="flat" cmpd="sng" algn="ctr">
+                      <a:solidFill>
+                        <a:srgbClr val="D9DCE1"/>
+                      </a:solidFill>
+                      <a:prstDash val="solid"/>
+                      <a:round/>
+                      <a:headEnd type="none" w="med" len="med"/>
+                      <a:tailEnd type="none" w="med" len="med"/>
+                    </a:lnT>
+                    <a:lnB w="6350" cap="flat" cmpd="sng" algn="ctr">
+                      <a:solidFill>
+                        <a:srgbClr val="D9DCE1"/>
+                      </a:solidFill>
+                      <a:prstDash val="solid"/>
+                      <a:round/>
+                      <a:headEnd type="none" w="med" len="med"/>
+                      <a:tailEnd type="none" w="med" len="med"/>
+                    </a:lnB>
+                  </a:tcPr>
+                </a:tc>
+                <a:tc>
+                  <a:txBody>
+                    <a:bodyPr/>
+                    <a:lstStyle/>
+                    <a:p>
+                      <a:pPr algn="ctr" indent="0" marL="0">
+                        <a:buNone/>
+                      </a:pPr>
+                      <a:r>
+                        <a:rPr lang="en-US" sz="1000" b="1" dirty="0">
+                          <a:solidFill>
+                            <a:schemeClr val="accent2"/>
+                          </a:solidFill>
+                          <a:latin typeface="Calibri" pitchFamily="34" charset="0"/>
+                          <a:ea typeface="Calibri" pitchFamily="34" charset="-122"/>
+                          <a:cs typeface="Calibri" pitchFamily="34" charset="-120"/>
+                        </a:rPr>
+                        <a:t>0.6</a:t>
+                      </a:r>
+                      <a:endParaRPr lang="en-US" sz="1000" dirty="0">
+                        <a:latin typeface="Calibri" charset="0"/>
+                        <a:ea typeface="Calibri" charset="0"/>
+                        <a:cs typeface="Calibri" charset="0"/>
+                      </a:endParaRPr>
+                    </a:p>
+                  </a:txBody>
+                  <a:tcPr marL="36576" marR="36576" marT="36576" marB="36576">
+                    <a:lnL w="6350" cap="flat" cmpd="sng" algn="ctr">
+                      <a:solidFill>
+                        <a:srgbClr val="D9DCE1"/>
+                      </a:solidFill>
+                      <a:prstDash val="solid"/>
+                      <a:round/>
+                      <a:headEnd type="none" w="med" len="med"/>
+                      <a:tailEnd type="none" w="med" len="med"/>
+                    </a:lnL>
+                    <a:lnR w="6350" cap="flat" cmpd="sng" algn="ctr">
+                      <a:solidFill>
+                        <a:srgbClr val="D9DCE1"/>
+                      </a:solidFill>
+                      <a:prstDash val="solid"/>
+                      <a:round/>
+                      <a:headEnd type="none" w="med" len="med"/>
+                      <a:tailEnd type="none" w="med" len="med"/>
+                    </a:lnR>
+                    <a:lnT w="6350" cap="flat" cmpd="sng" algn="ctr">
+                      <a:solidFill>
+                        <a:srgbClr val="D9DCE1"/>
+                      </a:solidFill>
+                      <a:prstDash val="solid"/>
+                      <a:round/>
+                      <a:headEnd type="none" w="med" len="med"/>
+                      <a:tailEnd type="none" w="med" len="med"/>
+                    </a:lnT>
+                    <a:lnB w="6350" cap="flat" cmpd="sng" algn="ctr">
+                      <a:solidFill>
+                        <a:srgbClr val="D9DCE1"/>
+                      </a:solidFill>
+                      <a:prstDash val="solid"/>
+                      <a:round/>
+                      <a:headEnd type="none" w="med" len="med"/>
+                      <a:tailEnd type="none" w="med" len="med"/>
+                    </a:lnB>
+                  </a:tcPr>
+                </a:tc>
+              </a:tr>
+            </a:tbl>
+          </a:graphicData>
+        </a:graphic>
+      </p:graphicFrame>
+      <p:sp>
+        <p:nvSpPr>
+          <p:cNvPr id="5" name="Text 1"/>
+          <p:cNvSpPr txBox="1"/>
+          <p:nvPr/>
+        </p:nvSpPr>
+        <p:spPr>
+          <a:xfrm>
+            <a:off x="5486400" y="2377440"/>
+            <a:ext cx="3200400" cy="1188720"/>
+          </a:xfrm>
+          <a:prstGeom prst="rect">
+            <a:avLst/>
+          </a:prstGeom>
+          <a:noFill/>
+          <a:ln/>
+        </p:spPr>
+        <p:txBody>
+          <a:bodyPr wrap="square" lIns="0" tIns="0" rIns="0" bIns="0" rtlCol="0" anchor="t"/>
+          <a:lstStyle/>
+          <a:p>
+            <a:pPr indent="0" marL="0">
+              <a:buNone/>
+            </a:pPr>
+            <a:r>
+              <a:rPr lang="en-US" sz="1150" dirty="0">
+                <a:solidFill>
+                  <a:schemeClr val="tx1"/>
+                </a:solidFill>
+                <a:latin typeface="Calibri" pitchFamily="34" charset="0"/>
+                <a:ea typeface="Calibri" pitchFamily="34" charset="-122"/>
+                <a:cs typeface="Calibri" pitchFamily="34" charset="-120"/>
+              </a:rPr>
+              <a:t>Monthly test, 2001 to 2026: 0.49 per RBI point in the corridor years (95 percent interval 0.14 to 0.85, p 0.007), 0.02 before (p 0.58). The last three cycles all fit.</a:t>
+            </a:r>
+            <a:endParaRPr lang="en-US" sz="1150" dirty="0"/>
+          </a:p>
+        </p:txBody>
+      </p:sp>
+      <p:sp>
+        <p:nvSpPr>
+          <p:cNvPr id="6" name="Text 2"/>
+          <p:cNvSpPr txBox="1"/>
+          <p:nvPr/>
+        </p:nvSpPr>
+        <p:spPr>
+          <a:xfrm>
+            <a:off x="5486400" y="3657600"/>
+            <a:ext cx="3200400" cy="822960"/>
+          </a:xfrm>
+          <a:prstGeom prst="rect">
+            <a:avLst/>
+          </a:prstGeom>
+          <a:noFill/>
+          <a:ln/>
+        </p:spPr>
+        <p:txBody>
+          <a:bodyPr wrap="square" lIns="0" tIns="0" rIns="0" bIns="0" rtlCol="0" anchor="t"/>
+          <a:lstStyle/>
+          <a:p>
+            <a:pPr indent="0" marL="0">
+              <a:buNone/>
+            </a:pPr>
+            <a:r>
+              <a:rPr lang="en-US" sz="1150" i="1" dirty="0">
+                <a:solidFill>
+                  <a:schemeClr val="tx2"/>
+                </a:solidFill>
+                <a:latin typeface="Calibri" pitchFamily="34" charset="0"/>
+                <a:ea typeface="Calibri" pitchFamily="34" charset="-122"/>
+                <a:cs typeface="Calibri" pitchFamily="34" charset="-120"/>
+              </a:rPr>
+              <a:t>At this response, a cycle ending at 5.75 to 6.00 implies an NRB move of about 0.25 to 0.37 point.</a:t>
+            </a:r>
+            <a:endParaRPr lang="en-US" sz="1150" dirty="0"/>
+          </a:p>
+        </p:txBody>
+      </p:sp>
+      <p:sp>
+        <p:nvSpPr>
+          <p:cNvPr id="25" name="Slide Number Placeholder 0"/>
+          <p:cNvSpPr>
+            <a:spLocks noGrp="1"/>
+          </p:cNvSpPr>
+          <p:nvPr>
+            <p:ph type="sldNum" sz="quarter" idx="4294967295"/>
+          </p:nvPr>
+        </p:nvSpPr>
+        <p:spPr>
+          <a:xfrm>
+            <a:off x="8229600" y="4800600"/>
+            <a:ext cx="457200" cy="228600"/>
+          </a:xfrm>
+          <a:prstGeom prst="rect">
+            <a:avLst/>
+          </a:prstGeom>
+          <a:extLst>
+            <a:ext uri="{C572A759-6A51-4108-AA02-DFA0A04FC94B}">
+              <ma14:wrappingTextBoxFlag xmlns:ma14="http://schemas.microsoft.com/office/mac/drawingml/2011/main" val="0"/>
+            </a:ext>
+          </a:extLst>
+        </p:spPr>
+        <p:txBody>
+          <a:bodyPr lIns="0" tIns="0" rIns="0" bIns="0"/>
+          <a:lstStyle>
+            <a:lvl1pPr>
+              <a:defRPr sz="900">
+                <a:solidFill>
+                  <a:schemeClr val="accent4"/>
+                </a:solidFill>
+              </a:defRPr>
+            </a:lvl1pPr>
+          </a:lstStyle>
+          <a:p>
+            <a:pPr algn="r"/>
+            <a:fld id="{F7021451-1387-4CA6-816F-3879F97B5CBC}" type="slidenum">
+              <a:rPr b="0" lang="en-US"/>
+              <a:t>20</a:t>
+            </a:fld>
+            <a:endParaRPr lang="en-US"/>
+          </a:p>
+        </p:txBody>
+      </p:sp>
+    </p:spTree>
+  </p:cSld>
+  <p:clrMapOvr>
+    <a:masterClrMapping/>
+  </p:clrMapOvr>
+</p:sld>
+</file>
+
+<file path=ppt/slides/slide21.xml><?xml version="1.0" encoding="utf-8"?>
+<p:sld xmlns:a="http://schemas.openxmlformats.org/drawingml/2006/main" xmlns:r="http://schemas.openxmlformats.org/officeDocument/2006/relationships" xmlns:p="http://schemas.openxmlformats.org/presentationml/2006/main">
+  <p:cSld name="Slide 21">
     <p:spTree>
       <p:nvGrpSpPr>
         <p:cNvPr id="1" name=""/>
@@ -29096,7 +34574,7 @@
             <a:pPr algn="r"/>
             <a:fld id="{F7021451-1387-4CA6-816F-3879F97B5CBC}" type="slidenum">
               <a:rPr b="0" lang="en-US"/>
-              <a:t>20</a:t>
+              <a:t>21</a:t>
             </a:fld>
             <a:endParaRPr lang="en-US"/>
           </a:p>
@@ -29110,9 +34588,9 @@
 </p:sld>
 </file>
 
-<file path=ppt/slides/slide21.xml><?xml version="1.0" encoding="utf-8"?>
+<file path=ppt/slides/slide22.xml><?xml version="1.0" encoding="utf-8"?>
 <p:sld xmlns:a="http://schemas.openxmlformats.org/drawingml/2006/main" xmlns:r="http://schemas.openxmlformats.org/officeDocument/2006/relationships" xmlns:p="http://schemas.openxmlformats.org/presentationml/2006/main">
-  <p:cSld name="Slide 21">
+  <p:cSld name="Slide 22">
     <p:spTree>
       <p:nvGrpSpPr>
         <p:cNvPr id="1" name=""/>
@@ -29457,7 +34935,7 @@
             <a:pPr algn="r"/>
             <a:fld id="{F7021451-1387-4CA6-816F-3879F97B5CBC}" type="slidenum">
               <a:rPr b="0" lang="en-US"/>
-              <a:t>21</a:t>
+              <a:t>22</a:t>
             </a:fld>
             <a:endParaRPr lang="en-US"/>
           </a:p>
@@ -29471,9 +34949,9 @@
 </p:sld>
 </file>
 
-<file path=ppt/slides/slide22.xml><?xml version="1.0" encoding="utf-8"?>
+<file path=ppt/slides/slide23.xml><?xml version="1.0" encoding="utf-8"?>
 <p:sld xmlns:a="http://schemas.openxmlformats.org/drawingml/2006/main" xmlns:r="http://schemas.openxmlformats.org/officeDocument/2006/relationships" xmlns:p="http://schemas.openxmlformats.org/presentationml/2006/main">
-  <p:cSld name="Slide 22">
+  <p:cSld name="Slide 23">
     <p:spTree>
       <p:nvGrpSpPr>
         <p:cNvPr id="1" name=""/>
@@ -29679,7 +35157,7 @@
                 <a:ea typeface="Calibri" pitchFamily="34" charset="-122"/>
                 <a:cs typeface="Calibri" pitchFamily="34" charset="-120"/>
               </a:rPr>
-              <a:t>At the 0.6 response of the last three cycles, a cycle ending at 5.75 to 6.00 means an NRB move of about 0.3 to 0.45 point.</a:t>
+              <a:t>At the 0.5 response measured since 2016, a cycle ending at 5.75 to 6.00 means an NRB move of about 0.25 to 0.37 point.</a:t>
             </a:r>
             <a:endParaRPr lang="en-US" sz="1200" dirty="0"/>
           </a:p>
@@ -29880,7 +35358,7 @@
             <a:pPr algn="r"/>
             <a:fld id="{F7021451-1387-4CA6-816F-3879F97B5CBC}" type="slidenum">
               <a:rPr b="0" lang="en-US"/>
-              <a:t>22</a:t>
+              <a:t>23</a:t>
             </a:fld>
             <a:endParaRPr lang="en-US"/>
           </a:p>
@@ -29894,9 +35372,9 @@
 </p:sld>
 </file>
 
-<file path=ppt/slides/slide23.xml><?xml version="1.0" encoding="utf-8"?>
+<file path=ppt/slides/slide24.xml><?xml version="1.0" encoding="utf-8"?>
 <p:sld xmlns:a="http://schemas.openxmlformats.org/drawingml/2006/main" xmlns:r="http://schemas.openxmlformats.org/officeDocument/2006/relationships" xmlns:p="http://schemas.openxmlformats.org/presentationml/2006/main">
-  <p:cSld name="Slide 23">
+  <p:cSld name="Slide 24">
     <p:spTree>
       <p:nvGrpSpPr>
         <p:cNvPr id="1" name=""/>
@@ -30006,7 +35484,7 @@
                   <a:srgbClr val="CADCFC"/>
                 </a:solidFill>
               </a:rPr>
-              <a:t>Nepal's rates follow from India's cycle through the peg: prices move with India's (0.88 since 2021), and the NRB has moved its corridor 0.6 point per RBI point in every cycle since 2019.</a:t>
+              <a:t>The peg carries India's prices into Nepal (0.88 since 2021). Nepal's market rate followed the RBI in only 6 of 12 cycles, but since the 2016 corridor the NRB moves about 0.5 point per RBI point.</a:t>
             </a:r>
             <a:endParaRPr lang="en-US" sz="1800" dirty="0"/>
           </a:p>

--- a/reports/presentation/ratecycle_india_nepal.pptx
+++ b/reports/presentation/ratecycle_india_nepal.pptx
@@ -29,9 +29,10 @@
     <p:sldId id="277" r:id="rId23"/>
     <p:sldId id="278" r:id="rId24"/>
     <p:sldId id="279" r:id="rId25"/>
+    <p:sldId id="280" r:id="rId26"/>
   </p:sldIdLst>
   <p:notesMasterIdLst>
-    <p:notesMasterId r:id="rId26"/>
+    <p:notesMasterId r:id="rId27"/>
   </p:notesMasterIdLst>
   <p:sldSz cx="9144000" cy="5143500"/>
   <p:notesSz cx="5143500" cy="9144000"/>
@@ -130,13 +131,13 @@
   <p:extLst>
     <p:ext uri="{521415D9-36F7-43E2-AB2F-B90AF26B5E84}">
       <p14:sectionLst xmlns:p14="http://schemas.microsoft.com/office/powerpoint/2010/main">
-        <p14:section name="Opening" id="{48b1857e-b106-c3cd-4ac4-50f9e93c3d3f}">
+        <p14:section name="Opening" id="{244cb3db-b6e6-1f68-f652-b311aac392c4}">
           <p14:sldIdLst>
             <p14:sldId id="256"/>
             <p14:sldId id="257"/>
           </p14:sldIdLst>
         </p14:section>
-        <p14:section name="How the models were trained" id="{ed13fa3e-1541-a7e2-18e8-d7227300291b}">
+        <p14:section name="How the models were trained" id="{5d328c6b-351e-21b4-2e27-1d602bf88454}">
           <p14:sldIdLst>
             <p14:sldId id="258"/>
             <p14:sldId id="259"/>
@@ -147,7 +148,7 @@
             <p14:sldId id="264"/>
           </p14:sldIdLst>
         </p14:section>
-        <p14:section name="India" id="{aab90010-c327-4144-9152-6703df323820}">
+        <p14:section name="India" id="{aa5290dd-e676-ea87-593e-20170da3a2b7}">
           <p14:sldIdLst>
             <p14:sldId id="265"/>
             <p14:sldId id="266"/>
@@ -158,20 +159,25 @@
             <p14:sldId id="271"/>
           </p14:sldIdLst>
         </p14:section>
-        <p14:section name="Nepal, derived from India's cycle" id="{03934389-97cb-e416-fac4-0c6b32056aa7}">
+        <p14:section name="Next two years" id="{1df60a50-2251-3d1e-ecaa-8d74ea01585a}">
           <p14:sldIdLst>
             <p14:sldId id="272"/>
+          </p14:sldIdLst>
+        </p14:section>
+        <p14:section name="Nepal, derived from India's cycle" id="{96205027-01d6-57fc-c1dc-06a632bcdac6}">
+          <p14:sldIdLst>
             <p14:sldId id="273"/>
             <p14:sldId id="274"/>
             <p14:sldId id="275"/>
             <p14:sldId id="276"/>
             <p14:sldId id="277"/>
             <p14:sldId id="278"/>
+            <p14:sldId id="279"/>
           </p14:sldIdLst>
         </p14:section>
-        <p14:section name="Close" id="{16203a55-d3cc-5fe8-3d5a-18b290e91982}">
+        <p14:section name="Close" id="{878e3cae-e948-2e13-ad46-e58f9990bb18}">
           <p14:sldIdLst>
-            <p14:sldId id="279"/>
+            <p14:sldId id="280"/>
           </p14:sldIdLst>
         </p14:section>
       </p14:sectionLst>
@@ -542,6 +548,2342 @@
                 </a:solidFill>
                 <a:latin typeface="+mn-lt"/>
               </a:rPr>
+              <a:t>Consumer price inflation over 12 months, percent, 2013 to 2026</a:t>
+            </a:r>
+          </a:p>
+        </c:rich>
+      </c:tx>
+      <c:layout/>
+      <c:overlay val="0"/>
+    </c:title>
+    <c:autoTitleDeleted val="0"/>
+    <c:plotArea>
+      <c:layout/>
+      <c:lineChart>
+        <c:varyColors val="0"/>
+        <c:ser>
+          <c:idx val="0"/>
+          <c:order val="0"/>
+          <c:tx>
+            <c:strRef>
+              <c:f>Sheet1!$B$1</c:f>
+              <c:strCache>
+                <c:ptCount val="1"/>
+                <c:pt idx="0">
+                  <c:v>India CPI inflation</c:v>
+                </c:pt>
+              </c:strCache>
+            </c:strRef>
+          </c:tx>
+          <c:spPr>
+            <a:solidFill>
+              <a:srgbClr val="EB6834"/>
+            </a:solidFill>
+            <a:ln w="25400" cap="flat">
+              <a:solidFill>
+                <a:srgbClr val="EB6834"/>
+              </a:solidFill>
+              <a:prstDash val="solid"/>
+              <a:round/>
+            </a:ln>
+            <a:effectLst/>
+          </c:spPr>
+          <c:invertIfNegative val="0"/>
+          <c:dLbls>
+            <c:numFmt formatCode="#,##0" sourceLinked="0"/>
+            <c:txPr>
+              <a:bodyPr/>
+              <a:lstStyle/>
+              <a:p>
+                <a:pPr>
+                  <a:defRPr b="0" i="0" strike="noStrike" sz="1100" u="none">
+                    <a:solidFill>
+                      <a:srgbClr val="1B1F2A"/>
+                    </a:solidFill>
+                    <a:latin typeface="+mn-lt"/>
+                  </a:defRPr>
+                </a:pPr>
+              </a:p>
+            </c:txPr>
+            <c:showLegendKey val="0"/>
+            <c:showVal val="0"/>
+            <c:showCatName val="0"/>
+            <c:showSerName val="0"/>
+            <c:showPercent val="0"/>
+            <c:showBubbleSize val="0"/>
+            <c:showLeaderLines val="0"/>
+          </c:dLbls>
+          <c:marker>
+            <c:symbol val="none"/>
+            <c:size val="6"/>
+            <c:spPr>
+              <a:solidFill>
+                <a:srgbClr val="EB6834"/>
+              </a:solidFill>
+              <a:ln w="9525" cap="flat">
+                <a:solidFill>
+                  <a:srgbClr val="EB6834"/>
+                </a:solidFill>
+                <a:prstDash val="solid"/>
+                <a:round/>
+              </a:ln>
+              <a:effectLst/>
+            </c:spPr>
+          </c:marker>
+          <c:cat>
+            <c:multiLvlStrRef>
+              <c:f>Sheet1!$A$2:$A$164</c:f>
+              <c:multiLvlStrCache>
+                <c:ptCount val="163"/>
+                <c:lvl>
+                  <c:pt idx="0">
+                    <c:v>2013</c:v>
+                  </c:pt>
+                  <c:pt idx="1">
+                    <c:v>2013</c:v>
+                  </c:pt>
+                  <c:pt idx="2">
+                    <c:v>2013</c:v>
+                  </c:pt>
+                  <c:pt idx="3">
+                    <c:v>2013</c:v>
+                  </c:pt>
+                  <c:pt idx="4">
+                    <c:v>2013</c:v>
+                  </c:pt>
+                  <c:pt idx="5">
+                    <c:v>2013</c:v>
+                  </c:pt>
+                  <c:pt idx="6">
+                    <c:v>2013</c:v>
+                  </c:pt>
+                  <c:pt idx="7">
+                    <c:v>2013</c:v>
+                  </c:pt>
+                  <c:pt idx="8">
+                    <c:v>2013</c:v>
+                  </c:pt>
+                  <c:pt idx="9">
+                    <c:v>2013</c:v>
+                  </c:pt>
+                  <c:pt idx="10">
+                    <c:v>2013</c:v>
+                  </c:pt>
+                  <c:pt idx="11">
+                    <c:v>2013</c:v>
+                  </c:pt>
+                  <c:pt idx="12">
+                    <c:v>2014</c:v>
+                  </c:pt>
+                  <c:pt idx="13">
+                    <c:v>2014</c:v>
+                  </c:pt>
+                  <c:pt idx="14">
+                    <c:v>2014</c:v>
+                  </c:pt>
+                  <c:pt idx="15">
+                    <c:v>2014</c:v>
+                  </c:pt>
+                  <c:pt idx="16">
+                    <c:v>2014</c:v>
+                  </c:pt>
+                  <c:pt idx="17">
+                    <c:v>2014</c:v>
+                  </c:pt>
+                  <c:pt idx="18">
+                    <c:v>2014</c:v>
+                  </c:pt>
+                  <c:pt idx="19">
+                    <c:v>2014</c:v>
+                  </c:pt>
+                  <c:pt idx="20">
+                    <c:v>2014</c:v>
+                  </c:pt>
+                  <c:pt idx="21">
+                    <c:v>2014</c:v>
+                  </c:pt>
+                  <c:pt idx="22">
+                    <c:v>2014</c:v>
+                  </c:pt>
+                  <c:pt idx="23">
+                    <c:v>2014</c:v>
+                  </c:pt>
+                  <c:pt idx="24">
+                    <c:v>2015</c:v>
+                  </c:pt>
+                  <c:pt idx="25">
+                    <c:v>2015</c:v>
+                  </c:pt>
+                  <c:pt idx="26">
+                    <c:v>2015</c:v>
+                  </c:pt>
+                  <c:pt idx="27">
+                    <c:v>2015</c:v>
+                  </c:pt>
+                  <c:pt idx="28">
+                    <c:v>2015</c:v>
+                  </c:pt>
+                  <c:pt idx="29">
+                    <c:v>2015</c:v>
+                  </c:pt>
+                  <c:pt idx="30">
+                    <c:v>2015</c:v>
+                  </c:pt>
+                  <c:pt idx="31">
+                    <c:v>2015</c:v>
+                  </c:pt>
+                  <c:pt idx="32">
+                    <c:v>2015</c:v>
+                  </c:pt>
+                  <c:pt idx="33">
+                    <c:v>2015</c:v>
+                  </c:pt>
+                  <c:pt idx="34">
+                    <c:v>2015</c:v>
+                  </c:pt>
+                  <c:pt idx="35">
+                    <c:v>2015</c:v>
+                  </c:pt>
+                  <c:pt idx="36">
+                    <c:v>2016</c:v>
+                  </c:pt>
+                  <c:pt idx="37">
+                    <c:v>2016</c:v>
+                  </c:pt>
+                  <c:pt idx="38">
+                    <c:v>2016</c:v>
+                  </c:pt>
+                  <c:pt idx="39">
+                    <c:v>2016</c:v>
+                  </c:pt>
+                  <c:pt idx="40">
+                    <c:v>2016</c:v>
+                  </c:pt>
+                  <c:pt idx="41">
+                    <c:v>2016</c:v>
+                  </c:pt>
+                  <c:pt idx="42">
+                    <c:v>2016</c:v>
+                  </c:pt>
+                  <c:pt idx="43">
+                    <c:v>2016</c:v>
+                  </c:pt>
+                  <c:pt idx="44">
+                    <c:v>2016</c:v>
+                  </c:pt>
+                  <c:pt idx="45">
+                    <c:v>2016</c:v>
+                  </c:pt>
+                  <c:pt idx="46">
+                    <c:v>2016</c:v>
+                  </c:pt>
+                  <c:pt idx="47">
+                    <c:v>2016</c:v>
+                  </c:pt>
+                  <c:pt idx="48">
+                    <c:v>2017</c:v>
+                  </c:pt>
+                  <c:pt idx="49">
+                    <c:v>2017</c:v>
+                  </c:pt>
+                  <c:pt idx="50">
+                    <c:v>2017</c:v>
+                  </c:pt>
+                  <c:pt idx="51">
+                    <c:v>2017</c:v>
+                  </c:pt>
+                  <c:pt idx="52">
+                    <c:v>2017</c:v>
+                  </c:pt>
+                  <c:pt idx="53">
+                    <c:v>2017</c:v>
+                  </c:pt>
+                  <c:pt idx="54">
+                    <c:v>2017</c:v>
+                  </c:pt>
+                  <c:pt idx="55">
+                    <c:v>2017</c:v>
+                  </c:pt>
+                  <c:pt idx="56">
+                    <c:v>2017</c:v>
+                  </c:pt>
+                  <c:pt idx="57">
+                    <c:v>2017</c:v>
+                  </c:pt>
+                  <c:pt idx="58">
+                    <c:v>2017</c:v>
+                  </c:pt>
+                  <c:pt idx="59">
+                    <c:v>2017</c:v>
+                  </c:pt>
+                  <c:pt idx="60">
+                    <c:v>2018</c:v>
+                  </c:pt>
+                  <c:pt idx="61">
+                    <c:v>2018</c:v>
+                  </c:pt>
+                  <c:pt idx="62">
+                    <c:v>2018</c:v>
+                  </c:pt>
+                  <c:pt idx="63">
+                    <c:v>2018</c:v>
+                  </c:pt>
+                  <c:pt idx="64">
+                    <c:v>2018</c:v>
+                  </c:pt>
+                  <c:pt idx="65">
+                    <c:v>2018</c:v>
+                  </c:pt>
+                  <c:pt idx="66">
+                    <c:v>2018</c:v>
+                  </c:pt>
+                  <c:pt idx="67">
+                    <c:v>2018</c:v>
+                  </c:pt>
+                  <c:pt idx="68">
+                    <c:v>2018</c:v>
+                  </c:pt>
+                  <c:pt idx="69">
+                    <c:v>2018</c:v>
+                  </c:pt>
+                  <c:pt idx="70">
+                    <c:v>2018</c:v>
+                  </c:pt>
+                  <c:pt idx="71">
+                    <c:v>2018</c:v>
+                  </c:pt>
+                  <c:pt idx="72">
+                    <c:v>2019</c:v>
+                  </c:pt>
+                  <c:pt idx="73">
+                    <c:v>2019</c:v>
+                  </c:pt>
+                  <c:pt idx="74">
+                    <c:v>2019</c:v>
+                  </c:pt>
+                  <c:pt idx="75">
+                    <c:v>2019</c:v>
+                  </c:pt>
+                  <c:pt idx="76">
+                    <c:v>2019</c:v>
+                  </c:pt>
+                  <c:pt idx="77">
+                    <c:v>2019</c:v>
+                  </c:pt>
+                  <c:pt idx="78">
+                    <c:v>2019</c:v>
+                  </c:pt>
+                  <c:pt idx="79">
+                    <c:v>2019</c:v>
+                  </c:pt>
+                  <c:pt idx="80">
+                    <c:v>2019</c:v>
+                  </c:pt>
+                  <c:pt idx="81">
+                    <c:v>2019</c:v>
+                  </c:pt>
+                  <c:pt idx="82">
+                    <c:v>2019</c:v>
+                  </c:pt>
+                  <c:pt idx="83">
+                    <c:v>2019</c:v>
+                  </c:pt>
+                  <c:pt idx="84">
+                    <c:v>2020</c:v>
+                  </c:pt>
+                  <c:pt idx="85">
+                    <c:v>2020</c:v>
+                  </c:pt>
+                  <c:pt idx="86">
+                    <c:v>2020</c:v>
+                  </c:pt>
+                  <c:pt idx="87">
+                    <c:v>2020</c:v>
+                  </c:pt>
+                  <c:pt idx="88">
+                    <c:v>2020</c:v>
+                  </c:pt>
+                  <c:pt idx="89">
+                    <c:v>2020</c:v>
+                  </c:pt>
+                  <c:pt idx="90">
+                    <c:v>2020</c:v>
+                  </c:pt>
+                  <c:pt idx="91">
+                    <c:v>2020</c:v>
+                  </c:pt>
+                  <c:pt idx="92">
+                    <c:v>2020</c:v>
+                  </c:pt>
+                  <c:pt idx="93">
+                    <c:v>2020</c:v>
+                  </c:pt>
+                  <c:pt idx="94">
+                    <c:v>2020</c:v>
+                  </c:pt>
+                  <c:pt idx="95">
+                    <c:v>2020</c:v>
+                  </c:pt>
+                  <c:pt idx="96">
+                    <c:v>2021</c:v>
+                  </c:pt>
+                  <c:pt idx="97">
+                    <c:v>2021</c:v>
+                  </c:pt>
+                  <c:pt idx="98">
+                    <c:v>2021</c:v>
+                  </c:pt>
+                  <c:pt idx="99">
+                    <c:v>2021</c:v>
+                  </c:pt>
+                  <c:pt idx="100">
+                    <c:v>2021</c:v>
+                  </c:pt>
+                  <c:pt idx="101">
+                    <c:v>2021</c:v>
+                  </c:pt>
+                  <c:pt idx="102">
+                    <c:v>2021</c:v>
+                  </c:pt>
+                  <c:pt idx="103">
+                    <c:v>2021</c:v>
+                  </c:pt>
+                  <c:pt idx="104">
+                    <c:v>2021</c:v>
+                  </c:pt>
+                  <c:pt idx="105">
+                    <c:v>2021</c:v>
+                  </c:pt>
+                  <c:pt idx="106">
+                    <c:v>2021</c:v>
+                  </c:pt>
+                  <c:pt idx="107">
+                    <c:v>2021</c:v>
+                  </c:pt>
+                  <c:pt idx="108">
+                    <c:v>2022</c:v>
+                  </c:pt>
+                  <c:pt idx="109">
+                    <c:v>2022</c:v>
+                  </c:pt>
+                  <c:pt idx="110">
+                    <c:v>2022</c:v>
+                  </c:pt>
+                  <c:pt idx="111">
+                    <c:v>2022</c:v>
+                  </c:pt>
+                  <c:pt idx="112">
+                    <c:v>2022</c:v>
+                  </c:pt>
+                  <c:pt idx="113">
+                    <c:v>2022</c:v>
+                  </c:pt>
+                  <c:pt idx="114">
+                    <c:v>2022</c:v>
+                  </c:pt>
+                  <c:pt idx="115">
+                    <c:v>2022</c:v>
+                  </c:pt>
+                  <c:pt idx="116">
+                    <c:v>2022</c:v>
+                  </c:pt>
+                  <c:pt idx="117">
+                    <c:v>2022</c:v>
+                  </c:pt>
+                  <c:pt idx="118">
+                    <c:v>2022</c:v>
+                  </c:pt>
+                  <c:pt idx="119">
+                    <c:v>2022</c:v>
+                  </c:pt>
+                  <c:pt idx="120">
+                    <c:v>2023</c:v>
+                  </c:pt>
+                  <c:pt idx="121">
+                    <c:v>2023</c:v>
+                  </c:pt>
+                  <c:pt idx="122">
+                    <c:v>2023</c:v>
+                  </c:pt>
+                  <c:pt idx="123">
+                    <c:v>2023</c:v>
+                  </c:pt>
+                  <c:pt idx="124">
+                    <c:v>2023</c:v>
+                  </c:pt>
+                  <c:pt idx="125">
+                    <c:v>2023</c:v>
+                  </c:pt>
+                  <c:pt idx="126">
+                    <c:v>2023</c:v>
+                  </c:pt>
+                  <c:pt idx="127">
+                    <c:v>2023</c:v>
+                  </c:pt>
+                  <c:pt idx="128">
+                    <c:v>2023</c:v>
+                  </c:pt>
+                  <c:pt idx="129">
+                    <c:v>2023</c:v>
+                  </c:pt>
+                  <c:pt idx="130">
+                    <c:v>2023</c:v>
+                  </c:pt>
+                  <c:pt idx="131">
+                    <c:v>2023</c:v>
+                  </c:pt>
+                  <c:pt idx="132">
+                    <c:v>2024</c:v>
+                  </c:pt>
+                  <c:pt idx="133">
+                    <c:v>2024</c:v>
+                  </c:pt>
+                  <c:pt idx="134">
+                    <c:v>2024</c:v>
+                  </c:pt>
+                  <c:pt idx="135">
+                    <c:v>2024</c:v>
+                  </c:pt>
+                  <c:pt idx="136">
+                    <c:v>2024</c:v>
+                  </c:pt>
+                  <c:pt idx="137">
+                    <c:v>2024</c:v>
+                  </c:pt>
+                  <c:pt idx="138">
+                    <c:v>2024</c:v>
+                  </c:pt>
+                  <c:pt idx="139">
+                    <c:v>2024</c:v>
+                  </c:pt>
+                  <c:pt idx="140">
+                    <c:v>2024</c:v>
+                  </c:pt>
+                  <c:pt idx="141">
+                    <c:v>2024</c:v>
+                  </c:pt>
+                  <c:pt idx="142">
+                    <c:v>2024</c:v>
+                  </c:pt>
+                  <c:pt idx="143">
+                    <c:v>2024</c:v>
+                  </c:pt>
+                  <c:pt idx="144">
+                    <c:v>2025</c:v>
+                  </c:pt>
+                  <c:pt idx="145">
+                    <c:v>2025</c:v>
+                  </c:pt>
+                  <c:pt idx="146">
+                    <c:v>2025</c:v>
+                  </c:pt>
+                  <c:pt idx="147">
+                    <c:v>2025</c:v>
+                  </c:pt>
+                  <c:pt idx="148">
+                    <c:v>2025</c:v>
+                  </c:pt>
+                  <c:pt idx="149">
+                    <c:v>2025</c:v>
+                  </c:pt>
+                  <c:pt idx="150">
+                    <c:v>2025</c:v>
+                  </c:pt>
+                  <c:pt idx="151">
+                    <c:v>2025</c:v>
+                  </c:pt>
+                  <c:pt idx="152">
+                    <c:v>2025</c:v>
+                  </c:pt>
+                  <c:pt idx="153">
+                    <c:v>2025</c:v>
+                  </c:pt>
+                  <c:pt idx="154">
+                    <c:v>2025</c:v>
+                  </c:pt>
+                  <c:pt idx="155">
+                    <c:v>2025</c:v>
+                  </c:pt>
+                  <c:pt idx="156">
+                    <c:v>2026</c:v>
+                  </c:pt>
+                  <c:pt idx="157">
+                    <c:v>2026</c:v>
+                  </c:pt>
+                  <c:pt idx="158">
+                    <c:v>2026</c:v>
+                  </c:pt>
+                  <c:pt idx="159">
+                    <c:v>2026</c:v>
+                  </c:pt>
+                  <c:pt idx="160">
+                    <c:v>2026</c:v>
+                  </c:pt>
+                  <c:pt idx="161">
+                    <c:v>2026</c:v>
+                  </c:pt>
+                  <c:pt idx="162">
+                    <c:v>2026</c:v>
+                  </c:pt>
+                </c:lvl>
+              </c:multiLvlStrCache>
+            </c:multiLvlStrRef>
+          </c:cat>
+          <c:val>
+            <c:numRef>
+              <c:f>Sheet1!$B$2:$B$164</c:f>
+              <c:numCache>
+                <c:formatCode>General</c:formatCode>
+                <c:ptCount val="163"/>
+                <c:pt idx="0">
+                  <c:v>10.52</c:v>
+                </c:pt>
+                <c:pt idx="1">
+                  <c:v>10.89</c:v>
+                </c:pt>
+                <c:pt idx="2">
+                  <c:v>10.06</c:v>
+                </c:pt>
+                <c:pt idx="3">
+                  <c:v>9.1</c:v>
+                </c:pt>
+                <c:pt idx="4">
+                  <c:v>9.03</c:v>
+                </c:pt>
+                <c:pt idx="5">
+                  <c:v>9.52</c:v>
+                </c:pt>
+                <c:pt idx="6">
+                  <c:v>9.79</c:v>
+                </c:pt>
+                <c:pt idx="7">
+                  <c:v>9.98</c:v>
+                </c:pt>
+                <c:pt idx="8">
+                  <c:v>10.5</c:v>
+                </c:pt>
+                <c:pt idx="9">
+                  <c:v>10.81</c:v>
+                </c:pt>
+                <c:pt idx="10">
+                  <c:v>11.51</c:v>
+                </c:pt>
+                <c:pt idx="11">
+                  <c:v>9.46</c:v>
+                </c:pt>
+                <c:pt idx="12">
+                  <c:v>8.6</c:v>
+                </c:pt>
+                <c:pt idx="13">
+                  <c:v>7.88</c:v>
+                </c:pt>
+                <c:pt idx="14">
+                  <c:v>8.25</c:v>
+                </c:pt>
+                <c:pt idx="15">
+                  <c:v>8.48</c:v>
+                </c:pt>
+                <c:pt idx="16">
+                  <c:v>8.33</c:v>
+                </c:pt>
+                <c:pt idx="17">
+                  <c:v>6.77</c:v>
+                </c:pt>
+                <c:pt idx="18">
+                  <c:v>7.39</c:v>
+                </c:pt>
+                <c:pt idx="19">
+                  <c:v>7.03</c:v>
+                </c:pt>
+                <c:pt idx="20">
+                  <c:v>5.63</c:v>
+                </c:pt>
+                <c:pt idx="21">
+                  <c:v>4.62</c:v>
+                </c:pt>
+                <c:pt idx="22">
+                  <c:v>3.27</c:v>
+                </c:pt>
+                <c:pt idx="23">
+                  <c:v>4.28</c:v>
+                </c:pt>
+                <c:pt idx="24">
+                  <c:v>5.19</c:v>
+                </c:pt>
+                <c:pt idx="25">
+                  <c:v>5.37</c:v>
+                </c:pt>
+                <c:pt idx="26">
+                  <c:v>5.25</c:v>
+                </c:pt>
+                <c:pt idx="27">
+                  <c:v>4.87</c:v>
+                </c:pt>
+                <c:pt idx="28">
+                  <c:v>5.01</c:v>
+                </c:pt>
+                <c:pt idx="29">
+                  <c:v>5.4</c:v>
+                </c:pt>
+                <c:pt idx="30">
+                  <c:v>3.69</c:v>
+                </c:pt>
+                <c:pt idx="31">
+                  <c:v>3.74</c:v>
+                </c:pt>
+                <c:pt idx="32">
+                  <c:v>4.41</c:v>
+                </c:pt>
+                <c:pt idx="33">
+                  <c:v>5</c:v>
+                </c:pt>
+                <c:pt idx="34">
+                  <c:v>5.41</c:v>
+                </c:pt>
+                <c:pt idx="35">
+                  <c:v>5.61</c:v>
+                </c:pt>
+                <c:pt idx="36">
+                  <c:v>5.69</c:v>
+                </c:pt>
+                <c:pt idx="37">
+                  <c:v>5.26</c:v>
+                </c:pt>
+                <c:pt idx="38">
+                  <c:v>4.83</c:v>
+                </c:pt>
+                <c:pt idx="39">
+                  <c:v>5.47</c:v>
+                </c:pt>
+                <c:pt idx="40">
+                  <c:v>5.76</c:v>
+                </c:pt>
+                <c:pt idx="41">
+                  <c:v>5.77</c:v>
+                </c:pt>
+                <c:pt idx="42">
+                  <c:v>6.07</c:v>
+                </c:pt>
+                <c:pt idx="43">
+                  <c:v>5.05</c:v>
+                </c:pt>
+                <c:pt idx="44">
+                  <c:v>4.39</c:v>
+                </c:pt>
+                <c:pt idx="45">
+                  <c:v>4.2</c:v>
+                </c:pt>
+                <c:pt idx="46">
+                  <c:v>3.63</c:v>
+                </c:pt>
+                <c:pt idx="47">
+                  <c:v>3.41</c:v>
+                </c:pt>
+                <c:pt idx="48">
+                  <c:v>3.17</c:v>
+                </c:pt>
+                <c:pt idx="49">
+                  <c:v>3.65</c:v>
+                </c:pt>
+                <c:pt idx="50">
+                  <c:v>3.89</c:v>
+                </c:pt>
+                <c:pt idx="51">
+                  <c:v>2.99</c:v>
+                </c:pt>
+                <c:pt idx="52">
+                  <c:v>2.18</c:v>
+                </c:pt>
+                <c:pt idx="53">
+                  <c:v>1.46</c:v>
+                </c:pt>
+                <c:pt idx="54">
+                  <c:v>2.36</c:v>
+                </c:pt>
+                <c:pt idx="55">
+                  <c:v>3.28</c:v>
+                </c:pt>
+                <c:pt idx="56">
+                  <c:v>3.28</c:v>
+                </c:pt>
+                <c:pt idx="57">
+                  <c:v>3.58</c:v>
+                </c:pt>
+                <c:pt idx="58">
+                  <c:v>4.88</c:v>
+                </c:pt>
+                <c:pt idx="59">
+                  <c:v>5.21</c:v>
+                </c:pt>
+                <c:pt idx="60">
+                  <c:v>5.07</c:v>
+                </c:pt>
+                <c:pt idx="61">
+                  <c:v>4.44</c:v>
+                </c:pt>
+                <c:pt idx="62">
+                  <c:v>4.28</c:v>
+                </c:pt>
+                <c:pt idx="63">
+                  <c:v>4.58</c:v>
+                </c:pt>
+                <c:pt idx="64">
+                  <c:v>4.87</c:v>
+                </c:pt>
+                <c:pt idx="65">
+                  <c:v>4.92</c:v>
+                </c:pt>
+                <c:pt idx="66">
+                  <c:v>4.17</c:v>
+                </c:pt>
+                <c:pt idx="67">
+                  <c:v>3.69</c:v>
+                </c:pt>
+                <c:pt idx="68">
+                  <c:v>3.7</c:v>
+                </c:pt>
+                <c:pt idx="69">
+                  <c:v>3.38</c:v>
+                </c:pt>
+                <c:pt idx="70">
+                  <c:v>2.33</c:v>
+                </c:pt>
+                <c:pt idx="71">
+                  <c:v>2.11</c:v>
+                </c:pt>
+                <c:pt idx="72">
+                  <c:v>1.97</c:v>
+                </c:pt>
+                <c:pt idx="73">
+                  <c:v>2.57</c:v>
+                </c:pt>
+                <c:pt idx="74">
+                  <c:v>2.86</c:v>
+                </c:pt>
+                <c:pt idx="75">
+                  <c:v>2.99</c:v>
+                </c:pt>
+                <c:pt idx="76">
+                  <c:v>3.05</c:v>
+                </c:pt>
+                <c:pt idx="77">
+                  <c:v>3.18</c:v>
+                </c:pt>
+                <c:pt idx="78">
+                  <c:v>3.15</c:v>
+                </c:pt>
+                <c:pt idx="79">
+                  <c:v>3.28</c:v>
+                </c:pt>
+                <c:pt idx="80">
+                  <c:v>3.99</c:v>
+                </c:pt>
+                <c:pt idx="81">
+                  <c:v>4.62</c:v>
+                </c:pt>
+                <c:pt idx="82">
+                  <c:v>5.54</c:v>
+                </c:pt>
+                <c:pt idx="83">
+                  <c:v>7.35</c:v>
+                </c:pt>
+                <c:pt idx="84">
+                  <c:v>7.59</c:v>
+                </c:pt>
+                <c:pt idx="85">
+                  <c:v>6.58</c:v>
+                </c:pt>
+                <c:pt idx="86">
+                  <c:v>5.84</c:v>
+                </c:pt>
+                <c:pt idx="87">
+                  <c:v>7.22</c:v>
+                </c:pt>
+                <c:pt idx="88">
+                  <c:v>6.27</c:v>
+                </c:pt>
+                <c:pt idx="89">
+                  <c:v>6.23</c:v>
+                </c:pt>
+                <c:pt idx="90">
+                  <c:v>6.73</c:v>
+                </c:pt>
+                <c:pt idx="91">
+                  <c:v>6.69</c:v>
+                </c:pt>
+                <c:pt idx="92">
+                  <c:v>7.27</c:v>
+                </c:pt>
+                <c:pt idx="93">
+                  <c:v>7.61</c:v>
+                </c:pt>
+                <c:pt idx="94">
+                  <c:v>6.93</c:v>
+                </c:pt>
+                <c:pt idx="95">
+                  <c:v>4.59</c:v>
+                </c:pt>
+                <c:pt idx="96">
+                  <c:v>4.06</c:v>
+                </c:pt>
+                <c:pt idx="97">
+                  <c:v>5.03</c:v>
+                </c:pt>
+                <c:pt idx="98">
+                  <c:v>5.52</c:v>
+                </c:pt>
+                <c:pt idx="99">
+                  <c:v>4.23</c:v>
+                </c:pt>
+                <c:pt idx="100">
+                  <c:v>6.3</c:v>
+                </c:pt>
+                <c:pt idx="101">
+                  <c:v>6.26</c:v>
+                </c:pt>
+                <c:pt idx="102">
+                  <c:v>5.59</c:v>
+                </c:pt>
+                <c:pt idx="103">
+                  <c:v>5.3</c:v>
+                </c:pt>
+                <c:pt idx="104">
+                  <c:v>4.35</c:v>
+                </c:pt>
+                <c:pt idx="105">
+                  <c:v>4.48</c:v>
+                </c:pt>
+                <c:pt idx="106">
+                  <c:v>4.91</c:v>
+                </c:pt>
+                <c:pt idx="107">
+                  <c:v>5.66</c:v>
+                </c:pt>
+                <c:pt idx="108">
+                  <c:v>6.01</c:v>
+                </c:pt>
+                <c:pt idx="109">
+                  <c:v>6.07</c:v>
+                </c:pt>
+                <c:pt idx="110">
+                  <c:v>6.95</c:v>
+                </c:pt>
+                <c:pt idx="111">
+                  <c:v>7.79</c:v>
+                </c:pt>
+                <c:pt idx="112">
+                  <c:v>7.04</c:v>
+                </c:pt>
+                <c:pt idx="113">
+                  <c:v>7.01</c:v>
+                </c:pt>
+                <c:pt idx="114">
+                  <c:v>6.71</c:v>
+                </c:pt>
+                <c:pt idx="115">
+                  <c:v>7</c:v>
+                </c:pt>
+                <c:pt idx="116">
+                  <c:v>7.41</c:v>
+                </c:pt>
+                <c:pt idx="117">
+                  <c:v>6.77</c:v>
+                </c:pt>
+                <c:pt idx="118">
+                  <c:v>5.88</c:v>
+                </c:pt>
+                <c:pt idx="119">
+                  <c:v>5.72</c:v>
+                </c:pt>
+                <c:pt idx="120">
+                  <c:v>6.52</c:v>
+                </c:pt>
+                <c:pt idx="121">
+                  <c:v>6.44</c:v>
+                </c:pt>
+                <c:pt idx="122">
+                  <c:v>5.66</c:v>
+                </c:pt>
+                <c:pt idx="123">
+                  <c:v>4.7</c:v>
+                </c:pt>
+                <c:pt idx="124">
+                  <c:v>4.31</c:v>
+                </c:pt>
+                <c:pt idx="125">
+                  <c:v>4.87</c:v>
+                </c:pt>
+                <c:pt idx="126">
+                  <c:v>7.44</c:v>
+                </c:pt>
+                <c:pt idx="127">
+                  <c:v>6.83</c:v>
+                </c:pt>
+                <c:pt idx="128">
+                  <c:v>5.02</c:v>
+                </c:pt>
+                <c:pt idx="129">
+                  <c:v>4.87</c:v>
+                </c:pt>
+                <c:pt idx="130">
+                  <c:v>5.55</c:v>
+                </c:pt>
+                <c:pt idx="131">
+                  <c:v>5.69</c:v>
+                </c:pt>
+                <c:pt idx="132">
+                  <c:v>5.1</c:v>
+                </c:pt>
+                <c:pt idx="133">
+                  <c:v>5.09</c:v>
+                </c:pt>
+                <c:pt idx="134">
+                  <c:v>4.85</c:v>
+                </c:pt>
+                <c:pt idx="135">
+                  <c:v>4.83</c:v>
+                </c:pt>
+                <c:pt idx="136">
+                  <c:v>4.8</c:v>
+                </c:pt>
+                <c:pt idx="137">
+                  <c:v>5.08</c:v>
+                </c:pt>
+                <c:pt idx="138">
+                  <c:v>3.6</c:v>
+                </c:pt>
+                <c:pt idx="139">
+                  <c:v>3.65</c:v>
+                </c:pt>
+                <c:pt idx="140">
+                  <c:v>5.49</c:v>
+                </c:pt>
+                <c:pt idx="141">
+                  <c:v>6.21</c:v>
+                </c:pt>
+                <c:pt idx="142">
+                  <c:v>5.48</c:v>
+                </c:pt>
+                <c:pt idx="143">
+                  <c:v>5.22</c:v>
+                </c:pt>
+                <c:pt idx="144">
+                  <c:v>4.26</c:v>
+                </c:pt>
+                <c:pt idx="145">
+                  <c:v>3.61</c:v>
+                </c:pt>
+                <c:pt idx="146">
+                  <c:v>3.34</c:v>
+                </c:pt>
+                <c:pt idx="147">
+                  <c:v>3.16</c:v>
+                </c:pt>
+                <c:pt idx="148">
+                  <c:v>2.82</c:v>
+                </c:pt>
+                <c:pt idx="149">
+                  <c:v>2.1</c:v>
+                </c:pt>
+                <c:pt idx="150">
+                  <c:v>1.61</c:v>
+                </c:pt>
+                <c:pt idx="151">
+                  <c:v>2.07</c:v>
+                </c:pt>
+                <c:pt idx="152">
+                  <c:v>1.44</c:v>
+                </c:pt>
+                <c:pt idx="153">
+                  <c:v>0.25</c:v>
+                </c:pt>
+                <c:pt idx="154">
+                  <c:v>0.71</c:v>
+                </c:pt>
+                <c:pt idx="155">
+                  <c:v>1.33</c:v>
+                </c:pt>
+                <c:pt idx="156">
+                  <c:v>2.73</c:v>
+                </c:pt>
+                <c:pt idx="157">
+                  <c:v>3.21</c:v>
+                </c:pt>
+                <c:pt idx="158">
+                  <c:v>3.4</c:v>
+                </c:pt>
+                <c:pt idx="159">
+                  <c:v>3.48</c:v>
+                </c:pt>
+                <c:pt idx="160">
+                  <c:v>3.94</c:v>
+                </c:pt>
+                <c:pt idx="161">
+                  <c:v>4.38</c:v>
+                </c:pt>
+                <c:pt idx="162">
+                  <c:v>4.44</c:v>
+                </c:pt>
+              </c:numCache>
+            </c:numRef>
+          </c:val>
+          <c:smooth val="0"/>
+        </c:ser>
+        <c:ser>
+          <c:idx val="1"/>
+          <c:order val="1"/>
+          <c:tx>
+            <c:strRef>
+              <c:f>Sheet1!$C$1</c:f>
+              <c:strCache>
+                <c:ptCount val="1"/>
+                <c:pt idx="0">
+                  <c:v>Nepal CPI inflation</c:v>
+                </c:pt>
+              </c:strCache>
+            </c:strRef>
+          </c:tx>
+          <c:spPr>
+            <a:solidFill>
+              <a:srgbClr val="2A78D6"/>
+            </a:solidFill>
+            <a:ln w="25400" cap="flat">
+              <a:solidFill>
+                <a:srgbClr val="2A78D6"/>
+              </a:solidFill>
+              <a:prstDash val="solid"/>
+              <a:round/>
+            </a:ln>
+            <a:effectLst/>
+          </c:spPr>
+          <c:invertIfNegative val="0"/>
+          <c:dLbls>
+            <c:numFmt formatCode="#,##0" sourceLinked="0"/>
+            <c:txPr>
+              <a:bodyPr/>
+              <a:lstStyle/>
+              <a:p>
+                <a:pPr>
+                  <a:defRPr b="0" i="0" strike="noStrike" sz="1100" u="none">
+                    <a:solidFill>
+                      <a:srgbClr val="1B1F2A"/>
+                    </a:solidFill>
+                    <a:latin typeface="+mn-lt"/>
+                  </a:defRPr>
+                </a:pPr>
+              </a:p>
+            </c:txPr>
+            <c:showLegendKey val="0"/>
+            <c:showVal val="0"/>
+            <c:showCatName val="0"/>
+            <c:showSerName val="0"/>
+            <c:showPercent val="0"/>
+            <c:showBubbleSize val="0"/>
+            <c:showLeaderLines val="0"/>
+          </c:dLbls>
+          <c:marker>
+            <c:symbol val="none"/>
+            <c:size val="6"/>
+            <c:spPr>
+              <a:solidFill>
+                <a:srgbClr val="2A78D6"/>
+              </a:solidFill>
+              <a:ln w="9525" cap="flat">
+                <a:solidFill>
+                  <a:srgbClr val="2A78D6"/>
+                </a:solidFill>
+                <a:prstDash val="solid"/>
+                <a:round/>
+              </a:ln>
+              <a:effectLst/>
+            </c:spPr>
+          </c:marker>
+          <c:cat>
+            <c:multiLvlStrRef>
+              <c:f>Sheet1!$A$2:$A$164</c:f>
+              <c:multiLvlStrCache>
+                <c:ptCount val="163"/>
+                <c:lvl>
+                  <c:pt idx="0">
+                    <c:v>2013</c:v>
+                  </c:pt>
+                  <c:pt idx="1">
+                    <c:v>2013</c:v>
+                  </c:pt>
+                  <c:pt idx="2">
+                    <c:v>2013</c:v>
+                  </c:pt>
+                  <c:pt idx="3">
+                    <c:v>2013</c:v>
+                  </c:pt>
+                  <c:pt idx="4">
+                    <c:v>2013</c:v>
+                  </c:pt>
+                  <c:pt idx="5">
+                    <c:v>2013</c:v>
+                  </c:pt>
+                  <c:pt idx="6">
+                    <c:v>2013</c:v>
+                  </c:pt>
+                  <c:pt idx="7">
+                    <c:v>2013</c:v>
+                  </c:pt>
+                  <c:pt idx="8">
+                    <c:v>2013</c:v>
+                  </c:pt>
+                  <c:pt idx="9">
+                    <c:v>2013</c:v>
+                  </c:pt>
+                  <c:pt idx="10">
+                    <c:v>2013</c:v>
+                  </c:pt>
+                  <c:pt idx="11">
+                    <c:v>2013</c:v>
+                  </c:pt>
+                  <c:pt idx="12">
+                    <c:v>2014</c:v>
+                  </c:pt>
+                  <c:pt idx="13">
+                    <c:v>2014</c:v>
+                  </c:pt>
+                  <c:pt idx="14">
+                    <c:v>2014</c:v>
+                  </c:pt>
+                  <c:pt idx="15">
+                    <c:v>2014</c:v>
+                  </c:pt>
+                  <c:pt idx="16">
+                    <c:v>2014</c:v>
+                  </c:pt>
+                  <c:pt idx="17">
+                    <c:v>2014</c:v>
+                  </c:pt>
+                  <c:pt idx="18">
+                    <c:v>2014</c:v>
+                  </c:pt>
+                  <c:pt idx="19">
+                    <c:v>2014</c:v>
+                  </c:pt>
+                  <c:pt idx="20">
+                    <c:v>2014</c:v>
+                  </c:pt>
+                  <c:pt idx="21">
+                    <c:v>2014</c:v>
+                  </c:pt>
+                  <c:pt idx="22">
+                    <c:v>2014</c:v>
+                  </c:pt>
+                  <c:pt idx="23">
+                    <c:v>2014</c:v>
+                  </c:pt>
+                  <c:pt idx="24">
+                    <c:v>2015</c:v>
+                  </c:pt>
+                  <c:pt idx="25">
+                    <c:v>2015</c:v>
+                  </c:pt>
+                  <c:pt idx="26">
+                    <c:v>2015</c:v>
+                  </c:pt>
+                  <c:pt idx="27">
+                    <c:v>2015</c:v>
+                  </c:pt>
+                  <c:pt idx="28">
+                    <c:v>2015</c:v>
+                  </c:pt>
+                  <c:pt idx="29">
+                    <c:v>2015</c:v>
+                  </c:pt>
+                  <c:pt idx="30">
+                    <c:v>2015</c:v>
+                  </c:pt>
+                  <c:pt idx="31">
+                    <c:v>2015</c:v>
+                  </c:pt>
+                  <c:pt idx="32">
+                    <c:v>2015</c:v>
+                  </c:pt>
+                  <c:pt idx="33">
+                    <c:v>2015</c:v>
+                  </c:pt>
+                  <c:pt idx="34">
+                    <c:v>2015</c:v>
+                  </c:pt>
+                  <c:pt idx="35">
+                    <c:v>2015</c:v>
+                  </c:pt>
+                  <c:pt idx="36">
+                    <c:v>2016</c:v>
+                  </c:pt>
+                  <c:pt idx="37">
+                    <c:v>2016</c:v>
+                  </c:pt>
+                  <c:pt idx="38">
+                    <c:v>2016</c:v>
+                  </c:pt>
+                  <c:pt idx="39">
+                    <c:v>2016</c:v>
+                  </c:pt>
+                  <c:pt idx="40">
+                    <c:v>2016</c:v>
+                  </c:pt>
+                  <c:pt idx="41">
+                    <c:v>2016</c:v>
+                  </c:pt>
+                  <c:pt idx="42">
+                    <c:v>2016</c:v>
+                  </c:pt>
+                  <c:pt idx="43">
+                    <c:v>2016</c:v>
+                  </c:pt>
+                  <c:pt idx="44">
+                    <c:v>2016</c:v>
+                  </c:pt>
+                  <c:pt idx="45">
+                    <c:v>2016</c:v>
+                  </c:pt>
+                  <c:pt idx="46">
+                    <c:v>2016</c:v>
+                  </c:pt>
+                  <c:pt idx="47">
+                    <c:v>2016</c:v>
+                  </c:pt>
+                  <c:pt idx="48">
+                    <c:v>2017</c:v>
+                  </c:pt>
+                  <c:pt idx="49">
+                    <c:v>2017</c:v>
+                  </c:pt>
+                  <c:pt idx="50">
+                    <c:v>2017</c:v>
+                  </c:pt>
+                  <c:pt idx="51">
+                    <c:v>2017</c:v>
+                  </c:pt>
+                  <c:pt idx="52">
+                    <c:v>2017</c:v>
+                  </c:pt>
+                  <c:pt idx="53">
+                    <c:v>2017</c:v>
+                  </c:pt>
+                  <c:pt idx="54">
+                    <c:v>2017</c:v>
+                  </c:pt>
+                  <c:pt idx="55">
+                    <c:v>2017</c:v>
+                  </c:pt>
+                  <c:pt idx="56">
+                    <c:v>2017</c:v>
+                  </c:pt>
+                  <c:pt idx="57">
+                    <c:v>2017</c:v>
+                  </c:pt>
+                  <c:pt idx="58">
+                    <c:v>2017</c:v>
+                  </c:pt>
+                  <c:pt idx="59">
+                    <c:v>2017</c:v>
+                  </c:pt>
+                  <c:pt idx="60">
+                    <c:v>2018</c:v>
+                  </c:pt>
+                  <c:pt idx="61">
+                    <c:v>2018</c:v>
+                  </c:pt>
+                  <c:pt idx="62">
+                    <c:v>2018</c:v>
+                  </c:pt>
+                  <c:pt idx="63">
+                    <c:v>2018</c:v>
+                  </c:pt>
+                  <c:pt idx="64">
+                    <c:v>2018</c:v>
+                  </c:pt>
+                  <c:pt idx="65">
+                    <c:v>2018</c:v>
+                  </c:pt>
+                  <c:pt idx="66">
+                    <c:v>2018</c:v>
+                  </c:pt>
+                  <c:pt idx="67">
+                    <c:v>2018</c:v>
+                  </c:pt>
+                  <c:pt idx="68">
+                    <c:v>2018</c:v>
+                  </c:pt>
+                  <c:pt idx="69">
+                    <c:v>2018</c:v>
+                  </c:pt>
+                  <c:pt idx="70">
+                    <c:v>2018</c:v>
+                  </c:pt>
+                  <c:pt idx="71">
+                    <c:v>2018</c:v>
+                  </c:pt>
+                  <c:pt idx="72">
+                    <c:v>2019</c:v>
+                  </c:pt>
+                  <c:pt idx="73">
+                    <c:v>2019</c:v>
+                  </c:pt>
+                  <c:pt idx="74">
+                    <c:v>2019</c:v>
+                  </c:pt>
+                  <c:pt idx="75">
+                    <c:v>2019</c:v>
+                  </c:pt>
+                  <c:pt idx="76">
+                    <c:v>2019</c:v>
+                  </c:pt>
+                  <c:pt idx="77">
+                    <c:v>2019</c:v>
+                  </c:pt>
+                  <c:pt idx="78">
+                    <c:v>2019</c:v>
+                  </c:pt>
+                  <c:pt idx="79">
+                    <c:v>2019</c:v>
+                  </c:pt>
+                  <c:pt idx="80">
+                    <c:v>2019</c:v>
+                  </c:pt>
+                  <c:pt idx="81">
+                    <c:v>2019</c:v>
+                  </c:pt>
+                  <c:pt idx="82">
+                    <c:v>2019</c:v>
+                  </c:pt>
+                  <c:pt idx="83">
+                    <c:v>2019</c:v>
+                  </c:pt>
+                  <c:pt idx="84">
+                    <c:v>2020</c:v>
+                  </c:pt>
+                  <c:pt idx="85">
+                    <c:v>2020</c:v>
+                  </c:pt>
+                  <c:pt idx="86">
+                    <c:v>2020</c:v>
+                  </c:pt>
+                  <c:pt idx="87">
+                    <c:v>2020</c:v>
+                  </c:pt>
+                  <c:pt idx="88">
+                    <c:v>2020</c:v>
+                  </c:pt>
+                  <c:pt idx="89">
+                    <c:v>2020</c:v>
+                  </c:pt>
+                  <c:pt idx="90">
+                    <c:v>2020</c:v>
+                  </c:pt>
+                  <c:pt idx="91">
+                    <c:v>2020</c:v>
+                  </c:pt>
+                  <c:pt idx="92">
+                    <c:v>2020</c:v>
+                  </c:pt>
+                  <c:pt idx="93">
+                    <c:v>2020</c:v>
+                  </c:pt>
+                  <c:pt idx="94">
+                    <c:v>2020</c:v>
+                  </c:pt>
+                  <c:pt idx="95">
+                    <c:v>2020</c:v>
+                  </c:pt>
+                  <c:pt idx="96">
+                    <c:v>2021</c:v>
+                  </c:pt>
+                  <c:pt idx="97">
+                    <c:v>2021</c:v>
+                  </c:pt>
+                  <c:pt idx="98">
+                    <c:v>2021</c:v>
+                  </c:pt>
+                  <c:pt idx="99">
+                    <c:v>2021</c:v>
+                  </c:pt>
+                  <c:pt idx="100">
+                    <c:v>2021</c:v>
+                  </c:pt>
+                  <c:pt idx="101">
+                    <c:v>2021</c:v>
+                  </c:pt>
+                  <c:pt idx="102">
+                    <c:v>2021</c:v>
+                  </c:pt>
+                  <c:pt idx="103">
+                    <c:v>2021</c:v>
+                  </c:pt>
+                  <c:pt idx="104">
+                    <c:v>2021</c:v>
+                  </c:pt>
+                  <c:pt idx="105">
+                    <c:v>2021</c:v>
+                  </c:pt>
+                  <c:pt idx="106">
+                    <c:v>2021</c:v>
+                  </c:pt>
+                  <c:pt idx="107">
+                    <c:v>2021</c:v>
+                  </c:pt>
+                  <c:pt idx="108">
+                    <c:v>2022</c:v>
+                  </c:pt>
+                  <c:pt idx="109">
+                    <c:v>2022</c:v>
+                  </c:pt>
+                  <c:pt idx="110">
+                    <c:v>2022</c:v>
+                  </c:pt>
+                  <c:pt idx="111">
+                    <c:v>2022</c:v>
+                  </c:pt>
+                  <c:pt idx="112">
+                    <c:v>2022</c:v>
+                  </c:pt>
+                  <c:pt idx="113">
+                    <c:v>2022</c:v>
+                  </c:pt>
+                  <c:pt idx="114">
+                    <c:v>2022</c:v>
+                  </c:pt>
+                  <c:pt idx="115">
+                    <c:v>2022</c:v>
+                  </c:pt>
+                  <c:pt idx="116">
+                    <c:v>2022</c:v>
+                  </c:pt>
+                  <c:pt idx="117">
+                    <c:v>2022</c:v>
+                  </c:pt>
+                  <c:pt idx="118">
+                    <c:v>2022</c:v>
+                  </c:pt>
+                  <c:pt idx="119">
+                    <c:v>2022</c:v>
+                  </c:pt>
+                  <c:pt idx="120">
+                    <c:v>2023</c:v>
+                  </c:pt>
+                  <c:pt idx="121">
+                    <c:v>2023</c:v>
+                  </c:pt>
+                  <c:pt idx="122">
+                    <c:v>2023</c:v>
+                  </c:pt>
+                  <c:pt idx="123">
+                    <c:v>2023</c:v>
+                  </c:pt>
+                  <c:pt idx="124">
+                    <c:v>2023</c:v>
+                  </c:pt>
+                  <c:pt idx="125">
+                    <c:v>2023</c:v>
+                  </c:pt>
+                  <c:pt idx="126">
+                    <c:v>2023</c:v>
+                  </c:pt>
+                  <c:pt idx="127">
+                    <c:v>2023</c:v>
+                  </c:pt>
+                  <c:pt idx="128">
+                    <c:v>2023</c:v>
+                  </c:pt>
+                  <c:pt idx="129">
+                    <c:v>2023</c:v>
+                  </c:pt>
+                  <c:pt idx="130">
+                    <c:v>2023</c:v>
+                  </c:pt>
+                  <c:pt idx="131">
+                    <c:v>2023</c:v>
+                  </c:pt>
+                  <c:pt idx="132">
+                    <c:v>2024</c:v>
+                  </c:pt>
+                  <c:pt idx="133">
+                    <c:v>2024</c:v>
+                  </c:pt>
+                  <c:pt idx="134">
+                    <c:v>2024</c:v>
+                  </c:pt>
+                  <c:pt idx="135">
+                    <c:v>2024</c:v>
+                  </c:pt>
+                  <c:pt idx="136">
+                    <c:v>2024</c:v>
+                  </c:pt>
+                  <c:pt idx="137">
+                    <c:v>2024</c:v>
+                  </c:pt>
+                  <c:pt idx="138">
+                    <c:v>2024</c:v>
+                  </c:pt>
+                  <c:pt idx="139">
+                    <c:v>2024</c:v>
+                  </c:pt>
+                  <c:pt idx="140">
+                    <c:v>2024</c:v>
+                  </c:pt>
+                  <c:pt idx="141">
+                    <c:v>2024</c:v>
+                  </c:pt>
+                  <c:pt idx="142">
+                    <c:v>2024</c:v>
+                  </c:pt>
+                  <c:pt idx="143">
+                    <c:v>2024</c:v>
+                  </c:pt>
+                  <c:pt idx="144">
+                    <c:v>2025</c:v>
+                  </c:pt>
+                  <c:pt idx="145">
+                    <c:v>2025</c:v>
+                  </c:pt>
+                  <c:pt idx="146">
+                    <c:v>2025</c:v>
+                  </c:pt>
+                  <c:pt idx="147">
+                    <c:v>2025</c:v>
+                  </c:pt>
+                  <c:pt idx="148">
+                    <c:v>2025</c:v>
+                  </c:pt>
+                  <c:pt idx="149">
+                    <c:v>2025</c:v>
+                  </c:pt>
+                  <c:pt idx="150">
+                    <c:v>2025</c:v>
+                  </c:pt>
+                  <c:pt idx="151">
+                    <c:v>2025</c:v>
+                  </c:pt>
+                  <c:pt idx="152">
+                    <c:v>2025</c:v>
+                  </c:pt>
+                  <c:pt idx="153">
+                    <c:v>2025</c:v>
+                  </c:pt>
+                  <c:pt idx="154">
+                    <c:v>2025</c:v>
+                  </c:pt>
+                  <c:pt idx="155">
+                    <c:v>2025</c:v>
+                  </c:pt>
+                  <c:pt idx="156">
+                    <c:v>2026</c:v>
+                  </c:pt>
+                  <c:pt idx="157">
+                    <c:v>2026</c:v>
+                  </c:pt>
+                  <c:pt idx="158">
+                    <c:v>2026</c:v>
+                  </c:pt>
+                  <c:pt idx="159">
+                    <c:v>2026</c:v>
+                  </c:pt>
+                  <c:pt idx="160">
+                    <c:v>2026</c:v>
+                  </c:pt>
+                  <c:pt idx="161">
+                    <c:v>2026</c:v>
+                  </c:pt>
+                  <c:pt idx="162">
+                    <c:v>2026</c:v>
+                  </c:pt>
+                </c:lvl>
+              </c:multiLvlStrCache>
+            </c:multiLvlStrRef>
+          </c:cat>
+          <c:val>
+            <c:numRef>
+              <c:f>Sheet1!$C$2:$C$164</c:f>
+              <c:numCache>
+                <c:formatCode>General</c:formatCode>
+                <c:ptCount val="163"/>
+                <c:pt idx="0">
+                  <c:v>9.82</c:v>
+                </c:pt>
+                <c:pt idx="1">
+                  <c:v>10.07</c:v>
+                </c:pt>
+                <c:pt idx="2">
+                  <c:v>10.24</c:v>
+                </c:pt>
+                <c:pt idx="3">
+                  <c:v>9.46</c:v>
+                </c:pt>
+                <c:pt idx="4">
+                  <c:v>8.69</c:v>
+                </c:pt>
+                <c:pt idx="5">
+                  <c:v>8.23</c:v>
+                </c:pt>
+                <c:pt idx="6">
+                  <c:v>7.75</c:v>
+                </c:pt>
+                <c:pt idx="7">
+                  <c:v>7.86</c:v>
+                </c:pt>
+                <c:pt idx="8">
+                  <c:v>7.94</c:v>
+                </c:pt>
+                <c:pt idx="9">
+                  <c:v>8.41</c:v>
+                </c:pt>
+                <c:pt idx="10">
+                  <c:v>9.97</c:v>
+                </c:pt>
+                <c:pt idx="11">
+                  <c:v>10.28</c:v>
+                </c:pt>
+                <c:pt idx="12">
+                  <c:v>9.72</c:v>
+                </c:pt>
+                <c:pt idx="13">
+                  <c:v>8.76</c:v>
+                </c:pt>
+                <c:pt idx="14">
+                  <c:v>8.84</c:v>
+                </c:pt>
+                <c:pt idx="15">
+                  <c:v>9.47</c:v>
+                </c:pt>
+                <c:pt idx="16">
+                  <c:v>9.75</c:v>
+                </c:pt>
+                <c:pt idx="17">
+                  <c:v>9.45</c:v>
+                </c:pt>
+                <c:pt idx="18">
+                  <c:v>8.08</c:v>
+                </c:pt>
+                <c:pt idx="19">
+                  <c:v>7.5</c:v>
+                </c:pt>
+                <c:pt idx="20">
+                  <c:v>7.56</c:v>
+                </c:pt>
+                <c:pt idx="21">
+                  <c:v>7.5</c:v>
+                </c:pt>
+                <c:pt idx="22">
+                  <c:v>7.15</c:v>
+                </c:pt>
+                <c:pt idx="23">
+                  <c:v>7.06</c:v>
+                </c:pt>
+                <c:pt idx="24">
+                  <c:v>6.88</c:v>
+                </c:pt>
+                <c:pt idx="25">
+                  <c:v>6.99</c:v>
+                </c:pt>
+                <c:pt idx="26">
+                  <c:v>7.01</c:v>
+                </c:pt>
+                <c:pt idx="27">
+                  <c:v>6.84</c:v>
+                </c:pt>
+                <c:pt idx="28">
+                  <c:v>7.09</c:v>
+                </c:pt>
+                <c:pt idx="29">
+                  <c:v>7.39</c:v>
+                </c:pt>
+                <c:pt idx="30">
+                  <c:v>7.58</c:v>
+                </c:pt>
+                <c:pt idx="31">
+                  <c:v>6.9</c:v>
+                </c:pt>
+                <c:pt idx="32">
+                  <c:v>7.19</c:v>
+                </c:pt>
+                <c:pt idx="33">
+                  <c:v>8.2</c:v>
+                </c:pt>
+                <c:pt idx="34">
+                  <c:v>10.44</c:v>
+                </c:pt>
+                <c:pt idx="35">
+                  <c:v>11.57</c:v>
+                </c:pt>
+                <c:pt idx="36">
+                  <c:v>12.05</c:v>
+                </c:pt>
+                <c:pt idx="37">
+                  <c:v>11.29</c:v>
+                </c:pt>
+                <c:pt idx="38">
+                  <c:v>10.24</c:v>
+                </c:pt>
+                <c:pt idx="39">
+                  <c:v>9.7</c:v>
+                </c:pt>
+                <c:pt idx="40">
+                  <c:v>10.05</c:v>
+                </c:pt>
+                <c:pt idx="41">
+                  <c:v>11.13</c:v>
+                </c:pt>
+                <c:pt idx="42">
+                  <c:v>10.44</c:v>
+                </c:pt>
+                <c:pt idx="43">
+                  <c:v>8.62</c:v>
+                </c:pt>
+                <c:pt idx="44">
+                  <c:v>7.89</c:v>
+                </c:pt>
+                <c:pt idx="45">
+                  <c:v>6.73</c:v>
+                </c:pt>
+                <c:pt idx="46">
+                  <c:v>4.75</c:v>
+                </c:pt>
+                <c:pt idx="47">
+                  <c:v>3.83</c:v>
+                </c:pt>
+                <c:pt idx="48">
+                  <c:v>2.74</c:v>
+                </c:pt>
+                <c:pt idx="49">
+                  <c:v>3.1</c:v>
+                </c:pt>
+                <c:pt idx="50">
+                  <c:v>3.35</c:v>
+                </c:pt>
+                <c:pt idx="51">
+                  <c:v>3.59</c:v>
+                </c:pt>
+                <c:pt idx="52">
+                  <c:v>3.46</c:v>
+                </c:pt>
+                <c:pt idx="53">
+                  <c:v>2.87</c:v>
+                </c:pt>
+                <c:pt idx="54">
+                  <c:v>2.99</c:v>
+                </c:pt>
+                <c:pt idx="55">
+                  <c:v>1.21</c:v>
+                </c:pt>
+                <c:pt idx="56">
+                  <c:v>2.32</c:v>
+                </c:pt>
+                <c:pt idx="57">
+                  <c:v>1.87</c:v>
+                </c:pt>
+                <c:pt idx="58">
+                  <c:v>2.55</c:v>
+                </c:pt>
+                <c:pt idx="59">
+                  <c:v>3.41</c:v>
+                </c:pt>
+                <c:pt idx="60">
+                  <c:v>4</c:v>
+                </c:pt>
+                <c:pt idx="61">
+                  <c:v>4.99</c:v>
+                </c:pt>
+                <c:pt idx="62">
+                  <c:v>5.56</c:v>
+                </c:pt>
+                <c:pt idx="63">
+                  <c:v>5.28</c:v>
+                </c:pt>
+                <c:pt idx="64">
+                  <c:v>4.08</c:v>
+                </c:pt>
+                <c:pt idx="65">
+                  <c:v>4.12</c:v>
+                </c:pt>
+                <c:pt idx="66">
+                  <c:v>4.58</c:v>
+                </c:pt>
+                <c:pt idx="67">
+                  <c:v>4.19</c:v>
+                </c:pt>
+                <c:pt idx="68">
+                  <c:v>3.65</c:v>
+                </c:pt>
+                <c:pt idx="69">
+                  <c:v>4.68</c:v>
+                </c:pt>
+                <c:pt idx="70">
+                  <c:v>4.15</c:v>
+                </c:pt>
+                <c:pt idx="71">
+                  <c:v>3.71</c:v>
+                </c:pt>
+                <c:pt idx="72">
+                  <c:v>4.58</c:v>
+                </c:pt>
+                <c:pt idx="73">
+                  <c:v>4.35</c:v>
+                </c:pt>
+                <c:pt idx="74">
+                  <c:v>4.2</c:v>
+                </c:pt>
+                <c:pt idx="75">
+                  <c:v>4.44</c:v>
+                </c:pt>
+                <c:pt idx="76">
+                  <c:v>5.29</c:v>
+                </c:pt>
+                <c:pt idx="77">
+                  <c:v>6.16</c:v>
+                </c:pt>
+                <c:pt idx="78">
+                  <c:v>6.02</c:v>
+                </c:pt>
+                <c:pt idx="79">
+                  <c:v>6.95</c:v>
+                </c:pt>
+                <c:pt idx="80">
+                  <c:v>6.16</c:v>
+                </c:pt>
+                <c:pt idx="81">
+                  <c:v>6.2</c:v>
+                </c:pt>
+                <c:pt idx="82">
+                  <c:v>5.76</c:v>
+                </c:pt>
+                <c:pt idx="83">
+                  <c:v>6.55</c:v>
+                </c:pt>
+                <c:pt idx="84">
+                  <c:v>6.82</c:v>
+                </c:pt>
+                <c:pt idx="85">
+                  <c:v>6.87</c:v>
+                </c:pt>
+                <c:pt idx="86">
+                  <c:v>6.7</c:v>
+                </c:pt>
+                <c:pt idx="87">
+                  <c:v>6.74</c:v>
+                </c:pt>
+                <c:pt idx="88">
+                  <c:v>5.83</c:v>
+                </c:pt>
+                <c:pt idx="89">
+                  <c:v>4.54</c:v>
+                </c:pt>
+                <c:pt idx="90">
+                  <c:v>4.78</c:v>
+                </c:pt>
+                <c:pt idx="91">
+                  <c:v>3.49</c:v>
+                </c:pt>
+                <c:pt idx="92">
+                  <c:v>4.52</c:v>
+                </c:pt>
+                <c:pt idx="93">
+                  <c:v>3.79</c:v>
+                </c:pt>
+                <c:pt idx="94">
+                  <c:v>4.05</c:v>
+                </c:pt>
+                <c:pt idx="95">
+                  <c:v>2.93</c:v>
+                </c:pt>
+                <c:pt idx="96">
+                  <c:v>3.32</c:v>
+                </c:pt>
+                <c:pt idx="97">
+                  <c:v>2.7</c:v>
+                </c:pt>
+                <c:pt idx="98">
+                  <c:v>3.03</c:v>
+                </c:pt>
+                <c:pt idx="99">
+                  <c:v>3.1</c:v>
+                </c:pt>
+                <c:pt idx="100">
+                  <c:v>3.65</c:v>
+                </c:pt>
+                <c:pt idx="101">
+                  <c:v>4.19</c:v>
+                </c:pt>
+                <c:pt idx="102">
+                  <c:v>4.19</c:v>
+                </c:pt>
+                <c:pt idx="103">
+                  <c:v>4.35</c:v>
+                </c:pt>
+                <c:pt idx="104">
+                  <c:v>3.49</c:v>
+                </c:pt>
+                <c:pt idx="105">
+                  <c:v>4.24</c:v>
+                </c:pt>
+                <c:pt idx="106">
+                  <c:v>6.04</c:v>
+                </c:pt>
+                <c:pt idx="107">
+                  <c:v>7.11</c:v>
+                </c:pt>
+                <c:pt idx="108">
+                  <c:v>5.89</c:v>
+                </c:pt>
+                <c:pt idx="109">
+                  <c:v>6.24</c:v>
+                </c:pt>
+                <c:pt idx="110">
+                  <c:v>7.14</c:v>
+                </c:pt>
+                <c:pt idx="111">
+                  <c:v>7.28</c:v>
+                </c:pt>
+                <c:pt idx="112">
+                  <c:v>7.87</c:v>
+                </c:pt>
+                <c:pt idx="113">
+                  <c:v>8.56</c:v>
+                </c:pt>
+                <c:pt idx="114">
+                  <c:v>8.08</c:v>
+                </c:pt>
+                <c:pt idx="115">
+                  <c:v>8.26</c:v>
+                </c:pt>
+                <c:pt idx="116">
+                  <c:v>8.64</c:v>
+                </c:pt>
+                <c:pt idx="117">
+                  <c:v>8.5</c:v>
+                </c:pt>
+                <c:pt idx="118">
+                  <c:v>8.08</c:v>
+                </c:pt>
+                <c:pt idx="119">
+                  <c:v>7.38</c:v>
+                </c:pt>
+                <c:pt idx="120">
+                  <c:v>7.26</c:v>
+                </c:pt>
+                <c:pt idx="121">
+                  <c:v>7.88</c:v>
+                </c:pt>
+                <c:pt idx="122">
+                  <c:v>7.44</c:v>
+                </c:pt>
+                <c:pt idx="123">
+                  <c:v>7.76</c:v>
+                </c:pt>
+                <c:pt idx="124">
+                  <c:v>7.41</c:v>
+                </c:pt>
+                <c:pt idx="125">
+                  <c:v>6.83</c:v>
+                </c:pt>
+                <c:pt idx="126">
+                  <c:v>7.44</c:v>
+                </c:pt>
+                <c:pt idx="127">
+                  <c:v>7.52</c:v>
+                </c:pt>
+                <c:pt idx="128">
+                  <c:v>8.19</c:v>
+                </c:pt>
+                <c:pt idx="129">
+                  <c:v>7.5</c:v>
+                </c:pt>
+                <c:pt idx="130">
+                  <c:v>5.38</c:v>
+                </c:pt>
+                <c:pt idx="131">
+                  <c:v>4.95</c:v>
+                </c:pt>
+                <c:pt idx="132">
+                  <c:v>5.26</c:v>
+                </c:pt>
+                <c:pt idx="133">
+                  <c:v>5.01</c:v>
+                </c:pt>
+                <c:pt idx="134">
+                  <c:v>4.82</c:v>
+                </c:pt>
+                <c:pt idx="135">
+                  <c:v>4.61</c:v>
+                </c:pt>
+                <c:pt idx="136">
+                  <c:v>4.4</c:v>
+                </c:pt>
+                <c:pt idx="137">
+                  <c:v>4.17</c:v>
+                </c:pt>
+                <c:pt idx="138">
+                  <c:v>3.57</c:v>
+                </c:pt>
+                <c:pt idx="139">
+                  <c:v>4.09</c:v>
+                </c:pt>
+                <c:pt idx="140">
+                  <c:v>3.86</c:v>
+                </c:pt>
+                <c:pt idx="141">
+                  <c:v>4.82</c:v>
+                </c:pt>
+                <c:pt idx="142">
+                  <c:v>5.6</c:v>
+                </c:pt>
+                <c:pt idx="143">
+                  <c:v>6.05</c:v>
+                </c:pt>
+                <c:pt idx="144">
+                  <c:v>5.41</c:v>
+                </c:pt>
+                <c:pt idx="145">
+                  <c:v>4.16</c:v>
+                </c:pt>
+                <c:pt idx="146">
+                  <c:v>3.75</c:v>
+                </c:pt>
+                <c:pt idx="147">
+                  <c:v>3.39</c:v>
+                </c:pt>
+                <c:pt idx="148">
+                  <c:v>2.77</c:v>
+                </c:pt>
+                <c:pt idx="149">
+                  <c:v>2.72</c:v>
+                </c:pt>
+                <c:pt idx="150">
+                  <c:v>2.2</c:v>
+                </c:pt>
+                <c:pt idx="151">
+                  <c:v>1.68</c:v>
+                </c:pt>
+                <c:pt idx="152">
+                  <c:v>1.87</c:v>
+                </c:pt>
+                <c:pt idx="153">
+                  <c:v>1.47</c:v>
+                </c:pt>
+                <c:pt idx="154">
+                  <c:v>1.11</c:v>
+                </c:pt>
+                <c:pt idx="155">
+                  <c:v>1.63</c:v>
+                </c:pt>
+                <c:pt idx="156">
+                  <c:v>2.42</c:v>
+                </c:pt>
+                <c:pt idx="157">
+                  <c:v>3.25</c:v>
+                </c:pt>
+                <c:pt idx="158">
+                  <c:v>3.62</c:v>
+                </c:pt>
+                <c:pt idx="159">
+                  <c:v/>
+                </c:pt>
+                <c:pt idx="160">
+                  <c:v/>
+                </c:pt>
+                <c:pt idx="161">
+                  <c:v/>
+                </c:pt>
+                <c:pt idx="162">
+                  <c:v/>
+                </c:pt>
+              </c:numCache>
+            </c:numRef>
+          </c:val>
+          <c:smooth val="0"/>
+        </c:ser>
+        <c:dLbls>
+          <c:numFmt formatCode="#,##0" sourceLinked="0"/>
+          <c:txPr>
+            <a:bodyPr/>
+            <a:lstStyle/>
+            <a:p>
+              <a:pPr>
+                <a:defRPr b="0" i="0" strike="noStrike" sz="1100" u="none">
+                  <a:solidFill>
+                    <a:srgbClr val="1B1F2A"/>
+                  </a:solidFill>
+                  <a:latin typeface="+mn-lt"/>
+                </a:defRPr>
+              </a:pPr>
+            </a:p>
+          </c:txPr>
+          <c:showLegendKey val="0"/>
+          <c:showVal val="0"/>
+          <c:showCatName val="0"/>
+          <c:showSerName val="0"/>
+          <c:showPercent val="0"/>
+          <c:showBubbleSize val="0"/>
+          <c:showLeaderLines val="0"/>
+        </c:dLbls>
+        <c:marker val="1"/>
+        <c:axId val="2094734554"/>
+        <c:axId val="2094734552"/>
+        <c:axId val="2094734556"/>
+      </c:lineChart>
+      <c:catAx>
+        <c:axId val="2094734554"/>
+        <c:scaling>
+          <c:orientation val="minMax"/>
+        </c:scaling>
+        <c:delete val="0"/>
+        <c:axPos val="b"/>
+        <c:numFmt formatCode="General" sourceLinked="1"/>
+        <c:majorTickMark val="out"/>
+        <c:minorTickMark val="none"/>
+        <c:tickLblPos val="low"/>
+        <c:spPr>
+          <a:ln w="12700" cap="flat">
+            <a:noFill/>
+            <a:prstDash val="solid"/>
+            <a:round/>
+          </a:ln>
+        </c:spPr>
+        <c:txPr>
+          <a:bodyPr/>
+          <a:lstStyle/>
+          <a:p>
+            <a:pPr>
+              <a:defRPr sz="1000" b="0" i="0" u="none" strike="noStrike">
+                <a:solidFill>
+                  <a:srgbClr val="1B1F2A"/>
+                </a:solidFill>
+                <a:latin typeface="+mn-lt"/>
+              </a:defRPr>
+            </a:pPr>
+            <a:endParaRPr lang="en-US"/>
+          </a:p>
+        </c:txPr>
+        <c:crossAx val="2094734552"/>
+        <c:crosses val="autoZero"/>
+        <c:auto val="1"/>
+        <c:lblAlgn val="ctr"/>
+        <c:noMultiLvlLbl val="1"/>
+        <c:tickLblSkip val="24"/>
+      </c:catAx>
+      <c:valAx>
+        <c:axId val="2094734552"/>
+        <c:scaling>
+          <c:orientation val="minMax"/>
+          <c:max val="12"/>
+          <c:min val="0"/>
+        </c:scaling>
+        <c:delete val="0"/>
+        <c:axPos val="l"/>
+        <c:majorGridlines>
+          <c:spPr>
+            <a:ln w="6350" cap="flat">
+              <a:solidFill>
+                <a:srgbClr val="D9DCE1"/>
+              </a:solidFill>
+              <a:prstDash val="solid"/>
+              <a:round/>
+            </a:ln>
+          </c:spPr>
+        </c:majorGridlines>
+        <c:numFmt formatCode="0" sourceLinked="0"/>
+        <c:majorTickMark val="out"/>
+        <c:minorTickMark val="none"/>
+        <c:tickLblPos val="nextTo"/>
+        <c:spPr>
+          <a:ln w="12700" cap="flat">
+            <a:noFill/>
+            <a:prstDash val="solid"/>
+            <a:round/>
+          </a:ln>
+        </c:spPr>
+        <c:txPr>
+          <a:bodyPr/>
+          <a:lstStyle/>
+          <a:p>
+            <a:pPr>
+              <a:defRPr sz="1000" b="0" i="0" u="none" strike="noStrike">
+                <a:solidFill>
+                  <a:srgbClr val="8A8F98"/>
+                </a:solidFill>
+                <a:latin typeface="+mn-lt"/>
+              </a:defRPr>
+            </a:pPr>
+            <a:endParaRPr lang="en-US"/>
+          </a:p>
+        </c:txPr>
+        <c:crossAx val="2094734554"/>
+        <c:crosses val="autoZero"/>
+        <c:crossBetween val="between"/>
+        <c:majorUnit val="2"/>
+      </c:valAx>
+      <c:spPr>
+        <a:noFill/>
+        <a:ln>
+          <a:noFill/>
+        </a:ln>
+        <a:effectLst/>
+      </c:spPr>
+    </c:plotArea>
+    <c:legend>
+      <c:legendPos val="b"/>
+      <c:overlay val="0"/>
+      <c:txPr>
+        <a:bodyPr/>
+        <a:lstStyle/>
+        <a:p>
+          <a:pPr>
+            <a:defRPr sz="1000">
+              <a:latin typeface="+mn-lt"/>
+              <a:cs typeface="+mn-lt"/>
+            </a:defRPr>
+          </a:pPr>
+          <a:endParaRPr lang="en-US"/>
+        </a:p>
+      </c:txPr>
+    </c:legend>
+    <c:plotVisOnly val="1"/>
+    <c:dispBlanksAs val="span"/>
+  </c:chart>
+  <c:spPr>
+    <a:noFill/>
+    <a:ln>
+      <a:noFill/>
+    </a:ln>
+    <a:effectLst/>
+  </c:spPr>
+  <c:externalData r:id="rId1">
+    <c:autoUpdate val="0"/>
+  </c:externalData>
+</c:chartSpace>
+</file>
+
+<file path=ppt/charts/chart11.xml><?xml version="1.0" encoding="utf-8"?>
+<c:chartSpace xmlns:c="http://schemas.openxmlformats.org/drawingml/2006/chart" xmlns:a="http://schemas.openxmlformats.org/drawingml/2006/main" xmlns:r="http://schemas.openxmlformats.org/officeDocument/2006/relationships">
+  <c:date1904 val="0"/>
+  <c:roundedCorners val="1"/>
+  <c:chart>
+    <c:title>
+      <c:tx>
+        <c:rich>
+          <a:bodyPr/>
+          <a:lstStyle/>
+          <a:p>
+            <a:pPr>
+              <a:defRPr sz="1100" b="0" i="0" u="none" strike="noStrike">
+                <a:solidFill>
+                  <a:srgbClr val="1B1F2A"/>
+                </a:solidFill>
+                <a:latin typeface="+mn-lt"/>
+              </a:defRPr>
+            </a:pPr>
+            <a:r>
+              <a:rPr sz="1100" b="0" i="0" u="none" strike="noStrike">
+                <a:solidFill>
+                  <a:srgbClr val="1B1F2A"/>
+                </a:solidFill>
+                <a:latin typeface="+mn-lt"/>
+              </a:rPr>
               <a:t>Policy rates, percent, month end, 2016 to July 2026</a:t>
             </a:r>
           </a:p>
@@ -2420,7 +4762,7 @@
 </c:chartSpace>
 </file>
 
-<file path=ppt/charts/chart11.xml><?xml version="1.0" encoding="utf-8"?>
+<file path=ppt/charts/chart12.xml><?xml version="1.0" encoding="utf-8"?>
 <c:chartSpace xmlns:c="http://schemas.openxmlformats.org/drawingml/2006/chart" xmlns:a="http://schemas.openxmlformats.org/drawingml/2006/main" xmlns:r="http://schemas.openxmlformats.org/officeDocument/2006/relationships">
   <c:date1904 val="0"/>
   <c:roundedCorners val="1"/>
@@ -14626,7 +16968,7 @@
                 </a:solidFill>
                 <a:latin typeface="+mn-lt"/>
               </a:rPr>
-              <a:t>Consumer price inflation over 12 months, percent, 2013 to 2026</a:t>
+              <a:t>After each RBI meeting, December 2026 to October 2028, percent</a:t>
             </a:r>
           </a:p>
         </c:rich>
@@ -14648,7 +16990,7 @@
               <c:strCache>
                 <c:ptCount val="1"/>
                 <c:pt idx="0">
-                  <c:v>India CPI inflation</c:v>
+                  <c:v>RBI repo, expected</c:v>
                 </c:pt>
               </c:strCache>
             </c:strRef>
@@ -14692,8 +17034,8 @@
             <c:showLeaderLines val="0"/>
           </c:dLbls>
           <c:marker>
-            <c:symbol val="none"/>
-            <c:size val="6"/>
+            <c:symbol val="circle"/>
+            <c:size val="4"/>
             <c:spPr>
               <a:solidFill>
                 <a:srgbClr val="EB6834"/>
@@ -14710,498 +17052,45 @@
           </c:marker>
           <c:cat>
             <c:multiLvlStrRef>
-              <c:f>Sheet1!$A$2:$A$164</c:f>
+              <c:f>Sheet1!$A$2:$A$13</c:f>
               <c:multiLvlStrCache>
-                <c:ptCount val="163"/>
+                <c:ptCount val="12"/>
                 <c:lvl>
                   <c:pt idx="0">
-                    <c:v>2013</c:v>
+                    <c:v>Dec 26</c:v>
                   </c:pt>
                   <c:pt idx="1">
-                    <c:v>2013</c:v>
+                    <c:v>Feb 27</c:v>
                   </c:pt>
                   <c:pt idx="2">
-                    <c:v>2013</c:v>
+                    <c:v>Apr 27</c:v>
                   </c:pt>
                   <c:pt idx="3">
-                    <c:v>2013</c:v>
+                    <c:v>Jun 27</c:v>
                   </c:pt>
                   <c:pt idx="4">
-                    <c:v>2013</c:v>
+                    <c:v>Aug 27</c:v>
                   </c:pt>
                   <c:pt idx="5">
-                    <c:v>2013</c:v>
+                    <c:v>Oct 27</c:v>
                   </c:pt>
                   <c:pt idx="6">
-                    <c:v>2013</c:v>
+                    <c:v>Dec 27</c:v>
                   </c:pt>
                   <c:pt idx="7">
-                    <c:v>2013</c:v>
+                    <c:v>Feb 28</c:v>
                   </c:pt>
                   <c:pt idx="8">
-                    <c:v>2013</c:v>
+                    <c:v>Apr 28</c:v>
                   </c:pt>
                   <c:pt idx="9">
-                    <c:v>2013</c:v>
+                    <c:v>Jun 28</c:v>
                   </c:pt>
                   <c:pt idx="10">
-                    <c:v>2013</c:v>
+                    <c:v>Aug 28</c:v>
                   </c:pt>
                   <c:pt idx="11">
-                    <c:v>2013</c:v>
-                  </c:pt>
-                  <c:pt idx="12">
-                    <c:v>2014</c:v>
-                  </c:pt>
-                  <c:pt idx="13">
-                    <c:v>2014</c:v>
-                  </c:pt>
-                  <c:pt idx="14">
-                    <c:v>2014</c:v>
-                  </c:pt>
-                  <c:pt idx="15">
-                    <c:v>2014</c:v>
-                  </c:pt>
-                  <c:pt idx="16">
-                    <c:v>2014</c:v>
-                  </c:pt>
-                  <c:pt idx="17">
-                    <c:v>2014</c:v>
-                  </c:pt>
-                  <c:pt idx="18">
-                    <c:v>2014</c:v>
-                  </c:pt>
-                  <c:pt idx="19">
-                    <c:v>2014</c:v>
-                  </c:pt>
-                  <c:pt idx="20">
-                    <c:v>2014</c:v>
-                  </c:pt>
-                  <c:pt idx="21">
-                    <c:v>2014</c:v>
-                  </c:pt>
-                  <c:pt idx="22">
-                    <c:v>2014</c:v>
-                  </c:pt>
-                  <c:pt idx="23">
-                    <c:v>2014</c:v>
-                  </c:pt>
-                  <c:pt idx="24">
-                    <c:v>2015</c:v>
-                  </c:pt>
-                  <c:pt idx="25">
-                    <c:v>2015</c:v>
-                  </c:pt>
-                  <c:pt idx="26">
-                    <c:v>2015</c:v>
-                  </c:pt>
-                  <c:pt idx="27">
-                    <c:v>2015</c:v>
-                  </c:pt>
-                  <c:pt idx="28">
-                    <c:v>2015</c:v>
-                  </c:pt>
-                  <c:pt idx="29">
-                    <c:v>2015</c:v>
-                  </c:pt>
-                  <c:pt idx="30">
-                    <c:v>2015</c:v>
-                  </c:pt>
-                  <c:pt idx="31">
-                    <c:v>2015</c:v>
-                  </c:pt>
-                  <c:pt idx="32">
-                    <c:v>2015</c:v>
-                  </c:pt>
-                  <c:pt idx="33">
-                    <c:v>2015</c:v>
-                  </c:pt>
-                  <c:pt idx="34">
-                    <c:v>2015</c:v>
-                  </c:pt>
-                  <c:pt idx="35">
-                    <c:v>2015</c:v>
-                  </c:pt>
-                  <c:pt idx="36">
-                    <c:v>2016</c:v>
-                  </c:pt>
-                  <c:pt idx="37">
-                    <c:v>2016</c:v>
-                  </c:pt>
-                  <c:pt idx="38">
-                    <c:v>2016</c:v>
-                  </c:pt>
-                  <c:pt idx="39">
-                    <c:v>2016</c:v>
-                  </c:pt>
-                  <c:pt idx="40">
-                    <c:v>2016</c:v>
-                  </c:pt>
-                  <c:pt idx="41">
-                    <c:v>2016</c:v>
-                  </c:pt>
-                  <c:pt idx="42">
-                    <c:v>2016</c:v>
-                  </c:pt>
-                  <c:pt idx="43">
-                    <c:v>2016</c:v>
-                  </c:pt>
-                  <c:pt idx="44">
-                    <c:v>2016</c:v>
-                  </c:pt>
-                  <c:pt idx="45">
-                    <c:v>2016</c:v>
-                  </c:pt>
-                  <c:pt idx="46">
-                    <c:v>2016</c:v>
-                  </c:pt>
-                  <c:pt idx="47">
-                    <c:v>2016</c:v>
-                  </c:pt>
-                  <c:pt idx="48">
-                    <c:v>2017</c:v>
-                  </c:pt>
-                  <c:pt idx="49">
-                    <c:v>2017</c:v>
-                  </c:pt>
-                  <c:pt idx="50">
-                    <c:v>2017</c:v>
-                  </c:pt>
-                  <c:pt idx="51">
-                    <c:v>2017</c:v>
-                  </c:pt>
-                  <c:pt idx="52">
-                    <c:v>2017</c:v>
-                  </c:pt>
-                  <c:pt idx="53">
-                    <c:v>2017</c:v>
-                  </c:pt>
-                  <c:pt idx="54">
-                    <c:v>2017</c:v>
-                  </c:pt>
-                  <c:pt idx="55">
-                    <c:v>2017</c:v>
-                  </c:pt>
-                  <c:pt idx="56">
-                    <c:v>2017</c:v>
-                  </c:pt>
-                  <c:pt idx="57">
-                    <c:v>2017</c:v>
-                  </c:pt>
-                  <c:pt idx="58">
-                    <c:v>2017</c:v>
-                  </c:pt>
-                  <c:pt idx="59">
-                    <c:v>2017</c:v>
-                  </c:pt>
-                  <c:pt idx="60">
-                    <c:v>2018</c:v>
-                  </c:pt>
-                  <c:pt idx="61">
-                    <c:v>2018</c:v>
-                  </c:pt>
-                  <c:pt idx="62">
-                    <c:v>2018</c:v>
-                  </c:pt>
-                  <c:pt idx="63">
-                    <c:v>2018</c:v>
-                  </c:pt>
-                  <c:pt idx="64">
-                    <c:v>2018</c:v>
-                  </c:pt>
-                  <c:pt idx="65">
-                    <c:v>2018</c:v>
-                  </c:pt>
-                  <c:pt idx="66">
-                    <c:v>2018</c:v>
-                  </c:pt>
-                  <c:pt idx="67">
-                    <c:v>2018</c:v>
-                  </c:pt>
-                  <c:pt idx="68">
-                    <c:v>2018</c:v>
-                  </c:pt>
-                  <c:pt idx="69">
-                    <c:v>2018</c:v>
-                  </c:pt>
-                  <c:pt idx="70">
-                    <c:v>2018</c:v>
-                  </c:pt>
-                  <c:pt idx="71">
-                    <c:v>2018</c:v>
-                  </c:pt>
-                  <c:pt idx="72">
-                    <c:v>2019</c:v>
-                  </c:pt>
-                  <c:pt idx="73">
-                    <c:v>2019</c:v>
-                  </c:pt>
-                  <c:pt idx="74">
-                    <c:v>2019</c:v>
-                  </c:pt>
-                  <c:pt idx="75">
-                    <c:v>2019</c:v>
-                  </c:pt>
-                  <c:pt idx="76">
-                    <c:v>2019</c:v>
-                  </c:pt>
-                  <c:pt idx="77">
-                    <c:v>2019</c:v>
-                  </c:pt>
-                  <c:pt idx="78">
-                    <c:v>2019</c:v>
-                  </c:pt>
-                  <c:pt idx="79">
-                    <c:v>2019</c:v>
-                  </c:pt>
-                  <c:pt idx="80">
-                    <c:v>2019</c:v>
-                  </c:pt>
-                  <c:pt idx="81">
-                    <c:v>2019</c:v>
-                  </c:pt>
-                  <c:pt idx="82">
-                    <c:v>2019</c:v>
-                  </c:pt>
-                  <c:pt idx="83">
-                    <c:v>2019</c:v>
-                  </c:pt>
-                  <c:pt idx="84">
-                    <c:v>2020</c:v>
-                  </c:pt>
-                  <c:pt idx="85">
-                    <c:v>2020</c:v>
-                  </c:pt>
-                  <c:pt idx="86">
-                    <c:v>2020</c:v>
-                  </c:pt>
-                  <c:pt idx="87">
-                    <c:v>2020</c:v>
-                  </c:pt>
-                  <c:pt idx="88">
-                    <c:v>2020</c:v>
-                  </c:pt>
-                  <c:pt idx="89">
-                    <c:v>2020</c:v>
-                  </c:pt>
-                  <c:pt idx="90">
-                    <c:v>2020</c:v>
-                  </c:pt>
-                  <c:pt idx="91">
-                    <c:v>2020</c:v>
-                  </c:pt>
-                  <c:pt idx="92">
-                    <c:v>2020</c:v>
-                  </c:pt>
-                  <c:pt idx="93">
-                    <c:v>2020</c:v>
-                  </c:pt>
-                  <c:pt idx="94">
-                    <c:v>2020</c:v>
-                  </c:pt>
-                  <c:pt idx="95">
-                    <c:v>2020</c:v>
-                  </c:pt>
-                  <c:pt idx="96">
-                    <c:v>2021</c:v>
-                  </c:pt>
-                  <c:pt idx="97">
-                    <c:v>2021</c:v>
-                  </c:pt>
-                  <c:pt idx="98">
-                    <c:v>2021</c:v>
-                  </c:pt>
-                  <c:pt idx="99">
-                    <c:v>2021</c:v>
-                  </c:pt>
-                  <c:pt idx="100">
-                    <c:v>2021</c:v>
-                  </c:pt>
-                  <c:pt idx="101">
-                    <c:v>2021</c:v>
-                  </c:pt>
-                  <c:pt idx="102">
-                    <c:v>2021</c:v>
-                  </c:pt>
-                  <c:pt idx="103">
-                    <c:v>2021</c:v>
-                  </c:pt>
-                  <c:pt idx="104">
-                    <c:v>2021</c:v>
-                  </c:pt>
-                  <c:pt idx="105">
-                    <c:v>2021</c:v>
-                  </c:pt>
-                  <c:pt idx="106">
-                    <c:v>2021</c:v>
-                  </c:pt>
-                  <c:pt idx="107">
-                    <c:v>2021</c:v>
-                  </c:pt>
-                  <c:pt idx="108">
-                    <c:v>2022</c:v>
-                  </c:pt>
-                  <c:pt idx="109">
-                    <c:v>2022</c:v>
-                  </c:pt>
-                  <c:pt idx="110">
-                    <c:v>2022</c:v>
-                  </c:pt>
-                  <c:pt idx="111">
-                    <c:v>2022</c:v>
-                  </c:pt>
-                  <c:pt idx="112">
-                    <c:v>2022</c:v>
-                  </c:pt>
-                  <c:pt idx="113">
-                    <c:v>2022</c:v>
-                  </c:pt>
-                  <c:pt idx="114">
-                    <c:v>2022</c:v>
-                  </c:pt>
-                  <c:pt idx="115">
-                    <c:v>2022</c:v>
-                  </c:pt>
-                  <c:pt idx="116">
-                    <c:v>2022</c:v>
-                  </c:pt>
-                  <c:pt idx="117">
-                    <c:v>2022</c:v>
-                  </c:pt>
-                  <c:pt idx="118">
-                    <c:v>2022</c:v>
-                  </c:pt>
-                  <c:pt idx="119">
-                    <c:v>2022</c:v>
-                  </c:pt>
-                  <c:pt idx="120">
-                    <c:v>2023</c:v>
-                  </c:pt>
-                  <c:pt idx="121">
-                    <c:v>2023</c:v>
-                  </c:pt>
-                  <c:pt idx="122">
-                    <c:v>2023</c:v>
-                  </c:pt>
-                  <c:pt idx="123">
-                    <c:v>2023</c:v>
-                  </c:pt>
-                  <c:pt idx="124">
-                    <c:v>2023</c:v>
-                  </c:pt>
-                  <c:pt idx="125">
-                    <c:v>2023</c:v>
-                  </c:pt>
-                  <c:pt idx="126">
-                    <c:v>2023</c:v>
-                  </c:pt>
-                  <c:pt idx="127">
-                    <c:v>2023</c:v>
-                  </c:pt>
-                  <c:pt idx="128">
-                    <c:v>2023</c:v>
-                  </c:pt>
-                  <c:pt idx="129">
-                    <c:v>2023</c:v>
-                  </c:pt>
-                  <c:pt idx="130">
-                    <c:v>2023</c:v>
-                  </c:pt>
-                  <c:pt idx="131">
-                    <c:v>2023</c:v>
-                  </c:pt>
-                  <c:pt idx="132">
-                    <c:v>2024</c:v>
-                  </c:pt>
-                  <c:pt idx="133">
-                    <c:v>2024</c:v>
-                  </c:pt>
-                  <c:pt idx="134">
-                    <c:v>2024</c:v>
-                  </c:pt>
-                  <c:pt idx="135">
-                    <c:v>2024</c:v>
-                  </c:pt>
-                  <c:pt idx="136">
-                    <c:v>2024</c:v>
-                  </c:pt>
-                  <c:pt idx="137">
-                    <c:v>2024</c:v>
-                  </c:pt>
-                  <c:pt idx="138">
-                    <c:v>2024</c:v>
-                  </c:pt>
-                  <c:pt idx="139">
-                    <c:v>2024</c:v>
-                  </c:pt>
-                  <c:pt idx="140">
-                    <c:v>2024</c:v>
-                  </c:pt>
-                  <c:pt idx="141">
-                    <c:v>2024</c:v>
-                  </c:pt>
-                  <c:pt idx="142">
-                    <c:v>2024</c:v>
-                  </c:pt>
-                  <c:pt idx="143">
-                    <c:v>2024</c:v>
-                  </c:pt>
-                  <c:pt idx="144">
-                    <c:v>2025</c:v>
-                  </c:pt>
-                  <c:pt idx="145">
-                    <c:v>2025</c:v>
-                  </c:pt>
-                  <c:pt idx="146">
-                    <c:v>2025</c:v>
-                  </c:pt>
-                  <c:pt idx="147">
-                    <c:v>2025</c:v>
-                  </c:pt>
-                  <c:pt idx="148">
-                    <c:v>2025</c:v>
-                  </c:pt>
-                  <c:pt idx="149">
-                    <c:v>2025</c:v>
-                  </c:pt>
-                  <c:pt idx="150">
-                    <c:v>2025</c:v>
-                  </c:pt>
-                  <c:pt idx="151">
-                    <c:v>2025</c:v>
-                  </c:pt>
-                  <c:pt idx="152">
-                    <c:v>2025</c:v>
-                  </c:pt>
-                  <c:pt idx="153">
-                    <c:v>2025</c:v>
-                  </c:pt>
-                  <c:pt idx="154">
-                    <c:v>2025</c:v>
-                  </c:pt>
-                  <c:pt idx="155">
-                    <c:v>2025</c:v>
-                  </c:pt>
-                  <c:pt idx="156">
-                    <c:v>2026</c:v>
-                  </c:pt>
-                  <c:pt idx="157">
-                    <c:v>2026</c:v>
-                  </c:pt>
-                  <c:pt idx="158">
-                    <c:v>2026</c:v>
-                  </c:pt>
-                  <c:pt idx="159">
-                    <c:v>2026</c:v>
-                  </c:pt>
-                  <c:pt idx="160">
-                    <c:v>2026</c:v>
-                  </c:pt>
-                  <c:pt idx="161">
-                    <c:v>2026</c:v>
-                  </c:pt>
-                  <c:pt idx="162">
-                    <c:v>2026</c:v>
+                    <c:v>Oct 28</c:v>
                   </c:pt>
                 </c:lvl>
               </c:multiLvlStrCache>
@@ -15209,498 +17098,45 @@
           </c:cat>
           <c:val>
             <c:numRef>
-              <c:f>Sheet1!$B$2:$B$164</c:f>
+              <c:f>Sheet1!$B$2:$B$13</c:f>
               <c:numCache>
                 <c:formatCode>General</c:formatCode>
-                <c:ptCount val="163"/>
+                <c:ptCount val="12"/>
                 <c:pt idx="0">
-                  <c:v>10.52</c:v>
+                  <c:v>5.64</c:v>
                 </c:pt>
                 <c:pt idx="1">
-                  <c:v>10.89</c:v>
+                  <c:v>5.71</c:v>
                 </c:pt>
                 <c:pt idx="2">
-                  <c:v>10.06</c:v>
+                  <c:v>5.71</c:v>
                 </c:pt>
                 <c:pt idx="3">
-                  <c:v>9.1</c:v>
+                  <c:v>5.63</c:v>
                 </c:pt>
                 <c:pt idx="4">
-                  <c:v>9.03</c:v>
+                  <c:v>5.54</c:v>
                 </c:pt>
                 <c:pt idx="5">
-                  <c:v>9.52</c:v>
+                  <c:v>5.47</c:v>
                 </c:pt>
                 <c:pt idx="6">
-                  <c:v>9.79</c:v>
+                  <c:v>5.42</c:v>
                 </c:pt>
                 <c:pt idx="7">
-                  <c:v>9.98</c:v>
+                  <c:v>5.38</c:v>
                 </c:pt>
                 <c:pt idx="8">
-                  <c:v>10.5</c:v>
+                  <c:v>5.34</c:v>
                 </c:pt>
                 <c:pt idx="9">
-                  <c:v>10.81</c:v>
+                  <c:v>5.31</c:v>
                 </c:pt>
                 <c:pt idx="10">
-                  <c:v>11.51</c:v>
+                  <c:v>5.28</c:v>
                 </c:pt>
                 <c:pt idx="11">
-                  <c:v>9.46</c:v>
-                </c:pt>
-                <c:pt idx="12">
-                  <c:v>8.6</c:v>
-                </c:pt>
-                <c:pt idx="13">
-                  <c:v>7.88</c:v>
-                </c:pt>
-                <c:pt idx="14">
-                  <c:v>8.25</c:v>
-                </c:pt>
-                <c:pt idx="15">
-                  <c:v>8.48</c:v>
-                </c:pt>
-                <c:pt idx="16">
-                  <c:v>8.33</c:v>
-                </c:pt>
-                <c:pt idx="17">
-                  <c:v>6.77</c:v>
-                </c:pt>
-                <c:pt idx="18">
-                  <c:v>7.39</c:v>
-                </c:pt>
-                <c:pt idx="19">
-                  <c:v>7.03</c:v>
-                </c:pt>
-                <c:pt idx="20">
-                  <c:v>5.63</c:v>
-                </c:pt>
-                <c:pt idx="21">
-                  <c:v>4.62</c:v>
-                </c:pt>
-                <c:pt idx="22">
-                  <c:v>3.27</c:v>
-                </c:pt>
-                <c:pt idx="23">
-                  <c:v>4.28</c:v>
-                </c:pt>
-                <c:pt idx="24">
-                  <c:v>5.19</c:v>
-                </c:pt>
-                <c:pt idx="25">
-                  <c:v>5.37</c:v>
-                </c:pt>
-                <c:pt idx="26">
-                  <c:v>5.25</c:v>
-                </c:pt>
-                <c:pt idx="27">
-                  <c:v>4.87</c:v>
-                </c:pt>
-                <c:pt idx="28">
-                  <c:v>5.01</c:v>
-                </c:pt>
-                <c:pt idx="29">
-                  <c:v>5.4</c:v>
-                </c:pt>
-                <c:pt idx="30">
-                  <c:v>3.69</c:v>
-                </c:pt>
-                <c:pt idx="31">
-                  <c:v>3.74</c:v>
-                </c:pt>
-                <c:pt idx="32">
-                  <c:v>4.41</c:v>
-                </c:pt>
-                <c:pt idx="33">
-                  <c:v>5</c:v>
-                </c:pt>
-                <c:pt idx="34">
-                  <c:v>5.41</c:v>
-                </c:pt>
-                <c:pt idx="35">
-                  <c:v>5.61</c:v>
-                </c:pt>
-                <c:pt idx="36">
-                  <c:v>5.69</c:v>
-                </c:pt>
-                <c:pt idx="37">
-                  <c:v>5.26</c:v>
-                </c:pt>
-                <c:pt idx="38">
-                  <c:v>4.83</c:v>
-                </c:pt>
-                <c:pt idx="39">
-                  <c:v>5.47</c:v>
-                </c:pt>
-                <c:pt idx="40">
-                  <c:v>5.76</c:v>
-                </c:pt>
-                <c:pt idx="41">
-                  <c:v>5.77</c:v>
-                </c:pt>
-                <c:pt idx="42">
-                  <c:v>6.07</c:v>
-                </c:pt>
-                <c:pt idx="43">
-                  <c:v>5.05</c:v>
-                </c:pt>
-                <c:pt idx="44">
-                  <c:v>4.39</c:v>
-                </c:pt>
-                <c:pt idx="45">
-                  <c:v>4.2</c:v>
-                </c:pt>
-                <c:pt idx="46">
-                  <c:v>3.63</c:v>
-                </c:pt>
-                <c:pt idx="47">
-                  <c:v>3.41</c:v>
-                </c:pt>
-                <c:pt idx="48">
-                  <c:v>3.17</c:v>
-                </c:pt>
-                <c:pt idx="49">
-                  <c:v>3.65</c:v>
-                </c:pt>
-                <c:pt idx="50">
-                  <c:v>3.89</c:v>
-                </c:pt>
-                <c:pt idx="51">
-                  <c:v>2.99</c:v>
-                </c:pt>
-                <c:pt idx="52">
-                  <c:v>2.18</c:v>
-                </c:pt>
-                <c:pt idx="53">
-                  <c:v>1.46</c:v>
-                </c:pt>
-                <c:pt idx="54">
-                  <c:v>2.36</c:v>
-                </c:pt>
-                <c:pt idx="55">
-                  <c:v>3.28</c:v>
-                </c:pt>
-                <c:pt idx="56">
-                  <c:v>3.28</c:v>
-                </c:pt>
-                <c:pt idx="57">
-                  <c:v>3.58</c:v>
-                </c:pt>
-                <c:pt idx="58">
-                  <c:v>4.88</c:v>
-                </c:pt>
-                <c:pt idx="59">
-                  <c:v>5.21</c:v>
-                </c:pt>
-                <c:pt idx="60">
-                  <c:v>5.07</c:v>
-                </c:pt>
-                <c:pt idx="61">
-                  <c:v>4.44</c:v>
-                </c:pt>
-                <c:pt idx="62">
-                  <c:v>4.28</c:v>
-                </c:pt>
-                <c:pt idx="63">
-                  <c:v>4.58</c:v>
-                </c:pt>
-                <c:pt idx="64">
-                  <c:v>4.87</c:v>
-                </c:pt>
-                <c:pt idx="65">
-                  <c:v>4.92</c:v>
-                </c:pt>
-                <c:pt idx="66">
-                  <c:v>4.17</c:v>
-                </c:pt>
-                <c:pt idx="67">
-                  <c:v>3.69</c:v>
-                </c:pt>
-                <c:pt idx="68">
-                  <c:v>3.7</c:v>
-                </c:pt>
-                <c:pt idx="69">
-                  <c:v>3.38</c:v>
-                </c:pt>
-                <c:pt idx="70">
-                  <c:v>2.33</c:v>
-                </c:pt>
-                <c:pt idx="71">
-                  <c:v>2.11</c:v>
-                </c:pt>
-                <c:pt idx="72">
-                  <c:v>1.97</c:v>
-                </c:pt>
-                <c:pt idx="73">
-                  <c:v>2.57</c:v>
-                </c:pt>
-                <c:pt idx="74">
-                  <c:v>2.86</c:v>
-                </c:pt>
-                <c:pt idx="75">
-                  <c:v>2.99</c:v>
-                </c:pt>
-                <c:pt idx="76">
-                  <c:v>3.05</c:v>
-                </c:pt>
-                <c:pt idx="77">
-                  <c:v>3.18</c:v>
-                </c:pt>
-                <c:pt idx="78">
-                  <c:v>3.15</c:v>
-                </c:pt>
-                <c:pt idx="79">
-                  <c:v>3.28</c:v>
-                </c:pt>
-                <c:pt idx="80">
-                  <c:v>3.99</c:v>
-                </c:pt>
-                <c:pt idx="81">
-                  <c:v>4.62</c:v>
-                </c:pt>
-                <c:pt idx="82">
-                  <c:v>5.54</c:v>
-                </c:pt>
-                <c:pt idx="83">
-                  <c:v>7.35</c:v>
-                </c:pt>
-                <c:pt idx="84">
-                  <c:v>7.59</c:v>
-                </c:pt>
-                <c:pt idx="85">
-                  <c:v>6.58</c:v>
-                </c:pt>
-                <c:pt idx="86">
-                  <c:v>5.84</c:v>
-                </c:pt>
-                <c:pt idx="87">
-                  <c:v>7.22</c:v>
-                </c:pt>
-                <c:pt idx="88">
-                  <c:v>6.27</c:v>
-                </c:pt>
-                <c:pt idx="89">
-                  <c:v>6.23</c:v>
-                </c:pt>
-                <c:pt idx="90">
-                  <c:v>6.73</c:v>
-                </c:pt>
-                <c:pt idx="91">
-                  <c:v>6.69</c:v>
-                </c:pt>
-                <c:pt idx="92">
-                  <c:v>7.27</c:v>
-                </c:pt>
-                <c:pt idx="93">
-                  <c:v>7.61</c:v>
-                </c:pt>
-                <c:pt idx="94">
-                  <c:v>6.93</c:v>
-                </c:pt>
-                <c:pt idx="95">
-                  <c:v>4.59</c:v>
-                </c:pt>
-                <c:pt idx="96">
-                  <c:v>4.06</c:v>
-                </c:pt>
-                <c:pt idx="97">
-                  <c:v>5.03</c:v>
-                </c:pt>
-                <c:pt idx="98">
-                  <c:v>5.52</c:v>
-                </c:pt>
-                <c:pt idx="99">
-                  <c:v>4.23</c:v>
-                </c:pt>
-                <c:pt idx="100">
-                  <c:v>6.3</c:v>
-                </c:pt>
-                <c:pt idx="101">
-                  <c:v>6.26</c:v>
-                </c:pt>
-                <c:pt idx="102">
-                  <c:v>5.59</c:v>
-                </c:pt>
-                <c:pt idx="103">
-                  <c:v>5.3</c:v>
-                </c:pt>
-                <c:pt idx="104">
-                  <c:v>4.35</c:v>
-                </c:pt>
-                <c:pt idx="105">
-                  <c:v>4.48</c:v>
-                </c:pt>
-                <c:pt idx="106">
-                  <c:v>4.91</c:v>
-                </c:pt>
-                <c:pt idx="107">
-                  <c:v>5.66</c:v>
-                </c:pt>
-                <c:pt idx="108">
-                  <c:v>6.01</c:v>
-                </c:pt>
-                <c:pt idx="109">
-                  <c:v>6.07</c:v>
-                </c:pt>
-                <c:pt idx="110">
-                  <c:v>6.95</c:v>
-                </c:pt>
-                <c:pt idx="111">
-                  <c:v>7.79</c:v>
-                </c:pt>
-                <c:pt idx="112">
-                  <c:v>7.04</c:v>
-                </c:pt>
-                <c:pt idx="113">
-                  <c:v>7.01</c:v>
-                </c:pt>
-                <c:pt idx="114">
-                  <c:v>6.71</c:v>
-                </c:pt>
-                <c:pt idx="115">
-                  <c:v>7</c:v>
-                </c:pt>
-                <c:pt idx="116">
-                  <c:v>7.41</c:v>
-                </c:pt>
-                <c:pt idx="117">
-                  <c:v>6.77</c:v>
-                </c:pt>
-                <c:pt idx="118">
-                  <c:v>5.88</c:v>
-                </c:pt>
-                <c:pt idx="119">
-                  <c:v>5.72</c:v>
-                </c:pt>
-                <c:pt idx="120">
-                  <c:v>6.52</c:v>
-                </c:pt>
-                <c:pt idx="121">
-                  <c:v>6.44</c:v>
-                </c:pt>
-                <c:pt idx="122">
-                  <c:v>5.66</c:v>
-                </c:pt>
-                <c:pt idx="123">
-                  <c:v>4.7</c:v>
-                </c:pt>
-                <c:pt idx="124">
-                  <c:v>4.31</c:v>
-                </c:pt>
-                <c:pt idx="125">
-                  <c:v>4.87</c:v>
-                </c:pt>
-                <c:pt idx="126">
-                  <c:v>7.44</c:v>
-                </c:pt>
-                <c:pt idx="127">
-                  <c:v>6.83</c:v>
-                </c:pt>
-                <c:pt idx="128">
-                  <c:v>5.02</c:v>
-                </c:pt>
-                <c:pt idx="129">
-                  <c:v>4.87</c:v>
-                </c:pt>
-                <c:pt idx="130">
-                  <c:v>5.55</c:v>
-                </c:pt>
-                <c:pt idx="131">
-                  <c:v>5.69</c:v>
-                </c:pt>
-                <c:pt idx="132">
-                  <c:v>5.1</c:v>
-                </c:pt>
-                <c:pt idx="133">
-                  <c:v>5.09</c:v>
-                </c:pt>
-                <c:pt idx="134">
-                  <c:v>4.85</c:v>
-                </c:pt>
-                <c:pt idx="135">
-                  <c:v>4.83</c:v>
-                </c:pt>
-                <c:pt idx="136">
-                  <c:v>4.8</c:v>
-                </c:pt>
-                <c:pt idx="137">
-                  <c:v>5.08</c:v>
-                </c:pt>
-                <c:pt idx="138">
-                  <c:v>3.6</c:v>
-                </c:pt>
-                <c:pt idx="139">
-                  <c:v>3.65</c:v>
-                </c:pt>
-                <c:pt idx="140">
-                  <c:v>5.49</c:v>
-                </c:pt>
-                <c:pt idx="141">
-                  <c:v>6.21</c:v>
-                </c:pt>
-                <c:pt idx="142">
-                  <c:v>5.48</c:v>
-                </c:pt>
-                <c:pt idx="143">
-                  <c:v>5.22</c:v>
-                </c:pt>
-                <c:pt idx="144">
-                  <c:v>4.26</c:v>
-                </c:pt>
-                <c:pt idx="145">
-                  <c:v>3.61</c:v>
-                </c:pt>
-                <c:pt idx="146">
-                  <c:v>3.34</c:v>
-                </c:pt>
-                <c:pt idx="147">
-                  <c:v>3.16</c:v>
-                </c:pt>
-                <c:pt idx="148">
-                  <c:v>2.82</c:v>
-                </c:pt>
-                <c:pt idx="149">
-                  <c:v>2.1</c:v>
-                </c:pt>
-                <c:pt idx="150">
-                  <c:v>1.61</c:v>
-                </c:pt>
-                <c:pt idx="151">
-                  <c:v>2.07</c:v>
-                </c:pt>
-                <c:pt idx="152">
-                  <c:v>1.44</c:v>
-                </c:pt>
-                <c:pt idx="153">
-                  <c:v>0.25</c:v>
-                </c:pt>
-                <c:pt idx="154">
-                  <c:v>0.71</c:v>
-                </c:pt>
-                <c:pt idx="155">
-                  <c:v>1.33</c:v>
-                </c:pt>
-                <c:pt idx="156">
-                  <c:v>2.73</c:v>
-                </c:pt>
-                <c:pt idx="157">
-                  <c:v>3.21</c:v>
-                </c:pt>
-                <c:pt idx="158">
-                  <c:v>3.4</c:v>
-                </c:pt>
-                <c:pt idx="159">
-                  <c:v>3.48</c:v>
-                </c:pt>
-                <c:pt idx="160">
-                  <c:v>3.94</c:v>
-                </c:pt>
-                <c:pt idx="161">
-                  <c:v>4.38</c:v>
-                </c:pt>
-                <c:pt idx="162">
-                  <c:v>4.44</c:v>
+                  <c:v>5.24</c:v>
                 </c:pt>
               </c:numCache>
             </c:numRef>
@@ -15716,7 +17152,331 @@
               <c:strCache>
                 <c:ptCount val="1"/>
                 <c:pt idx="0">
-                  <c:v>Nepal CPI inflation</c:v>
+                  <c:v>RBI repo, 90 percent bound</c:v>
+                </c:pt>
+              </c:strCache>
+            </c:strRef>
+          </c:tx>
+          <c:spPr>
+            <a:solidFill>
+              <a:srgbClr val="F4B08E"/>
+            </a:solidFill>
+            <a:ln w="25400" cap="flat">
+              <a:solidFill>
+                <a:srgbClr val="F4B08E"/>
+              </a:solidFill>
+              <a:prstDash val="solid"/>
+              <a:round/>
+            </a:ln>
+            <a:effectLst/>
+          </c:spPr>
+          <c:invertIfNegative val="0"/>
+          <c:dLbls>
+            <c:numFmt formatCode="#,##0" sourceLinked="0"/>
+            <c:txPr>
+              <a:bodyPr/>
+              <a:lstStyle/>
+              <a:p>
+                <a:pPr>
+                  <a:defRPr b="0" i="0" strike="noStrike" sz="1100" u="none">
+                    <a:solidFill>
+                      <a:srgbClr val="1B1F2A"/>
+                    </a:solidFill>
+                    <a:latin typeface="+mn-lt"/>
+                  </a:defRPr>
+                </a:pPr>
+              </a:p>
+            </c:txPr>
+            <c:showLegendKey val="0"/>
+            <c:showVal val="0"/>
+            <c:showCatName val="0"/>
+            <c:showSerName val="0"/>
+            <c:showPercent val="0"/>
+            <c:showBubbleSize val="0"/>
+            <c:showLeaderLines val="0"/>
+          </c:dLbls>
+          <c:marker>
+            <c:symbol val="circle"/>
+            <c:size val="4"/>
+            <c:spPr>
+              <a:solidFill>
+                <a:srgbClr val="F4B08E"/>
+              </a:solidFill>
+              <a:ln w="9525" cap="flat">
+                <a:solidFill>
+                  <a:srgbClr val="F4B08E"/>
+                </a:solidFill>
+                <a:prstDash val="solid"/>
+                <a:round/>
+              </a:ln>
+              <a:effectLst/>
+            </c:spPr>
+          </c:marker>
+          <c:cat>
+            <c:multiLvlStrRef>
+              <c:f>Sheet1!$A$2:$A$13</c:f>
+              <c:multiLvlStrCache>
+                <c:ptCount val="12"/>
+                <c:lvl>
+                  <c:pt idx="0">
+                    <c:v>Dec 26</c:v>
+                  </c:pt>
+                  <c:pt idx="1">
+                    <c:v>Feb 27</c:v>
+                  </c:pt>
+                  <c:pt idx="2">
+                    <c:v>Apr 27</c:v>
+                  </c:pt>
+                  <c:pt idx="3">
+                    <c:v>Jun 27</c:v>
+                  </c:pt>
+                  <c:pt idx="4">
+                    <c:v>Aug 27</c:v>
+                  </c:pt>
+                  <c:pt idx="5">
+                    <c:v>Oct 27</c:v>
+                  </c:pt>
+                  <c:pt idx="6">
+                    <c:v>Dec 27</c:v>
+                  </c:pt>
+                  <c:pt idx="7">
+                    <c:v>Feb 28</c:v>
+                  </c:pt>
+                  <c:pt idx="8">
+                    <c:v>Apr 28</c:v>
+                  </c:pt>
+                  <c:pt idx="9">
+                    <c:v>Jun 28</c:v>
+                  </c:pt>
+                  <c:pt idx="10">
+                    <c:v>Aug 28</c:v>
+                  </c:pt>
+                  <c:pt idx="11">
+                    <c:v>Oct 28</c:v>
+                  </c:pt>
+                </c:lvl>
+              </c:multiLvlStrCache>
+            </c:multiLvlStrRef>
+          </c:cat>
+          <c:val>
+            <c:numRef>
+              <c:f>Sheet1!$C$2:$C$13</c:f>
+              <c:numCache>
+                <c:formatCode>General</c:formatCode>
+                <c:ptCount val="12"/>
+                <c:pt idx="0">
+                  <c:v>5.75</c:v>
+                </c:pt>
+                <c:pt idx="1">
+                  <c:v>6</c:v>
+                </c:pt>
+                <c:pt idx="2">
+                  <c:v>6.25</c:v>
+                </c:pt>
+                <c:pt idx="3">
+                  <c:v>6.25</c:v>
+                </c:pt>
+                <c:pt idx="4">
+                  <c:v>6.25</c:v>
+                </c:pt>
+                <c:pt idx="5">
+                  <c:v>6.25</c:v>
+                </c:pt>
+                <c:pt idx="6">
+                  <c:v>6.25</c:v>
+                </c:pt>
+                <c:pt idx="7">
+                  <c:v>6.25</c:v>
+                </c:pt>
+                <c:pt idx="8">
+                  <c:v>6.25</c:v>
+                </c:pt>
+                <c:pt idx="9">
+                  <c:v>6.25</c:v>
+                </c:pt>
+                <c:pt idx="10">
+                  <c:v>6.25</c:v>
+                </c:pt>
+                <c:pt idx="11">
+                  <c:v>6.25</c:v>
+                </c:pt>
+              </c:numCache>
+            </c:numRef>
+          </c:val>
+          <c:smooth val="0"/>
+        </c:ser>
+        <c:ser>
+          <c:idx val="2"/>
+          <c:order val="2"/>
+          <c:tx>
+            <c:strRef>
+              <c:f>Sheet1!$D$1</c:f>
+              <c:strCache>
+                <c:ptCount val="1"/>
+                <c:pt idx="0">
+                  <c:v>RBI repo, 10 percent bound</c:v>
+                </c:pt>
+              </c:strCache>
+            </c:strRef>
+          </c:tx>
+          <c:spPr>
+            <a:solidFill>
+              <a:srgbClr val="F4B08E"/>
+            </a:solidFill>
+            <a:ln w="25400" cap="flat">
+              <a:solidFill>
+                <a:srgbClr val="F4B08E"/>
+              </a:solidFill>
+              <a:prstDash val="solid"/>
+              <a:round/>
+            </a:ln>
+            <a:effectLst/>
+          </c:spPr>
+          <c:invertIfNegative val="0"/>
+          <c:dLbls>
+            <c:numFmt formatCode="#,##0" sourceLinked="0"/>
+            <c:txPr>
+              <a:bodyPr/>
+              <a:lstStyle/>
+              <a:p>
+                <a:pPr>
+                  <a:defRPr b="0" i="0" strike="noStrike" sz="1100" u="none">
+                    <a:solidFill>
+                      <a:srgbClr val="1B1F2A"/>
+                    </a:solidFill>
+                    <a:latin typeface="+mn-lt"/>
+                  </a:defRPr>
+                </a:pPr>
+              </a:p>
+            </c:txPr>
+            <c:showLegendKey val="0"/>
+            <c:showVal val="0"/>
+            <c:showCatName val="0"/>
+            <c:showSerName val="0"/>
+            <c:showPercent val="0"/>
+            <c:showBubbleSize val="0"/>
+            <c:showLeaderLines val="0"/>
+          </c:dLbls>
+          <c:marker>
+            <c:symbol val="circle"/>
+            <c:size val="4"/>
+            <c:spPr>
+              <a:solidFill>
+                <a:srgbClr val="F4B08E"/>
+              </a:solidFill>
+              <a:ln w="9525" cap="flat">
+                <a:solidFill>
+                  <a:srgbClr val="F4B08E"/>
+                </a:solidFill>
+                <a:prstDash val="solid"/>
+                <a:round/>
+              </a:ln>
+              <a:effectLst/>
+            </c:spPr>
+          </c:marker>
+          <c:cat>
+            <c:multiLvlStrRef>
+              <c:f>Sheet1!$A$2:$A$13</c:f>
+              <c:multiLvlStrCache>
+                <c:ptCount val="12"/>
+                <c:lvl>
+                  <c:pt idx="0">
+                    <c:v>Dec 26</c:v>
+                  </c:pt>
+                  <c:pt idx="1">
+                    <c:v>Feb 27</c:v>
+                  </c:pt>
+                  <c:pt idx="2">
+                    <c:v>Apr 27</c:v>
+                  </c:pt>
+                  <c:pt idx="3">
+                    <c:v>Jun 27</c:v>
+                  </c:pt>
+                  <c:pt idx="4">
+                    <c:v>Aug 27</c:v>
+                  </c:pt>
+                  <c:pt idx="5">
+                    <c:v>Oct 27</c:v>
+                  </c:pt>
+                  <c:pt idx="6">
+                    <c:v>Dec 27</c:v>
+                  </c:pt>
+                  <c:pt idx="7">
+                    <c:v>Feb 28</c:v>
+                  </c:pt>
+                  <c:pt idx="8">
+                    <c:v>Apr 28</c:v>
+                  </c:pt>
+                  <c:pt idx="9">
+                    <c:v>Jun 28</c:v>
+                  </c:pt>
+                  <c:pt idx="10">
+                    <c:v>Aug 28</c:v>
+                  </c:pt>
+                  <c:pt idx="11">
+                    <c:v>Oct 28</c:v>
+                  </c:pt>
+                </c:lvl>
+              </c:multiLvlStrCache>
+            </c:multiLvlStrRef>
+          </c:cat>
+          <c:val>
+            <c:numRef>
+              <c:f>Sheet1!$D$2:$D$13</c:f>
+              <c:numCache>
+                <c:formatCode>General</c:formatCode>
+                <c:ptCount val="12"/>
+                <c:pt idx="0">
+                  <c:v>5.5</c:v>
+                </c:pt>
+                <c:pt idx="1">
+                  <c:v>5.5</c:v>
+                </c:pt>
+                <c:pt idx="2">
+                  <c:v>5.25</c:v>
+                </c:pt>
+                <c:pt idx="3">
+                  <c:v>5</c:v>
+                </c:pt>
+                <c:pt idx="4">
+                  <c:v>5</c:v>
+                </c:pt>
+                <c:pt idx="5">
+                  <c:v>4.75</c:v>
+                </c:pt>
+                <c:pt idx="6">
+                  <c:v>4.75</c:v>
+                </c:pt>
+                <c:pt idx="7">
+                  <c:v>4.5</c:v>
+                </c:pt>
+                <c:pt idx="8">
+                  <c:v>4.5</c:v>
+                </c:pt>
+                <c:pt idx="9">
+                  <c:v>4.5</c:v>
+                </c:pt>
+                <c:pt idx="10">
+                  <c:v>4.25</c:v>
+                </c:pt>
+                <c:pt idx="11">
+                  <c:v>4.25</c:v>
+                </c:pt>
+              </c:numCache>
+            </c:numRef>
+          </c:val>
+          <c:smooth val="0"/>
+        </c:ser>
+        <c:ser>
+          <c:idx val="3"/>
+          <c:order val="3"/>
+          <c:tx>
+            <c:strRef>
+              <c:f>Sheet1!$E$1</c:f>
+              <c:strCache>
+                <c:ptCount val="1"/>
+                <c:pt idx="0">
+                  <c:v>NRB bank rate implied</c:v>
                 </c:pt>
               </c:strCache>
             </c:strRef>
@@ -15760,8 +17520,8 @@
             <c:showLeaderLines val="0"/>
           </c:dLbls>
           <c:marker>
-            <c:symbol val="none"/>
-            <c:size val="6"/>
+            <c:symbol val="circle"/>
+            <c:size val="4"/>
             <c:spPr>
               <a:solidFill>
                 <a:srgbClr val="2A78D6"/>
@@ -15778,498 +17538,45 @@
           </c:marker>
           <c:cat>
             <c:multiLvlStrRef>
-              <c:f>Sheet1!$A$2:$A$164</c:f>
+              <c:f>Sheet1!$A$2:$A$13</c:f>
               <c:multiLvlStrCache>
-                <c:ptCount val="163"/>
+                <c:ptCount val="12"/>
                 <c:lvl>
                   <c:pt idx="0">
-                    <c:v>2013</c:v>
+                    <c:v>Dec 26</c:v>
                   </c:pt>
                   <c:pt idx="1">
-                    <c:v>2013</c:v>
+                    <c:v>Feb 27</c:v>
                   </c:pt>
                   <c:pt idx="2">
-                    <c:v>2013</c:v>
+                    <c:v>Apr 27</c:v>
                   </c:pt>
                   <c:pt idx="3">
-                    <c:v>2013</c:v>
+                    <c:v>Jun 27</c:v>
                   </c:pt>
                   <c:pt idx="4">
-                    <c:v>2013</c:v>
+                    <c:v>Aug 27</c:v>
                   </c:pt>
                   <c:pt idx="5">
-                    <c:v>2013</c:v>
+                    <c:v>Oct 27</c:v>
                   </c:pt>
                   <c:pt idx="6">
-                    <c:v>2013</c:v>
+                    <c:v>Dec 27</c:v>
                   </c:pt>
                   <c:pt idx="7">
-                    <c:v>2013</c:v>
+                    <c:v>Feb 28</c:v>
                   </c:pt>
                   <c:pt idx="8">
-                    <c:v>2013</c:v>
+                    <c:v>Apr 28</c:v>
                   </c:pt>
                   <c:pt idx="9">
-                    <c:v>2013</c:v>
+                    <c:v>Jun 28</c:v>
                   </c:pt>
                   <c:pt idx="10">
-                    <c:v>2013</c:v>
+                    <c:v>Aug 28</c:v>
                   </c:pt>
                   <c:pt idx="11">
-                    <c:v>2013</c:v>
-                  </c:pt>
-                  <c:pt idx="12">
-                    <c:v>2014</c:v>
-                  </c:pt>
-                  <c:pt idx="13">
-                    <c:v>2014</c:v>
-                  </c:pt>
-                  <c:pt idx="14">
-                    <c:v>2014</c:v>
-                  </c:pt>
-                  <c:pt idx="15">
-                    <c:v>2014</c:v>
-                  </c:pt>
-                  <c:pt idx="16">
-                    <c:v>2014</c:v>
-                  </c:pt>
-                  <c:pt idx="17">
-                    <c:v>2014</c:v>
-                  </c:pt>
-                  <c:pt idx="18">
-                    <c:v>2014</c:v>
-                  </c:pt>
-                  <c:pt idx="19">
-                    <c:v>2014</c:v>
-                  </c:pt>
-                  <c:pt idx="20">
-                    <c:v>2014</c:v>
-                  </c:pt>
-                  <c:pt idx="21">
-                    <c:v>2014</c:v>
-                  </c:pt>
-                  <c:pt idx="22">
-                    <c:v>2014</c:v>
-                  </c:pt>
-                  <c:pt idx="23">
-                    <c:v>2014</c:v>
-                  </c:pt>
-                  <c:pt idx="24">
-                    <c:v>2015</c:v>
-                  </c:pt>
-                  <c:pt idx="25">
-                    <c:v>2015</c:v>
-                  </c:pt>
-                  <c:pt idx="26">
-                    <c:v>2015</c:v>
-                  </c:pt>
-                  <c:pt idx="27">
-                    <c:v>2015</c:v>
-                  </c:pt>
-                  <c:pt idx="28">
-                    <c:v>2015</c:v>
-                  </c:pt>
-                  <c:pt idx="29">
-                    <c:v>2015</c:v>
-                  </c:pt>
-                  <c:pt idx="30">
-                    <c:v>2015</c:v>
-                  </c:pt>
-                  <c:pt idx="31">
-                    <c:v>2015</c:v>
-                  </c:pt>
-                  <c:pt idx="32">
-                    <c:v>2015</c:v>
-                  </c:pt>
-                  <c:pt idx="33">
-                    <c:v>2015</c:v>
-                  </c:pt>
-                  <c:pt idx="34">
-                    <c:v>2015</c:v>
-                  </c:pt>
-                  <c:pt idx="35">
-                    <c:v>2015</c:v>
-                  </c:pt>
-                  <c:pt idx="36">
-                    <c:v>2016</c:v>
-                  </c:pt>
-                  <c:pt idx="37">
-                    <c:v>2016</c:v>
-                  </c:pt>
-                  <c:pt idx="38">
-                    <c:v>2016</c:v>
-                  </c:pt>
-                  <c:pt idx="39">
-                    <c:v>2016</c:v>
-                  </c:pt>
-                  <c:pt idx="40">
-                    <c:v>2016</c:v>
-                  </c:pt>
-                  <c:pt idx="41">
-                    <c:v>2016</c:v>
-                  </c:pt>
-                  <c:pt idx="42">
-                    <c:v>2016</c:v>
-                  </c:pt>
-                  <c:pt idx="43">
-                    <c:v>2016</c:v>
-                  </c:pt>
-                  <c:pt idx="44">
-                    <c:v>2016</c:v>
-                  </c:pt>
-                  <c:pt idx="45">
-                    <c:v>2016</c:v>
-                  </c:pt>
-                  <c:pt idx="46">
-                    <c:v>2016</c:v>
-                  </c:pt>
-                  <c:pt idx="47">
-                    <c:v>2016</c:v>
-                  </c:pt>
-                  <c:pt idx="48">
-                    <c:v>2017</c:v>
-                  </c:pt>
-                  <c:pt idx="49">
-                    <c:v>2017</c:v>
-                  </c:pt>
-                  <c:pt idx="50">
-                    <c:v>2017</c:v>
-                  </c:pt>
-                  <c:pt idx="51">
-                    <c:v>2017</c:v>
-                  </c:pt>
-                  <c:pt idx="52">
-                    <c:v>2017</c:v>
-                  </c:pt>
-                  <c:pt idx="53">
-                    <c:v>2017</c:v>
-                  </c:pt>
-                  <c:pt idx="54">
-                    <c:v>2017</c:v>
-                  </c:pt>
-                  <c:pt idx="55">
-                    <c:v>2017</c:v>
-                  </c:pt>
-                  <c:pt idx="56">
-                    <c:v>2017</c:v>
-                  </c:pt>
-                  <c:pt idx="57">
-                    <c:v>2017</c:v>
-                  </c:pt>
-                  <c:pt idx="58">
-                    <c:v>2017</c:v>
-                  </c:pt>
-                  <c:pt idx="59">
-                    <c:v>2017</c:v>
-                  </c:pt>
-                  <c:pt idx="60">
-                    <c:v>2018</c:v>
-                  </c:pt>
-                  <c:pt idx="61">
-                    <c:v>2018</c:v>
-                  </c:pt>
-                  <c:pt idx="62">
-                    <c:v>2018</c:v>
-                  </c:pt>
-                  <c:pt idx="63">
-                    <c:v>2018</c:v>
-                  </c:pt>
-                  <c:pt idx="64">
-                    <c:v>2018</c:v>
-                  </c:pt>
-                  <c:pt idx="65">
-                    <c:v>2018</c:v>
-                  </c:pt>
-                  <c:pt idx="66">
-                    <c:v>2018</c:v>
-                  </c:pt>
-                  <c:pt idx="67">
-                    <c:v>2018</c:v>
-                  </c:pt>
-                  <c:pt idx="68">
-                    <c:v>2018</c:v>
-                  </c:pt>
-                  <c:pt idx="69">
-                    <c:v>2018</c:v>
-                  </c:pt>
-                  <c:pt idx="70">
-                    <c:v>2018</c:v>
-                  </c:pt>
-                  <c:pt idx="71">
-                    <c:v>2018</c:v>
-                  </c:pt>
-                  <c:pt idx="72">
-                    <c:v>2019</c:v>
-                  </c:pt>
-                  <c:pt idx="73">
-                    <c:v>2019</c:v>
-                  </c:pt>
-                  <c:pt idx="74">
-                    <c:v>2019</c:v>
-                  </c:pt>
-                  <c:pt idx="75">
-                    <c:v>2019</c:v>
-                  </c:pt>
-                  <c:pt idx="76">
-                    <c:v>2019</c:v>
-                  </c:pt>
-                  <c:pt idx="77">
-                    <c:v>2019</c:v>
-                  </c:pt>
-                  <c:pt idx="78">
-                    <c:v>2019</c:v>
-                  </c:pt>
-                  <c:pt idx="79">
-                    <c:v>2019</c:v>
-                  </c:pt>
-                  <c:pt idx="80">
-                    <c:v>2019</c:v>
-                  </c:pt>
-                  <c:pt idx="81">
-                    <c:v>2019</c:v>
-                  </c:pt>
-                  <c:pt idx="82">
-                    <c:v>2019</c:v>
-                  </c:pt>
-                  <c:pt idx="83">
-                    <c:v>2019</c:v>
-                  </c:pt>
-                  <c:pt idx="84">
-                    <c:v>2020</c:v>
-                  </c:pt>
-                  <c:pt idx="85">
-                    <c:v>2020</c:v>
-                  </c:pt>
-                  <c:pt idx="86">
-                    <c:v>2020</c:v>
-                  </c:pt>
-                  <c:pt idx="87">
-                    <c:v>2020</c:v>
-                  </c:pt>
-                  <c:pt idx="88">
-                    <c:v>2020</c:v>
-                  </c:pt>
-                  <c:pt idx="89">
-                    <c:v>2020</c:v>
-                  </c:pt>
-                  <c:pt idx="90">
-                    <c:v>2020</c:v>
-                  </c:pt>
-                  <c:pt idx="91">
-                    <c:v>2020</c:v>
-                  </c:pt>
-                  <c:pt idx="92">
-                    <c:v>2020</c:v>
-                  </c:pt>
-                  <c:pt idx="93">
-                    <c:v>2020</c:v>
-                  </c:pt>
-                  <c:pt idx="94">
-                    <c:v>2020</c:v>
-                  </c:pt>
-                  <c:pt idx="95">
-                    <c:v>2020</c:v>
-                  </c:pt>
-                  <c:pt idx="96">
-                    <c:v>2021</c:v>
-                  </c:pt>
-                  <c:pt idx="97">
-                    <c:v>2021</c:v>
-                  </c:pt>
-                  <c:pt idx="98">
-                    <c:v>2021</c:v>
-                  </c:pt>
-                  <c:pt idx="99">
-                    <c:v>2021</c:v>
-                  </c:pt>
-                  <c:pt idx="100">
-                    <c:v>2021</c:v>
-                  </c:pt>
-                  <c:pt idx="101">
-                    <c:v>2021</c:v>
-                  </c:pt>
-                  <c:pt idx="102">
-                    <c:v>2021</c:v>
-                  </c:pt>
-                  <c:pt idx="103">
-                    <c:v>2021</c:v>
-                  </c:pt>
-                  <c:pt idx="104">
-                    <c:v>2021</c:v>
-                  </c:pt>
-                  <c:pt idx="105">
-                    <c:v>2021</c:v>
-                  </c:pt>
-                  <c:pt idx="106">
-                    <c:v>2021</c:v>
-                  </c:pt>
-                  <c:pt idx="107">
-                    <c:v>2021</c:v>
-                  </c:pt>
-                  <c:pt idx="108">
-                    <c:v>2022</c:v>
-                  </c:pt>
-                  <c:pt idx="109">
-                    <c:v>2022</c:v>
-                  </c:pt>
-                  <c:pt idx="110">
-                    <c:v>2022</c:v>
-                  </c:pt>
-                  <c:pt idx="111">
-                    <c:v>2022</c:v>
-                  </c:pt>
-                  <c:pt idx="112">
-                    <c:v>2022</c:v>
-                  </c:pt>
-                  <c:pt idx="113">
-                    <c:v>2022</c:v>
-                  </c:pt>
-                  <c:pt idx="114">
-                    <c:v>2022</c:v>
-                  </c:pt>
-                  <c:pt idx="115">
-                    <c:v>2022</c:v>
-                  </c:pt>
-                  <c:pt idx="116">
-                    <c:v>2022</c:v>
-                  </c:pt>
-                  <c:pt idx="117">
-                    <c:v>2022</c:v>
-                  </c:pt>
-                  <c:pt idx="118">
-                    <c:v>2022</c:v>
-                  </c:pt>
-                  <c:pt idx="119">
-                    <c:v>2022</c:v>
-                  </c:pt>
-                  <c:pt idx="120">
-                    <c:v>2023</c:v>
-                  </c:pt>
-                  <c:pt idx="121">
-                    <c:v>2023</c:v>
-                  </c:pt>
-                  <c:pt idx="122">
-                    <c:v>2023</c:v>
-                  </c:pt>
-                  <c:pt idx="123">
-                    <c:v>2023</c:v>
-                  </c:pt>
-                  <c:pt idx="124">
-                    <c:v>2023</c:v>
-                  </c:pt>
-                  <c:pt idx="125">
-                    <c:v>2023</c:v>
-                  </c:pt>
-                  <c:pt idx="126">
-                    <c:v>2023</c:v>
-                  </c:pt>
-                  <c:pt idx="127">
-                    <c:v>2023</c:v>
-                  </c:pt>
-                  <c:pt idx="128">
-                    <c:v>2023</c:v>
-                  </c:pt>
-                  <c:pt idx="129">
-                    <c:v>2023</c:v>
-                  </c:pt>
-                  <c:pt idx="130">
-                    <c:v>2023</c:v>
-                  </c:pt>
-                  <c:pt idx="131">
-                    <c:v>2023</c:v>
-                  </c:pt>
-                  <c:pt idx="132">
-                    <c:v>2024</c:v>
-                  </c:pt>
-                  <c:pt idx="133">
-                    <c:v>2024</c:v>
-                  </c:pt>
-                  <c:pt idx="134">
-                    <c:v>2024</c:v>
-                  </c:pt>
-                  <c:pt idx="135">
-                    <c:v>2024</c:v>
-                  </c:pt>
-                  <c:pt idx="136">
-                    <c:v>2024</c:v>
-                  </c:pt>
-                  <c:pt idx="137">
-                    <c:v>2024</c:v>
-                  </c:pt>
-                  <c:pt idx="138">
-                    <c:v>2024</c:v>
-                  </c:pt>
-                  <c:pt idx="139">
-                    <c:v>2024</c:v>
-                  </c:pt>
-                  <c:pt idx="140">
-                    <c:v>2024</c:v>
-                  </c:pt>
-                  <c:pt idx="141">
-                    <c:v>2024</c:v>
-                  </c:pt>
-                  <c:pt idx="142">
-                    <c:v>2024</c:v>
-                  </c:pt>
-                  <c:pt idx="143">
-                    <c:v>2024</c:v>
-                  </c:pt>
-                  <c:pt idx="144">
-                    <c:v>2025</c:v>
-                  </c:pt>
-                  <c:pt idx="145">
-                    <c:v>2025</c:v>
-                  </c:pt>
-                  <c:pt idx="146">
-                    <c:v>2025</c:v>
-                  </c:pt>
-                  <c:pt idx="147">
-                    <c:v>2025</c:v>
-                  </c:pt>
-                  <c:pt idx="148">
-                    <c:v>2025</c:v>
-                  </c:pt>
-                  <c:pt idx="149">
-                    <c:v>2025</c:v>
-                  </c:pt>
-                  <c:pt idx="150">
-                    <c:v>2025</c:v>
-                  </c:pt>
-                  <c:pt idx="151">
-                    <c:v>2025</c:v>
-                  </c:pt>
-                  <c:pt idx="152">
-                    <c:v>2025</c:v>
-                  </c:pt>
-                  <c:pt idx="153">
-                    <c:v>2025</c:v>
-                  </c:pt>
-                  <c:pt idx="154">
-                    <c:v>2025</c:v>
-                  </c:pt>
-                  <c:pt idx="155">
-                    <c:v>2025</c:v>
-                  </c:pt>
-                  <c:pt idx="156">
-                    <c:v>2026</c:v>
-                  </c:pt>
-                  <c:pt idx="157">
-                    <c:v>2026</c:v>
-                  </c:pt>
-                  <c:pt idx="158">
-                    <c:v>2026</c:v>
-                  </c:pt>
-                  <c:pt idx="159">
-                    <c:v>2026</c:v>
-                  </c:pt>
-                  <c:pt idx="160">
-                    <c:v>2026</c:v>
-                  </c:pt>
-                  <c:pt idx="161">
-                    <c:v>2026</c:v>
-                  </c:pt>
-                  <c:pt idx="162">
-                    <c:v>2026</c:v>
+                    <c:v>Oct 28</c:v>
                   </c:pt>
                 </c:lvl>
               </c:multiLvlStrCache>
@@ -16277,498 +17584,45 @@
           </c:cat>
           <c:val>
             <c:numRef>
-              <c:f>Sheet1!$C$2:$C$164</c:f>
+              <c:f>Sheet1!$E$2:$E$13</c:f>
               <c:numCache>
                 <c:formatCode>General</c:formatCode>
-                <c:ptCount val="163"/>
+                <c:ptCount val="12"/>
                 <c:pt idx="0">
-                  <c:v>9.82</c:v>
+                  <c:v>5.94</c:v>
                 </c:pt>
                 <c:pt idx="1">
-                  <c:v>10.07</c:v>
+                  <c:v>5.97</c:v>
                 </c:pt>
                 <c:pt idx="2">
-                  <c:v>10.24</c:v>
+                  <c:v>5.98</c:v>
                 </c:pt>
                 <c:pt idx="3">
-                  <c:v>9.46</c:v>
+                  <c:v>5.94</c:v>
                 </c:pt>
                 <c:pt idx="4">
-                  <c:v>8.69</c:v>
+                  <c:v>5.89</c:v>
                 </c:pt>
                 <c:pt idx="5">
-                  <c:v>8.23</c:v>
+                  <c:v>5.86</c:v>
                 </c:pt>
                 <c:pt idx="6">
-                  <c:v>7.75</c:v>
+                  <c:v>5.84</c:v>
                 </c:pt>
                 <c:pt idx="7">
-                  <c:v>7.86</c:v>
+                  <c:v>5.81</c:v>
                 </c:pt>
                 <c:pt idx="8">
-                  <c:v>7.94</c:v>
+                  <c:v>5.8</c:v>
                 </c:pt>
                 <c:pt idx="9">
-                  <c:v>8.41</c:v>
+                  <c:v>5.78</c:v>
                 </c:pt>
                 <c:pt idx="10">
-                  <c:v>9.97</c:v>
+                  <c:v>5.76</c:v>
                 </c:pt>
                 <c:pt idx="11">
-                  <c:v>10.28</c:v>
-                </c:pt>
-                <c:pt idx="12">
-                  <c:v>9.72</c:v>
-                </c:pt>
-                <c:pt idx="13">
-                  <c:v>8.76</c:v>
-                </c:pt>
-                <c:pt idx="14">
-                  <c:v>8.84</c:v>
-                </c:pt>
-                <c:pt idx="15">
-                  <c:v>9.47</c:v>
-                </c:pt>
-                <c:pt idx="16">
-                  <c:v>9.75</c:v>
-                </c:pt>
-                <c:pt idx="17">
-                  <c:v>9.45</c:v>
-                </c:pt>
-                <c:pt idx="18">
-                  <c:v>8.08</c:v>
-                </c:pt>
-                <c:pt idx="19">
-                  <c:v>7.5</c:v>
-                </c:pt>
-                <c:pt idx="20">
-                  <c:v>7.56</c:v>
-                </c:pt>
-                <c:pt idx="21">
-                  <c:v>7.5</c:v>
-                </c:pt>
-                <c:pt idx="22">
-                  <c:v>7.15</c:v>
-                </c:pt>
-                <c:pt idx="23">
-                  <c:v>7.06</c:v>
-                </c:pt>
-                <c:pt idx="24">
-                  <c:v>6.88</c:v>
-                </c:pt>
-                <c:pt idx="25">
-                  <c:v>6.99</c:v>
-                </c:pt>
-                <c:pt idx="26">
-                  <c:v>7.01</c:v>
-                </c:pt>
-                <c:pt idx="27">
-                  <c:v>6.84</c:v>
-                </c:pt>
-                <c:pt idx="28">
-                  <c:v>7.09</c:v>
-                </c:pt>
-                <c:pt idx="29">
-                  <c:v>7.39</c:v>
-                </c:pt>
-                <c:pt idx="30">
-                  <c:v>7.58</c:v>
-                </c:pt>
-                <c:pt idx="31">
-                  <c:v>6.9</c:v>
-                </c:pt>
-                <c:pt idx="32">
-                  <c:v>7.19</c:v>
-                </c:pt>
-                <c:pt idx="33">
-                  <c:v>8.2</c:v>
-                </c:pt>
-                <c:pt idx="34">
-                  <c:v>10.44</c:v>
-                </c:pt>
-                <c:pt idx="35">
-                  <c:v>11.57</c:v>
-                </c:pt>
-                <c:pt idx="36">
-                  <c:v>12.05</c:v>
-                </c:pt>
-                <c:pt idx="37">
-                  <c:v>11.29</c:v>
-                </c:pt>
-                <c:pt idx="38">
-                  <c:v>10.24</c:v>
-                </c:pt>
-                <c:pt idx="39">
-                  <c:v>9.7</c:v>
-                </c:pt>
-                <c:pt idx="40">
-                  <c:v>10.05</c:v>
-                </c:pt>
-                <c:pt idx="41">
-                  <c:v>11.13</c:v>
-                </c:pt>
-                <c:pt idx="42">
-                  <c:v>10.44</c:v>
-                </c:pt>
-                <c:pt idx="43">
-                  <c:v>8.62</c:v>
-                </c:pt>
-                <c:pt idx="44">
-                  <c:v>7.89</c:v>
-                </c:pt>
-                <c:pt idx="45">
-                  <c:v>6.73</c:v>
-                </c:pt>
-                <c:pt idx="46">
-                  <c:v>4.75</c:v>
-                </c:pt>
-                <c:pt idx="47">
-                  <c:v>3.83</c:v>
-                </c:pt>
-                <c:pt idx="48">
-                  <c:v>2.74</c:v>
-                </c:pt>
-                <c:pt idx="49">
-                  <c:v>3.1</c:v>
-                </c:pt>
-                <c:pt idx="50">
-                  <c:v>3.35</c:v>
-                </c:pt>
-                <c:pt idx="51">
-                  <c:v>3.59</c:v>
-                </c:pt>
-                <c:pt idx="52">
-                  <c:v>3.46</c:v>
-                </c:pt>
-                <c:pt idx="53">
-                  <c:v>2.87</c:v>
-                </c:pt>
-                <c:pt idx="54">
-                  <c:v>2.99</c:v>
-                </c:pt>
-                <c:pt idx="55">
-                  <c:v>1.21</c:v>
-                </c:pt>
-                <c:pt idx="56">
-                  <c:v>2.32</c:v>
-                </c:pt>
-                <c:pt idx="57">
-                  <c:v>1.87</c:v>
-                </c:pt>
-                <c:pt idx="58">
-                  <c:v>2.55</c:v>
-                </c:pt>
-                <c:pt idx="59">
-                  <c:v>3.41</c:v>
-                </c:pt>
-                <c:pt idx="60">
-                  <c:v>4</c:v>
-                </c:pt>
-                <c:pt idx="61">
-                  <c:v>4.99</c:v>
-                </c:pt>
-                <c:pt idx="62">
-                  <c:v>5.56</c:v>
-                </c:pt>
-                <c:pt idx="63">
-                  <c:v>5.28</c:v>
-                </c:pt>
-                <c:pt idx="64">
-                  <c:v>4.08</c:v>
-                </c:pt>
-                <c:pt idx="65">
-                  <c:v>4.12</c:v>
-                </c:pt>
-                <c:pt idx="66">
-                  <c:v>4.58</c:v>
-                </c:pt>
-                <c:pt idx="67">
-                  <c:v>4.19</c:v>
-                </c:pt>
-                <c:pt idx="68">
-                  <c:v>3.65</c:v>
-                </c:pt>
-                <c:pt idx="69">
-                  <c:v>4.68</c:v>
-                </c:pt>
-                <c:pt idx="70">
-                  <c:v>4.15</c:v>
-                </c:pt>
-                <c:pt idx="71">
-                  <c:v>3.71</c:v>
-                </c:pt>
-                <c:pt idx="72">
-                  <c:v>4.58</c:v>
-                </c:pt>
-                <c:pt idx="73">
-                  <c:v>4.35</c:v>
-                </c:pt>
-                <c:pt idx="74">
-                  <c:v>4.2</c:v>
-                </c:pt>
-                <c:pt idx="75">
-                  <c:v>4.44</c:v>
-                </c:pt>
-                <c:pt idx="76">
-                  <c:v>5.29</c:v>
-                </c:pt>
-                <c:pt idx="77">
-                  <c:v>6.16</c:v>
-                </c:pt>
-                <c:pt idx="78">
-                  <c:v>6.02</c:v>
-                </c:pt>
-                <c:pt idx="79">
-                  <c:v>6.95</c:v>
-                </c:pt>
-                <c:pt idx="80">
-                  <c:v>6.16</c:v>
-                </c:pt>
-                <c:pt idx="81">
-                  <c:v>6.2</c:v>
-                </c:pt>
-                <c:pt idx="82">
-                  <c:v>5.76</c:v>
-                </c:pt>
-                <c:pt idx="83">
-                  <c:v>6.55</c:v>
-                </c:pt>
-                <c:pt idx="84">
-                  <c:v>6.82</c:v>
-                </c:pt>
-                <c:pt idx="85">
-                  <c:v>6.87</c:v>
-                </c:pt>
-                <c:pt idx="86">
-                  <c:v>6.7</c:v>
-                </c:pt>
-                <c:pt idx="87">
-                  <c:v>6.74</c:v>
-                </c:pt>
-                <c:pt idx="88">
-                  <c:v>5.83</c:v>
-                </c:pt>
-                <c:pt idx="89">
-                  <c:v>4.54</c:v>
-                </c:pt>
-                <c:pt idx="90">
-                  <c:v>4.78</c:v>
-                </c:pt>
-                <c:pt idx="91">
-                  <c:v>3.49</c:v>
-                </c:pt>
-                <c:pt idx="92">
-                  <c:v>4.52</c:v>
-                </c:pt>
-                <c:pt idx="93">
-                  <c:v>3.79</c:v>
-                </c:pt>
-                <c:pt idx="94">
-                  <c:v>4.05</c:v>
-                </c:pt>
-                <c:pt idx="95">
-                  <c:v>2.93</c:v>
-                </c:pt>
-                <c:pt idx="96">
-                  <c:v>3.32</c:v>
-                </c:pt>
-                <c:pt idx="97">
-                  <c:v>2.7</c:v>
-                </c:pt>
-                <c:pt idx="98">
-                  <c:v>3.03</c:v>
-                </c:pt>
-                <c:pt idx="99">
-                  <c:v>3.1</c:v>
-                </c:pt>
-                <c:pt idx="100">
-                  <c:v>3.65</c:v>
-                </c:pt>
-                <c:pt idx="101">
-                  <c:v>4.19</c:v>
-                </c:pt>
-                <c:pt idx="102">
-                  <c:v>4.19</c:v>
-                </c:pt>
-                <c:pt idx="103">
-                  <c:v>4.35</c:v>
-                </c:pt>
-                <c:pt idx="104">
-                  <c:v>3.49</c:v>
-                </c:pt>
-                <c:pt idx="105">
-                  <c:v>4.24</c:v>
-                </c:pt>
-                <c:pt idx="106">
-                  <c:v>6.04</c:v>
-                </c:pt>
-                <c:pt idx="107">
-                  <c:v>7.11</c:v>
-                </c:pt>
-                <c:pt idx="108">
-                  <c:v>5.89</c:v>
-                </c:pt>
-                <c:pt idx="109">
-                  <c:v>6.24</c:v>
-                </c:pt>
-                <c:pt idx="110">
-                  <c:v>7.14</c:v>
-                </c:pt>
-                <c:pt idx="111">
-                  <c:v>7.28</c:v>
-                </c:pt>
-                <c:pt idx="112">
-                  <c:v>7.87</c:v>
-                </c:pt>
-                <c:pt idx="113">
-                  <c:v>8.56</c:v>
-                </c:pt>
-                <c:pt idx="114">
-                  <c:v>8.08</c:v>
-                </c:pt>
-                <c:pt idx="115">
-                  <c:v>8.26</c:v>
-                </c:pt>
-                <c:pt idx="116">
-                  <c:v>8.64</c:v>
-                </c:pt>
-                <c:pt idx="117">
-                  <c:v>8.5</c:v>
-                </c:pt>
-                <c:pt idx="118">
-                  <c:v>8.08</c:v>
-                </c:pt>
-                <c:pt idx="119">
-                  <c:v>7.38</c:v>
-                </c:pt>
-                <c:pt idx="120">
-                  <c:v>7.26</c:v>
-                </c:pt>
-                <c:pt idx="121">
-                  <c:v>7.88</c:v>
-                </c:pt>
-                <c:pt idx="122">
-                  <c:v>7.44</c:v>
-                </c:pt>
-                <c:pt idx="123">
-                  <c:v>7.76</c:v>
-                </c:pt>
-                <c:pt idx="124">
-                  <c:v>7.41</c:v>
-                </c:pt>
-                <c:pt idx="125">
-                  <c:v>6.83</c:v>
-                </c:pt>
-                <c:pt idx="126">
-                  <c:v>7.44</c:v>
-                </c:pt>
-                <c:pt idx="127">
-                  <c:v>7.52</c:v>
-                </c:pt>
-                <c:pt idx="128">
-                  <c:v>8.19</c:v>
-                </c:pt>
-                <c:pt idx="129">
-                  <c:v>7.5</c:v>
-                </c:pt>
-                <c:pt idx="130">
-                  <c:v>5.38</c:v>
-                </c:pt>
-                <c:pt idx="131">
-                  <c:v>4.95</c:v>
-                </c:pt>
-                <c:pt idx="132">
-                  <c:v>5.26</c:v>
-                </c:pt>
-                <c:pt idx="133">
-                  <c:v>5.01</c:v>
-                </c:pt>
-                <c:pt idx="134">
-                  <c:v>4.82</c:v>
-                </c:pt>
-                <c:pt idx="135">
-                  <c:v>4.61</c:v>
-                </c:pt>
-                <c:pt idx="136">
-                  <c:v>4.4</c:v>
-                </c:pt>
-                <c:pt idx="137">
-                  <c:v>4.17</c:v>
-                </c:pt>
-                <c:pt idx="138">
-                  <c:v>3.57</c:v>
-                </c:pt>
-                <c:pt idx="139">
-                  <c:v>4.09</c:v>
-                </c:pt>
-                <c:pt idx="140">
-                  <c:v>3.86</c:v>
-                </c:pt>
-                <c:pt idx="141">
-                  <c:v>4.82</c:v>
-                </c:pt>
-                <c:pt idx="142">
-                  <c:v>5.6</c:v>
-                </c:pt>
-                <c:pt idx="143">
-                  <c:v>6.05</c:v>
-                </c:pt>
-                <c:pt idx="144">
-                  <c:v>5.41</c:v>
-                </c:pt>
-                <c:pt idx="145">
-                  <c:v>4.16</c:v>
-                </c:pt>
-                <c:pt idx="146">
-                  <c:v>3.75</c:v>
-                </c:pt>
-                <c:pt idx="147">
-                  <c:v>3.39</c:v>
-                </c:pt>
-                <c:pt idx="148">
-                  <c:v>2.77</c:v>
-                </c:pt>
-                <c:pt idx="149">
-                  <c:v>2.72</c:v>
-                </c:pt>
-                <c:pt idx="150">
-                  <c:v>2.2</c:v>
-                </c:pt>
-                <c:pt idx="151">
-                  <c:v>1.68</c:v>
-                </c:pt>
-                <c:pt idx="152">
-                  <c:v>1.87</c:v>
-                </c:pt>
-                <c:pt idx="153">
-                  <c:v>1.47</c:v>
-                </c:pt>
-                <c:pt idx="154">
-                  <c:v>1.11</c:v>
-                </c:pt>
-                <c:pt idx="155">
-                  <c:v>1.63</c:v>
-                </c:pt>
-                <c:pt idx="156">
-                  <c:v>2.42</c:v>
-                </c:pt>
-                <c:pt idx="157">
-                  <c:v>3.25</c:v>
-                </c:pt>
-                <c:pt idx="158">
-                  <c:v>3.62</c:v>
-                </c:pt>
-                <c:pt idx="159">
-                  <c:v/>
-                </c:pt>
-                <c:pt idx="160">
-                  <c:v/>
-                </c:pt>
-                <c:pt idx="161">
-                  <c:v/>
-                </c:pt>
-                <c:pt idx="162">
-                  <c:v/>
+                  <c:v>5.75</c:v>
                 </c:pt>
               </c:numCache>
             </c:numRef>
@@ -16842,14 +17696,14 @@
         <c:auto val="1"/>
         <c:lblAlgn val="ctr"/>
         <c:noMultiLvlLbl val="1"/>
-        <c:tickLblSkip val="24"/>
+        <c:tickLblSkip val="2"/>
       </c:catAx>
       <c:valAx>
         <c:axId val="2094734552"/>
         <c:scaling>
           <c:orientation val="minMax"/>
-          <c:max val="12"/>
-          <c:min val="0"/>
+          <c:max val="6.5"/>
+          <c:min val="4"/>
         </c:scaling>
         <c:delete val="0"/>
         <c:axPos val="l"/>
@@ -16864,7 +17718,7 @@
             </a:ln>
           </c:spPr>
         </c:majorGridlines>
-        <c:numFmt formatCode="0" sourceLinked="0"/>
+        <c:numFmt formatCode="0.00" sourceLinked="0"/>
         <c:majorTickMark val="out"/>
         <c:minorTickMark val="none"/>
         <c:tickLblPos val="nextTo"/>
@@ -16893,7 +17747,7 @@
         <c:crossAx val="2094734554"/>
         <c:crosses val="autoZero"/>
         <c:crossBetween val="between"/>
-        <c:majorUnit val="2"/>
+        <c:majorUnit val="0.5"/>
       </c:valAx>
       <c:spPr>
         <a:noFill/>
@@ -16911,7 +17765,7 @@
         <a:lstStyle/>
         <a:p>
           <a:pPr>
-            <a:defRPr sz="1000">
+            <a:defRPr sz="950">
               <a:latin typeface="+mn-lt"/>
               <a:cs typeface="+mn-lt"/>
             </a:defRPr>
@@ -18035,7 +18889,7 @@
           <a:p>
             <a:r>
               <a:rPr lang="en-US" dirty="0"/>
-              <a:t>Nepal's interest rates and prices are treated here as outcomes of India's cycle. Capital controls resolve the impossible trinity: the peg holds, and the NRB keeps room over its own rate, so India's move arrives through prices, through the NRB's own response, and through liquidity. Sources: peg_channels.csv and peg_cycles.csv, decisions D052 and D053.</a:t>
+              <a:t>Decisions D057 and D058: the frozen model chained through 12 meetings, shown for the premium persists scenario; the other four peak between 5.63 and 5.81 and all end near 5.2 to 5.26. The first three meetings use the news based inputs of D050. After April 2027 inputs follow declared assumptions: inflation returns to its 2021 to 2026 average of 4.7, the oil effect leaves twelve month inflation from December 2027, and each point of repo above 5.50 lowers inflation by 0.4 point. Beyond a year the assumptions drive the path more than the news, so this is a conditional outlook, not a forecast.</a:t>
             </a:r>
             <a:endParaRPr lang="en-US" dirty="0"/>
           </a:p>
@@ -18123,7 +18977,7 @@
           <a:p>
             <a:r>
               <a:rPr lang="en-US" dirty="0"/>
-              <a:t>Change from the month before the RBI's first move to three months after its last, in percentage points. Same way means a move of more than 0.1 point in the RBI's direction. The monthly test of decision D055 agrees: no significant response of the interbank rate before or during the corridor (p 0.50 and 0.51). Decision D053, reports/tables/peg_cycles.csv.</a:t>
+              <a:t>Nepal's interest rates and prices are treated here as outcomes of India's cycle. Capital controls resolve the impossible trinity: the peg holds, and the NRB keeps room over its own rate, so India's move arrives through prices, through the NRB's own response, and through liquidity. Sources: peg_channels.csv and peg_cycles.csv, decisions D052 and D053.</a:t>
             </a:r>
             <a:endParaRPr lang="en-US" dirty="0"/>
           </a:p>
@@ -18211,7 +19065,7 @@
           <a:p>
             <a:r>
               <a:rPr lang="en-US" dirty="0"/>
-              <a:t>Monthly CPI inflation on both sides; Nepal's series ends in March 2026 and twelve months in 2006 and 2007 that repeated the year before in the IMF file are left missing. Source: reports/tables/peg_channels.csv, decision D052.</a:t>
+              <a:t>Change from the month before the RBI's first move to three months after its last, in percentage points. Same way means a move of more than 0.1 point in the RBI's direction. The monthly test of decision D055 agrees: no significant response of the interbank rate before or during the corridor (p 0.50 and 0.51). Decision D053, reports/tables/peg_cycles.csv.</a:t>
             </a:r>
             <a:endParaRPr lang="en-US" dirty="0"/>
           </a:p>
@@ -18387,7 +19241,7 @@
           <a:p>
             <a:r>
               <a:rPr lang="en-US" dirty="0"/>
-              <a:t>Change from the month before the RBI's first move to three months after its last. Over all twelve complete RBI cycles since 2001 the NRB bank rate moved the same way in 7, the 91 day treasury bill in 7 and the interbank rate in 6; the response became regular once the NRB corridor was in place. Treasury bill changes since 2019: minus 0.65, plus 2.08, minus 0.35. Sources: reports/tables/peg_cycles.csv and peg_policy_response.csv, decisions D053, D055 and D056.</a:t>
+              <a:t>Monthly CPI inflation on both sides; Nepal's series ends in March 2026 and twelve months in 2006 and 2007 that repeated the year before in the IMF file are left missing. Source: reports/tables/peg_channels.csv, decision D052.</a:t>
             </a:r>
             <a:endParaRPr lang="en-US" dirty="0"/>
           </a:p>
@@ -18475,7 +19329,7 @@
           <a:p>
             <a:r>
               <a:rPr lang="en-US" dirty="0"/>
-              <a:t>Under the peg the NRB must buy the foreign currency that remittances bring in, and each purchase creates bank reserves. When deposits grow faster than credit, the surplus pushes the interbank rate to the floor of the corridor; when credit outruns deposits, it rises to the ceiling. Slow government spending did not cause the current floor: the fiscal injection was smaller during it. Decision D049.</a:t>
+              <a:t>Change from the month before the RBI's first move to three months after its last. Over all twelve complete RBI cycles since 2001 the NRB bank rate moved the same way in 7, the 91 day treasury bill in 7 and the interbank rate in 6; the response became regular once the NRB corridor was in place. Treasury bill changes since 2019: minus 0.65, plus 2.08, minus 0.35. Sources: reports/tables/peg_cycles.csv and peg_policy_response.csv, decisions D053, D055 and D056.</a:t>
             </a:r>
             <a:endParaRPr lang="en-US" dirty="0"/>
           </a:p>
@@ -18563,7 +19417,7 @@
           <a:p>
             <a:r>
               <a:rPr lang="en-US" dirty="0"/>
-              <a:t>Binary logistic model of decision D039, refitted at every origin with a four month gap so no training label was unknown at the origin. Lean is P(rise) minus P(fall). Results from November 2021 are labelled post hoc because the design was chosen afterwards. The last three months, August to October 2026, are sealed forecasts awaiting NRB data. Source: reports/tables/nepal_binary_predictions.csv.</a:t>
+              <a:t>Under the peg the NRB must buy the foreign currency that remittances bring in, and each purchase creates bank reserves. When deposits grow faster than credit, the surplus pushes the interbank rate to the floor of the corridor; when credit outruns deposits, it rises to the ceiling. Slow government spending did not cause the current floor: the fiscal injection was smaller during it. Decision D049.</a:t>
             </a:r>
             <a:endParaRPr lang="en-US" dirty="0"/>
           </a:p>
@@ -18651,7 +19505,7 @@
           <a:p>
             <a:r>
               <a:rPr lang="en-US" dirty="0"/>
-              <a:t>The NRB estimate applies the corridor era response of decision D056 to the outlook range and is an implication, not a model forecast. The frozen Nepal model's sealed forecast for October 2026 is rise 0.29, fall 0.24.</a:t>
+              <a:t>Binary logistic model of decision D039, refitted at every origin with a four month gap so no training label was unknown at the origin. Lean is P(rise) minus P(fall). Results from November 2021 are labelled post hoc because the design was chosen afterwards. The last three months, August to October 2026, are sealed forecasts awaiting NRB data. Source: reports/tables/nepal_binary_predictions.csv.</a:t>
             </a:r>
             <a:endParaRPr lang="en-US" dirty="0"/>
           </a:p>
@@ -18739,6 +19593,94 @@
           <a:p>
             <a:r>
               <a:rPr lang="en-US" dirty="0"/>
+              <a:t>The NRB estimate applies the corridor era response of decision D056 to the outlook range and is an implication, not a model forecast. The frozen Nepal model's sealed forecast for October 2026 is rise 0.29, fall 0.24.</a:t>
+            </a:r>
+            <a:endParaRPr lang="en-US" dirty="0"/>
+          </a:p>
+        </p:txBody>
+      </p:sp>
+      <p:sp>
+        <p:nvSpPr>
+          <p:cNvPr id="4" name="Slide Number Placeholder 3"/>
+          <p:cNvSpPr>
+            <a:spLocks noGrp="1"/>
+          </p:cNvSpPr>
+          <p:nvPr>
+            <p:ph type="sldNum" sz="quarter" idx="10"/>
+          </p:nvPr>
+        </p:nvSpPr>
+        <p:spPr/>
+        <p:txBody>
+          <a:bodyPr/>
+          <a:lstStyle/>
+          <a:p>
+            <a:fld id="{F7021451-1387-4CA6-816F-3879F97B5CBC}" type="slidenum">
+              <a:rPr lang="en-US"/>
+              <a:t>24</a:t>
+            </a:fld>
+            <a:endParaRPr lang="en-US"/>
+          </a:p>
+        </p:txBody>
+      </p:sp>
+    </p:spTree>
+    <p:extLst>
+      <p:ext uri="{BB962C8B-B14F-4D97-AF65-F5344CB8AC3E}">
+        <p14:creationId xmlns:p14="http://schemas.microsoft.com/office/powerpoint/2010/main" val="1024086991"/>
+      </p:ext>
+    </p:extLst>
+  </p:cSld>
+  <p:clrMapOvr>
+    <a:masterClrMapping/>
+  </p:clrMapOvr>
+</p:notes>
+</file>
+
+<file path=ppt/notesSlides/notesSlide25.xml><?xml version="1.0" encoding="utf-8"?>
+<p:notes xmlns:a="http://schemas.openxmlformats.org/drawingml/2006/main" xmlns:r="http://schemas.openxmlformats.org/officeDocument/2006/relationships" xmlns:p="http://schemas.openxmlformats.org/presentationml/2006/main">
+  <p:cSld>
+    <p:spTree>
+      <p:nvGrpSpPr>
+        <p:cNvPr id="1" name=""/>
+        <p:cNvGrpSpPr/>
+        <p:nvPr/>
+      </p:nvGrpSpPr>
+      <p:grpSpPr>
+        <a:xfrm>
+          <a:off x="0" y="0"/>
+          <a:ext cx="0" cy="0"/>
+          <a:chOff x="0" y="0"/>
+          <a:chExt cx="0" cy="0"/>
+        </a:xfrm>
+      </p:grpSpPr>
+      <p:sp>
+        <p:nvSpPr>
+          <p:cNvPr id="2" name="Slide Image Placeholder 1"/>
+          <p:cNvSpPr>
+            <a:spLocks noGrp="1" noRot="1" noChangeAspect="1"/>
+          </p:cNvSpPr>
+          <p:nvPr>
+            <p:ph type="sldImg"/>
+          </p:nvPr>
+        </p:nvSpPr>
+        <p:spPr/>
+      </p:sp>
+      <p:sp>
+        <p:nvSpPr>
+          <p:cNvPr id="3" name="Notes Placeholder 2"/>
+          <p:cNvSpPr>
+            <a:spLocks noGrp="1"/>
+          </p:cNvSpPr>
+          <p:nvPr>
+            <p:ph type="body" idx="1"/>
+          </p:nvPr>
+        </p:nvSpPr>
+        <p:spPr/>
+        <p:txBody>
+          <a:bodyPr/>
+          <a:lstStyle/>
+          <a:p>
+            <a:r>
+              <a:rPr lang="en-US" dirty="0"/>
               <a:t>Code, data manifests and the decision log are in the project repository; every number in this deck comes from a committed table.</a:t>
             </a:r>
             <a:endParaRPr lang="en-US" dirty="0"/>
@@ -18762,7 +19704,7 @@
           <a:p>
             <a:fld id="{F7021451-1387-4CA6-816F-3879F97B5CBC}" type="slidenum">
               <a:rPr lang="en-US"/>
-              <a:t>24</a:t>
+              <a:t>25</a:t>
             </a:fld>
             <a:endParaRPr lang="en-US"/>
           </a:p>
@@ -26234,6 +27176,367 @@
                 <a:ea typeface="Cambria" pitchFamily="34" charset="-122"/>
                 <a:cs typeface="Cambria" pitchFamily="34" charset="-120"/>
               </a:rPr>
+              <a:t>Next two years: a short cycle, then a slow easing</a:t>
+            </a:r>
+            <a:endParaRPr lang="en-US" sz="2600" dirty="0"/>
+          </a:p>
+        </p:txBody>
+      </p:sp>
+      <p:graphicFrame>
+        <p:nvGraphicFramePr>
+          <p:cNvPr id="3" name="Chart 0" descr=""/>
+          <p:cNvGraphicFramePr/>
+          <p:nvPr/>
+        </p:nvGraphicFramePr>
+        <p:xfrm>
+          <a:off x="365760" y="1005840"/>
+          <a:ext cx="5257800" cy="3611880"/>
+        </p:xfrm>
+        <a:graphic xmlns:a="http://schemas.openxmlformats.org/drawingml/2006/main">
+          <a:graphicData uri="http://schemas.openxmlformats.org/drawingml/2006/chart">
+            <c:chart xmlns:c="http://schemas.openxmlformats.org/drawingml/2006/chart" r:id="rId1"/>
+          </a:graphicData>
+        </a:graphic>
+      </p:graphicFrame>
+      <p:sp>
+        <p:nvSpPr>
+          <p:cNvPr id="4" name="ty0"/>
+          <p:cNvSpPr/>
+          <p:nvPr/>
+        </p:nvSpPr>
+        <p:spPr>
+          <a:xfrm>
+            <a:off x="5760720" y="1097280"/>
+            <a:ext cx="2926080" cy="1069848"/>
+          </a:xfrm>
+          <a:prstGeom prst="roundRect">
+            <a:avLst>
+              <a:gd name="adj" fmla="val 6838"/>
+            </a:avLst>
+          </a:prstGeom>
+          <a:solidFill>
+            <a:schemeClr val="bg2"/>
+          </a:solidFill>
+          <a:ln/>
+        </p:spPr>
+      </p:sp>
+      <p:sp>
+        <p:nvSpPr>
+          <p:cNvPr id="5" name="Text 2"/>
+          <p:cNvSpPr txBox="1"/>
+          <p:nvPr/>
+        </p:nvSpPr>
+        <p:spPr>
+          <a:xfrm>
+            <a:off x="5897880" y="1170432"/>
+            <a:ext cx="2697480" cy="950976"/>
+          </a:xfrm>
+          <a:prstGeom prst="rect">
+            <a:avLst/>
+          </a:prstGeom>
+          <a:noFill/>
+          <a:ln/>
+        </p:spPr>
+        <p:txBody>
+          <a:bodyPr wrap="square" lIns="0" tIns="0" rIns="0" bIns="0" rtlCol="0" anchor="t"/>
+          <a:lstStyle/>
+          <a:p>
+            <a:pPr indent="0" marL="0">
+              <a:buNone/>
+            </a:pPr>
+            <a:r>
+              <a:rPr lang="en-US" sz="1100" b="1" dirty="0">
+                <a:solidFill>
+                  <a:schemeClr val="accent1"/>
+                </a:solidFill>
+                <a:latin typeface="Calibri" pitchFamily="34" charset="0"/>
+                <a:ea typeface="Calibri" pitchFamily="34" charset="-122"/>
+                <a:cs typeface="Calibri" pitchFamily="34" charset="-120"/>
+              </a:rPr>
+              <a:t>Peak by April 2027</a:t>
+            </a:r>
+            <a:endParaRPr lang="en-US" sz="1100" dirty="0"/>
+          </a:p>
+          <a:p>
+            <a:pPr indent="0" marL="0">
+              <a:buNone/>
+            </a:pPr>
+            <a:r>
+              <a:rPr lang="en-US" sz="1100" dirty="0">
+                <a:solidFill>
+                  <a:schemeClr val="tx1"/>
+                </a:solidFill>
+                <a:latin typeface="Calibri" pitchFamily="34" charset="0"/>
+                <a:ea typeface="Calibri" pitchFamily="34" charset="-122"/>
+                <a:cs typeface="Calibri" pitchFamily="34" charset="-120"/>
+              </a:rPr>
+              <a:t>Expected repo 5.71 if oil stays near 112, 5.81 if the Gulf escalates: one or two more hikes.</a:t>
+            </a:r>
+            <a:endParaRPr lang="en-US" sz="1100" dirty="0"/>
+          </a:p>
+        </p:txBody>
+      </p:sp>
+      <p:sp>
+        <p:nvSpPr>
+          <p:cNvPr id="6" name="ty1"/>
+          <p:cNvSpPr/>
+          <p:nvPr/>
+        </p:nvSpPr>
+        <p:spPr>
+          <a:xfrm>
+            <a:off x="5760720" y="2258568"/>
+            <a:ext cx="2926080" cy="1069848"/>
+          </a:xfrm>
+          <a:prstGeom prst="roundRect">
+            <a:avLst>
+              <a:gd name="adj" fmla="val 6838"/>
+            </a:avLst>
+          </a:prstGeom>
+          <a:solidFill>
+            <a:schemeClr val="bg2"/>
+          </a:solidFill>
+          <a:ln/>
+        </p:spPr>
+      </p:sp>
+      <p:sp>
+        <p:nvSpPr>
+          <p:cNvPr id="7" name="Text 4"/>
+          <p:cNvSpPr txBox="1"/>
+          <p:nvPr/>
+        </p:nvSpPr>
+        <p:spPr>
+          <a:xfrm>
+            <a:off x="5897880" y="2331720"/>
+            <a:ext cx="2697480" cy="950976"/>
+          </a:xfrm>
+          <a:prstGeom prst="rect">
+            <a:avLst/>
+          </a:prstGeom>
+          <a:noFill/>
+          <a:ln/>
+        </p:spPr>
+        <p:txBody>
+          <a:bodyPr wrap="square" lIns="0" tIns="0" rIns="0" bIns="0" rtlCol="0" anchor="t"/>
+          <a:lstStyle/>
+          <a:p>
+            <a:pPr indent="0" marL="0">
+              <a:buNone/>
+            </a:pPr>
+            <a:r>
+              <a:rPr lang="en-US" sz="1100" b="1" dirty="0">
+                <a:solidFill>
+                  <a:schemeClr val="accent2"/>
+                </a:solidFill>
+                <a:latin typeface="Calibri" pitchFamily="34" charset="0"/>
+                <a:ea typeface="Calibri" pitchFamily="34" charset="-122"/>
+                <a:cs typeface="Calibri" pitchFamily="34" charset="-120"/>
+              </a:rPr>
+              <a:t>Easing from mid 2027</a:t>
+            </a:r>
+            <a:endParaRPr lang="en-US" sz="1100" dirty="0"/>
+          </a:p>
+          <a:p>
+            <a:pPr indent="0" marL="0">
+              <a:buNone/>
+            </a:pPr>
+            <a:r>
+              <a:rPr lang="en-US" sz="1100" dirty="0">
+                <a:solidFill>
+                  <a:schemeClr val="tx1"/>
+                </a:solidFill>
+                <a:latin typeface="Calibri" pitchFamily="34" charset="0"/>
+                <a:ea typeface="Calibri" pitchFamily="34" charset="-122"/>
+                <a:cs typeface="Calibri" pitchFamily="34" charset="-120"/>
+              </a:rPr>
+              <a:t>Cuts overtake hikes from June 2027 as the oil shock leaves yearly inflation. October 2028: about 5.25, range 4.25 to 6.25.</a:t>
+            </a:r>
+            <a:endParaRPr lang="en-US" sz="1100" dirty="0"/>
+          </a:p>
+        </p:txBody>
+      </p:sp>
+      <p:sp>
+        <p:nvSpPr>
+          <p:cNvPr id="8" name="ty2"/>
+          <p:cNvSpPr/>
+          <p:nvPr/>
+        </p:nvSpPr>
+        <p:spPr>
+          <a:xfrm>
+            <a:off x="5760720" y="3419856"/>
+            <a:ext cx="2926080" cy="1069848"/>
+          </a:xfrm>
+          <a:prstGeom prst="roundRect">
+            <a:avLst>
+              <a:gd name="adj" fmla="val 6838"/>
+            </a:avLst>
+          </a:prstGeom>
+          <a:solidFill>
+            <a:schemeClr val="bg2"/>
+          </a:solidFill>
+          <a:ln/>
+        </p:spPr>
+      </p:sp>
+      <p:sp>
+        <p:nvSpPr>
+          <p:cNvPr id="9" name="Text 6"/>
+          <p:cNvSpPr txBox="1"/>
+          <p:nvPr/>
+        </p:nvSpPr>
+        <p:spPr>
+          <a:xfrm>
+            <a:off x="5897880" y="3493008"/>
+            <a:ext cx="2697480" cy="950976"/>
+          </a:xfrm>
+          <a:prstGeom prst="rect">
+            <a:avLst/>
+          </a:prstGeom>
+          <a:noFill/>
+          <a:ln/>
+        </p:spPr>
+        <p:txBody>
+          <a:bodyPr wrap="square" lIns="0" tIns="0" rIns="0" bIns="0" rtlCol="0" anchor="t"/>
+          <a:lstStyle/>
+          <a:p>
+            <a:pPr indent="0" marL="0">
+              <a:buNone/>
+            </a:pPr>
+            <a:r>
+              <a:rPr lang="en-US" sz="1100" b="1" dirty="0">
+                <a:solidFill>
+                  <a:schemeClr val="accent3"/>
+                </a:solidFill>
+                <a:latin typeface="Calibri" pitchFamily="34" charset="0"/>
+                <a:ea typeface="Calibri" pitchFamily="34" charset="-122"/>
+                <a:cs typeface="Calibri" pitchFamily="34" charset="-120"/>
+              </a:rPr>
+              <a:t>Nepal follows at half</a:t>
+            </a:r>
+            <a:endParaRPr lang="en-US" sz="1100" dirty="0"/>
+          </a:p>
+          <a:p>
+            <a:pPr indent="0" marL="0">
+              <a:buNone/>
+            </a:pPr>
+            <a:r>
+              <a:rPr lang="en-US" sz="1100" dirty="0">
+                <a:solidFill>
+                  <a:schemeClr val="tx1"/>
+                </a:solidFill>
+                <a:latin typeface="Calibri" pitchFamily="34" charset="0"/>
+                <a:ea typeface="Calibri" pitchFamily="34" charset="-122"/>
+                <a:cs typeface="Calibri" pitchFamily="34" charset="-120"/>
+              </a:rPr>
+              <a:t>At the 0.49 response, the NRB bank rate rises from 5.75 to about 6.0, then drifts back to 5.75 by late 2028.</a:t>
+            </a:r>
+            <a:endParaRPr lang="en-US" sz="1100" dirty="0"/>
+          </a:p>
+        </p:txBody>
+      </p:sp>
+      <p:sp>
+        <p:nvSpPr>
+          <p:cNvPr id="25" name="Slide Number Placeholder 0"/>
+          <p:cNvSpPr>
+            <a:spLocks noGrp="1"/>
+          </p:cNvSpPr>
+          <p:nvPr>
+            <p:ph type="sldNum" sz="quarter" idx="4294967295"/>
+          </p:nvPr>
+        </p:nvSpPr>
+        <p:spPr>
+          <a:xfrm>
+            <a:off x="8229600" y="4800600"/>
+            <a:ext cx="457200" cy="228600"/>
+          </a:xfrm>
+          <a:prstGeom prst="rect">
+            <a:avLst/>
+          </a:prstGeom>
+          <a:extLst>
+            <a:ext uri="{C572A759-6A51-4108-AA02-DFA0A04FC94B}">
+              <ma14:wrappingTextBoxFlag xmlns:ma14="http://schemas.microsoft.com/office/mac/drawingml/2011/main" val="0"/>
+            </a:ext>
+          </a:extLst>
+        </p:spPr>
+        <p:txBody>
+          <a:bodyPr lIns="0" tIns="0" rIns="0" bIns="0"/>
+          <a:lstStyle>
+            <a:lvl1pPr>
+              <a:defRPr sz="900">
+                <a:solidFill>
+                  <a:schemeClr val="accent4"/>
+                </a:solidFill>
+              </a:defRPr>
+            </a:lvl1pPr>
+          </a:lstStyle>
+          <a:p>
+            <a:pPr algn="r"/>
+            <a:fld id="{F7021451-1387-4CA6-816F-3879F97B5CBC}" type="slidenum">
+              <a:rPr b="0" lang="en-US"/>
+              <a:t>17</a:t>
+            </a:fld>
+            <a:endParaRPr lang="en-US"/>
+          </a:p>
+        </p:txBody>
+      </p:sp>
+    </p:spTree>
+  </p:cSld>
+  <p:clrMapOvr>
+    <a:masterClrMapping/>
+  </p:clrMapOvr>
+</p:sld>
+</file>
+
+<file path=ppt/slides/slide18.xml><?xml version="1.0" encoding="utf-8"?>
+<p:sld xmlns:a="http://schemas.openxmlformats.org/drawingml/2006/main" xmlns:r="http://schemas.openxmlformats.org/officeDocument/2006/relationships" xmlns:p="http://schemas.openxmlformats.org/presentationml/2006/main">
+  <p:cSld name="Slide 18">
+    <p:spTree>
+      <p:nvGrpSpPr>
+        <p:cNvPr id="1" name=""/>
+        <p:cNvGrpSpPr/>
+        <p:nvPr/>
+      </p:nvGrpSpPr>
+      <p:grpSpPr>
+        <a:xfrm>
+          <a:off x="0" y="0"/>
+          <a:ext cx="0" cy="0"/>
+          <a:chOff x="0" y="0"/>
+          <a:chExt cx="0" cy="0"/>
+        </a:xfrm>
+      </p:grpSpPr>
+      <p:sp>
+        <p:nvSpPr>
+          <p:cNvPr id="2" name="Text 0"/>
+          <p:cNvSpPr/>
+          <p:nvPr>
+            <p:ph idx="100" type="title" hasCustomPrompt="1"/>
+          </p:nvPr>
+        </p:nvSpPr>
+        <p:spPr>
+          <a:xfrm>
+            <a:off x="457200" y="274320"/>
+            <a:ext cx="8229600" cy="685800"/>
+          </a:xfrm>
+          <a:prstGeom prst="rect">
+            <a:avLst/>
+          </a:prstGeom>
+          <a:noFill/>
+          <a:ln/>
+        </p:spPr>
+        <p:txBody>
+          <a:bodyPr wrap="square" lIns="0" tIns="0" rIns="0" bIns="0" rtlCol="0" anchor="ctr"/>
+          <a:lstStyle/>
+          <a:p>
+            <a:pPr algn="l" indent="0" marL="0">
+              <a:buNone/>
+            </a:pPr>
+            <a:r>
+              <a:rPr lang="en-US" sz="2600" b="1" dirty="0">
+                <a:solidFill>
+                  <a:schemeClr val="tx2"/>
+                </a:solidFill>
+                <a:latin typeface="Cambria" pitchFamily="34" charset="0"/>
+                <a:ea typeface="Cambria" pitchFamily="34" charset="-122"/>
+                <a:cs typeface="Cambria" pitchFamily="34" charset="-120"/>
+              </a:rPr>
               <a:t>How India's rate cycle reaches Nepal</a:t>
             </a:r>
             <a:endParaRPr lang="en-US" sz="2600" dirty="0"/>
@@ -26709,7 +28012,7 @@
             <a:pPr algn="r"/>
             <a:fld id="{F7021451-1387-4CA6-816F-3879F97B5CBC}" type="slidenum">
               <a:rPr b="0" lang="en-US"/>
-              <a:t>17</a:t>
+              <a:t>18</a:t>
             </a:fld>
             <a:endParaRPr lang="en-US"/>
           </a:p>
@@ -26723,9 +28026,9 @@
 </p:sld>
 </file>
 
-<file path=ppt/slides/slide18.xml><?xml version="1.0" encoding="utf-8"?>
+<file path=ppt/slides/slide19.xml><?xml version="1.0" encoding="utf-8"?>
 <p:sld xmlns:a="http://schemas.openxmlformats.org/drawingml/2006/main" xmlns:r="http://schemas.openxmlformats.org/officeDocument/2006/relationships" xmlns:p="http://schemas.openxmlformats.org/presentationml/2006/main">
-  <p:cSld name="Slide 18">
+  <p:cSld name="Slide 19">
     <p:spTree>
       <p:nvGrpSpPr>
         <p:cNvPr id="1" name=""/>
@@ -26783,7 +28086,7 @@
       </p:sp>
       <p:graphicFrame>
         <p:nvGraphicFramePr>
-          <p:cNvPr id="19" name="Table 0"/>
+          <p:cNvPr id="20" name="Table 0"/>
           <p:cNvGraphicFramePr>
             <a:graphicFrameLocks noGrp="1"/>
           </p:cNvGraphicFramePr>
@@ -32053,367 +33356,6 @@
                 <a:cs typeface="Calibri" pitchFamily="34" charset="-120"/>
               </a:rPr>
               <a:t>Textbook theory says a peg imports the anchor's interest rate. Capital controls stop that: the peg alone does not carry India's rate.</a:t>
-            </a:r>
-            <a:endParaRPr lang="en-US" sz="1100" dirty="0"/>
-          </a:p>
-        </p:txBody>
-      </p:sp>
-      <p:sp>
-        <p:nvSpPr>
-          <p:cNvPr id="25" name="Slide Number Placeholder 0"/>
-          <p:cNvSpPr>
-            <a:spLocks noGrp="1"/>
-          </p:cNvSpPr>
-          <p:nvPr>
-            <p:ph type="sldNum" sz="quarter" idx="4294967295"/>
-          </p:nvPr>
-        </p:nvSpPr>
-        <p:spPr>
-          <a:xfrm>
-            <a:off x="8229600" y="4800600"/>
-            <a:ext cx="457200" cy="228600"/>
-          </a:xfrm>
-          <a:prstGeom prst="rect">
-            <a:avLst/>
-          </a:prstGeom>
-          <a:extLst>
-            <a:ext uri="{C572A759-6A51-4108-AA02-DFA0A04FC94B}">
-              <ma14:wrappingTextBoxFlag xmlns:ma14="http://schemas.microsoft.com/office/mac/drawingml/2011/main" val="0"/>
-            </a:ext>
-          </a:extLst>
-        </p:spPr>
-        <p:txBody>
-          <a:bodyPr lIns="0" tIns="0" rIns="0" bIns="0"/>
-          <a:lstStyle>
-            <a:lvl1pPr>
-              <a:defRPr sz="900">
-                <a:solidFill>
-                  <a:schemeClr val="accent4"/>
-                </a:solidFill>
-              </a:defRPr>
-            </a:lvl1pPr>
-          </a:lstStyle>
-          <a:p>
-            <a:pPr algn="r"/>
-            <a:fld id="{F7021451-1387-4CA6-816F-3879F97B5CBC}" type="slidenum">
-              <a:rPr b="0" lang="en-US"/>
-              <a:t>18</a:t>
-            </a:fld>
-            <a:endParaRPr lang="en-US"/>
-          </a:p>
-        </p:txBody>
-      </p:sp>
-    </p:spTree>
-  </p:cSld>
-  <p:clrMapOvr>
-    <a:masterClrMapping/>
-  </p:clrMapOvr>
-</p:sld>
-</file>
-
-<file path=ppt/slides/slide19.xml><?xml version="1.0" encoding="utf-8"?>
-<p:sld xmlns:a="http://schemas.openxmlformats.org/drawingml/2006/main" xmlns:r="http://schemas.openxmlformats.org/officeDocument/2006/relationships" xmlns:p="http://schemas.openxmlformats.org/presentationml/2006/main">
-  <p:cSld name="Slide 19">
-    <p:spTree>
-      <p:nvGrpSpPr>
-        <p:cNvPr id="1" name=""/>
-        <p:cNvGrpSpPr/>
-        <p:nvPr/>
-      </p:nvGrpSpPr>
-      <p:grpSpPr>
-        <a:xfrm>
-          <a:off x="0" y="0"/>
-          <a:ext cx="0" cy="0"/>
-          <a:chOff x="0" y="0"/>
-          <a:chExt cx="0" cy="0"/>
-        </a:xfrm>
-      </p:grpSpPr>
-      <p:sp>
-        <p:nvSpPr>
-          <p:cNvPr id="2" name="Text 0"/>
-          <p:cNvSpPr/>
-          <p:nvPr>
-            <p:ph idx="100" type="title" hasCustomPrompt="1"/>
-          </p:nvPr>
-        </p:nvSpPr>
-        <p:spPr>
-          <a:xfrm>
-            <a:off x="457200" y="274320"/>
-            <a:ext cx="8229600" cy="685800"/>
-          </a:xfrm>
-          <a:prstGeom prst="rect">
-            <a:avLst/>
-          </a:prstGeom>
-          <a:noFill/>
-          <a:ln/>
-        </p:spPr>
-        <p:txBody>
-          <a:bodyPr wrap="square" lIns="0" tIns="0" rIns="0" bIns="0" rtlCol="0" anchor="ctr"/>
-          <a:lstStyle/>
-          <a:p>
-            <a:pPr algn="l" indent="0" marL="0">
-              <a:buNone/>
-            </a:pPr>
-            <a:r>
-              <a:rPr lang="en-US" sz="2600" b="1" dirty="0">
-                <a:solidFill>
-                  <a:schemeClr val="tx2"/>
-                </a:solidFill>
-                <a:latin typeface="Cambria" pitchFamily="34" charset="0"/>
-                <a:ea typeface="Cambria" pitchFamily="34" charset="-122"/>
-                <a:cs typeface="Cambria" pitchFamily="34" charset="-120"/>
-              </a:rPr>
-              <a:t>Channel 1: India's inflation becomes Nepal's</a:t>
-            </a:r>
-            <a:endParaRPr lang="en-US" sz="2600" dirty="0"/>
-          </a:p>
-        </p:txBody>
-      </p:sp>
-      <p:graphicFrame>
-        <p:nvGraphicFramePr>
-          <p:cNvPr id="3" name="Chart 0" descr=""/>
-          <p:cNvGraphicFramePr/>
-          <p:nvPr/>
-        </p:nvGraphicFramePr>
-        <p:xfrm>
-          <a:off x="365760" y="1005840"/>
-          <a:ext cx="5257800" cy="3611880"/>
-        </p:xfrm>
-        <a:graphic xmlns:a="http://schemas.openxmlformats.org/drawingml/2006/main">
-          <a:graphicData uri="http://schemas.openxmlformats.org/drawingml/2006/chart">
-            <c:chart xmlns:c="http://schemas.openxmlformats.org/drawingml/2006/chart" r:id="rId1"/>
-          </a:graphicData>
-        </a:graphic>
-      </p:graphicFrame>
-      <p:sp>
-        <p:nvSpPr>
-          <p:cNvPr id="4" name="pr0"/>
-          <p:cNvSpPr/>
-          <p:nvPr/>
-        </p:nvSpPr>
-        <p:spPr>
-          <a:xfrm>
-            <a:off x="5760720" y="1097280"/>
-            <a:ext cx="2926080" cy="1051560"/>
-          </a:xfrm>
-          <a:prstGeom prst="roundRect">
-            <a:avLst>
-              <a:gd name="adj" fmla="val 6957"/>
-            </a:avLst>
-          </a:prstGeom>
-          <a:solidFill>
-            <a:schemeClr val="bg2"/>
-          </a:solidFill>
-          <a:ln/>
-        </p:spPr>
-      </p:sp>
-      <p:sp>
-        <p:nvSpPr>
-          <p:cNvPr id="5" name="Text 2"/>
-          <p:cNvSpPr txBox="1"/>
-          <p:nvPr/>
-        </p:nvSpPr>
-        <p:spPr>
-          <a:xfrm>
-            <a:off x="5897880" y="1170432"/>
-            <a:ext cx="2697480" cy="932688"/>
-          </a:xfrm>
-          <a:prstGeom prst="rect">
-            <a:avLst/>
-          </a:prstGeom>
-          <a:noFill/>
-          <a:ln/>
-        </p:spPr>
-        <p:txBody>
-          <a:bodyPr wrap="square" lIns="0" tIns="0" rIns="0" bIns="0" rtlCol="0" anchor="t"/>
-          <a:lstStyle/>
-          <a:p>
-            <a:pPr indent="0" marL="0">
-              <a:buNone/>
-            </a:pPr>
-            <a:r>
-              <a:rPr lang="en-US" sz="1100" b="1" dirty="0">
-                <a:solidFill>
-                  <a:schemeClr val="accent1"/>
-                </a:solidFill>
-                <a:latin typeface="Calibri" pitchFamily="34" charset="0"/>
-                <a:ea typeface="Calibri" pitchFamily="34" charset="-122"/>
-                <a:cs typeface="Calibri" pitchFamily="34" charset="-120"/>
-              </a:rPr>
-              <a:t>Correlation 0.88</a:t>
-            </a:r>
-            <a:endParaRPr lang="en-US" sz="1100" dirty="0"/>
-          </a:p>
-          <a:p>
-            <a:pPr indent="0" marL="0">
-              <a:buNone/>
-            </a:pPr>
-            <a:r>
-              <a:rPr lang="en-US" sz="1100" dirty="0">
-                <a:solidFill>
-                  <a:schemeClr val="tx1"/>
-                </a:solidFill>
-                <a:latin typeface="Calibri" pitchFamily="34" charset="0"/>
-                <a:ea typeface="Calibri" pitchFamily="34" charset="-122"/>
-                <a:cs typeface="Calibri" pitchFamily="34" charset="-120"/>
-              </a:rPr>
-              <a:t>Since November 2021, the years of India's last full hiking and cutting cycles. 0.66 since 2013.</a:t>
-            </a:r>
-            <a:endParaRPr lang="en-US" sz="1100" dirty="0"/>
-          </a:p>
-        </p:txBody>
-      </p:sp>
-      <p:sp>
-        <p:nvSpPr>
-          <p:cNvPr id="6" name="pr1"/>
-          <p:cNvSpPr/>
-          <p:nvPr/>
-        </p:nvSpPr>
-        <p:spPr>
-          <a:xfrm>
-            <a:off x="5760720" y="2258568"/>
-            <a:ext cx="2926080" cy="1051560"/>
-          </a:xfrm>
-          <a:prstGeom prst="roundRect">
-            <a:avLst>
-              <a:gd name="adj" fmla="val 6957"/>
-            </a:avLst>
-          </a:prstGeom>
-          <a:solidFill>
-            <a:schemeClr val="bg2"/>
-          </a:solidFill>
-          <a:ln/>
-        </p:spPr>
-      </p:sp>
-      <p:sp>
-        <p:nvSpPr>
-          <p:cNvPr id="7" name="Text 4"/>
-          <p:cNvSpPr txBox="1"/>
-          <p:nvPr/>
-        </p:nvSpPr>
-        <p:spPr>
-          <a:xfrm>
-            <a:off x="5897880" y="2331720"/>
-            <a:ext cx="2697480" cy="932688"/>
-          </a:xfrm>
-          <a:prstGeom prst="rect">
-            <a:avLst/>
-          </a:prstGeom>
-          <a:noFill/>
-          <a:ln/>
-        </p:spPr>
-        <p:txBody>
-          <a:bodyPr wrap="square" lIns="0" tIns="0" rIns="0" bIns="0" rtlCol="0" anchor="t"/>
-          <a:lstStyle/>
-          <a:p>
-            <a:pPr indent="0" marL="0">
-              <a:buNone/>
-            </a:pPr>
-            <a:r>
-              <a:rPr lang="en-US" sz="1100" b="1" dirty="0">
-                <a:solidFill>
-                  <a:schemeClr val="accent1"/>
-                </a:solidFill>
-                <a:latin typeface="Calibri" pitchFamily="34" charset="0"/>
-                <a:ea typeface="Calibri" pitchFamily="34" charset="-122"/>
-                <a:cs typeface="Calibri" pitchFamily="34" charset="-120"/>
-              </a:rPr>
-              <a:t>Why</a:t>
-            </a:r>
-            <a:endParaRPr lang="en-US" sz="1100" dirty="0"/>
-          </a:p>
-          <a:p>
-            <a:pPr indent="0" marL="0">
-              <a:buNone/>
-            </a:pPr>
-            <a:r>
-              <a:rPr lang="en-US" sz="1100" dirty="0">
-                <a:solidFill>
-                  <a:schemeClr val="tx1"/>
-                </a:solidFill>
-                <a:latin typeface="Calibri" pitchFamily="34" charset="0"/>
-                <a:ea typeface="Calibri" pitchFamily="34" charset="-122"/>
-                <a:cs typeface="Calibri" pitchFamily="34" charset="-120"/>
-              </a:rPr>
-              <a:t>A fixed rupee price makes India's goods, fuel and food prices Nepal's import prices.</a:t>
-            </a:r>
-            <a:endParaRPr lang="en-US" sz="1100" dirty="0"/>
-          </a:p>
-        </p:txBody>
-      </p:sp>
-      <p:sp>
-        <p:nvSpPr>
-          <p:cNvPr id="8" name="pr2"/>
-          <p:cNvSpPr/>
-          <p:nvPr/>
-        </p:nvSpPr>
-        <p:spPr>
-          <a:xfrm>
-            <a:off x="5760720" y="3419856"/>
-            <a:ext cx="2926080" cy="1051560"/>
-          </a:xfrm>
-          <a:prstGeom prst="roundRect">
-            <a:avLst>
-              <a:gd name="adj" fmla="val 6957"/>
-            </a:avLst>
-          </a:prstGeom>
-          <a:solidFill>
-            <a:schemeClr val="bg2"/>
-          </a:solidFill>
-          <a:ln/>
-        </p:spPr>
-      </p:sp>
-      <p:sp>
-        <p:nvSpPr>
-          <p:cNvPr id="9" name="Text 6"/>
-          <p:cNvSpPr txBox="1"/>
-          <p:nvPr/>
-        </p:nvSpPr>
-        <p:spPr>
-          <a:xfrm>
-            <a:off x="5897880" y="3493008"/>
-            <a:ext cx="2697480" cy="932688"/>
-          </a:xfrm>
-          <a:prstGeom prst="rect">
-            <a:avLst/>
-          </a:prstGeom>
-          <a:noFill/>
-          <a:ln/>
-        </p:spPr>
-        <p:txBody>
-          <a:bodyPr wrap="square" lIns="0" tIns="0" rIns="0" bIns="0" rtlCol="0" anchor="t"/>
-          <a:lstStyle/>
-          <a:p>
-            <a:pPr indent="0" marL="0">
-              <a:buNone/>
-            </a:pPr>
-            <a:r>
-              <a:rPr lang="en-US" sz="1100" b="1" dirty="0">
-                <a:solidFill>
-                  <a:schemeClr val="accent2"/>
-                </a:solidFill>
-                <a:latin typeface="Calibri" pitchFamily="34" charset="0"/>
-                <a:ea typeface="Calibri" pitchFamily="34" charset="-122"/>
-                <a:cs typeface="Calibri" pitchFamily="34" charset="-120"/>
-              </a:rPr>
-              <a:t>For the new cycle</a:t>
-            </a:r>
-            <a:endParaRPr lang="en-US" sz="1100" dirty="0"/>
-          </a:p>
-          <a:p>
-            <a:pPr indent="0" marL="0">
-              <a:buNone/>
-            </a:pPr>
-            <a:r>
-              <a:rPr lang="en-US" sz="1100" dirty="0">
-                <a:solidFill>
-                  <a:schemeClr val="tx1"/>
-                </a:solidFill>
-                <a:latin typeface="Calibri" pitchFamily="34" charset="0"/>
-                <a:ea typeface="Calibri" pitchFamily="34" charset="-122"/>
-                <a:cs typeface="Calibri" pitchFamily="34" charset="-120"/>
-              </a:rPr>
-              <a:t>An RBI hike that cools India's inflation cools Nepal's too, without the NRB moving.</a:t>
             </a:r>
             <a:endParaRPr lang="en-US" sz="1100" dirty="0"/>
           </a:p>
@@ -32974,6 +33916,367 @@
                 <a:ea typeface="Cambria" pitchFamily="34" charset="-122"/>
                 <a:cs typeface="Cambria" pitchFamily="34" charset="-120"/>
               </a:rPr>
+              <a:t>Channel 1: India's inflation becomes Nepal's</a:t>
+            </a:r>
+            <a:endParaRPr lang="en-US" sz="2600" dirty="0"/>
+          </a:p>
+        </p:txBody>
+      </p:sp>
+      <p:graphicFrame>
+        <p:nvGraphicFramePr>
+          <p:cNvPr id="3" name="Chart 0" descr=""/>
+          <p:cNvGraphicFramePr/>
+          <p:nvPr/>
+        </p:nvGraphicFramePr>
+        <p:xfrm>
+          <a:off x="365760" y="1005840"/>
+          <a:ext cx="5257800" cy="3611880"/>
+        </p:xfrm>
+        <a:graphic xmlns:a="http://schemas.openxmlformats.org/drawingml/2006/main">
+          <a:graphicData uri="http://schemas.openxmlformats.org/drawingml/2006/chart">
+            <c:chart xmlns:c="http://schemas.openxmlformats.org/drawingml/2006/chart" r:id="rId1"/>
+          </a:graphicData>
+        </a:graphic>
+      </p:graphicFrame>
+      <p:sp>
+        <p:nvSpPr>
+          <p:cNvPr id="4" name="pr0"/>
+          <p:cNvSpPr/>
+          <p:nvPr/>
+        </p:nvSpPr>
+        <p:spPr>
+          <a:xfrm>
+            <a:off x="5760720" y="1097280"/>
+            <a:ext cx="2926080" cy="1051560"/>
+          </a:xfrm>
+          <a:prstGeom prst="roundRect">
+            <a:avLst>
+              <a:gd name="adj" fmla="val 6957"/>
+            </a:avLst>
+          </a:prstGeom>
+          <a:solidFill>
+            <a:schemeClr val="bg2"/>
+          </a:solidFill>
+          <a:ln/>
+        </p:spPr>
+      </p:sp>
+      <p:sp>
+        <p:nvSpPr>
+          <p:cNvPr id="5" name="Text 2"/>
+          <p:cNvSpPr txBox="1"/>
+          <p:nvPr/>
+        </p:nvSpPr>
+        <p:spPr>
+          <a:xfrm>
+            <a:off x="5897880" y="1170432"/>
+            <a:ext cx="2697480" cy="932688"/>
+          </a:xfrm>
+          <a:prstGeom prst="rect">
+            <a:avLst/>
+          </a:prstGeom>
+          <a:noFill/>
+          <a:ln/>
+        </p:spPr>
+        <p:txBody>
+          <a:bodyPr wrap="square" lIns="0" tIns="0" rIns="0" bIns="0" rtlCol="0" anchor="t"/>
+          <a:lstStyle/>
+          <a:p>
+            <a:pPr indent="0" marL="0">
+              <a:buNone/>
+            </a:pPr>
+            <a:r>
+              <a:rPr lang="en-US" sz="1100" b="1" dirty="0">
+                <a:solidFill>
+                  <a:schemeClr val="accent1"/>
+                </a:solidFill>
+                <a:latin typeface="Calibri" pitchFamily="34" charset="0"/>
+                <a:ea typeface="Calibri" pitchFamily="34" charset="-122"/>
+                <a:cs typeface="Calibri" pitchFamily="34" charset="-120"/>
+              </a:rPr>
+              <a:t>Correlation 0.88</a:t>
+            </a:r>
+            <a:endParaRPr lang="en-US" sz="1100" dirty="0"/>
+          </a:p>
+          <a:p>
+            <a:pPr indent="0" marL="0">
+              <a:buNone/>
+            </a:pPr>
+            <a:r>
+              <a:rPr lang="en-US" sz="1100" dirty="0">
+                <a:solidFill>
+                  <a:schemeClr val="tx1"/>
+                </a:solidFill>
+                <a:latin typeface="Calibri" pitchFamily="34" charset="0"/>
+                <a:ea typeface="Calibri" pitchFamily="34" charset="-122"/>
+                <a:cs typeface="Calibri" pitchFamily="34" charset="-120"/>
+              </a:rPr>
+              <a:t>Since November 2021, the years of India's last full hiking and cutting cycles. 0.66 since 2013.</a:t>
+            </a:r>
+            <a:endParaRPr lang="en-US" sz="1100" dirty="0"/>
+          </a:p>
+        </p:txBody>
+      </p:sp>
+      <p:sp>
+        <p:nvSpPr>
+          <p:cNvPr id="6" name="pr1"/>
+          <p:cNvSpPr/>
+          <p:nvPr/>
+        </p:nvSpPr>
+        <p:spPr>
+          <a:xfrm>
+            <a:off x="5760720" y="2258568"/>
+            <a:ext cx="2926080" cy="1051560"/>
+          </a:xfrm>
+          <a:prstGeom prst="roundRect">
+            <a:avLst>
+              <a:gd name="adj" fmla="val 6957"/>
+            </a:avLst>
+          </a:prstGeom>
+          <a:solidFill>
+            <a:schemeClr val="bg2"/>
+          </a:solidFill>
+          <a:ln/>
+        </p:spPr>
+      </p:sp>
+      <p:sp>
+        <p:nvSpPr>
+          <p:cNvPr id="7" name="Text 4"/>
+          <p:cNvSpPr txBox="1"/>
+          <p:nvPr/>
+        </p:nvSpPr>
+        <p:spPr>
+          <a:xfrm>
+            <a:off x="5897880" y="2331720"/>
+            <a:ext cx="2697480" cy="932688"/>
+          </a:xfrm>
+          <a:prstGeom prst="rect">
+            <a:avLst/>
+          </a:prstGeom>
+          <a:noFill/>
+          <a:ln/>
+        </p:spPr>
+        <p:txBody>
+          <a:bodyPr wrap="square" lIns="0" tIns="0" rIns="0" bIns="0" rtlCol="0" anchor="t"/>
+          <a:lstStyle/>
+          <a:p>
+            <a:pPr indent="0" marL="0">
+              <a:buNone/>
+            </a:pPr>
+            <a:r>
+              <a:rPr lang="en-US" sz="1100" b="1" dirty="0">
+                <a:solidFill>
+                  <a:schemeClr val="accent1"/>
+                </a:solidFill>
+                <a:latin typeface="Calibri" pitchFamily="34" charset="0"/>
+                <a:ea typeface="Calibri" pitchFamily="34" charset="-122"/>
+                <a:cs typeface="Calibri" pitchFamily="34" charset="-120"/>
+              </a:rPr>
+              <a:t>Why</a:t>
+            </a:r>
+            <a:endParaRPr lang="en-US" sz="1100" dirty="0"/>
+          </a:p>
+          <a:p>
+            <a:pPr indent="0" marL="0">
+              <a:buNone/>
+            </a:pPr>
+            <a:r>
+              <a:rPr lang="en-US" sz="1100" dirty="0">
+                <a:solidFill>
+                  <a:schemeClr val="tx1"/>
+                </a:solidFill>
+                <a:latin typeface="Calibri" pitchFamily="34" charset="0"/>
+                <a:ea typeface="Calibri" pitchFamily="34" charset="-122"/>
+                <a:cs typeface="Calibri" pitchFamily="34" charset="-120"/>
+              </a:rPr>
+              <a:t>A fixed rupee price makes India's goods, fuel and food prices Nepal's import prices.</a:t>
+            </a:r>
+            <a:endParaRPr lang="en-US" sz="1100" dirty="0"/>
+          </a:p>
+        </p:txBody>
+      </p:sp>
+      <p:sp>
+        <p:nvSpPr>
+          <p:cNvPr id="8" name="pr2"/>
+          <p:cNvSpPr/>
+          <p:nvPr/>
+        </p:nvSpPr>
+        <p:spPr>
+          <a:xfrm>
+            <a:off x="5760720" y="3419856"/>
+            <a:ext cx="2926080" cy="1051560"/>
+          </a:xfrm>
+          <a:prstGeom prst="roundRect">
+            <a:avLst>
+              <a:gd name="adj" fmla="val 6957"/>
+            </a:avLst>
+          </a:prstGeom>
+          <a:solidFill>
+            <a:schemeClr val="bg2"/>
+          </a:solidFill>
+          <a:ln/>
+        </p:spPr>
+      </p:sp>
+      <p:sp>
+        <p:nvSpPr>
+          <p:cNvPr id="9" name="Text 6"/>
+          <p:cNvSpPr txBox="1"/>
+          <p:nvPr/>
+        </p:nvSpPr>
+        <p:spPr>
+          <a:xfrm>
+            <a:off x="5897880" y="3493008"/>
+            <a:ext cx="2697480" cy="932688"/>
+          </a:xfrm>
+          <a:prstGeom prst="rect">
+            <a:avLst/>
+          </a:prstGeom>
+          <a:noFill/>
+          <a:ln/>
+        </p:spPr>
+        <p:txBody>
+          <a:bodyPr wrap="square" lIns="0" tIns="0" rIns="0" bIns="0" rtlCol="0" anchor="t"/>
+          <a:lstStyle/>
+          <a:p>
+            <a:pPr indent="0" marL="0">
+              <a:buNone/>
+            </a:pPr>
+            <a:r>
+              <a:rPr lang="en-US" sz="1100" b="1" dirty="0">
+                <a:solidFill>
+                  <a:schemeClr val="accent2"/>
+                </a:solidFill>
+                <a:latin typeface="Calibri" pitchFamily="34" charset="0"/>
+                <a:ea typeface="Calibri" pitchFamily="34" charset="-122"/>
+                <a:cs typeface="Calibri" pitchFamily="34" charset="-120"/>
+              </a:rPr>
+              <a:t>For the new cycle</a:t>
+            </a:r>
+            <a:endParaRPr lang="en-US" sz="1100" dirty="0"/>
+          </a:p>
+          <a:p>
+            <a:pPr indent="0" marL="0">
+              <a:buNone/>
+            </a:pPr>
+            <a:r>
+              <a:rPr lang="en-US" sz="1100" dirty="0">
+                <a:solidFill>
+                  <a:schemeClr val="tx1"/>
+                </a:solidFill>
+                <a:latin typeface="Calibri" pitchFamily="34" charset="0"/>
+                <a:ea typeface="Calibri" pitchFamily="34" charset="-122"/>
+                <a:cs typeface="Calibri" pitchFamily="34" charset="-120"/>
+              </a:rPr>
+              <a:t>An RBI hike that cools India's inflation cools Nepal's too, without the NRB moving.</a:t>
+            </a:r>
+            <a:endParaRPr lang="en-US" sz="1100" dirty="0"/>
+          </a:p>
+        </p:txBody>
+      </p:sp>
+      <p:sp>
+        <p:nvSpPr>
+          <p:cNvPr id="25" name="Slide Number Placeholder 0"/>
+          <p:cNvSpPr>
+            <a:spLocks noGrp="1"/>
+          </p:cNvSpPr>
+          <p:nvPr>
+            <p:ph type="sldNum" sz="quarter" idx="4294967295"/>
+          </p:nvPr>
+        </p:nvSpPr>
+        <p:spPr>
+          <a:xfrm>
+            <a:off x="8229600" y="4800600"/>
+            <a:ext cx="457200" cy="228600"/>
+          </a:xfrm>
+          <a:prstGeom prst="rect">
+            <a:avLst/>
+          </a:prstGeom>
+          <a:extLst>
+            <a:ext uri="{C572A759-6A51-4108-AA02-DFA0A04FC94B}">
+              <ma14:wrappingTextBoxFlag xmlns:ma14="http://schemas.microsoft.com/office/mac/drawingml/2011/main" val="0"/>
+            </a:ext>
+          </a:extLst>
+        </p:spPr>
+        <p:txBody>
+          <a:bodyPr lIns="0" tIns="0" rIns="0" bIns="0"/>
+          <a:lstStyle>
+            <a:lvl1pPr>
+              <a:defRPr sz="900">
+                <a:solidFill>
+                  <a:schemeClr val="accent4"/>
+                </a:solidFill>
+              </a:defRPr>
+            </a:lvl1pPr>
+          </a:lstStyle>
+          <a:p>
+            <a:pPr algn="r"/>
+            <a:fld id="{F7021451-1387-4CA6-816F-3879F97B5CBC}" type="slidenum">
+              <a:rPr b="0" lang="en-US"/>
+              <a:t>20</a:t>
+            </a:fld>
+            <a:endParaRPr lang="en-US"/>
+          </a:p>
+        </p:txBody>
+      </p:sp>
+    </p:spTree>
+  </p:cSld>
+  <p:clrMapOvr>
+    <a:masterClrMapping/>
+  </p:clrMapOvr>
+</p:sld>
+</file>
+
+<file path=ppt/slides/slide21.xml><?xml version="1.0" encoding="utf-8"?>
+<p:sld xmlns:a="http://schemas.openxmlformats.org/drawingml/2006/main" xmlns:r="http://schemas.openxmlformats.org/officeDocument/2006/relationships" xmlns:p="http://schemas.openxmlformats.org/presentationml/2006/main">
+  <p:cSld name="Slide 21">
+    <p:spTree>
+      <p:nvGrpSpPr>
+        <p:cNvPr id="1" name=""/>
+        <p:cNvGrpSpPr/>
+        <p:nvPr/>
+      </p:nvGrpSpPr>
+      <p:grpSpPr>
+        <a:xfrm>
+          <a:off x="0" y="0"/>
+          <a:ext cx="0" cy="0"/>
+          <a:chOff x="0" y="0"/>
+          <a:chExt cx="0" cy="0"/>
+        </a:xfrm>
+      </p:grpSpPr>
+      <p:sp>
+        <p:nvSpPr>
+          <p:cNvPr id="2" name="Text 0"/>
+          <p:cNvSpPr/>
+          <p:nvPr>
+            <p:ph idx="100" type="title" hasCustomPrompt="1"/>
+          </p:nvPr>
+        </p:nvSpPr>
+        <p:spPr>
+          <a:xfrm>
+            <a:off x="457200" y="274320"/>
+            <a:ext cx="8229600" cy="685800"/>
+          </a:xfrm>
+          <a:prstGeom prst="rect">
+            <a:avLst/>
+          </a:prstGeom>
+          <a:noFill/>
+          <a:ln/>
+        </p:spPr>
+        <p:txBody>
+          <a:bodyPr wrap="square" lIns="0" tIns="0" rIns="0" bIns="0" rtlCol="0" anchor="ctr"/>
+          <a:lstStyle/>
+          <a:p>
+            <a:pPr algn="l" indent="0" marL="0">
+              <a:buNone/>
+            </a:pPr>
+            <a:r>
+              <a:rPr lang="en-US" sz="2600" b="1" dirty="0">
+                <a:solidFill>
+                  <a:schemeClr val="tx2"/>
+                </a:solidFill>
+                <a:latin typeface="Cambria" pitchFamily="34" charset="0"/>
+                <a:ea typeface="Cambria" pitchFamily="34" charset="-122"/>
+                <a:cs typeface="Cambria" pitchFamily="34" charset="-120"/>
+              </a:rPr>
               <a:t>Channel 2: since 2016 the NRB follows the RBI at 0.5</a:t>
             </a:r>
             <a:endParaRPr lang="en-US" sz="2600" dirty="0"/>
@@ -32998,7 +34301,7 @@
       </p:graphicFrame>
       <p:graphicFrame>
         <p:nvGraphicFramePr>
-          <p:cNvPr id="21" name="Table 0"/>
+          <p:cNvPr id="22" name="Table 0"/>
           <p:cNvGraphicFramePr>
             <a:graphicFrameLocks noGrp="1"/>
           </p:cNvGraphicFramePr>
@@ -34205,7 +35508,7 @@
             <a:pPr algn="r"/>
             <a:fld id="{F7021451-1387-4CA6-816F-3879F97B5CBC}" type="slidenum">
               <a:rPr b="0" lang="en-US"/>
-              <a:t>20</a:t>
+              <a:t>21</a:t>
             </a:fld>
             <a:endParaRPr lang="en-US"/>
           </a:p>
@@ -34219,9 +35522,9 @@
 </p:sld>
 </file>
 
-<file path=ppt/slides/slide21.xml><?xml version="1.0" encoding="utf-8"?>
+<file path=ppt/slides/slide22.xml><?xml version="1.0" encoding="utf-8"?>
 <p:sld xmlns:a="http://schemas.openxmlformats.org/drawingml/2006/main" xmlns:r="http://schemas.openxmlformats.org/officeDocument/2006/relationships" xmlns:p="http://schemas.openxmlformats.org/presentationml/2006/main">
-  <p:cSld name="Slide 21">
+  <p:cSld name="Slide 22">
     <p:spTree>
       <p:nvGrpSpPr>
         <p:cNvPr id="1" name=""/>
@@ -34574,7 +35877,7 @@
             <a:pPr algn="r"/>
             <a:fld id="{F7021451-1387-4CA6-816F-3879F97B5CBC}" type="slidenum">
               <a:rPr b="0" lang="en-US"/>
-              <a:t>21</a:t>
+              <a:t>22</a:t>
             </a:fld>
             <a:endParaRPr lang="en-US"/>
           </a:p>
@@ -34588,9 +35891,9 @@
 </p:sld>
 </file>
 
-<file path=ppt/slides/slide22.xml><?xml version="1.0" encoding="utf-8"?>
+<file path=ppt/slides/slide23.xml><?xml version="1.0" encoding="utf-8"?>
 <p:sld xmlns:a="http://schemas.openxmlformats.org/drawingml/2006/main" xmlns:r="http://schemas.openxmlformats.org/officeDocument/2006/relationships" xmlns:p="http://schemas.openxmlformats.org/presentationml/2006/main">
-  <p:cSld name="Slide 22">
+  <p:cSld name="Slide 23">
     <p:spTree>
       <p:nvGrpSpPr>
         <p:cNvPr id="1" name=""/>
@@ -34935,7 +36238,7 @@
             <a:pPr algn="r"/>
             <a:fld id="{F7021451-1387-4CA6-816F-3879F97B5CBC}" type="slidenum">
               <a:rPr b="0" lang="en-US"/>
-              <a:t>22</a:t>
+              <a:t>23</a:t>
             </a:fld>
             <a:endParaRPr lang="en-US"/>
           </a:p>
@@ -34949,9 +36252,9 @@
 </p:sld>
 </file>
 
-<file path=ppt/slides/slide23.xml><?xml version="1.0" encoding="utf-8"?>
+<file path=ppt/slides/slide24.xml><?xml version="1.0" encoding="utf-8"?>
 <p:sld xmlns:a="http://schemas.openxmlformats.org/drawingml/2006/main" xmlns:r="http://schemas.openxmlformats.org/officeDocument/2006/relationships" xmlns:p="http://schemas.openxmlformats.org/presentationml/2006/main">
-  <p:cSld name="Slide 23">
+  <p:cSld name="Slide 24">
     <p:spTree>
       <p:nvGrpSpPr>
         <p:cNvPr id="1" name=""/>
@@ -35358,7 +36661,7 @@
             <a:pPr algn="r"/>
             <a:fld id="{F7021451-1387-4CA6-816F-3879F97B5CBC}" type="slidenum">
               <a:rPr b="0" lang="en-US"/>
-              <a:t>23</a:t>
+              <a:t>24</a:t>
             </a:fld>
             <a:endParaRPr lang="en-US"/>
           </a:p>
@@ -35372,9 +36675,9 @@
 </p:sld>
 </file>
 
-<file path=ppt/slides/slide24.xml><?xml version="1.0" encoding="utf-8"?>
+<file path=ppt/slides/slide25.xml><?xml version="1.0" encoding="utf-8"?>
 <p:sld xmlns:a="http://schemas.openxmlformats.org/drawingml/2006/main" xmlns:r="http://schemas.openxmlformats.org/officeDocument/2006/relationships" xmlns:p="http://schemas.openxmlformats.org/presentationml/2006/main">
-  <p:cSld name="Slide 24">
+  <p:cSld name="Slide 25">
     <p:spTree>
       <p:nvGrpSpPr>
         <p:cNvPr id="1" name=""/>
@@ -35499,7 +36802,7 @@
                   <a:srgbClr val="CADCFC"/>
                 </a:solidFill>
               </a:rPr>
-              <a:t>Remittance liquidity sets how much reaches Nepal's market rate. Next test: the December RBI decision against our recorded 0.56.</a:t>
+              <a:t>Over two years the model sees a short cycle peaking near 5.75 by April 2027, then easing back towards 5.25 by late 2028, with the NRB following at half strength. First test: December, against our recorded 0.56.</a:t>
             </a:r>
             <a:endParaRPr lang="en-US" sz="1800" dirty="0"/>
           </a:p>
